--- a/slides/study2-final.pptx
+++ b/slides/study2-final.pptx
@@ -136,12 +136,12 @@
   <p:extLst>
     <p:ext uri="{521415D9-36F7-43E2-AB2F-B90AF26B5E84}">
       <p14:sectionLst xmlns:p14="http://schemas.microsoft.com/office/powerpoint/2010/main">
-        <p14:section name="Introduction" id="{85d98919-57c4-deed-8d55-0abbc89f7b85}">
+        <p14:section name="Introduction" id="{b5afc7cb-31fd-3077-46ef-5c8792dd9180}">
           <p14:sldIdLst>
             <p14:sldId id="256"/>
           </p14:sldIdLst>
         </p14:section>
-        <p14:section name="The basics, no chess needed" id="{2add4a46-515f-4297-7ebb-01255e8913d6}">
+        <p14:section name="The basics, no chess needed" id="{2231df70-555a-4179-986f-e77cecd03d7a}">
           <p14:sldIdLst>
             <p14:sldId id="257"/>
             <p14:sldId id="258"/>
@@ -152,13 +152,13 @@
             <p14:sldId id="263"/>
           </p14:sldIdLst>
         </p14:section>
-        <p14:section name="The questions" id="{3b432baf-40c8-393b-a572-003628e2f625}">
+        <p14:section name="The questions" id="{af2feeb7-6cf3-3995-1ca1-be61be77d076}">
           <p14:sldIdLst>
             <p14:sldId id="264"/>
             <p14:sldId id="265"/>
           </p14:sldIdLst>
         </p14:section>
-        <p14:section name="How it was measured" id="{c4e3f669-8ad9-86ea-3aea-2a46d07902d6}">
+        <p14:section name="How it was measured" id="{a436353e-dca2-6073-ef7b-08ee47e17e47}">
           <p14:sldIdLst>
             <p14:sldId id="266"/>
             <p14:sldId id="267"/>
@@ -172,7 +172,7 @@
             <p14:sldId id="275"/>
           </p14:sldIdLst>
         </p14:section>
-        <p14:section name="Results" id="{0598c06a-ef0f-69ae-d1d7-a0acd0256f23}">
+        <p14:section name="Results" id="{cc2a3ee3-f0d2-e9f8-a123-fae0d5bac87d}">
           <p14:sldIdLst>
             <p14:sldId id="276"/>
             <p14:sldId id="277"/>
@@ -181,18 +181,18 @@
             <p14:sldId id="280"/>
           </p14:sldIdLst>
         </p14:section>
-        <p14:section name="What it means" id="{b8175a2a-b9d3-0d3c-796f-09c1f6055983}">
+        <p14:section name="What it means" id="{8fb00e2c-4c75-2d92-b91a-ff585ed30bc3}">
           <p14:sldIdLst>
             <p14:sldId id="281"/>
             <p14:sldId id="282"/>
           </p14:sldIdLst>
         </p14:section>
-        <p14:section name="Conclusions" id="{58742f77-0b33-63ee-5e1a-c3f29c66787c}">
+        <p14:section name="Conclusions" id="{50cb3300-556e-a921-ac0b-05aedc597bb9}">
           <p14:sldIdLst>
             <p14:sldId id="283"/>
           </p14:sldIdLst>
         </p14:section>
-        <p14:section name="Backup" id="{f21fabd5-cacd-36af-81c1-1583a371a901}">
+        <p14:section name="Backup" id="{3d086d3e-8e91-0db6-c8a3-d344e07b0a14}">
           <p14:sldIdLst>
             <p14:sldId id="284"/>
             <p14:sldId id="285"/>
@@ -17592,7 +17592,7 @@
                 <a:ea typeface="Arial" pitchFamily="34" charset="-122"/>
                 <a:cs typeface="Arial" pitchFamily="34" charset="-120"/>
               </a:rPr>
-              <a:t>Backus, Cubel, Guid, Sanchez-Pages &amp; Lopez Manas (2023). Quantitative Economics, 14(1).</a:t>
+              <a:t>Backus, Cubel, Guid, Sanchez-Pages &amp; Lopez Manas (2023). Quantitative Economics, 14(1), 349-380.</a:t>
             </a:r>
             <a:endParaRPr lang="en-US" sz="1400" dirty="0"/>
           </a:p>
@@ -17632,7 +17632,7 @@
                 <a:ea typeface="Arial" pitchFamily="34" charset="-122"/>
                 <a:cs typeface="Arial" pitchFamily="34" charset="-120"/>
               </a:rPr>
-              <a:t>Gee, Seese, Curley &amp; Ward (2025). arXiv:2503.21713.</a:t>
+              <a:t>Gee, Seese, Curley &amp; Ward (2025). Journal of Quantitative Analysis in Sports, 22(2), 117-132. Preprint arXiv:2503.21713.</a:t>
             </a:r>
             <a:endParaRPr lang="en-US" sz="1400" dirty="0"/>
           </a:p>
@@ -17652,7 +17652,7 @@
                 <a:ea typeface="Arial" pitchFamily="34" charset="-122"/>
                 <a:cs typeface="Arial" pitchFamily="34" charset="-120"/>
               </a:rPr>
-              <a:t>Guid &amp; Bratko (2006). ICGA Journal.</a:t>
+              <a:t>Guid &amp; Bratko (2006). Computer analysis of world chess champions. ICGA Journal, 29(2), 65-73.</a:t>
             </a:r>
             <a:endParaRPr lang="en-US" sz="1400" dirty="0"/>
           </a:p>

--- a/slides/study2-final.pptx
+++ b/slides/study2-final.pptx
@@ -45,9 +45,10 @@
     <p:sldId id="293" r:id="rId39"/>
     <p:sldId id="294" r:id="rId40"/>
     <p:sldId id="295" r:id="rId41"/>
+    <p:sldId id="296" r:id="rId42"/>
   </p:sldIdLst>
   <p:notesMasterIdLst>
-    <p:notesMasterId r:id="rId42"/>
+    <p:notesMasterId r:id="rId43"/>
   </p:notesMasterIdLst>
   <p:sldSz cx="9144000" cy="5143500"/>
   <p:notesSz cx="5143500" cy="9144000"/>
@@ -146,12 +147,12 @@
   <p:extLst>
     <p:ext uri="{521415D9-36F7-43E2-AB2F-B90AF26B5E84}">
       <p14:sectionLst xmlns:p14="http://schemas.microsoft.com/office/powerpoint/2010/main">
-        <p14:section name="Introduction" id="{84cc0561-945a-2a0e-53e9-f30e83a8994f}">
+        <p14:section name="Introduction" id="{2eecf3f0-fdd8-2790-daed-11de7fca8c3e}">
           <p14:sldIdLst>
             <p14:sldId id="256"/>
           </p14:sldIdLst>
         </p14:section>
-        <p14:section name="The basics, no chess needed" id="{6b375aae-6eeb-eff8-19e3-30ba2e29bb26}">
+        <p14:section name="The basics, no chess needed" id="{31b834b9-3a71-2961-630c-157ed7a7e5c6}">
           <p14:sldIdLst>
             <p14:sldId id="257"/>
             <p14:sldId id="258"/>
@@ -162,7 +163,7 @@
             <p14:sldId id="263"/>
           </p14:sldIdLst>
         </p14:section>
-        <p14:section name="What other researchers have found" id="{5cb76e51-471d-7d32-37cf-bdcc2eca55fe}">
+        <p14:section name="What other researchers have found" id="{049a14ef-8982-be68-1c3f-62e7f5f6a845}">
           <p14:sldIdLst>
             <p14:sldId id="264"/>
             <p14:sldId id="265"/>
@@ -176,13 +177,13 @@
             <p14:sldId id="273"/>
           </p14:sldIdLst>
         </p14:section>
-        <p14:section name="The questions" id="{89e72812-3175-62f1-2a99-d6bf71bd4d05}">
+        <p14:section name="The questions" id="{7615d33b-9d1e-dde9-0138-577228543ae0}">
           <p14:sldIdLst>
             <p14:sldId id="274"/>
             <p14:sldId id="275"/>
           </p14:sldIdLst>
         </p14:section>
-        <p14:section name="How it was measured" id="{c78f2932-2e4d-2b3c-a90e-abc626da79e4}">
+        <p14:section name="How it was measured" id="{24c34d47-0e1e-83c2-0330-29700cc1d9fa}">
           <p14:sldIdLst>
             <p14:sldId id="276"/>
             <p14:sldId id="277"/>
@@ -194,32 +195,33 @@
             <p14:sldId id="283"/>
             <p14:sldId id="284"/>
             <p14:sldId id="285"/>
+            <p14:sldId id="286"/>
           </p14:sldIdLst>
         </p14:section>
-        <p14:section name="Results" id="{4871e449-ea32-cb4d-4205-cde99cecc65c}">
+        <p14:section name="Results" id="{74e42cb8-4157-753e-0f47-95b4f6af3ded}">
           <p14:sldIdLst>
-            <p14:sldId id="286"/>
             <p14:sldId id="287"/>
             <p14:sldId id="288"/>
             <p14:sldId id="289"/>
             <p14:sldId id="290"/>
+            <p14:sldId id="291"/>
           </p14:sldIdLst>
         </p14:section>
-        <p14:section name="What it means" id="{33a0df01-2d8c-03ba-af77-8d4889aa016b}">
+        <p14:section name="What it means" id="{816a2873-f64a-3477-4f38-16f9349a2a63}">
           <p14:sldIdLst>
-            <p14:sldId id="291"/>
             <p14:sldId id="292"/>
-          </p14:sldIdLst>
-        </p14:section>
-        <p14:section name="Conclusions" id="{7e9c3fbe-ac24-7f0d-b687-c161dd1e16e5}">
-          <p14:sldIdLst>
             <p14:sldId id="293"/>
           </p14:sldIdLst>
         </p14:section>
-        <p14:section name="Backup" id="{824f8432-b1e8-8136-22ab-75ab7a8c84f9}">
+        <p14:section name="Conclusions" id="{3c6214e2-8c8c-3915-5433-6dc46d706545}">
           <p14:sldIdLst>
             <p14:sldId id="294"/>
+          </p14:sldIdLst>
+        </p14:section>
+        <p14:section name="Backup" id="{e02a5700-6ac6-dd1b-8552-6d3c17c22421}">
+          <p14:sldIdLst>
             <p14:sldId id="295"/>
+            <p14:sldId id="296"/>
           </p14:sldIdLst>
         </p14:section>
       </p14:sectionLst>
@@ -2562,7 +2564,7 @@
           <a:p>
             <a:r>
               <a:rPr lang="en-US" dirty="0"/>
-              <a:t>The regression is a line of best fit with several ingredients. It estimates how much each factor pushes ACPL up or down, separately. The one we care about is beta one: the extra mistakes after a lucky win, with rating, opponent strength and colour already accounted for. The other rows are sensible, which tells us the model works.</a:t>
+              <a:t>Why do we only score moves 15 to 30? We copied this from Backus and colleagues, who took it from Guid and Bratko. On page 359 they write: 'Following Guid and Bratko (2006, 2011), we base our quality of play variable on the analysis of moves n = 15, ..., 30, in each game g with total length N of at least 15 moves. We consider this subset of moves for two reasons. First, to limit the substantial computational burden of calculating so many moves (about 1.5 million in our full sample). Second, because we want to focus on the middle game, which is least likely to follow an established plan as experienced players, like those in our sample, tend to study the opening moves of their opponents and practice endgames in advance.' Their footnote 15 adds that each extra move of search depth roughly doubles the computing time. Their players were experienced tournament players. Ours are club players online, who probably memorise fewer openings, so for us the window mostly skips habitual opening moves and keeps the computing manageable. Either way, the same window is used for every game in every group, and it was fixed before any data was scored, so it cannot favour one group over another.</a:t>
             </a:r>
             <a:endParaRPr lang="en-US" dirty="0"/>
           </a:p>
@@ -2650,7 +2652,7 @@
           <a:p>
             <a:r>
               <a:rPr lang="en-US" dirty="0"/>
-              <a:t>No estimate is exact. The standard error tells us how much it would change if we had picked different games. Multiply by 1.96 each way and you get the 95 percent confidence interval: the range of values the data can believe. The p-value asks: if lucky wins truly made no difference, how often would we see a gap this large by luck? Here, 3 times in a thousand.</a:t>
+              <a:t>The regression is a line of best fit with several ingredients. It estimates how much each factor pushes ACPL up or down, separately. The one we care about is beta one: the extra mistakes after a lucky win, with rating, opponent strength and colour already accounted for. The other rows are sensible, which tells us the model works.</a:t>
             </a:r>
             <a:endParaRPr lang="en-US" dirty="0"/>
           </a:p>
@@ -2738,7 +2740,7 @@
           <a:p>
             <a:r>
               <a:rPr lang="en-US" dirty="0"/>
-              <a:t>This is the rule written down before the study. If the whole interval sits inside the shaded zone of plus or minus 2 centipawns, the groups are equal for practical purposes, and the 'players reset' prediction is supported. If the interval is clear of zero and the gap is at least 2, the prediction is refuted. Anything else is inconclusive. This test of 'equal within a margin' is called an equivalence test, or TOST.</a:t>
+              <a:t>No estimate is exact. The standard error tells us how much it would change if we had picked different games. Multiply by 1.96 each way and you get the 95 percent confidence interval: the range of values the data can believe. The p-value asks: if lucky wins truly made no difference, how often would we see a gap this large by luck? Here, 3 times in a thousand.</a:t>
             </a:r>
             <a:endParaRPr lang="en-US" dirty="0"/>
           </a:p>
@@ -2914,7 +2916,7 @@
           <a:p>
             <a:r>
               <a:rPr lang="en-US" dirty="0"/>
-              <a:t>Before scoring, we worked out how many games were needed. Games vary a lot, by about 50 centipawns, so to pin down a 2 centipawn difference we need a lot of them: about 10,700 per group. We planned 13,000 because some games end too early to score. We ended with about 12,000 usable per group.</a:t>
+              <a:t>This is the rule written down before the study. If the whole interval sits inside the shaded zone of plus or minus 2 centipawns, the groups are equal for practical purposes, and the 'players reset' prediction is supported. If the interval is clear of zero and the gap is at least 2, the prediction is refuted. Anything else is inconclusive. This test of 'equal within a margin' is called an equivalence test, or TOST.</a:t>
             </a:r>
             <a:endParaRPr lang="en-US" dirty="0"/>
           </a:p>
@@ -3002,7 +3004,7 @@
           <a:p>
             <a:r>
               <a:rPr lang="en-US" dirty="0"/>
-              <a:t>Now what happened.</a:t>
+              <a:t>Before scoring, we worked out how many games were needed. Games vary a lot, by about 50 centipawns, so to pin down a 2 centipawn difference we need a lot of them: about 10,700 per group. We planned 13,000 because some games end too early to score. We ended with about 12,000 usable per group.</a:t>
             </a:r>
             <a:endParaRPr lang="en-US" dirty="0"/>
           </a:p>
@@ -3090,7 +3092,7 @@
           <a:p>
             <a:r>
               <a:rPr lang="en-US" dirty="0"/>
-              <a:t>Here is the main result. After a lucky win, players lost 1.96 more centipawns per move. The 90 percent interval pokes out of the plus or minus 2 zone, so we cannot say the groups are equal, and the 'players reset' prediction is not supported. But the rule needed at least 2 centipawns to call it refuted, and 1.96 falls short by 0.04. So the official verdict is inconclusive, right on the line. In rating terms, 1.96 centipawns is about the gap between players 53 points apart.</a:t>
+              <a:t>Now what happened.</a:t>
             </a:r>
             <a:endParaRPr lang="en-US" dirty="0"/>
           </a:p>
@@ -3178,7 +3180,7 @@
           <a:p>
             <a:r>
               <a:rPr lang="en-US" dirty="0"/>
-              <a:t>We fixed five checks in advance, each changing one choice: only 10-minute games, removing rematches against the same opponent, each rating band separately, and a stricter definition of lucky. Every one points the same way, between 1.8 and 2.3 centipawns. One band's interval just touches zero because it has half the data.</a:t>
+              <a:t>Here is the main result. After a lucky win, players lost 1.96 more centipawns per move. The 90 percent interval pokes out of the plus or minus 2 zone, so we cannot say the groups are equal, and the 'players reset' prediction is not supported. But the rule needed at least 2 centipawns to call it refuted, and 1.96 falls short by 0.04. So the official verdict is inconclusive, right on the line. In rating terms, 1.96 centipawns is about the gap between players 53 points apart.</a:t>
             </a:r>
             <a:endParaRPr lang="en-US" dirty="0"/>
           </a:p>
@@ -3266,7 +3268,7 @@
           <a:p>
             <a:r>
               <a:rPr lang="en-US" dirty="0"/>
-              <a:t>The repeat of study 1's question. None of the differences between time, checkmate and resignation wins was significant. Two comparisons were inside the plus or minus 3 zone; the third missed it by five hundredths of a centipawn. So formally inconclusive, but in practice the same story as study 1: the type of win matters very little.</a:t>
+              <a:t>We fixed five checks in advance, each changing one choice: only 10-minute games, removing rematches against the same opponent, each rating band separately, and a stricter definition of lucky. Every one points the same way, between 1.8 and 2.3 centipawns. One band's interval just touches zero because it has half the data.</a:t>
             </a:r>
             <a:endParaRPr lang="en-US" dirty="0"/>
           </a:p>
@@ -3354,7 +3356,7 @@
           <a:p>
             <a:r>
               <a:rPr lang="en-US" dirty="0"/>
-              <a:t>Study 1's hint and study 2's planned test used completely different games and found almost the same number: 2.2 and 1.96. Study 2's interval is much narrower because it had nine times as many lucky wins. When an unplanned hint comes back in a planned test, that is how science is supposed to work.</a:t>
+              <a:t>The repeat of study 1's question. None of the differences between time, checkmate and resignation wins was significant. Two comparisons were inside the plus or minus 3 zone; the third missed it by five hundredths of a centipawn. So formally inconclusive, but in practice the same story as study 1: the type of win matters very little.</a:t>
             </a:r>
             <a:endParaRPr lang="en-US" dirty="0"/>
           </a:p>
@@ -3442,7 +3444,7 @@
           <a:p>
             <a:r>
               <a:rPr lang="en-US" dirty="0"/>
-              <a:t>Finally, what the result means and what it cannot tell us.</a:t>
+              <a:t>Study 1's hint and study 2's planned test used completely different games and found almost the same number: 2.2 and 1.96. Study 2's interval is much narrower because it had nine times as many lucky wins. When an unplanned hint comes back in a planned test, that is how science is supposed to work.</a:t>
             </a:r>
             <a:endParaRPr lang="en-US" dirty="0"/>
           </a:p>
@@ -3530,7 +3532,7 @@
           <a:p>
             <a:r>
               <a:rPr lang="en-US" dirty="0"/>
-              <a:t>What this means: escaping with an undeserved win seems to leave a small mark on the next game, roughly what you would expect from a player about 53 rating points weaker. What it does not tell us: why. It could be adrenaline, overconfidence or something else. And we only looked at rapid games and the middle part of each game.</a:t>
+              <a:t>Finally, what the result means and what it cannot tell us.</a:t>
             </a:r>
             <a:endParaRPr lang="en-US" dirty="0"/>
           </a:p>
@@ -3618,7 +3620,7 @@
           <a:p>
             <a:r>
               <a:rPr lang="en-US" dirty="0"/>
-              <a:t>To sum up. Lucky winners played slightly but clearly worse in their next game. My prediction that players reset was not supported, though the effect landed just under the size we decided in advance would count. Across both studies, how you win barely matters, but whether you deserved the win might. Questions and feedback welcome.</a:t>
+              <a:t>What this means: escaping with an undeserved win seems to leave a small mark on the next game, roughly what you would expect from a player about 53 rating points weaker. What it does not tell us: why. It could be adrenaline, overconfidence or something else. And we only looked at rapid games and the middle part of each game.</a:t>
             </a:r>
             <a:endParaRPr lang="en-US" dirty="0"/>
           </a:p>
@@ -3706,7 +3708,7 @@
           <a:p>
             <a:r>
               <a:rPr lang="en-US" dirty="0"/>
-              <a:t>Backup slide, not presented.</a:t>
+              <a:t>To sum up. Lucky winners played slightly but clearly worse in their next game. My prediction that players reset was not supported, though the effect landed just under the size we decided in advance would count. Across both studies, how you win barely matters, but whether you deserved the win might. Questions and feedback welcome.</a:t>
             </a:r>
             <a:endParaRPr lang="en-US" dirty="0"/>
           </a:p>
@@ -3882,7 +3884,7 @@
           <a:p>
             <a:r>
               <a:rPr lang="en-US" dirty="0"/>
-              <a:t>Backup slide: definitions for every technical term in the deck.</a:t>
+              <a:t>Backup slide, not presented.</a:t>
             </a:r>
             <a:endParaRPr lang="en-US" dirty="0"/>
           </a:p>
@@ -3906,6 +3908,94 @@
             <a:fld id="{F7021451-1387-4CA6-816F-3879F97B5CBC}" type="slidenum">
               <a:rPr lang="en-US"/>
               <a:t>40</a:t>
+            </a:fld>
+            <a:endParaRPr lang="en-US"/>
+          </a:p>
+        </p:txBody>
+      </p:sp>
+    </p:spTree>
+    <p:extLst>
+      <p:ext uri="{BB962C8B-B14F-4D97-AF65-F5344CB8AC3E}">
+        <p14:creationId xmlns:p14="http://schemas.microsoft.com/office/powerpoint/2010/main" val="1024086991"/>
+      </p:ext>
+    </p:extLst>
+  </p:cSld>
+  <p:clrMapOvr>
+    <a:masterClrMapping/>
+  </p:clrMapOvr>
+</p:notes>
+</file>
+
+<file path=ppt/notesSlides/notesSlide41.xml><?xml version="1.0" encoding="utf-8"?>
+<p:notes xmlns:a="http://schemas.openxmlformats.org/drawingml/2006/main" xmlns:r="http://schemas.openxmlformats.org/officeDocument/2006/relationships" xmlns:p="http://schemas.openxmlformats.org/presentationml/2006/main">
+  <p:cSld>
+    <p:spTree>
+      <p:nvGrpSpPr>
+        <p:cNvPr id="1" name=""/>
+        <p:cNvGrpSpPr/>
+        <p:nvPr/>
+      </p:nvGrpSpPr>
+      <p:grpSpPr>
+        <a:xfrm>
+          <a:off x="0" y="0"/>
+          <a:ext cx="0" cy="0"/>
+          <a:chOff x="0" y="0"/>
+          <a:chExt cx="0" cy="0"/>
+        </a:xfrm>
+      </p:grpSpPr>
+      <p:sp>
+        <p:nvSpPr>
+          <p:cNvPr id="2" name="Slide Image Placeholder 1"/>
+          <p:cNvSpPr>
+            <a:spLocks noGrp="1" noRot="1" noChangeAspect="1"/>
+          </p:cNvSpPr>
+          <p:nvPr>
+            <p:ph type="sldImg"/>
+          </p:nvPr>
+        </p:nvSpPr>
+        <p:spPr/>
+      </p:sp>
+      <p:sp>
+        <p:nvSpPr>
+          <p:cNvPr id="3" name="Notes Placeholder 2"/>
+          <p:cNvSpPr>
+            <a:spLocks noGrp="1"/>
+          </p:cNvSpPr>
+          <p:nvPr>
+            <p:ph type="body" idx="1"/>
+          </p:nvPr>
+        </p:nvSpPr>
+        <p:spPr/>
+        <p:txBody>
+          <a:bodyPr/>
+          <a:lstStyle/>
+          <a:p>
+            <a:r>
+              <a:rPr lang="en-US" dirty="0"/>
+              <a:t>Backup slide: definitions for every technical term in the deck.</a:t>
+            </a:r>
+            <a:endParaRPr lang="en-US" dirty="0"/>
+          </a:p>
+        </p:txBody>
+      </p:sp>
+      <p:sp>
+        <p:nvSpPr>
+          <p:cNvPr id="4" name="Slide Number Placeholder 3"/>
+          <p:cNvSpPr>
+            <a:spLocks noGrp="1"/>
+          </p:cNvSpPr>
+          <p:nvPr>
+            <p:ph type="sldNum" sz="quarter" idx="10"/>
+          </p:nvPr>
+        </p:nvSpPr>
+        <p:spPr/>
+        <p:txBody>
+          <a:bodyPr/>
+          <a:lstStyle/>
+          <a:p>
+            <a:fld id="{F7021451-1387-4CA6-816F-3879F97B5CBC}" type="slidenum">
+              <a:rPr lang="en-US"/>
+              <a:t>41</a:t>
             </a:fld>
             <a:endParaRPr lang="en-US"/>
           </a:p>
@@ -16593,7 +16683,7 @@
                           <a:ea typeface="Arial" pitchFamily="34" charset="-122"/>
                           <a:cs typeface="Arial" pitchFamily="34" charset="-120"/>
                         </a:rPr>
-                        <a:t>Skips memorised openings (Backus et al., 2023)</a:t>
+                        <a:t>Skips prepared openings, saves computer time (next slide)</a:t>
                       </a:r>
                       <a:endParaRPr lang="en-US" sz="1500" dirty="0">
                         <a:latin typeface="Arial" charset="0"/>
@@ -17184,7 +17274,7 @@
                   <a:schemeClr val="tx2"/>
                 </a:solidFill>
               </a:rPr>
-              <a:t>A regression compares the groups while holding rating, opponent and colour fixed</a:t>
+              <a:t>Why only moves 15 to 30: Backus et al. gave two reasons, following Guid and Bratko</a:t>
             </a:r>
             <a:endParaRPr lang="en-US" sz="2600" dirty="0"/>
           </a:p>
@@ -17192,18 +17282,18 @@
       </p:sp>
       <p:sp>
         <p:nvSpPr>
-          <p:cNvPr id="3" name="formula"/>
+          <p:cNvPr id="3" name="quote"/>
           <p:cNvSpPr/>
           <p:nvPr/>
         </p:nvSpPr>
         <p:spPr>
           <a:xfrm>
-            <a:off x="457200" y="1188720"/>
-            <a:ext cx="8229600" cy="731520"/>
+            <a:off x="457200" y="1115568"/>
+            <a:ext cx="8229600" cy="1097280"/>
           </a:xfrm>
           <a:prstGeom prst="roundRect">
             <a:avLst>
-              <a:gd name="adj" fmla="val 7500"/>
+              <a:gd name="adj" fmla="val 5000"/>
             </a:avLst>
           </a:prstGeom>
           <a:solidFill>
@@ -17225,6 +17315,529 @@
         </p:nvSpPr>
         <p:spPr>
           <a:xfrm>
+            <a:off x="640080" y="1115568"/>
+            <a:ext cx="7863840" cy="1097280"/>
+          </a:xfrm>
+          <a:prstGeom prst="rect">
+            <a:avLst/>
+          </a:prstGeom>
+          <a:noFill/>
+          <a:ln/>
+        </p:spPr>
+        <p:txBody>
+          <a:bodyPr wrap="square" lIns="0" tIns="0" rIns="0" bIns="0" rtlCol="0" anchor="ctr"/>
+          <a:lstStyle/>
+          <a:p>
+            <a:pPr indent="0" marL="0">
+              <a:buNone/>
+            </a:pPr>
+            <a:r>
+              <a:rPr lang="en-US" sz="1500" i="1" dirty="0">
+                <a:solidFill>
+                  <a:srgbClr val="1F4E79"/>
+                </a:solidFill>
+                <a:latin typeface="Arial" pitchFamily="34" charset="0"/>
+                <a:ea typeface="Arial" pitchFamily="34" charset="-122"/>
+                <a:cs typeface="Arial" pitchFamily="34" charset="-120"/>
+              </a:rPr>
+              <a:t>“We consider this subset of moves for two reasons. First, to limit the substantial computational burden … Second, because we want to focus on the middle game, which is least likely to follow an established plan …”</a:t>
+            </a:r>
+            <a:endParaRPr lang="en-US" sz="1500" dirty="0"/>
+          </a:p>
+          <a:p>
+            <a:pPr indent="0" marL="0">
+              <a:buNone/>
+            </a:pPr>
+            <a:r>
+              <a:rPr lang="en-US" sz="1300" dirty="0">
+                <a:solidFill>
+                  <a:srgbClr val="777777"/>
+                </a:solidFill>
+                <a:latin typeface="Arial" pitchFamily="34" charset="0"/>
+                <a:ea typeface="Arial" pitchFamily="34" charset="-122"/>
+                <a:cs typeface="Arial" pitchFamily="34" charset="-120"/>
+              </a:rPr>
+              <a:t>Backus et al. (2023), p. 359</a:t>
+            </a:r>
+            <a:endParaRPr lang="en-US" sz="1500" dirty="0"/>
+          </a:p>
+        </p:txBody>
+      </p:sp>
+      <p:sp>
+        <p:nvSpPr>
+          <p:cNvPr id="5" name="1. Computer time"/>
+          <p:cNvSpPr/>
+          <p:nvPr/>
+        </p:nvSpPr>
+        <p:spPr>
+          <a:xfrm>
+            <a:off x="457200" y="2377440"/>
+            <a:ext cx="3977640" cy="1234440"/>
+          </a:xfrm>
+          <a:prstGeom prst="roundRect">
+            <a:avLst>
+              <a:gd name="adj" fmla="val 4444"/>
+            </a:avLst>
+          </a:prstGeom>
+          <a:solidFill>
+            <a:srgbClr val="FFFFFF"/>
+          </a:solidFill>
+          <a:ln w="12700">
+            <a:solidFill>
+              <a:srgbClr val="2E75B6"/>
+            </a:solidFill>
+            <a:prstDash val="solid"/>
+          </a:ln>
+        </p:spPr>
+      </p:sp>
+      <p:sp>
+        <p:nvSpPr>
+          <p:cNvPr id="6" name="Text 4"/>
+          <p:cNvSpPr txBox="1"/>
+          <p:nvPr/>
+        </p:nvSpPr>
+        <p:spPr>
+          <a:xfrm>
+            <a:off x="640080" y="2450592"/>
+            <a:ext cx="3611880" cy="320040"/>
+          </a:xfrm>
+          <a:prstGeom prst="rect">
+            <a:avLst/>
+          </a:prstGeom>
+          <a:noFill/>
+          <a:ln/>
+        </p:spPr>
+        <p:txBody>
+          <a:bodyPr wrap="square" lIns="0" tIns="0" rIns="0" bIns="0" rtlCol="0" anchor="t"/>
+          <a:lstStyle/>
+          <a:p>
+            <a:pPr indent="0" marL="0">
+              <a:buNone/>
+            </a:pPr>
+            <a:r>
+              <a:rPr lang="en-US" sz="1600" b="1" dirty="0">
+                <a:solidFill>
+                  <a:srgbClr val="2E75B6"/>
+                </a:solidFill>
+                <a:latin typeface="Arial" pitchFamily="34" charset="0"/>
+                <a:ea typeface="Arial" pitchFamily="34" charset="-122"/>
+                <a:cs typeface="Arial" pitchFamily="34" charset="-120"/>
+              </a:rPr>
+              <a:t>1. Computer time</a:t>
+            </a:r>
+            <a:endParaRPr lang="en-US" sz="1600" dirty="0"/>
+          </a:p>
+        </p:txBody>
+      </p:sp>
+      <p:sp>
+        <p:nvSpPr>
+          <p:cNvPr id="7" name="Text 5"/>
+          <p:cNvSpPr txBox="1"/>
+          <p:nvPr/>
+        </p:nvSpPr>
+        <p:spPr>
+          <a:xfrm>
+            <a:off x="640080" y="2788920"/>
+            <a:ext cx="3611880" cy="777240"/>
+          </a:xfrm>
+          <a:prstGeom prst="rect">
+            <a:avLst/>
+          </a:prstGeom>
+          <a:noFill/>
+          <a:ln/>
+        </p:spPr>
+        <p:txBody>
+          <a:bodyPr wrap="square" lIns="0" tIns="0" rIns="0" bIns="0" rtlCol="0" anchor="t"/>
+          <a:lstStyle/>
+          <a:p>
+            <a:pPr indent="0" marL="0">
+              <a:buNone/>
+            </a:pPr>
+            <a:r>
+              <a:rPr lang="en-US" sz="1400" dirty="0">
+                <a:solidFill>
+                  <a:schemeClr val="tx1"/>
+                </a:solidFill>
+                <a:latin typeface="Arial" pitchFamily="34" charset="0"/>
+                <a:ea typeface="Arial" pitchFamily="34" charset="-122"/>
+                <a:cs typeface="Arial" pitchFamily="34" charset="-120"/>
+              </a:rPr>
+              <a:t>Their sample had about 1.5 million moves, and each extra step of search depth roughly doubles the computing time.</a:t>
+            </a:r>
+            <a:endParaRPr lang="en-US" sz="1400" dirty="0"/>
+          </a:p>
+        </p:txBody>
+      </p:sp>
+      <p:sp>
+        <p:nvSpPr>
+          <p:cNvPr id="8" name="2. Skip prepared play"/>
+          <p:cNvSpPr/>
+          <p:nvPr/>
+        </p:nvSpPr>
+        <p:spPr>
+          <a:xfrm>
+            <a:off x="4709160" y="2377440"/>
+            <a:ext cx="3977640" cy="1234440"/>
+          </a:xfrm>
+          <a:prstGeom prst="roundRect">
+            <a:avLst>
+              <a:gd name="adj" fmla="val 4444"/>
+            </a:avLst>
+          </a:prstGeom>
+          <a:solidFill>
+            <a:srgbClr val="FFFFFF"/>
+          </a:solidFill>
+          <a:ln w="12700">
+            <a:solidFill>
+              <a:srgbClr val="2E75B6"/>
+            </a:solidFill>
+            <a:prstDash val="solid"/>
+          </a:ln>
+        </p:spPr>
+      </p:sp>
+      <p:sp>
+        <p:nvSpPr>
+          <p:cNvPr id="9" name="Text 7"/>
+          <p:cNvSpPr txBox="1"/>
+          <p:nvPr/>
+        </p:nvSpPr>
+        <p:spPr>
+          <a:xfrm>
+            <a:off x="4892040" y="2450592"/>
+            <a:ext cx="3611880" cy="320040"/>
+          </a:xfrm>
+          <a:prstGeom prst="rect">
+            <a:avLst/>
+          </a:prstGeom>
+          <a:noFill/>
+          <a:ln/>
+        </p:spPr>
+        <p:txBody>
+          <a:bodyPr wrap="square" lIns="0" tIns="0" rIns="0" bIns="0" rtlCol="0" anchor="t"/>
+          <a:lstStyle/>
+          <a:p>
+            <a:pPr indent="0" marL="0">
+              <a:buNone/>
+            </a:pPr>
+            <a:r>
+              <a:rPr lang="en-US" sz="1600" b="1" dirty="0">
+                <a:solidFill>
+                  <a:srgbClr val="2E75B6"/>
+                </a:solidFill>
+                <a:latin typeface="Arial" pitchFamily="34" charset="0"/>
+                <a:ea typeface="Arial" pitchFamily="34" charset="-122"/>
+                <a:cs typeface="Arial" pitchFamily="34" charset="-120"/>
+              </a:rPr>
+              <a:t>2. Skip prepared play</a:t>
+            </a:r>
+            <a:endParaRPr lang="en-US" sz="1600" dirty="0"/>
+          </a:p>
+        </p:txBody>
+      </p:sp>
+      <p:sp>
+        <p:nvSpPr>
+          <p:cNvPr id="10" name="Text 8"/>
+          <p:cNvSpPr txBox="1"/>
+          <p:nvPr/>
+        </p:nvSpPr>
+        <p:spPr>
+          <a:xfrm>
+            <a:off x="4892040" y="2788920"/>
+            <a:ext cx="3611880" cy="777240"/>
+          </a:xfrm>
+          <a:prstGeom prst="rect">
+            <a:avLst/>
+          </a:prstGeom>
+          <a:noFill/>
+          <a:ln/>
+        </p:spPr>
+        <p:txBody>
+          <a:bodyPr wrap="square" lIns="0" tIns="0" rIns="0" bIns="0" rtlCol="0" anchor="t"/>
+          <a:lstStyle/>
+          <a:p>
+            <a:pPr indent="0" marL="0">
+              <a:buNone/>
+            </a:pPr>
+            <a:r>
+              <a:rPr lang="en-US" sz="1400" dirty="0">
+                <a:solidFill>
+                  <a:schemeClr val="tx1"/>
+                </a:solidFill>
+                <a:latin typeface="Arial" pitchFamily="34" charset="0"/>
+                <a:ea typeface="Arial" pitchFamily="34" charset="-122"/>
+                <a:cs typeface="Arial" pitchFamily="34" charset="-120"/>
+              </a:rPr>
+              <a:t>Strong players study openings and practise endgames in advance, so the middle game shows their own decisions best.</a:t>
+            </a:r>
+            <a:endParaRPr lang="en-US" sz="1400" dirty="0"/>
+          </a:p>
+        </p:txBody>
+      </p:sp>
+      <p:sp>
+        <p:nvSpPr>
+          <p:cNvPr id="11" name="our players"/>
+          <p:cNvSpPr/>
+          <p:nvPr/>
+        </p:nvSpPr>
+        <p:spPr>
+          <a:xfrm>
+            <a:off x="457200" y="3767328"/>
+            <a:ext cx="8229600" cy="841248"/>
+          </a:xfrm>
+          <a:prstGeom prst="roundRect">
+            <a:avLst>
+              <a:gd name="adj" fmla="val 6522"/>
+            </a:avLst>
+          </a:prstGeom>
+          <a:solidFill>
+            <a:srgbClr val="FFF2CC"/>
+          </a:solidFill>
+          <a:ln w="12700">
+            <a:solidFill>
+              <a:srgbClr val="C27C0E"/>
+            </a:solidFill>
+            <a:prstDash val="solid"/>
+          </a:ln>
+        </p:spPr>
+      </p:sp>
+      <p:sp>
+        <p:nvSpPr>
+          <p:cNvPr id="12" name="Text 10"/>
+          <p:cNvSpPr txBox="1"/>
+          <p:nvPr/>
+        </p:nvSpPr>
+        <p:spPr>
+          <a:xfrm>
+            <a:off x="594360" y="3767328"/>
+            <a:ext cx="7955280" cy="841248"/>
+          </a:xfrm>
+          <a:prstGeom prst="rect">
+            <a:avLst/>
+          </a:prstGeom>
+          <a:noFill/>
+          <a:ln/>
+        </p:spPr>
+        <p:txBody>
+          <a:bodyPr wrap="square" lIns="0" tIns="0" rIns="0" bIns="0" rtlCol="0" anchor="ctr"/>
+          <a:lstStyle/>
+          <a:p>
+            <a:pPr indent="0" marL="0">
+              <a:buNone/>
+            </a:pPr>
+            <a:r>
+              <a:rPr lang="en-US" sz="1400" b="1" dirty="0">
+                <a:solidFill>
+                  <a:srgbClr val="C27C0E"/>
+                </a:solidFill>
+                <a:latin typeface="Arial" pitchFamily="34" charset="0"/>
+                <a:ea typeface="Arial" pitchFamily="34" charset="-122"/>
+                <a:cs typeface="Arial" pitchFamily="34" charset="-120"/>
+              </a:rPr>
+              <a:t>For our players: </a:t>
+            </a:r>
+            <a:pPr indent="0" marL="0">
+              <a:buNone/>
+            </a:pPr>
+            <a:r>
+              <a:rPr lang="en-US" sz="1400" dirty="0">
+                <a:solidFill>
+                  <a:schemeClr val="tx1"/>
+                </a:solidFill>
+                <a:latin typeface="Arial" pitchFamily="34" charset="0"/>
+                <a:ea typeface="Arial" pitchFamily="34" charset="-122"/>
+                <a:cs typeface="Arial" pitchFamily="34" charset="-120"/>
+              </a:rPr>
+              <a:t>club players rated 1200 to 2000 probably memorise less, so here the window mainly skips habitual opening moves and keeps the computing manageable. It was fixed in the preregistration before any game was scored.</a:t>
+            </a:r>
+            <a:endParaRPr lang="en-US" sz="1400" dirty="0"/>
+          </a:p>
+        </p:txBody>
+      </p:sp>
+      <p:sp>
+        <p:nvSpPr>
+          <p:cNvPr id="13" name="Text 11"/>
+          <p:cNvSpPr txBox="1"/>
+          <p:nvPr/>
+        </p:nvSpPr>
+        <p:spPr>
+          <a:xfrm>
+            <a:off x="457200" y="4709160"/>
+            <a:ext cx="7680960" cy="274320"/>
+          </a:xfrm>
+          <a:prstGeom prst="rect">
+            <a:avLst/>
+          </a:prstGeom>
+          <a:noFill/>
+          <a:ln/>
+        </p:spPr>
+        <p:txBody>
+          <a:bodyPr wrap="square" lIns="0" tIns="0" rIns="0" bIns="0" rtlCol="0" anchor="ctr"/>
+          <a:lstStyle/>
+          <a:p>
+            <a:pPr indent="0" marL="0">
+              <a:buNone/>
+            </a:pPr>
+            <a:r>
+              <a:rPr lang="en-US" sz="1200" dirty="0">
+                <a:solidFill>
+                  <a:srgbClr val="777777"/>
+                </a:solidFill>
+                <a:latin typeface="Arial" pitchFamily="34" charset="0"/>
+                <a:ea typeface="Arial" pitchFamily="34" charset="-122"/>
+                <a:cs typeface="Arial" pitchFamily="34" charset="-120"/>
+              </a:rPr>
+              <a:t>Backus et al. (2023), Quantitative Economics 14(1), 349-380; window from Guid &amp; Bratko (2006, 2011)</a:t>
+            </a:r>
+            <a:endParaRPr lang="en-US" sz="1200" dirty="0"/>
+          </a:p>
+        </p:txBody>
+      </p:sp>
+      <p:sp>
+        <p:nvSpPr>
+          <p:cNvPr id="25" name="Slide Number Placeholder 0"/>
+          <p:cNvSpPr>
+            <a:spLocks noGrp="1"/>
+          </p:cNvSpPr>
+          <p:nvPr>
+            <p:ph type="sldNum" sz="quarter" idx="4294967295"/>
+          </p:nvPr>
+        </p:nvSpPr>
+        <p:spPr>
+          <a:xfrm>
+            <a:off x="8321040" y="4754880"/>
+            <a:ext cx="457200" cy="274320"/>
+          </a:xfrm>
+          <a:prstGeom prst="rect">
+            <a:avLst/>
+          </a:prstGeom>
+          <a:extLst>
+            <a:ext uri="{C572A759-6A51-4108-AA02-DFA0A04FC94B}">
+              <ma14:wrappingTextBoxFlag xmlns:ma14="http://schemas.microsoft.com/office/mac/drawingml/2011/main" val="0"/>
+            </a:ext>
+          </a:extLst>
+        </p:spPr>
+        <p:txBody>
+          <a:bodyPr/>
+          <a:lstStyle>
+            <a:lvl1pPr>
+              <a:defRPr sz="1100">
+                <a:solidFill>
+                  <a:srgbClr val="777777"/>
+                </a:solidFill>
+                <a:latin typeface="Arial"/>
+                <a:ea typeface="Arial"/>
+                <a:cs typeface="Arial"/>
+              </a:defRPr>
+            </a:lvl1pPr>
+          </a:lstStyle>
+          <a:p>
+            <a:pPr algn="l"/>
+            <a:fld id="{F7021451-1387-4CA6-816F-3879F97B5CBC}" type="slidenum">
+              <a:rPr b="0" lang="en-US"/>
+              <a:t>27</a:t>
+            </a:fld>
+            <a:endParaRPr lang="en-US"/>
+          </a:p>
+        </p:txBody>
+      </p:sp>
+    </p:spTree>
+  </p:cSld>
+  <p:clrMapOvr>
+    <a:masterClrMapping/>
+  </p:clrMapOvr>
+</p:sld>
+</file>
+
+<file path=ppt/slides/slide28.xml><?xml version="1.0" encoding="utf-8"?>
+<p:sld xmlns:a="http://schemas.openxmlformats.org/drawingml/2006/main" xmlns:r="http://schemas.openxmlformats.org/officeDocument/2006/relationships" xmlns:p="http://schemas.openxmlformats.org/presentationml/2006/main">
+  <p:cSld name="Slide 28">
+    <p:spTree>
+      <p:nvGrpSpPr>
+        <p:cNvPr id="1" name=""/>
+        <p:cNvGrpSpPr/>
+        <p:nvPr/>
+      </p:nvGrpSpPr>
+      <p:grpSpPr>
+        <a:xfrm>
+          <a:off x="0" y="0"/>
+          <a:ext cx="0" cy="0"/>
+          <a:chOff x="0" y="0"/>
+          <a:chExt cx="0" cy="0"/>
+        </a:xfrm>
+      </p:grpSpPr>
+      <p:sp>
+        <p:nvSpPr>
+          <p:cNvPr id="2" name="Text 0"/>
+          <p:cNvSpPr/>
+          <p:nvPr>
+            <p:ph idx="100" type="title" hasCustomPrompt="1"/>
+          </p:nvPr>
+        </p:nvSpPr>
+        <p:spPr>
+          <a:xfrm>
+            <a:off x="457200" y="228600"/>
+            <a:ext cx="8229600" cy="822960"/>
+          </a:xfrm>
+          <a:prstGeom prst="rect">
+            <a:avLst/>
+          </a:prstGeom>
+          <a:noFill/>
+          <a:ln/>
+        </p:spPr>
+        <p:txBody>
+          <a:bodyPr wrap="square" lIns="0" tIns="0" rIns="0" bIns="0" rtlCol="0" anchor="t"/>
+          <a:lstStyle/>
+          <a:p>
+            <a:pPr algn="l" indent="0" marL="0">
+              <a:buNone/>
+            </a:pPr>
+            <a:r>
+              <a:rPr lang="en-US" sz="2600" b="1" dirty="0">
+                <a:solidFill>
+                  <a:schemeClr val="tx2"/>
+                </a:solidFill>
+              </a:rPr>
+              <a:t>A regression compares the groups while holding rating, opponent and colour fixed</a:t>
+            </a:r>
+            <a:endParaRPr lang="en-US" sz="2600" dirty="0"/>
+          </a:p>
+        </p:txBody>
+      </p:sp>
+      <p:sp>
+        <p:nvSpPr>
+          <p:cNvPr id="3" name="formula"/>
+          <p:cNvSpPr/>
+          <p:nvPr/>
+        </p:nvSpPr>
+        <p:spPr>
+          <a:xfrm>
+            <a:off x="457200" y="1188720"/>
+            <a:ext cx="8229600" cy="731520"/>
+          </a:xfrm>
+          <a:prstGeom prst="roundRect">
+            <a:avLst>
+              <a:gd name="adj" fmla="val 7500"/>
+            </a:avLst>
+          </a:prstGeom>
+          <a:solidFill>
+            <a:srgbClr val="EBF3FA"/>
+          </a:solidFill>
+          <a:ln w="12700">
+            <a:solidFill>
+              <a:srgbClr val="2E75B6"/>
+            </a:solidFill>
+            <a:prstDash val="solid"/>
+          </a:ln>
+        </p:spPr>
+      </p:sp>
+      <p:sp>
+        <p:nvSpPr>
+          <p:cNvPr id="4" name="Text 2"/>
+          <p:cNvSpPr txBox="1"/>
+          <p:nvPr/>
+        </p:nvSpPr>
+        <p:spPr>
+          <a:xfrm>
             <a:off x="640080" y="1188720"/>
             <a:ext cx="7863840" cy="731520"/>
           </a:xfrm>
@@ -17258,7 +17871,7 @@
       </p:sp>
       <p:graphicFrame>
         <p:nvGraphicFramePr>
-          <p:cNvPr id="28" name="Table 0"/>
+          <p:cNvPr id="29" name="Table 0"/>
           <p:cNvGraphicFramePr>
             <a:graphicFrameLocks noGrp="1"/>
           </p:cNvGraphicFramePr>
@@ -18362,286 +18975,6 @@
             <a:pPr algn="l"/>
             <a:fld id="{F7021451-1387-4CA6-816F-3879F97B5CBC}" type="slidenum">
               <a:rPr b="0" lang="en-US"/>
-              <a:t>27</a:t>
-            </a:fld>
-            <a:endParaRPr lang="en-US"/>
-          </a:p>
-        </p:txBody>
-      </p:sp>
-    </p:spTree>
-  </p:cSld>
-  <p:clrMapOvr>
-    <a:masterClrMapping/>
-  </p:clrMapOvr>
-</p:sld>
-</file>
-
-<file path=ppt/slides/slide28.xml><?xml version="1.0" encoding="utf-8"?>
-<p:sld xmlns:a="http://schemas.openxmlformats.org/drawingml/2006/main" xmlns:r="http://schemas.openxmlformats.org/officeDocument/2006/relationships" xmlns:p="http://schemas.openxmlformats.org/presentationml/2006/main">
-  <p:cSld name="Slide 28">
-    <p:spTree>
-      <p:nvGrpSpPr>
-        <p:cNvPr id="1" name=""/>
-        <p:cNvGrpSpPr/>
-        <p:nvPr/>
-      </p:nvGrpSpPr>
-      <p:grpSpPr>
-        <a:xfrm>
-          <a:off x="0" y="0"/>
-          <a:ext cx="0" cy="0"/>
-          <a:chOff x="0" y="0"/>
-          <a:chExt cx="0" cy="0"/>
-        </a:xfrm>
-      </p:grpSpPr>
-      <p:sp>
-        <p:nvSpPr>
-          <p:cNvPr id="2" name="Text 0"/>
-          <p:cNvSpPr/>
-          <p:nvPr>
-            <p:ph idx="100" type="title" hasCustomPrompt="1"/>
-          </p:nvPr>
-        </p:nvSpPr>
-        <p:spPr>
-          <a:xfrm>
-            <a:off x="457200" y="228600"/>
-            <a:ext cx="8229600" cy="822960"/>
-          </a:xfrm>
-          <a:prstGeom prst="rect">
-            <a:avLst/>
-          </a:prstGeom>
-          <a:noFill/>
-          <a:ln/>
-        </p:spPr>
-        <p:txBody>
-          <a:bodyPr wrap="square" lIns="0" tIns="0" rIns="0" bIns="0" rtlCol="0" anchor="t"/>
-          <a:lstStyle/>
-          <a:p>
-            <a:pPr algn="l" indent="0" marL="0">
-              <a:buNone/>
-            </a:pPr>
-            <a:r>
-              <a:rPr lang="en-US" sz="2600" b="1" dirty="0">
-                <a:solidFill>
-                  <a:schemeClr val="tx2"/>
-                </a:solidFill>
-              </a:rPr>
-              <a:t>A confidence interval gives the range of believable values, and the p-value tests 'no effect'</a:t>
-            </a:r>
-            <a:endParaRPr lang="en-US" sz="2600" dirty="0"/>
-          </a:p>
-        </p:txBody>
-      </p:sp>
-      <p:sp>
-        <p:nvSpPr>
-          <p:cNvPr id="3" name="formula"/>
-          <p:cNvSpPr/>
-          <p:nvPr/>
-        </p:nvSpPr>
-        <p:spPr>
-          <a:xfrm>
-            <a:off x="457200" y="1188720"/>
-            <a:ext cx="8229600" cy="685800"/>
-          </a:xfrm>
-          <a:prstGeom prst="roundRect">
-            <a:avLst>
-              <a:gd name="adj" fmla="val 8000"/>
-            </a:avLst>
-          </a:prstGeom>
-          <a:solidFill>
-            <a:srgbClr val="EBF3FA"/>
-          </a:solidFill>
-          <a:ln w="12700">
-            <a:solidFill>
-              <a:srgbClr val="2E75B6"/>
-            </a:solidFill>
-            <a:prstDash val="solid"/>
-          </a:ln>
-        </p:spPr>
-      </p:sp>
-      <p:sp>
-        <p:nvSpPr>
-          <p:cNvPr id="4" name="Text 2"/>
-          <p:cNvSpPr txBox="1"/>
-          <p:nvPr/>
-        </p:nvSpPr>
-        <p:spPr>
-          <a:xfrm>
-            <a:off x="640080" y="1188720"/>
-            <a:ext cx="7863840" cy="685800"/>
-          </a:xfrm>
-          <a:prstGeom prst="rect">
-            <a:avLst/>
-          </a:prstGeom>
-          <a:noFill/>
-          <a:ln/>
-        </p:spPr>
-        <p:txBody>
-          <a:bodyPr wrap="square" lIns="0" tIns="0" rIns="0" bIns="0" rtlCol="0" anchor="ctr"/>
-          <a:lstStyle/>
-          <a:p>
-            <a:pPr algn="ctr" indent="0" marL="0">
-              <a:buNone/>
-            </a:pPr>
-            <a:r>
-              <a:rPr lang="en-US" sz="1700" b="1" dirty="0">
-                <a:solidFill>
-                  <a:srgbClr val="1F4E79"/>
-                </a:solidFill>
-                <a:latin typeface="Arial" pitchFamily="34" charset="0"/>
-                <a:ea typeface="Arial" pitchFamily="34" charset="-122"/>
-                <a:cs typeface="Arial" pitchFamily="34" charset="-120"/>
-              </a:rPr>
-              <a:t>95% interval = estimate ± 1.96 × SE      90% interval = estimate ± 1.645 × SE</a:t>
-            </a:r>
-            <a:endParaRPr lang="en-US" sz="1700" dirty="0"/>
-          </a:p>
-        </p:txBody>
-      </p:sp>
-      <p:sp>
-        <p:nvSpPr>
-          <p:cNvPr id="5" name="Text 3"/>
-          <p:cNvSpPr txBox="1"/>
-          <p:nvPr/>
-        </p:nvSpPr>
-        <p:spPr>
-          <a:xfrm>
-            <a:off x="457200" y="2057400"/>
-            <a:ext cx="8229600" cy="411480"/>
-          </a:xfrm>
-          <a:prstGeom prst="rect">
-            <a:avLst/>
-          </a:prstGeom>
-          <a:noFill/>
-          <a:ln/>
-        </p:spPr>
-        <p:txBody>
-          <a:bodyPr wrap="square" lIns="0" tIns="0" rIns="0" bIns="0" rtlCol="0" anchor="t"/>
-          <a:lstStyle/>
-          <a:p>
-            <a:pPr indent="0" marL="0">
-              <a:buNone/>
-            </a:pPr>
-            <a:r>
-              <a:rPr lang="en-US" sz="2000" b="1" dirty="0">
-                <a:solidFill>
-                  <a:srgbClr val="1F4E79"/>
-                </a:solidFill>
-                <a:latin typeface="Arial" pitchFamily="34" charset="0"/>
-                <a:ea typeface="Arial" pitchFamily="34" charset="-122"/>
-                <a:cs typeface="Arial" pitchFamily="34" charset="-120"/>
-              </a:rPr>
-              <a:t>Our numbers: 1.96 ± 1.96 × 0.666 = 0.66 to 3.27 cp</a:t>
-            </a:r>
-            <a:endParaRPr lang="en-US" sz="2000" dirty="0"/>
-          </a:p>
-        </p:txBody>
-      </p:sp>
-      <p:sp>
-        <p:nvSpPr>
-          <p:cNvPr id="6" name="Text 4"/>
-          <p:cNvSpPr txBox="1"/>
-          <p:nvPr/>
-        </p:nvSpPr>
-        <p:spPr>
-          <a:xfrm>
-            <a:off x="457200" y="2651760"/>
-            <a:ext cx="8229600" cy="1920240"/>
-          </a:xfrm>
-          <a:prstGeom prst="rect">
-            <a:avLst/>
-          </a:prstGeom>
-          <a:noFill/>
-          <a:ln/>
-        </p:spPr>
-        <p:txBody>
-          <a:bodyPr wrap="square" lIns="0" tIns="0" rIns="0" bIns="0" rtlCol="0" anchor="t"/>
-          <a:lstStyle/>
-          <a:p>
-            <a:pPr marL="342900" indent="-342900">
-              <a:spcAft>
-                <a:spcPts val="1000"/>
-              </a:spcAft>
-              <a:buSzPct val="100000"/>
-              <a:buChar char="•"/>
-            </a:pPr>
-            <a:r>
-              <a:rPr lang="en-US" sz="2000" dirty="0">
-                <a:solidFill>
-                  <a:schemeClr val="tx1"/>
-                </a:solidFill>
-                <a:latin typeface="Arial" pitchFamily="34" charset="0"/>
-                <a:ea typeface="Arial" pitchFamily="34" charset="-122"/>
-                <a:cs typeface="Arial" pitchFamily="34" charset="-120"/>
-              </a:rPr>
-              <a:t>SE (standard error): how much the estimate would wobble with different games</a:t>
-            </a:r>
-            <a:endParaRPr lang="en-US" sz="2000" dirty="0"/>
-          </a:p>
-          <a:p>
-            <a:pPr marL="342900" indent="-342900">
-              <a:spcAft>
-                <a:spcPts val="1000"/>
-              </a:spcAft>
-              <a:buSzPct val="100000"/>
-              <a:buChar char="•"/>
-            </a:pPr>
-            <a:r>
-              <a:rPr lang="en-US" sz="2000" dirty="0">
-                <a:solidFill>
-                  <a:schemeClr val="tx1"/>
-                </a:solidFill>
-                <a:latin typeface="Arial" pitchFamily="34" charset="0"/>
-                <a:ea typeface="Arial" pitchFamily="34" charset="-122"/>
-                <a:cs typeface="Arial" pitchFamily="34" charset="-120"/>
-              </a:rPr>
-              <a:t>p-value 0.003: if lucky wins truly did nothing, a gap this big would appear 3 times in 1,000</a:t>
-            </a:r>
-            <a:endParaRPr lang="en-US" sz="2000" dirty="0"/>
-          </a:p>
-        </p:txBody>
-      </p:sp>
-      <p:sp>
-        <p:nvSpPr>
-          <p:cNvPr id="25" name="Slide Number Placeholder 0"/>
-          <p:cNvSpPr>
-            <a:spLocks noGrp="1"/>
-          </p:cNvSpPr>
-          <p:nvPr>
-            <p:ph type="sldNum" sz="quarter" idx="4294967295"/>
-          </p:nvPr>
-        </p:nvSpPr>
-        <p:spPr>
-          <a:xfrm>
-            <a:off x="8321040" y="4754880"/>
-            <a:ext cx="457200" cy="274320"/>
-          </a:xfrm>
-          <a:prstGeom prst="rect">
-            <a:avLst/>
-          </a:prstGeom>
-          <a:extLst>
-            <a:ext uri="{C572A759-6A51-4108-AA02-DFA0A04FC94B}">
-              <ma14:wrappingTextBoxFlag xmlns:ma14="http://schemas.microsoft.com/office/mac/drawingml/2011/main" val="0"/>
-            </a:ext>
-          </a:extLst>
-        </p:spPr>
-        <p:txBody>
-          <a:bodyPr/>
-          <a:lstStyle>
-            <a:lvl1pPr>
-              <a:defRPr sz="1100">
-                <a:solidFill>
-                  <a:srgbClr val="777777"/>
-                </a:solidFill>
-                <a:latin typeface="Arial"/>
-                <a:ea typeface="Arial"/>
-                <a:cs typeface="Arial"/>
-              </a:defRPr>
-            </a:lvl1pPr>
-          </a:lstStyle>
-          <a:p>
-            <a:pPr algn="l"/>
-            <a:fld id="{F7021451-1387-4CA6-816F-3879F97B5CBC}" type="slidenum">
-              <a:rPr b="0" lang="en-US"/>
               <a:t>28</a:t>
             </a:fld>
             <a:endParaRPr lang="en-US"/>
@@ -18705,7 +19038,7 @@
                   <a:schemeClr val="tx2"/>
                 </a:solidFill>
               </a:rPr>
-              <a:t>The decision rule was fixed in advance: each result is supported, refuted or inconclusive</a:t>
+              <a:t>A confidence interval gives the range of believable values, and the p-value tests 'no effect'</a:t>
             </a:r>
             <a:endParaRPr lang="en-US" sz="2600" dirty="0"/>
           </a:p>
@@ -18713,24 +19046,26 @@
       </p:sp>
       <p:sp>
         <p:nvSpPr>
-          <p:cNvPr id="3" name="zone"/>
+          <p:cNvPr id="3" name="formula"/>
           <p:cNvSpPr/>
           <p:nvPr/>
         </p:nvSpPr>
         <p:spPr>
           <a:xfrm>
-            <a:off x="3566160" y="1234440"/>
-            <a:ext cx="3108960" cy="2148840"/>
-          </a:xfrm>
-          <a:prstGeom prst="rect">
-            <a:avLst/>
+            <a:off x="457200" y="1188720"/>
+            <a:ext cx="8229600" cy="685800"/>
+          </a:xfrm>
+          <a:prstGeom prst="roundRect">
+            <a:avLst>
+              <a:gd name="adj" fmla="val 8000"/>
+            </a:avLst>
           </a:prstGeom>
           <a:solidFill>
             <a:srgbClr val="EBF3FA"/>
           </a:solidFill>
           <a:ln w="12700">
             <a:solidFill>
-              <a:srgbClr val="EBF3FA"/>
+              <a:srgbClr val="2E75B6"/>
             </a:solidFill>
             <a:prstDash val="solid"/>
           </a:ln>
@@ -18738,37 +19073,14 @@
       </p:sp>
       <p:sp>
         <p:nvSpPr>
-          <p:cNvPr id="4" name="zero"/>
-          <p:cNvSpPr/>
-          <p:nvPr/>
-        </p:nvSpPr>
-        <p:spPr>
-          <a:xfrm>
-            <a:off x="5120640" y="1188720"/>
-            <a:ext cx="0" cy="2240280"/>
-          </a:xfrm>
-          <a:prstGeom prst="line">
-            <a:avLst/>
-          </a:prstGeom>
-          <a:noFill/>
-          <a:ln w="12700">
-            <a:solidFill>
-              <a:srgbClr val="777777"/>
-            </a:solidFill>
-            <a:prstDash val="dash"/>
-          </a:ln>
-        </p:spPr>
-      </p:sp>
-      <p:sp>
-        <p:nvSpPr>
-          <p:cNvPr id="5" name="Text 3"/>
+          <p:cNvPr id="4" name="Text 2"/>
           <p:cNvSpPr txBox="1"/>
           <p:nvPr/>
         </p:nvSpPr>
         <p:spPr>
           <a:xfrm>
-            <a:off x="457200" y="1325880"/>
-            <a:ext cx="1463040" cy="365760"/>
+            <a:off x="640080" y="1188720"/>
+            <a:ext cx="7863840" cy="685800"/>
           </a:xfrm>
           <a:prstGeom prst="rect">
             <a:avLst/>
@@ -18780,11 +19092,11 @@
           <a:bodyPr wrap="square" lIns="0" tIns="0" rIns="0" bIns="0" rtlCol="0" anchor="ctr"/>
           <a:lstStyle/>
           <a:p>
-            <a:pPr indent="0" marL="0">
+            <a:pPr algn="ctr" indent="0" marL="0">
               <a:buNone/>
             </a:pPr>
             <a:r>
-              <a:rPr lang="en-US" sz="1500" b="1" dirty="0">
+              <a:rPr lang="en-US" sz="1700" b="1" dirty="0">
                 <a:solidFill>
                   <a:srgbClr val="1F4E79"/>
                 </a:solidFill>
@@ -18792,45 +19104,22 @@
                 <a:ea typeface="Arial" pitchFamily="34" charset="-122"/>
                 <a:cs typeface="Arial" pitchFamily="34" charset="-120"/>
               </a:rPr>
-              <a:t>Supported</a:t>
-            </a:r>
-            <a:endParaRPr lang="en-US" sz="1500" dirty="0"/>
-          </a:p>
-        </p:txBody>
-      </p:sp>
-      <p:sp>
-        <p:nvSpPr>
-          <p:cNvPr id="6" name="rule Supported"/>
-          <p:cNvSpPr/>
-          <p:nvPr/>
-        </p:nvSpPr>
-        <p:spPr>
-          <a:xfrm>
-            <a:off x="4265676" y="1508760"/>
-            <a:ext cx="1632204" cy="0"/>
-          </a:xfrm>
-          <a:prstGeom prst="line">
-            <a:avLst/>
-          </a:prstGeom>
-          <a:noFill/>
-          <a:ln w="38100">
-            <a:solidFill>
-              <a:srgbClr val="1F4E79"/>
-            </a:solidFill>
-            <a:prstDash val="solid"/>
-          </a:ln>
-        </p:spPr>
-      </p:sp>
-      <p:sp>
-        <p:nvSpPr>
-          <p:cNvPr id="7" name="Text 5"/>
+              <a:t>95% interval = estimate ± 1.96 × SE      90% interval = estimate ± 1.645 × SE</a:t>
+            </a:r>
+            <a:endParaRPr lang="en-US" sz="1700" dirty="0"/>
+          </a:p>
+        </p:txBody>
+      </p:sp>
+      <p:sp>
+        <p:nvSpPr>
+          <p:cNvPr id="5" name="Text 3"/>
           <p:cNvSpPr txBox="1"/>
           <p:nvPr/>
         </p:nvSpPr>
         <p:spPr>
           <a:xfrm>
             <a:off x="457200" y="2057400"/>
-            <a:ext cx="1463040" cy="365760"/>
+            <a:ext cx="8229600" cy="411480"/>
           </a:xfrm>
           <a:prstGeom prst="rect">
             <a:avLst/>
@@ -18839,317 +19128,37 @@
           <a:ln/>
         </p:spPr>
         <p:txBody>
-          <a:bodyPr wrap="square" lIns="0" tIns="0" rIns="0" bIns="0" rtlCol="0" anchor="ctr"/>
+          <a:bodyPr wrap="square" lIns="0" tIns="0" rIns="0" bIns="0" rtlCol="0" anchor="t"/>
           <a:lstStyle/>
           <a:p>
             <a:pPr indent="0" marL="0">
               <a:buNone/>
             </a:pPr>
             <a:r>
-              <a:rPr lang="en-US" sz="1500" b="1" dirty="0">
-                <a:solidFill>
-                  <a:srgbClr val="C27C0E"/>
+              <a:rPr lang="en-US" sz="2000" b="1" dirty="0">
+                <a:solidFill>
+                  <a:srgbClr val="1F4E79"/>
                 </a:solidFill>
                 <a:latin typeface="Arial" pitchFamily="34" charset="0"/>
                 <a:ea typeface="Arial" pitchFamily="34" charset="-122"/>
                 <a:cs typeface="Arial" pitchFamily="34" charset="-120"/>
               </a:rPr>
-              <a:t>Refuted</a:t>
-            </a:r>
-            <a:endParaRPr lang="en-US" sz="1500" dirty="0"/>
-          </a:p>
-        </p:txBody>
-      </p:sp>
-      <p:sp>
-        <p:nvSpPr>
-          <p:cNvPr id="8" name="rule Refuted"/>
-          <p:cNvSpPr/>
-          <p:nvPr/>
-        </p:nvSpPr>
-        <p:spPr>
-          <a:xfrm>
-            <a:off x="6986016" y="2240280"/>
-            <a:ext cx="932688" cy="0"/>
-          </a:xfrm>
-          <a:prstGeom prst="line">
-            <a:avLst/>
-          </a:prstGeom>
-          <a:noFill/>
-          <a:ln w="38100">
-            <a:solidFill>
-              <a:srgbClr val="C27C0E"/>
-            </a:solidFill>
-            <a:prstDash val="solid"/>
-          </a:ln>
-        </p:spPr>
-      </p:sp>
-      <p:sp>
-        <p:nvSpPr>
-          <p:cNvPr id="9" name="Text 7"/>
+              <a:t>Our numbers: 1.96 ± 1.96 × 0.666 = 0.66 to 3.27 cp</a:t>
+            </a:r>
+            <a:endParaRPr lang="en-US" sz="2000" dirty="0"/>
+          </a:p>
+        </p:txBody>
+      </p:sp>
+      <p:sp>
+        <p:nvSpPr>
+          <p:cNvPr id="6" name="Text 4"/>
           <p:cNvSpPr txBox="1"/>
           <p:nvPr/>
         </p:nvSpPr>
         <p:spPr>
           <a:xfrm>
-            <a:off x="457200" y="2788920"/>
-            <a:ext cx="1463040" cy="365760"/>
-          </a:xfrm>
-          <a:prstGeom prst="rect">
-            <a:avLst/>
-          </a:prstGeom>
-          <a:noFill/>
-          <a:ln/>
-        </p:spPr>
-        <p:txBody>
-          <a:bodyPr wrap="square" lIns="0" tIns="0" rIns="0" bIns="0" rtlCol="0" anchor="ctr"/>
-          <a:lstStyle/>
-          <a:p>
-            <a:pPr indent="0" marL="0">
-              <a:buNone/>
-            </a:pPr>
-            <a:r>
-              <a:rPr lang="en-US" sz="1500" b="1" dirty="0">
-                <a:solidFill>
-                  <a:srgbClr val="777777"/>
-                </a:solidFill>
-                <a:latin typeface="Arial" pitchFamily="34" charset="0"/>
-                <a:ea typeface="Arial" pitchFamily="34" charset="-122"/>
-                <a:cs typeface="Arial" pitchFamily="34" charset="-120"/>
-              </a:rPr>
-              <a:t>Inconclusive</a:t>
-            </a:r>
-            <a:endParaRPr lang="en-US" sz="1500" dirty="0"/>
-          </a:p>
-        </p:txBody>
-      </p:sp>
-      <p:sp>
-        <p:nvSpPr>
-          <p:cNvPr id="10" name="rule Inconclusive"/>
-          <p:cNvSpPr/>
-          <p:nvPr/>
-        </p:nvSpPr>
-        <p:spPr>
-          <a:xfrm>
-            <a:off x="5431536" y="2971800"/>
-            <a:ext cx="2098548" cy="0"/>
-          </a:xfrm>
-          <a:prstGeom prst="line">
-            <a:avLst/>
-          </a:prstGeom>
-          <a:noFill/>
-          <a:ln w="38100">
-            <a:solidFill>
-              <a:srgbClr val="777777"/>
-            </a:solidFill>
-            <a:prstDash val="solid"/>
-          </a:ln>
-        </p:spPr>
-      </p:sp>
-      <p:sp>
-        <p:nvSpPr>
-          <p:cNvPr id="11" name="Text 9"/>
-          <p:cNvSpPr txBox="1"/>
-          <p:nvPr/>
-        </p:nvSpPr>
-        <p:spPr>
-          <a:xfrm>
-            <a:off x="1737360" y="3429000"/>
-            <a:ext cx="548640" cy="228600"/>
-          </a:xfrm>
-          <a:prstGeom prst="rect">
-            <a:avLst/>
-          </a:prstGeom>
-          <a:noFill/>
-          <a:ln/>
-        </p:spPr>
-        <p:txBody>
-          <a:bodyPr wrap="square" lIns="0" tIns="0" rIns="0" bIns="0" rtlCol="0" anchor="t"/>
-          <a:lstStyle/>
-          <a:p>
-            <a:pPr algn="ctr" indent="0" marL="0">
-              <a:buNone/>
-            </a:pPr>
-            <a:r>
-              <a:rPr lang="en-US" sz="1300" dirty="0">
-                <a:solidFill>
-                  <a:srgbClr val="777777"/>
-                </a:solidFill>
-                <a:latin typeface="Arial" pitchFamily="34" charset="0"/>
-                <a:ea typeface="Arial" pitchFamily="34" charset="-122"/>
-                <a:cs typeface="Arial" pitchFamily="34" charset="-120"/>
-              </a:rPr>
-              <a:t>-4</a:t>
-            </a:r>
-            <a:endParaRPr lang="en-US" sz="1300" dirty="0"/>
-          </a:p>
-        </p:txBody>
-      </p:sp>
-      <p:sp>
-        <p:nvSpPr>
-          <p:cNvPr id="12" name="Text 10"/>
-          <p:cNvSpPr txBox="1"/>
-          <p:nvPr/>
-        </p:nvSpPr>
-        <p:spPr>
-          <a:xfrm>
-            <a:off x="3291840" y="3429000"/>
-            <a:ext cx="548640" cy="228600"/>
-          </a:xfrm>
-          <a:prstGeom prst="rect">
-            <a:avLst/>
-          </a:prstGeom>
-          <a:noFill/>
-          <a:ln/>
-        </p:spPr>
-        <p:txBody>
-          <a:bodyPr wrap="square" lIns="0" tIns="0" rIns="0" bIns="0" rtlCol="0" anchor="t"/>
-          <a:lstStyle/>
-          <a:p>
-            <a:pPr algn="ctr" indent="0" marL="0">
-              <a:buNone/>
-            </a:pPr>
-            <a:r>
-              <a:rPr lang="en-US" sz="1300" dirty="0">
-                <a:solidFill>
-                  <a:srgbClr val="777777"/>
-                </a:solidFill>
-                <a:latin typeface="Arial" pitchFamily="34" charset="0"/>
-                <a:ea typeface="Arial" pitchFamily="34" charset="-122"/>
-                <a:cs typeface="Arial" pitchFamily="34" charset="-120"/>
-              </a:rPr>
-              <a:t>-2</a:t>
-            </a:r>
-            <a:endParaRPr lang="en-US" sz="1300" dirty="0"/>
-          </a:p>
-        </p:txBody>
-      </p:sp>
-      <p:sp>
-        <p:nvSpPr>
-          <p:cNvPr id="13" name="Text 11"/>
-          <p:cNvSpPr txBox="1"/>
-          <p:nvPr/>
-        </p:nvSpPr>
-        <p:spPr>
-          <a:xfrm>
-            <a:off x="4846320" y="3429000"/>
-            <a:ext cx="548640" cy="228600"/>
-          </a:xfrm>
-          <a:prstGeom prst="rect">
-            <a:avLst/>
-          </a:prstGeom>
-          <a:noFill/>
-          <a:ln/>
-        </p:spPr>
-        <p:txBody>
-          <a:bodyPr wrap="square" lIns="0" tIns="0" rIns="0" bIns="0" rtlCol="0" anchor="t"/>
-          <a:lstStyle/>
-          <a:p>
-            <a:pPr algn="ctr" indent="0" marL="0">
-              <a:buNone/>
-            </a:pPr>
-            <a:r>
-              <a:rPr lang="en-US" sz="1300" dirty="0">
-                <a:solidFill>
-                  <a:srgbClr val="777777"/>
-                </a:solidFill>
-                <a:latin typeface="Arial" pitchFamily="34" charset="0"/>
-                <a:ea typeface="Arial" pitchFamily="34" charset="-122"/>
-                <a:cs typeface="Arial" pitchFamily="34" charset="-120"/>
-              </a:rPr>
-              <a:t>0</a:t>
-            </a:r>
-            <a:endParaRPr lang="en-US" sz="1300" dirty="0"/>
-          </a:p>
-        </p:txBody>
-      </p:sp>
-      <p:sp>
-        <p:nvSpPr>
-          <p:cNvPr id="14" name="Text 12"/>
-          <p:cNvSpPr txBox="1"/>
-          <p:nvPr/>
-        </p:nvSpPr>
-        <p:spPr>
-          <a:xfrm>
-            <a:off x="6400800" y="3429000"/>
-            <a:ext cx="548640" cy="228600"/>
-          </a:xfrm>
-          <a:prstGeom prst="rect">
-            <a:avLst/>
-          </a:prstGeom>
-          <a:noFill/>
-          <a:ln/>
-        </p:spPr>
-        <p:txBody>
-          <a:bodyPr wrap="square" lIns="0" tIns="0" rIns="0" bIns="0" rtlCol="0" anchor="t"/>
-          <a:lstStyle/>
-          <a:p>
-            <a:pPr algn="ctr" indent="0" marL="0">
-              <a:buNone/>
-            </a:pPr>
-            <a:r>
-              <a:rPr lang="en-US" sz="1300" dirty="0">
-                <a:solidFill>
-                  <a:srgbClr val="777777"/>
-                </a:solidFill>
-                <a:latin typeface="Arial" pitchFamily="34" charset="0"/>
-                <a:ea typeface="Arial" pitchFamily="34" charset="-122"/>
-                <a:cs typeface="Arial" pitchFamily="34" charset="-120"/>
-              </a:rPr>
-              <a:t>+2</a:t>
-            </a:r>
-            <a:endParaRPr lang="en-US" sz="1300" dirty="0"/>
-          </a:p>
-        </p:txBody>
-      </p:sp>
-      <p:sp>
-        <p:nvSpPr>
-          <p:cNvPr id="15" name="Text 13"/>
-          <p:cNvSpPr txBox="1"/>
-          <p:nvPr/>
-        </p:nvSpPr>
-        <p:spPr>
-          <a:xfrm>
-            <a:off x="7955280" y="3429000"/>
-            <a:ext cx="548640" cy="228600"/>
-          </a:xfrm>
-          <a:prstGeom prst="rect">
-            <a:avLst/>
-          </a:prstGeom>
-          <a:noFill/>
-          <a:ln/>
-        </p:spPr>
-        <p:txBody>
-          <a:bodyPr wrap="square" lIns="0" tIns="0" rIns="0" bIns="0" rtlCol="0" anchor="t"/>
-          <a:lstStyle/>
-          <a:p>
-            <a:pPr algn="ctr" indent="0" marL="0">
-              <a:buNone/>
-            </a:pPr>
-            <a:r>
-              <a:rPr lang="en-US" sz="1300" dirty="0">
-                <a:solidFill>
-                  <a:srgbClr val="777777"/>
-                </a:solidFill>
-                <a:latin typeface="Arial" pitchFamily="34" charset="0"/>
-                <a:ea typeface="Arial" pitchFamily="34" charset="-122"/>
-                <a:cs typeface="Arial" pitchFamily="34" charset="-120"/>
-              </a:rPr>
-              <a:t>+4</a:t>
-            </a:r>
-            <a:endParaRPr lang="en-US" sz="1300" dirty="0"/>
-          </a:p>
-        </p:txBody>
-      </p:sp>
-      <p:sp>
-        <p:nvSpPr>
-          <p:cNvPr id="16" name="Text 14"/>
-          <p:cNvSpPr txBox="1"/>
-          <p:nvPr/>
-        </p:nvSpPr>
-        <p:spPr>
-          <a:xfrm>
-            <a:off x="457200" y="3794760"/>
-            <a:ext cx="8229600" cy="914400"/>
+            <a:off x="457200" y="2651760"/>
+            <a:ext cx="8229600" cy="1920240"/>
           </a:xfrm>
           <a:prstGeom prst="rect">
             <a:avLst/>
@@ -19169,7 +19178,7 @@
               <a:buChar char="•"/>
             </a:pPr>
             <a:r>
-              <a:rPr lang="en-US" sz="1700" dirty="0">
+              <a:rPr lang="en-US" sz="2000" dirty="0">
                 <a:solidFill>
                   <a:schemeClr val="tx1"/>
                 </a:solidFill>
@@ -19177,9 +19186,9 @@
                 <a:ea typeface="Arial" pitchFamily="34" charset="-122"/>
                 <a:cs typeface="Arial" pitchFamily="34" charset="-120"/>
               </a:rPr>
-              <a:t>Supported: whole 90% interval inside ±2 cp</a:t>
-            </a:r>
-            <a:endParaRPr lang="en-US" sz="1700" dirty="0"/>
+              <a:t>SE (standard error): how much the estimate would wobble with different games</a:t>
+            </a:r>
+            <a:endParaRPr lang="en-US" sz="2000" dirty="0"/>
           </a:p>
           <a:p>
             <a:pPr marL="342900" indent="-342900">
@@ -19190,7 +19199,7 @@
               <a:buChar char="•"/>
             </a:pPr>
             <a:r>
-              <a:rPr lang="en-US" sz="1700" dirty="0">
+              <a:rPr lang="en-US" sz="2000" dirty="0">
                 <a:solidFill>
                   <a:schemeClr val="tx1"/>
                 </a:solidFill>
@@ -19198,9 +19207,9 @@
                 <a:ea typeface="Arial" pitchFamily="34" charset="-122"/>
                 <a:cs typeface="Arial" pitchFamily="34" charset="-120"/>
               </a:rPr>
-              <a:t>Refuted: 95% interval misses 0 and gap is at least 2 cp</a:t>
-            </a:r>
-            <a:endParaRPr lang="en-US" sz="1700" dirty="0"/>
+              <a:t>p-value 0.003: if lucky wins truly did nothing, a gap this big would appear 3 times in 1,000</a:t>
+            </a:r>
+            <a:endParaRPr lang="en-US" sz="2000" dirty="0"/>
           </a:p>
         </p:txBody>
       </p:sp>
@@ -19599,6 +19608,610 @@
                   <a:schemeClr val="tx2"/>
                 </a:solidFill>
               </a:rPr>
+              <a:t>The decision rule was fixed in advance: each result is supported, refuted or inconclusive</a:t>
+            </a:r>
+            <a:endParaRPr lang="en-US" sz="2600" dirty="0"/>
+          </a:p>
+        </p:txBody>
+      </p:sp>
+      <p:sp>
+        <p:nvSpPr>
+          <p:cNvPr id="3" name="zone"/>
+          <p:cNvSpPr/>
+          <p:nvPr/>
+        </p:nvSpPr>
+        <p:spPr>
+          <a:xfrm>
+            <a:off x="3566160" y="1234440"/>
+            <a:ext cx="3108960" cy="2148840"/>
+          </a:xfrm>
+          <a:prstGeom prst="rect">
+            <a:avLst/>
+          </a:prstGeom>
+          <a:solidFill>
+            <a:srgbClr val="EBF3FA"/>
+          </a:solidFill>
+          <a:ln w="12700">
+            <a:solidFill>
+              <a:srgbClr val="EBF3FA"/>
+            </a:solidFill>
+            <a:prstDash val="solid"/>
+          </a:ln>
+        </p:spPr>
+      </p:sp>
+      <p:sp>
+        <p:nvSpPr>
+          <p:cNvPr id="4" name="zero"/>
+          <p:cNvSpPr/>
+          <p:nvPr/>
+        </p:nvSpPr>
+        <p:spPr>
+          <a:xfrm>
+            <a:off x="5120640" y="1188720"/>
+            <a:ext cx="0" cy="2240280"/>
+          </a:xfrm>
+          <a:prstGeom prst="line">
+            <a:avLst/>
+          </a:prstGeom>
+          <a:noFill/>
+          <a:ln w="12700">
+            <a:solidFill>
+              <a:srgbClr val="777777"/>
+            </a:solidFill>
+            <a:prstDash val="dash"/>
+          </a:ln>
+        </p:spPr>
+      </p:sp>
+      <p:sp>
+        <p:nvSpPr>
+          <p:cNvPr id="5" name="Text 3"/>
+          <p:cNvSpPr txBox="1"/>
+          <p:nvPr/>
+        </p:nvSpPr>
+        <p:spPr>
+          <a:xfrm>
+            <a:off x="457200" y="1325880"/>
+            <a:ext cx="1463040" cy="365760"/>
+          </a:xfrm>
+          <a:prstGeom prst="rect">
+            <a:avLst/>
+          </a:prstGeom>
+          <a:noFill/>
+          <a:ln/>
+        </p:spPr>
+        <p:txBody>
+          <a:bodyPr wrap="square" lIns="0" tIns="0" rIns="0" bIns="0" rtlCol="0" anchor="ctr"/>
+          <a:lstStyle/>
+          <a:p>
+            <a:pPr indent="0" marL="0">
+              <a:buNone/>
+            </a:pPr>
+            <a:r>
+              <a:rPr lang="en-US" sz="1500" b="1" dirty="0">
+                <a:solidFill>
+                  <a:srgbClr val="1F4E79"/>
+                </a:solidFill>
+                <a:latin typeface="Arial" pitchFamily="34" charset="0"/>
+                <a:ea typeface="Arial" pitchFamily="34" charset="-122"/>
+                <a:cs typeface="Arial" pitchFamily="34" charset="-120"/>
+              </a:rPr>
+              <a:t>Supported</a:t>
+            </a:r>
+            <a:endParaRPr lang="en-US" sz="1500" dirty="0"/>
+          </a:p>
+        </p:txBody>
+      </p:sp>
+      <p:sp>
+        <p:nvSpPr>
+          <p:cNvPr id="6" name="rule Supported"/>
+          <p:cNvSpPr/>
+          <p:nvPr/>
+        </p:nvSpPr>
+        <p:spPr>
+          <a:xfrm>
+            <a:off x="4265676" y="1508760"/>
+            <a:ext cx="1632204" cy="0"/>
+          </a:xfrm>
+          <a:prstGeom prst="line">
+            <a:avLst/>
+          </a:prstGeom>
+          <a:noFill/>
+          <a:ln w="38100">
+            <a:solidFill>
+              <a:srgbClr val="1F4E79"/>
+            </a:solidFill>
+            <a:prstDash val="solid"/>
+          </a:ln>
+        </p:spPr>
+      </p:sp>
+      <p:sp>
+        <p:nvSpPr>
+          <p:cNvPr id="7" name="Text 5"/>
+          <p:cNvSpPr txBox="1"/>
+          <p:nvPr/>
+        </p:nvSpPr>
+        <p:spPr>
+          <a:xfrm>
+            <a:off x="457200" y="2057400"/>
+            <a:ext cx="1463040" cy="365760"/>
+          </a:xfrm>
+          <a:prstGeom prst="rect">
+            <a:avLst/>
+          </a:prstGeom>
+          <a:noFill/>
+          <a:ln/>
+        </p:spPr>
+        <p:txBody>
+          <a:bodyPr wrap="square" lIns="0" tIns="0" rIns="0" bIns="0" rtlCol="0" anchor="ctr"/>
+          <a:lstStyle/>
+          <a:p>
+            <a:pPr indent="0" marL="0">
+              <a:buNone/>
+            </a:pPr>
+            <a:r>
+              <a:rPr lang="en-US" sz="1500" b="1" dirty="0">
+                <a:solidFill>
+                  <a:srgbClr val="C27C0E"/>
+                </a:solidFill>
+                <a:latin typeface="Arial" pitchFamily="34" charset="0"/>
+                <a:ea typeface="Arial" pitchFamily="34" charset="-122"/>
+                <a:cs typeface="Arial" pitchFamily="34" charset="-120"/>
+              </a:rPr>
+              <a:t>Refuted</a:t>
+            </a:r>
+            <a:endParaRPr lang="en-US" sz="1500" dirty="0"/>
+          </a:p>
+        </p:txBody>
+      </p:sp>
+      <p:sp>
+        <p:nvSpPr>
+          <p:cNvPr id="8" name="rule Refuted"/>
+          <p:cNvSpPr/>
+          <p:nvPr/>
+        </p:nvSpPr>
+        <p:spPr>
+          <a:xfrm>
+            <a:off x="6986016" y="2240280"/>
+            <a:ext cx="932688" cy="0"/>
+          </a:xfrm>
+          <a:prstGeom prst="line">
+            <a:avLst/>
+          </a:prstGeom>
+          <a:noFill/>
+          <a:ln w="38100">
+            <a:solidFill>
+              <a:srgbClr val="C27C0E"/>
+            </a:solidFill>
+            <a:prstDash val="solid"/>
+          </a:ln>
+        </p:spPr>
+      </p:sp>
+      <p:sp>
+        <p:nvSpPr>
+          <p:cNvPr id="9" name="Text 7"/>
+          <p:cNvSpPr txBox="1"/>
+          <p:nvPr/>
+        </p:nvSpPr>
+        <p:spPr>
+          <a:xfrm>
+            <a:off x="457200" y="2788920"/>
+            <a:ext cx="1463040" cy="365760"/>
+          </a:xfrm>
+          <a:prstGeom prst="rect">
+            <a:avLst/>
+          </a:prstGeom>
+          <a:noFill/>
+          <a:ln/>
+        </p:spPr>
+        <p:txBody>
+          <a:bodyPr wrap="square" lIns="0" tIns="0" rIns="0" bIns="0" rtlCol="0" anchor="ctr"/>
+          <a:lstStyle/>
+          <a:p>
+            <a:pPr indent="0" marL="0">
+              <a:buNone/>
+            </a:pPr>
+            <a:r>
+              <a:rPr lang="en-US" sz="1500" b="1" dirty="0">
+                <a:solidFill>
+                  <a:srgbClr val="777777"/>
+                </a:solidFill>
+                <a:latin typeface="Arial" pitchFamily="34" charset="0"/>
+                <a:ea typeface="Arial" pitchFamily="34" charset="-122"/>
+                <a:cs typeface="Arial" pitchFamily="34" charset="-120"/>
+              </a:rPr>
+              <a:t>Inconclusive</a:t>
+            </a:r>
+            <a:endParaRPr lang="en-US" sz="1500" dirty="0"/>
+          </a:p>
+        </p:txBody>
+      </p:sp>
+      <p:sp>
+        <p:nvSpPr>
+          <p:cNvPr id="10" name="rule Inconclusive"/>
+          <p:cNvSpPr/>
+          <p:nvPr/>
+        </p:nvSpPr>
+        <p:spPr>
+          <a:xfrm>
+            <a:off x="5431536" y="2971800"/>
+            <a:ext cx="2098548" cy="0"/>
+          </a:xfrm>
+          <a:prstGeom prst="line">
+            <a:avLst/>
+          </a:prstGeom>
+          <a:noFill/>
+          <a:ln w="38100">
+            <a:solidFill>
+              <a:srgbClr val="777777"/>
+            </a:solidFill>
+            <a:prstDash val="solid"/>
+          </a:ln>
+        </p:spPr>
+      </p:sp>
+      <p:sp>
+        <p:nvSpPr>
+          <p:cNvPr id="11" name="Text 9"/>
+          <p:cNvSpPr txBox="1"/>
+          <p:nvPr/>
+        </p:nvSpPr>
+        <p:spPr>
+          <a:xfrm>
+            <a:off x="1737360" y="3429000"/>
+            <a:ext cx="548640" cy="228600"/>
+          </a:xfrm>
+          <a:prstGeom prst="rect">
+            <a:avLst/>
+          </a:prstGeom>
+          <a:noFill/>
+          <a:ln/>
+        </p:spPr>
+        <p:txBody>
+          <a:bodyPr wrap="square" lIns="0" tIns="0" rIns="0" bIns="0" rtlCol="0" anchor="t"/>
+          <a:lstStyle/>
+          <a:p>
+            <a:pPr algn="ctr" indent="0" marL="0">
+              <a:buNone/>
+            </a:pPr>
+            <a:r>
+              <a:rPr lang="en-US" sz="1300" dirty="0">
+                <a:solidFill>
+                  <a:srgbClr val="777777"/>
+                </a:solidFill>
+                <a:latin typeface="Arial" pitchFamily="34" charset="0"/>
+                <a:ea typeface="Arial" pitchFamily="34" charset="-122"/>
+                <a:cs typeface="Arial" pitchFamily="34" charset="-120"/>
+              </a:rPr>
+              <a:t>-4</a:t>
+            </a:r>
+            <a:endParaRPr lang="en-US" sz="1300" dirty="0"/>
+          </a:p>
+        </p:txBody>
+      </p:sp>
+      <p:sp>
+        <p:nvSpPr>
+          <p:cNvPr id="12" name="Text 10"/>
+          <p:cNvSpPr txBox="1"/>
+          <p:nvPr/>
+        </p:nvSpPr>
+        <p:spPr>
+          <a:xfrm>
+            <a:off x="3291840" y="3429000"/>
+            <a:ext cx="548640" cy="228600"/>
+          </a:xfrm>
+          <a:prstGeom prst="rect">
+            <a:avLst/>
+          </a:prstGeom>
+          <a:noFill/>
+          <a:ln/>
+        </p:spPr>
+        <p:txBody>
+          <a:bodyPr wrap="square" lIns="0" tIns="0" rIns="0" bIns="0" rtlCol="0" anchor="t"/>
+          <a:lstStyle/>
+          <a:p>
+            <a:pPr algn="ctr" indent="0" marL="0">
+              <a:buNone/>
+            </a:pPr>
+            <a:r>
+              <a:rPr lang="en-US" sz="1300" dirty="0">
+                <a:solidFill>
+                  <a:srgbClr val="777777"/>
+                </a:solidFill>
+                <a:latin typeface="Arial" pitchFamily="34" charset="0"/>
+                <a:ea typeface="Arial" pitchFamily="34" charset="-122"/>
+                <a:cs typeface="Arial" pitchFamily="34" charset="-120"/>
+              </a:rPr>
+              <a:t>-2</a:t>
+            </a:r>
+            <a:endParaRPr lang="en-US" sz="1300" dirty="0"/>
+          </a:p>
+        </p:txBody>
+      </p:sp>
+      <p:sp>
+        <p:nvSpPr>
+          <p:cNvPr id="13" name="Text 11"/>
+          <p:cNvSpPr txBox="1"/>
+          <p:nvPr/>
+        </p:nvSpPr>
+        <p:spPr>
+          <a:xfrm>
+            <a:off x="4846320" y="3429000"/>
+            <a:ext cx="548640" cy="228600"/>
+          </a:xfrm>
+          <a:prstGeom prst="rect">
+            <a:avLst/>
+          </a:prstGeom>
+          <a:noFill/>
+          <a:ln/>
+        </p:spPr>
+        <p:txBody>
+          <a:bodyPr wrap="square" lIns="0" tIns="0" rIns="0" bIns="0" rtlCol="0" anchor="t"/>
+          <a:lstStyle/>
+          <a:p>
+            <a:pPr algn="ctr" indent="0" marL="0">
+              <a:buNone/>
+            </a:pPr>
+            <a:r>
+              <a:rPr lang="en-US" sz="1300" dirty="0">
+                <a:solidFill>
+                  <a:srgbClr val="777777"/>
+                </a:solidFill>
+                <a:latin typeface="Arial" pitchFamily="34" charset="0"/>
+                <a:ea typeface="Arial" pitchFamily="34" charset="-122"/>
+                <a:cs typeface="Arial" pitchFamily="34" charset="-120"/>
+              </a:rPr>
+              <a:t>0</a:t>
+            </a:r>
+            <a:endParaRPr lang="en-US" sz="1300" dirty="0"/>
+          </a:p>
+        </p:txBody>
+      </p:sp>
+      <p:sp>
+        <p:nvSpPr>
+          <p:cNvPr id="14" name="Text 12"/>
+          <p:cNvSpPr txBox="1"/>
+          <p:nvPr/>
+        </p:nvSpPr>
+        <p:spPr>
+          <a:xfrm>
+            <a:off x="6400800" y="3429000"/>
+            <a:ext cx="548640" cy="228600"/>
+          </a:xfrm>
+          <a:prstGeom prst="rect">
+            <a:avLst/>
+          </a:prstGeom>
+          <a:noFill/>
+          <a:ln/>
+        </p:spPr>
+        <p:txBody>
+          <a:bodyPr wrap="square" lIns="0" tIns="0" rIns="0" bIns="0" rtlCol="0" anchor="t"/>
+          <a:lstStyle/>
+          <a:p>
+            <a:pPr algn="ctr" indent="0" marL="0">
+              <a:buNone/>
+            </a:pPr>
+            <a:r>
+              <a:rPr lang="en-US" sz="1300" dirty="0">
+                <a:solidFill>
+                  <a:srgbClr val="777777"/>
+                </a:solidFill>
+                <a:latin typeface="Arial" pitchFamily="34" charset="0"/>
+                <a:ea typeface="Arial" pitchFamily="34" charset="-122"/>
+                <a:cs typeface="Arial" pitchFamily="34" charset="-120"/>
+              </a:rPr>
+              <a:t>+2</a:t>
+            </a:r>
+            <a:endParaRPr lang="en-US" sz="1300" dirty="0"/>
+          </a:p>
+        </p:txBody>
+      </p:sp>
+      <p:sp>
+        <p:nvSpPr>
+          <p:cNvPr id="15" name="Text 13"/>
+          <p:cNvSpPr txBox="1"/>
+          <p:nvPr/>
+        </p:nvSpPr>
+        <p:spPr>
+          <a:xfrm>
+            <a:off x="7955280" y="3429000"/>
+            <a:ext cx="548640" cy="228600"/>
+          </a:xfrm>
+          <a:prstGeom prst="rect">
+            <a:avLst/>
+          </a:prstGeom>
+          <a:noFill/>
+          <a:ln/>
+        </p:spPr>
+        <p:txBody>
+          <a:bodyPr wrap="square" lIns="0" tIns="0" rIns="0" bIns="0" rtlCol="0" anchor="t"/>
+          <a:lstStyle/>
+          <a:p>
+            <a:pPr algn="ctr" indent="0" marL="0">
+              <a:buNone/>
+            </a:pPr>
+            <a:r>
+              <a:rPr lang="en-US" sz="1300" dirty="0">
+                <a:solidFill>
+                  <a:srgbClr val="777777"/>
+                </a:solidFill>
+                <a:latin typeface="Arial" pitchFamily="34" charset="0"/>
+                <a:ea typeface="Arial" pitchFamily="34" charset="-122"/>
+                <a:cs typeface="Arial" pitchFamily="34" charset="-120"/>
+              </a:rPr>
+              <a:t>+4</a:t>
+            </a:r>
+            <a:endParaRPr lang="en-US" sz="1300" dirty="0"/>
+          </a:p>
+        </p:txBody>
+      </p:sp>
+      <p:sp>
+        <p:nvSpPr>
+          <p:cNvPr id="16" name="Text 14"/>
+          <p:cNvSpPr txBox="1"/>
+          <p:nvPr/>
+        </p:nvSpPr>
+        <p:spPr>
+          <a:xfrm>
+            <a:off x="457200" y="3794760"/>
+            <a:ext cx="8229600" cy="914400"/>
+          </a:xfrm>
+          <a:prstGeom prst="rect">
+            <a:avLst/>
+          </a:prstGeom>
+          <a:noFill/>
+          <a:ln/>
+        </p:spPr>
+        <p:txBody>
+          <a:bodyPr wrap="square" lIns="0" tIns="0" rIns="0" bIns="0" rtlCol="0" anchor="t"/>
+          <a:lstStyle/>
+          <a:p>
+            <a:pPr marL="342900" indent="-342900">
+              <a:spcAft>
+                <a:spcPts val="1000"/>
+              </a:spcAft>
+              <a:buSzPct val="100000"/>
+              <a:buChar char="•"/>
+            </a:pPr>
+            <a:r>
+              <a:rPr lang="en-US" sz="1700" dirty="0">
+                <a:solidFill>
+                  <a:schemeClr val="tx1"/>
+                </a:solidFill>
+                <a:latin typeface="Arial" pitchFamily="34" charset="0"/>
+                <a:ea typeface="Arial" pitchFamily="34" charset="-122"/>
+                <a:cs typeface="Arial" pitchFamily="34" charset="-120"/>
+              </a:rPr>
+              <a:t>Supported: whole 90% interval inside ±2 cp</a:t>
+            </a:r>
+            <a:endParaRPr lang="en-US" sz="1700" dirty="0"/>
+          </a:p>
+          <a:p>
+            <a:pPr marL="342900" indent="-342900">
+              <a:spcAft>
+                <a:spcPts val="1000"/>
+              </a:spcAft>
+              <a:buSzPct val="100000"/>
+              <a:buChar char="•"/>
+            </a:pPr>
+            <a:r>
+              <a:rPr lang="en-US" sz="1700" dirty="0">
+                <a:solidFill>
+                  <a:schemeClr val="tx1"/>
+                </a:solidFill>
+                <a:latin typeface="Arial" pitchFamily="34" charset="0"/>
+                <a:ea typeface="Arial" pitchFamily="34" charset="-122"/>
+                <a:cs typeface="Arial" pitchFamily="34" charset="-120"/>
+              </a:rPr>
+              <a:t>Refuted: 95% interval misses 0 and gap is at least 2 cp</a:t>
+            </a:r>
+            <a:endParaRPr lang="en-US" sz="1700" dirty="0"/>
+          </a:p>
+        </p:txBody>
+      </p:sp>
+      <p:sp>
+        <p:nvSpPr>
+          <p:cNvPr id="25" name="Slide Number Placeholder 0"/>
+          <p:cNvSpPr>
+            <a:spLocks noGrp="1"/>
+          </p:cNvSpPr>
+          <p:nvPr>
+            <p:ph type="sldNum" sz="quarter" idx="4294967295"/>
+          </p:nvPr>
+        </p:nvSpPr>
+        <p:spPr>
+          <a:xfrm>
+            <a:off x="8321040" y="4754880"/>
+            <a:ext cx="457200" cy="274320"/>
+          </a:xfrm>
+          <a:prstGeom prst="rect">
+            <a:avLst/>
+          </a:prstGeom>
+          <a:extLst>
+            <a:ext uri="{C572A759-6A51-4108-AA02-DFA0A04FC94B}">
+              <ma14:wrappingTextBoxFlag xmlns:ma14="http://schemas.microsoft.com/office/mac/drawingml/2011/main" val="0"/>
+            </a:ext>
+          </a:extLst>
+        </p:spPr>
+        <p:txBody>
+          <a:bodyPr/>
+          <a:lstStyle>
+            <a:lvl1pPr>
+              <a:defRPr sz="1100">
+                <a:solidFill>
+                  <a:srgbClr val="777777"/>
+                </a:solidFill>
+                <a:latin typeface="Arial"/>
+                <a:ea typeface="Arial"/>
+                <a:cs typeface="Arial"/>
+              </a:defRPr>
+            </a:lvl1pPr>
+          </a:lstStyle>
+          <a:p>
+            <a:pPr algn="l"/>
+            <a:fld id="{F7021451-1387-4CA6-816F-3879F97B5CBC}" type="slidenum">
+              <a:rPr b="0" lang="en-US"/>
+              <a:t>30</a:t>
+            </a:fld>
+            <a:endParaRPr lang="en-US"/>
+          </a:p>
+        </p:txBody>
+      </p:sp>
+    </p:spTree>
+  </p:cSld>
+  <p:clrMapOvr>
+    <a:masterClrMapping/>
+  </p:clrMapOvr>
+</p:sld>
+</file>
+
+<file path=ppt/slides/slide31.xml><?xml version="1.0" encoding="utf-8"?>
+<p:sld xmlns:a="http://schemas.openxmlformats.org/drawingml/2006/main" xmlns:r="http://schemas.openxmlformats.org/officeDocument/2006/relationships" xmlns:p="http://schemas.openxmlformats.org/presentationml/2006/main">
+  <p:cSld name="Slide 31">
+    <p:spTree>
+      <p:nvGrpSpPr>
+        <p:cNvPr id="1" name=""/>
+        <p:cNvGrpSpPr/>
+        <p:nvPr/>
+      </p:nvGrpSpPr>
+      <p:grpSpPr>
+        <a:xfrm>
+          <a:off x="0" y="0"/>
+          <a:ext cx="0" cy="0"/>
+          <a:chOff x="0" y="0"/>
+          <a:chExt cx="0" cy="0"/>
+        </a:xfrm>
+      </p:grpSpPr>
+      <p:sp>
+        <p:nvSpPr>
+          <p:cNvPr id="2" name="Text 0"/>
+          <p:cNvSpPr/>
+          <p:nvPr>
+            <p:ph idx="100" type="title" hasCustomPrompt="1"/>
+          </p:nvPr>
+        </p:nvSpPr>
+        <p:spPr>
+          <a:xfrm>
+            <a:off x="457200" y="228600"/>
+            <a:ext cx="8229600" cy="822960"/>
+          </a:xfrm>
+          <a:prstGeom prst="rect">
+            <a:avLst/>
+          </a:prstGeom>
+          <a:noFill/>
+          <a:ln/>
+        </p:spPr>
+        <p:txBody>
+          <a:bodyPr wrap="square" lIns="0" tIns="0" rIns="0" bIns="0" rtlCol="0" anchor="t"/>
+          <a:lstStyle/>
+          <a:p>
+            <a:pPr algn="l" indent="0" marL="0">
+              <a:buNone/>
+            </a:pPr>
+            <a:r>
+              <a:rPr lang="en-US" sz="2600" b="1" dirty="0">
+                <a:solidFill>
+                  <a:schemeClr val="tx2"/>
+                </a:solidFill>
+              </a:rPr>
               <a:t>About 10,700 pairs per group were needed, so we planned 13,000 to allow for losses</a:t>
             </a:r>
             <a:endParaRPr lang="en-US" sz="2600" dirty="0"/>
@@ -19673,7 +20286,7 @@
       </p:sp>
       <p:graphicFrame>
         <p:nvGraphicFramePr>
-          <p:cNvPr id="31" name="Table 0"/>
+          <p:cNvPr id="32" name="Table 0"/>
           <p:cNvGraphicFramePr>
             <a:graphicFrameLocks noGrp="1"/>
           </p:cNvGraphicFramePr>
@@ -20738,110 +21351,9 @@
             <a:pPr algn="l"/>
             <a:fld id="{F7021451-1387-4CA6-816F-3879F97B5CBC}" type="slidenum">
               <a:rPr b="0" lang="en-US"/>
-              <a:t>30</a:t>
+              <a:t>31</a:t>
             </a:fld>
             <a:endParaRPr lang="en-US"/>
-          </a:p>
-        </p:txBody>
-      </p:sp>
-    </p:spTree>
-  </p:cSld>
-  <p:clrMapOvr>
-    <a:masterClrMapping/>
-  </p:clrMapOvr>
-</p:sld>
-</file>
-
-<file path=ppt/slides/slide31.xml><?xml version="1.0" encoding="utf-8"?>
-<p:sld xmlns:a="http://schemas.openxmlformats.org/drawingml/2006/main" xmlns:r="http://schemas.openxmlformats.org/officeDocument/2006/relationships" xmlns:p="http://schemas.openxmlformats.org/presentationml/2006/main">
-  <p:cSld name="Slide 31">
-    <p:spTree>
-      <p:nvGrpSpPr>
-        <p:cNvPr id="1" name=""/>
-        <p:cNvGrpSpPr/>
-        <p:nvPr/>
-      </p:nvGrpSpPr>
-      <p:grpSpPr>
-        <a:xfrm>
-          <a:off x="0" y="0"/>
-          <a:ext cx="0" cy="0"/>
-          <a:chOff x="0" y="0"/>
-          <a:chExt cx="0" cy="0"/>
-        </a:xfrm>
-      </p:grpSpPr>
-      <p:sp>
-        <p:nvSpPr>
-          <p:cNvPr id="2" name="Text 0"/>
-          <p:cNvSpPr/>
-          <p:nvPr>
-            <p:ph idx="100" type="body" hasCustomPrompt="1"/>
-          </p:nvPr>
-        </p:nvSpPr>
-        <p:spPr>
-          <a:xfrm>
-            <a:off x="640080" y="1554480"/>
-            <a:ext cx="7863840" cy="457200"/>
-          </a:xfrm>
-          <a:prstGeom prst="rect">
-            <a:avLst/>
-          </a:prstGeom>
-          <a:noFill/>
-          <a:ln/>
-        </p:spPr>
-        <p:txBody>
-          <a:bodyPr wrap="square" lIns="0" tIns="0" rIns="0" bIns="0" rtlCol="0" anchor="t"/>
-          <a:lstStyle/>
-          <a:p>
-            <a:pPr algn="l" indent="0" marL="0">
-              <a:buNone/>
-            </a:pPr>
-            <a:r>
-              <a:rPr lang="en-US" sz="1800" dirty="0">
-                <a:solidFill>
-                  <a:schemeClr val="accent5"/>
-                </a:solidFill>
-              </a:rPr>
-              <a:t>Part 5</a:t>
-            </a:r>
-            <a:endParaRPr lang="en-US" sz="1800" dirty="0"/>
-          </a:p>
-        </p:txBody>
-      </p:sp>
-      <p:sp>
-        <p:nvSpPr>
-          <p:cNvPr id="3" name="Text 0"/>
-          <p:cNvSpPr/>
-          <p:nvPr>
-            <p:ph idx="101" type="title" hasCustomPrompt="1"/>
-          </p:nvPr>
-        </p:nvSpPr>
-        <p:spPr>
-          <a:xfrm>
-            <a:off x="640080" y="2011680"/>
-            <a:ext cx="7863840" cy="1280160"/>
-          </a:xfrm>
-          <a:prstGeom prst="rect">
-            <a:avLst/>
-          </a:prstGeom>
-          <a:noFill/>
-          <a:ln/>
-        </p:spPr>
-        <p:txBody>
-          <a:bodyPr wrap="square" lIns="0" tIns="0" rIns="0" bIns="0" rtlCol="0" anchor="t"/>
-          <a:lstStyle/>
-          <a:p>
-            <a:pPr algn="l" indent="0" marL="0">
-              <a:buNone/>
-            </a:pPr>
-            <a:r>
-              <a:rPr lang="en-US" sz="3600" b="1" dirty="0">
-                <a:solidFill>
-                  <a:schemeClr val="bg1"/>
-                </a:solidFill>
-              </a:rPr>
-              <a:t>Results</a:t>
-            </a:r>
-            <a:endParaRPr lang="en-US" sz="3600" dirty="0"/>
           </a:p>
         </p:txBody>
       </p:sp>
@@ -20875,13 +21387,13 @@
           <p:cNvPr id="2" name="Text 0"/>
           <p:cNvSpPr/>
           <p:nvPr>
-            <p:ph idx="100" type="title" hasCustomPrompt="1"/>
+            <p:ph idx="100" type="body" hasCustomPrompt="1"/>
           </p:nvPr>
         </p:nvSpPr>
         <p:spPr>
           <a:xfrm>
-            <a:off x="457200" y="228600"/>
-            <a:ext cx="8229600" cy="822960"/>
+            <a:off x="640080" y="1554480"/>
+            <a:ext cx="7863840" cy="457200"/>
           </a:xfrm>
           <a:prstGeom prst="rect">
             <a:avLst/>
@@ -20897,52 +21409,29 @@
               <a:buNone/>
             </a:pPr>
             <a:r>
-              <a:rPr lang="en-US" sz="2600" b="1" dirty="0">
-                <a:solidFill>
-                  <a:schemeClr val="tx2"/>
+              <a:rPr lang="en-US" sz="1800" dirty="0">
+                <a:solidFill>
+                  <a:schemeClr val="accent5"/>
                 </a:solidFill>
               </a:rPr>
-              <a:t>Lucky winners made 1.96 cp more mistakes per move in their next game (p = 0.003)</a:t>
-            </a:r>
-            <a:endParaRPr lang="en-US" sz="2600" dirty="0"/>
-          </a:p>
-        </p:txBody>
-      </p:sp>
-      <p:sp>
-        <p:nvSpPr>
-          <p:cNvPr id="3" name="zone"/>
+              <a:t>Part 5</a:t>
+            </a:r>
+            <a:endParaRPr lang="en-US" sz="1800" dirty="0"/>
+          </a:p>
+        </p:txBody>
+      </p:sp>
+      <p:sp>
+        <p:nvSpPr>
+          <p:cNvPr id="3" name="Text 0"/>
           <p:cNvSpPr/>
-          <p:nvPr/>
-        </p:nvSpPr>
-        <p:spPr>
-          <a:xfrm>
-            <a:off x="3063240" y="1371600"/>
-            <a:ext cx="1371600" cy="1645920"/>
-          </a:xfrm>
-          <a:prstGeom prst="rect">
-            <a:avLst/>
-          </a:prstGeom>
-          <a:solidFill>
-            <a:srgbClr val="EBF3FA"/>
-          </a:solidFill>
-          <a:ln w="12700">
-            <a:solidFill>
-              <a:srgbClr val="EBF3FA"/>
-            </a:solidFill>
-            <a:prstDash val="solid"/>
-          </a:ln>
-        </p:spPr>
-      </p:sp>
-      <p:sp>
-        <p:nvSpPr>
-          <p:cNvPr id="4" name="Text 2"/>
-          <p:cNvSpPr txBox="1"/>
-          <p:nvPr/>
-        </p:nvSpPr>
-        <p:spPr>
-          <a:xfrm>
-            <a:off x="2606040" y="3364992"/>
-            <a:ext cx="2286000" cy="256032"/>
+          <p:nvPr>
+            <p:ph idx="101" type="title" hasCustomPrompt="1"/>
+          </p:nvPr>
+        </p:nvSpPr>
+        <p:spPr>
+          <a:xfrm>
+            <a:off x="640080" y="2011680"/>
+            <a:ext cx="7863840" cy="1280160"/>
           </a:xfrm>
           <a:prstGeom prst="rect">
             <a:avLst/>
@@ -20954,764 +21443,18 @@
           <a:bodyPr wrap="square" lIns="0" tIns="0" rIns="0" bIns="0" rtlCol="0" anchor="t"/>
           <a:lstStyle/>
           <a:p>
-            <a:pPr algn="ctr" indent="0" marL="0">
+            <a:pPr algn="l" indent="0" marL="0">
               <a:buNone/>
             </a:pPr>
             <a:r>
-              <a:rPr lang="en-US" sz="1300" dirty="0">
-                <a:solidFill>
-                  <a:srgbClr val="2E75B6"/>
-                </a:solidFill>
-                <a:latin typeface="Arial" pitchFamily="34" charset="0"/>
-                <a:ea typeface="Arial" pitchFamily="34" charset="-122"/>
-                <a:cs typeface="Arial" pitchFamily="34" charset="-120"/>
+              <a:rPr lang="en-US" sz="3600" b="1" dirty="0">
+                <a:solidFill>
+                  <a:schemeClr val="bg1"/>
+                </a:solidFill>
               </a:rPr>
-              <a:t>"no real difference" zone: ±2 cp</a:t>
-            </a:r>
-            <a:endParaRPr lang="en-US" sz="1300" dirty="0"/>
-          </a:p>
-        </p:txBody>
-      </p:sp>
-      <p:sp>
-        <p:nvSpPr>
-          <p:cNvPr id="5" name="zero"/>
-          <p:cNvSpPr/>
-          <p:nvPr/>
-        </p:nvSpPr>
-        <p:spPr>
-          <a:xfrm>
-            <a:off x="3749040" y="1325880"/>
-            <a:ext cx="0" cy="1737360"/>
-          </a:xfrm>
-          <a:prstGeom prst="line">
-            <a:avLst/>
-          </a:prstGeom>
-          <a:noFill/>
-          <a:ln w="12700">
-            <a:solidFill>
-              <a:srgbClr val="777777"/>
-            </a:solidFill>
-            <a:prstDash val="dash"/>
-          </a:ln>
-        </p:spPr>
-      </p:sp>
-      <p:sp>
-        <p:nvSpPr>
-          <p:cNvPr id="6" name="Text 4"/>
-          <p:cNvSpPr txBox="1"/>
-          <p:nvPr/>
-        </p:nvSpPr>
-        <p:spPr>
-          <a:xfrm>
-            <a:off x="457200" y="1554480"/>
-            <a:ext cx="1783080" cy="457200"/>
-          </a:xfrm>
-          <a:prstGeom prst="rect">
-            <a:avLst/>
-          </a:prstGeom>
-          <a:noFill/>
-          <a:ln/>
-        </p:spPr>
-        <p:txBody>
-          <a:bodyPr wrap="square" lIns="0" tIns="0" rIns="0" bIns="0" rtlCol="0" anchor="ctr"/>
-          <a:lstStyle/>
-          <a:p>
-            <a:pPr indent="0" marL="0">
-              <a:buNone/>
-            </a:pPr>
-            <a:r>
-              <a:rPr lang="en-US" sz="1400" b="1" dirty="0">
-                <a:solidFill>
-                  <a:srgbClr val="C27C0E"/>
-                </a:solidFill>
-                <a:latin typeface="Arial" pitchFamily="34" charset="0"/>
-                <a:ea typeface="Arial" pitchFamily="34" charset="-122"/>
-                <a:cs typeface="Arial" pitchFamily="34" charset="-120"/>
-              </a:rPr>
-              <a:t>Lucky minus deserved, 90% interval</a:t>
-            </a:r>
-            <a:endParaRPr lang="en-US" sz="1400" dirty="0"/>
-          </a:p>
-        </p:txBody>
-      </p:sp>
-      <p:sp>
-        <p:nvSpPr>
-          <p:cNvPr id="7" name="ci 0"/>
-          <p:cNvSpPr/>
-          <p:nvPr/>
-        </p:nvSpPr>
-        <p:spPr>
-          <a:xfrm>
-            <a:off x="4047363" y="1783080"/>
-            <a:ext cx="750951" cy="0"/>
-          </a:xfrm>
-          <a:prstGeom prst="line">
-            <a:avLst/>
-          </a:prstGeom>
-          <a:noFill/>
-          <a:ln w="31750">
-            <a:solidFill>
-              <a:srgbClr val="C27C0E"/>
-            </a:solidFill>
-            <a:prstDash val="solid"/>
-          </a:ln>
-        </p:spPr>
-      </p:sp>
-      <p:sp>
-        <p:nvSpPr>
-          <p:cNvPr id="8" name="est 0"/>
-          <p:cNvSpPr/>
-          <p:nvPr/>
-        </p:nvSpPr>
-        <p:spPr>
-          <a:xfrm>
-            <a:off x="4347972" y="1709928"/>
-            <a:ext cx="146304" cy="146304"/>
-          </a:xfrm>
-          <a:prstGeom prst="ellipse">
-            <a:avLst/>
-          </a:prstGeom>
-          <a:solidFill>
-            <a:srgbClr val="C27C0E"/>
-          </a:solidFill>
-          <a:ln w="12700">
-            <a:solidFill>
-              <a:srgbClr val="C27C0E"/>
-            </a:solidFill>
-            <a:prstDash val="solid"/>
-          </a:ln>
-        </p:spPr>
-      </p:sp>
-      <p:sp>
-        <p:nvSpPr>
-          <p:cNvPr id="9" name="Text 7"/>
-          <p:cNvSpPr txBox="1"/>
-          <p:nvPr/>
-        </p:nvSpPr>
-        <p:spPr>
-          <a:xfrm>
-            <a:off x="4871466" y="1655064"/>
-            <a:ext cx="548640" cy="256032"/>
-          </a:xfrm>
-          <a:prstGeom prst="rect">
-            <a:avLst/>
-          </a:prstGeom>
-          <a:noFill/>
-          <a:ln/>
-        </p:spPr>
-        <p:txBody>
-          <a:bodyPr wrap="square" lIns="0" tIns="0" rIns="0" bIns="0" rtlCol="0" anchor="ctr"/>
-          <a:lstStyle/>
-          <a:p>
-            <a:pPr indent="0" marL="0">
-              <a:buNone/>
-            </a:pPr>
-            <a:r>
-              <a:rPr lang="en-US" sz="1300" b="1" dirty="0">
-                <a:solidFill>
-                  <a:srgbClr val="C27C0E"/>
-                </a:solidFill>
-                <a:latin typeface="Arial" pitchFamily="34" charset="0"/>
-                <a:ea typeface="Arial" pitchFamily="34" charset="-122"/>
-                <a:cs typeface="Arial" pitchFamily="34" charset="-120"/>
-              </a:rPr>
-              <a:t>+1.96</a:t>
-            </a:r>
-            <a:endParaRPr lang="en-US" sz="1300" dirty="0"/>
-          </a:p>
-        </p:txBody>
-      </p:sp>
-      <p:sp>
-        <p:nvSpPr>
-          <p:cNvPr id="10" name="Text 8"/>
-          <p:cNvSpPr txBox="1"/>
-          <p:nvPr/>
-        </p:nvSpPr>
-        <p:spPr>
-          <a:xfrm>
-            <a:off x="457200" y="2377440"/>
-            <a:ext cx="1783080" cy="457200"/>
-          </a:xfrm>
-          <a:prstGeom prst="rect">
-            <a:avLst/>
-          </a:prstGeom>
-          <a:noFill/>
-          <a:ln/>
-        </p:spPr>
-        <p:txBody>
-          <a:bodyPr wrap="square" lIns="0" tIns="0" rIns="0" bIns="0" rtlCol="0" anchor="ctr"/>
-          <a:lstStyle/>
-          <a:p>
-            <a:pPr indent="0" marL="0">
-              <a:buNone/>
-            </a:pPr>
-            <a:r>
-              <a:rPr lang="en-US" sz="1400" dirty="0">
-                <a:solidFill>
-                  <a:schemeClr val="tx1"/>
-                </a:solidFill>
-                <a:latin typeface="Arial" pitchFamily="34" charset="0"/>
-                <a:ea typeface="Arial" pitchFamily="34" charset="-122"/>
-                <a:cs typeface="Arial" pitchFamily="34" charset="-120"/>
-              </a:rPr>
-              <a:t>Lucky minus deserved, 95% interval</a:t>
-            </a:r>
-            <a:endParaRPr lang="en-US" sz="1400" dirty="0"/>
-          </a:p>
-        </p:txBody>
-      </p:sp>
-      <p:sp>
-        <p:nvSpPr>
-          <p:cNvPr id="11" name="ci 1"/>
-          <p:cNvSpPr/>
-          <p:nvPr/>
-        </p:nvSpPr>
-        <p:spPr>
-          <a:xfrm>
-            <a:off x="3975354" y="2606040"/>
-            <a:ext cx="894969" cy="0"/>
-          </a:xfrm>
-          <a:prstGeom prst="line">
-            <a:avLst/>
-          </a:prstGeom>
-          <a:noFill/>
-          <a:ln w="31750">
-            <a:solidFill>
-              <a:srgbClr val="1F4E79"/>
-            </a:solidFill>
-            <a:prstDash val="solid"/>
-          </a:ln>
-        </p:spPr>
-      </p:sp>
-      <p:sp>
-        <p:nvSpPr>
-          <p:cNvPr id="12" name="est 1"/>
-          <p:cNvSpPr/>
-          <p:nvPr/>
-        </p:nvSpPr>
-        <p:spPr>
-          <a:xfrm>
-            <a:off x="4347972" y="2532888"/>
-            <a:ext cx="146304" cy="146304"/>
-          </a:xfrm>
-          <a:prstGeom prst="ellipse">
-            <a:avLst/>
-          </a:prstGeom>
-          <a:solidFill>
-            <a:srgbClr val="1F4E79"/>
-          </a:solidFill>
-          <a:ln w="12700">
-            <a:solidFill>
-              <a:srgbClr val="1F4E79"/>
-            </a:solidFill>
-            <a:prstDash val="solid"/>
-          </a:ln>
-        </p:spPr>
-      </p:sp>
-      <p:sp>
-        <p:nvSpPr>
-          <p:cNvPr id="13" name="Text 11"/>
-          <p:cNvSpPr txBox="1"/>
-          <p:nvPr/>
-        </p:nvSpPr>
-        <p:spPr>
-          <a:xfrm>
-            <a:off x="4943475" y="2478024"/>
-            <a:ext cx="548640" cy="256032"/>
-          </a:xfrm>
-          <a:prstGeom prst="rect">
-            <a:avLst/>
-          </a:prstGeom>
-          <a:noFill/>
-          <a:ln/>
-        </p:spPr>
-        <p:txBody>
-          <a:bodyPr wrap="square" lIns="0" tIns="0" rIns="0" bIns="0" rtlCol="0" anchor="ctr"/>
-          <a:lstStyle/>
-          <a:p>
-            <a:pPr indent="0" marL="0">
-              <a:buNone/>
-            </a:pPr>
-            <a:r>
-              <a:rPr lang="en-US" sz="1300" b="1" dirty="0">
-                <a:solidFill>
-                  <a:srgbClr val="1F4E79"/>
-                </a:solidFill>
-                <a:latin typeface="Arial" pitchFamily="34" charset="0"/>
-                <a:ea typeface="Arial" pitchFamily="34" charset="-122"/>
-                <a:cs typeface="Arial" pitchFamily="34" charset="-120"/>
-              </a:rPr>
-              <a:t>+1.96</a:t>
-            </a:r>
-            <a:endParaRPr lang="en-US" sz="1300" dirty="0"/>
-          </a:p>
-        </p:txBody>
-      </p:sp>
-      <p:sp>
-        <p:nvSpPr>
-          <p:cNvPr id="14" name="axis"/>
-          <p:cNvSpPr/>
-          <p:nvPr/>
-        </p:nvSpPr>
-        <p:spPr>
-          <a:xfrm>
-            <a:off x="2377440" y="3063240"/>
-            <a:ext cx="2743200" cy="0"/>
-          </a:xfrm>
-          <a:prstGeom prst="line">
-            <a:avLst/>
-          </a:prstGeom>
-          <a:noFill/>
-          <a:ln w="12700">
-            <a:solidFill>
-              <a:srgbClr val="777777"/>
-            </a:solidFill>
-            <a:prstDash val="solid"/>
-          </a:ln>
-        </p:spPr>
-      </p:sp>
-      <p:sp>
-        <p:nvSpPr>
-          <p:cNvPr id="15" name="Text 13"/>
-          <p:cNvSpPr txBox="1"/>
-          <p:nvPr/>
-        </p:nvSpPr>
-        <p:spPr>
-          <a:xfrm>
-            <a:off x="2103120" y="3099816"/>
-            <a:ext cx="548640" cy="228600"/>
-          </a:xfrm>
-          <a:prstGeom prst="rect">
-            <a:avLst/>
-          </a:prstGeom>
-          <a:noFill/>
-          <a:ln/>
-        </p:spPr>
-        <p:txBody>
-          <a:bodyPr wrap="square" lIns="0" tIns="0" rIns="0" bIns="0" rtlCol="0" anchor="t"/>
-          <a:lstStyle/>
-          <a:p>
-            <a:pPr algn="ctr" indent="0" marL="0">
-              <a:buNone/>
-            </a:pPr>
-            <a:r>
-              <a:rPr lang="en-US" sz="1300" dirty="0">
-                <a:solidFill>
-                  <a:srgbClr val="777777"/>
-                </a:solidFill>
-                <a:latin typeface="Arial" pitchFamily="34" charset="0"/>
-                <a:ea typeface="Arial" pitchFamily="34" charset="-122"/>
-                <a:cs typeface="Arial" pitchFamily="34" charset="-120"/>
-              </a:rPr>
-              <a:t>-4</a:t>
-            </a:r>
-            <a:endParaRPr lang="en-US" sz="1300" dirty="0"/>
-          </a:p>
-        </p:txBody>
-      </p:sp>
-      <p:sp>
-        <p:nvSpPr>
-          <p:cNvPr id="16" name="Text 14"/>
-          <p:cNvSpPr txBox="1"/>
-          <p:nvPr/>
-        </p:nvSpPr>
-        <p:spPr>
-          <a:xfrm>
-            <a:off x="2788920" y="3099816"/>
-            <a:ext cx="548640" cy="228600"/>
-          </a:xfrm>
-          <a:prstGeom prst="rect">
-            <a:avLst/>
-          </a:prstGeom>
-          <a:noFill/>
-          <a:ln/>
-        </p:spPr>
-        <p:txBody>
-          <a:bodyPr wrap="square" lIns="0" tIns="0" rIns="0" bIns="0" rtlCol="0" anchor="t"/>
-          <a:lstStyle/>
-          <a:p>
-            <a:pPr algn="ctr" indent="0" marL="0">
-              <a:buNone/>
-            </a:pPr>
-            <a:r>
-              <a:rPr lang="en-US" sz="1300" dirty="0">
-                <a:solidFill>
-                  <a:srgbClr val="777777"/>
-                </a:solidFill>
-                <a:latin typeface="Arial" pitchFamily="34" charset="0"/>
-                <a:ea typeface="Arial" pitchFamily="34" charset="-122"/>
-                <a:cs typeface="Arial" pitchFamily="34" charset="-120"/>
-              </a:rPr>
-              <a:t>-2</a:t>
-            </a:r>
-            <a:endParaRPr lang="en-US" sz="1300" dirty="0"/>
-          </a:p>
-        </p:txBody>
-      </p:sp>
-      <p:sp>
-        <p:nvSpPr>
-          <p:cNvPr id="17" name="Text 15"/>
-          <p:cNvSpPr txBox="1"/>
-          <p:nvPr/>
-        </p:nvSpPr>
-        <p:spPr>
-          <a:xfrm>
-            <a:off x="3474720" y="3099816"/>
-            <a:ext cx="548640" cy="228600"/>
-          </a:xfrm>
-          <a:prstGeom prst="rect">
-            <a:avLst/>
-          </a:prstGeom>
-          <a:noFill/>
-          <a:ln/>
-        </p:spPr>
-        <p:txBody>
-          <a:bodyPr wrap="square" lIns="0" tIns="0" rIns="0" bIns="0" rtlCol="0" anchor="t"/>
-          <a:lstStyle/>
-          <a:p>
-            <a:pPr algn="ctr" indent="0" marL="0">
-              <a:buNone/>
-            </a:pPr>
-            <a:r>
-              <a:rPr lang="en-US" sz="1300" dirty="0">
-                <a:solidFill>
-                  <a:srgbClr val="777777"/>
-                </a:solidFill>
-                <a:latin typeface="Arial" pitchFamily="34" charset="0"/>
-                <a:ea typeface="Arial" pitchFamily="34" charset="-122"/>
-                <a:cs typeface="Arial" pitchFamily="34" charset="-120"/>
-              </a:rPr>
-              <a:t>0</a:t>
-            </a:r>
-            <a:endParaRPr lang="en-US" sz="1300" dirty="0"/>
-          </a:p>
-        </p:txBody>
-      </p:sp>
-      <p:sp>
-        <p:nvSpPr>
-          <p:cNvPr id="18" name="Text 16"/>
-          <p:cNvSpPr txBox="1"/>
-          <p:nvPr/>
-        </p:nvSpPr>
-        <p:spPr>
-          <a:xfrm>
-            <a:off x="4160520" y="3099816"/>
-            <a:ext cx="548640" cy="228600"/>
-          </a:xfrm>
-          <a:prstGeom prst="rect">
-            <a:avLst/>
-          </a:prstGeom>
-          <a:noFill/>
-          <a:ln/>
-        </p:spPr>
-        <p:txBody>
-          <a:bodyPr wrap="square" lIns="0" tIns="0" rIns="0" bIns="0" rtlCol="0" anchor="t"/>
-          <a:lstStyle/>
-          <a:p>
-            <a:pPr algn="ctr" indent="0" marL="0">
-              <a:buNone/>
-            </a:pPr>
-            <a:r>
-              <a:rPr lang="en-US" sz="1300" dirty="0">
-                <a:solidFill>
-                  <a:srgbClr val="777777"/>
-                </a:solidFill>
-                <a:latin typeface="Arial" pitchFamily="34" charset="0"/>
-                <a:ea typeface="Arial" pitchFamily="34" charset="-122"/>
-                <a:cs typeface="Arial" pitchFamily="34" charset="-120"/>
-              </a:rPr>
-              <a:t>+2</a:t>
-            </a:r>
-            <a:endParaRPr lang="en-US" sz="1300" dirty="0"/>
-          </a:p>
-        </p:txBody>
-      </p:sp>
-      <p:sp>
-        <p:nvSpPr>
-          <p:cNvPr id="19" name="Text 17"/>
-          <p:cNvSpPr txBox="1"/>
-          <p:nvPr/>
-        </p:nvSpPr>
-        <p:spPr>
-          <a:xfrm>
-            <a:off x="4846320" y="3099816"/>
-            <a:ext cx="548640" cy="228600"/>
-          </a:xfrm>
-          <a:prstGeom prst="rect">
-            <a:avLst/>
-          </a:prstGeom>
-          <a:noFill/>
-          <a:ln/>
-        </p:spPr>
-        <p:txBody>
-          <a:bodyPr wrap="square" lIns="0" tIns="0" rIns="0" bIns="0" rtlCol="0" anchor="t"/>
-          <a:lstStyle/>
-          <a:p>
-            <a:pPr algn="ctr" indent="0" marL="0">
-              <a:buNone/>
-            </a:pPr>
-            <a:r>
-              <a:rPr lang="en-US" sz="1300" dirty="0">
-                <a:solidFill>
-                  <a:srgbClr val="777777"/>
-                </a:solidFill>
-                <a:latin typeface="Arial" pitchFamily="34" charset="0"/>
-                <a:ea typeface="Arial" pitchFamily="34" charset="-122"/>
-                <a:cs typeface="Arial" pitchFamily="34" charset="-120"/>
-              </a:rPr>
-              <a:t>+4</a:t>
-            </a:r>
-            <a:endParaRPr lang="en-US" sz="1300" dirty="0"/>
-          </a:p>
-        </p:txBody>
-      </p:sp>
-      <p:sp>
-        <p:nvSpPr>
-          <p:cNvPr id="20" name="Text 18"/>
-          <p:cNvSpPr txBox="1"/>
-          <p:nvPr/>
-        </p:nvSpPr>
-        <p:spPr>
-          <a:xfrm>
-            <a:off x="2377440" y="3666744"/>
-            <a:ext cx="2743200" cy="256032"/>
-          </a:xfrm>
-          <a:prstGeom prst="rect">
-            <a:avLst/>
-          </a:prstGeom>
-          <a:noFill/>
-          <a:ln/>
-        </p:spPr>
-        <p:txBody>
-          <a:bodyPr wrap="square" lIns="0" tIns="0" rIns="0" bIns="0" rtlCol="0" anchor="t"/>
-          <a:lstStyle/>
-          <a:p>
-            <a:pPr algn="ctr" indent="0" marL="0">
-              <a:buNone/>
-            </a:pPr>
-            <a:r>
-              <a:rPr lang="en-US" sz="1300" dirty="0">
-                <a:solidFill>
-                  <a:srgbClr val="777777"/>
-                </a:solidFill>
-                <a:latin typeface="Arial" pitchFamily="34" charset="0"/>
-                <a:ea typeface="Arial" pitchFamily="34" charset="-122"/>
-                <a:cs typeface="Arial" pitchFamily="34" charset="-120"/>
-              </a:rPr>
-              <a:t>Difference in next-game ACPL, cp</a:t>
-            </a:r>
-            <a:endParaRPr lang="en-US" sz="1300" dirty="0"/>
-          </a:p>
-        </p:txBody>
-      </p:sp>
-      <p:sp>
-        <p:nvSpPr>
-          <p:cNvPr id="21" name="Text 19"/>
-          <p:cNvSpPr txBox="1"/>
-          <p:nvPr/>
-        </p:nvSpPr>
-        <p:spPr>
-          <a:xfrm>
-            <a:off x="5669280" y="1234440"/>
-            <a:ext cx="3017520" cy="365760"/>
-          </a:xfrm>
-          <a:prstGeom prst="rect">
-            <a:avLst/>
-          </a:prstGeom>
-          <a:noFill/>
-          <a:ln/>
-        </p:spPr>
-        <p:txBody>
-          <a:bodyPr wrap="square" lIns="0" tIns="0" rIns="0" bIns="0" rtlCol="0" anchor="t"/>
-          <a:lstStyle/>
-          <a:p>
-            <a:pPr indent="0" marL="0">
-              <a:buNone/>
-            </a:pPr>
-            <a:r>
-              <a:rPr lang="en-US" sz="2000" b="1" dirty="0">
-                <a:solidFill>
-                  <a:srgbClr val="2E75B6"/>
-                </a:solidFill>
-                <a:latin typeface="Arial" pitchFamily="34" charset="0"/>
-                <a:ea typeface="Arial" pitchFamily="34" charset="-122"/>
-                <a:cs typeface="Arial" pitchFamily="34" charset="-120"/>
-              </a:rPr>
-              <a:t>What it means</a:t>
-            </a:r>
-            <a:endParaRPr lang="en-US" sz="2000" dirty="0"/>
-          </a:p>
-        </p:txBody>
-      </p:sp>
-      <p:sp>
-        <p:nvSpPr>
-          <p:cNvPr id="22" name="Text 20"/>
-          <p:cNvSpPr txBox="1"/>
-          <p:nvPr/>
-        </p:nvSpPr>
-        <p:spPr>
-          <a:xfrm>
-            <a:off x="5669280" y="1691640"/>
-            <a:ext cx="3017520" cy="2743200"/>
-          </a:xfrm>
-          <a:prstGeom prst="rect">
-            <a:avLst/>
-          </a:prstGeom>
-          <a:noFill/>
-          <a:ln/>
-        </p:spPr>
-        <p:txBody>
-          <a:bodyPr wrap="square" lIns="0" tIns="0" rIns="0" bIns="0" rtlCol="0" anchor="t"/>
-          <a:lstStyle/>
-          <a:p>
-            <a:pPr marL="342900" indent="-342900">
-              <a:spcAft>
-                <a:spcPts val="1000"/>
-              </a:spcAft>
-              <a:buSzPct val="100000"/>
-              <a:buChar char="•"/>
-            </a:pPr>
-            <a:r>
-              <a:rPr lang="en-US" sz="2000" dirty="0">
-                <a:solidFill>
-                  <a:schemeClr val="tx1"/>
-                </a:solidFill>
-                <a:latin typeface="Arial" pitchFamily="34" charset="0"/>
-                <a:ea typeface="Arial" pitchFamily="34" charset="-122"/>
-                <a:cs typeface="Arial" pitchFamily="34" charset="-120"/>
-              </a:rPr>
-              <a:t>Not chance: p = 0.003</a:t>
-            </a:r>
-            <a:endParaRPr lang="en-US" sz="2000" dirty="0"/>
-          </a:p>
-          <a:p>
-            <a:pPr marL="342900" indent="-342900">
-              <a:spcAft>
-                <a:spcPts val="1000"/>
-              </a:spcAft>
-              <a:buSzPct val="100000"/>
-              <a:buChar char="•"/>
-            </a:pPr>
-            <a:r>
-              <a:rPr lang="en-US" sz="2000" dirty="0">
-                <a:solidFill>
-                  <a:schemeClr val="tx1"/>
-                </a:solidFill>
-                <a:latin typeface="Arial" pitchFamily="34" charset="0"/>
-                <a:ea typeface="Arial" pitchFamily="34" charset="-122"/>
-                <a:cs typeface="Arial" pitchFamily="34" charset="-120"/>
-              </a:rPr>
-              <a:t>Not equal: it leaves the ±2 zone</a:t>
-            </a:r>
-            <a:endParaRPr lang="en-US" sz="2000" dirty="0"/>
-          </a:p>
-          <a:p>
-            <a:pPr marL="342900" indent="-342900">
-              <a:spcAft>
-                <a:spcPts val="1000"/>
-              </a:spcAft>
-              <a:buSzPct val="100000"/>
-              <a:buChar char="•"/>
-            </a:pPr>
-            <a:r>
-              <a:rPr lang="en-US" sz="2000" dirty="0">
-                <a:solidFill>
-                  <a:schemeClr val="tx1"/>
-                </a:solidFill>
-                <a:latin typeface="Arial" pitchFamily="34" charset="0"/>
-                <a:ea typeface="Arial" pitchFamily="34" charset="-122"/>
-                <a:cs typeface="Arial" pitchFamily="34" charset="-120"/>
-              </a:rPr>
-              <a:t>Official verdict: inconclusive, as 1.96 &lt; 2</a:t>
-            </a:r>
-            <a:endParaRPr lang="en-US" sz="2000" dirty="0"/>
-          </a:p>
-        </p:txBody>
-      </p:sp>
-      <p:sp>
-        <p:nvSpPr>
-          <p:cNvPr id="23" name="Text 21"/>
-          <p:cNvSpPr txBox="1"/>
-          <p:nvPr/>
-        </p:nvSpPr>
-        <p:spPr>
-          <a:xfrm>
-            <a:off x="457200" y="4709160"/>
-            <a:ext cx="7680960" cy="274320"/>
-          </a:xfrm>
-          <a:prstGeom prst="rect">
-            <a:avLst/>
-          </a:prstGeom>
-          <a:noFill/>
-          <a:ln/>
-        </p:spPr>
-        <p:txBody>
-          <a:bodyPr wrap="square" lIns="0" tIns="0" rIns="0" bIns="0" rtlCol="0" anchor="ctr"/>
-          <a:lstStyle/>
-          <a:p>
-            <a:pPr indent="0" marL="0">
-              <a:buNone/>
-            </a:pPr>
-            <a:r>
-              <a:rPr lang="en-US" sz="1200" dirty="0">
-                <a:solidFill>
-                  <a:srgbClr val="777777"/>
-                </a:solidFill>
-                <a:latin typeface="Arial" pitchFamily="34" charset="0"/>
-                <a:ea typeface="Arial" pitchFamily="34" charset="-122"/>
-                <a:cs typeface="Arial" pitchFamily="34" charset="-120"/>
-              </a:rPr>
-              <a:t>Raw means: 74.38 cp after a lucky win, 72.28 after a deserved win; 12,033 and 11,962 pairs</a:t>
-            </a:r>
-            <a:endParaRPr lang="en-US" sz="1200" dirty="0"/>
-          </a:p>
-        </p:txBody>
-      </p:sp>
-      <p:sp>
-        <p:nvSpPr>
-          <p:cNvPr id="25" name="Slide Number Placeholder 0"/>
-          <p:cNvSpPr>
-            <a:spLocks noGrp="1"/>
-          </p:cNvSpPr>
-          <p:nvPr>
-            <p:ph type="sldNum" sz="quarter" idx="4294967295"/>
-          </p:nvPr>
-        </p:nvSpPr>
-        <p:spPr>
-          <a:xfrm>
-            <a:off x="8321040" y="4754880"/>
-            <a:ext cx="457200" cy="274320"/>
-          </a:xfrm>
-          <a:prstGeom prst="rect">
-            <a:avLst/>
-          </a:prstGeom>
-          <a:extLst>
-            <a:ext uri="{C572A759-6A51-4108-AA02-DFA0A04FC94B}">
-              <ma14:wrappingTextBoxFlag xmlns:ma14="http://schemas.microsoft.com/office/mac/drawingml/2011/main" val="0"/>
-            </a:ext>
-          </a:extLst>
-        </p:spPr>
-        <p:txBody>
-          <a:bodyPr/>
-          <a:lstStyle>
-            <a:lvl1pPr>
-              <a:defRPr sz="1100">
-                <a:solidFill>
-                  <a:srgbClr val="777777"/>
-                </a:solidFill>
-                <a:latin typeface="Arial"/>
-                <a:ea typeface="Arial"/>
-                <a:cs typeface="Arial"/>
-              </a:defRPr>
-            </a:lvl1pPr>
-          </a:lstStyle>
-          <a:p>
-            <a:pPr algn="l"/>
-            <a:fld id="{F7021451-1387-4CA6-816F-3879F97B5CBC}" type="slidenum">
-              <a:rPr b="0" lang="en-US"/>
-              <a:t>32</a:t>
-            </a:fld>
-            <a:endParaRPr lang="en-US"/>
+              <a:t>Results</a:t>
+            </a:r>
+            <a:endParaRPr lang="en-US" sz="3600" dirty="0"/>
           </a:p>
         </p:txBody>
       </p:sp>
@@ -21772,7 +21515,7 @@
                   <a:schemeClr val="tx2"/>
                 </a:solidFill>
               </a:rPr>
-              <a:t>Every check gives the same answer: lucky winners play 1.8 to 2.3 cp worse</a:t>
+              <a:t>Lucky winners made 1.96 cp more mistakes per move in their next game (p = 0.003)</a:t>
             </a:r>
             <a:endParaRPr lang="en-US" sz="2600" dirty="0"/>
           </a:p>
@@ -21780,14 +21523,78 @@
       </p:sp>
       <p:sp>
         <p:nvSpPr>
-          <p:cNvPr id="3" name="zero"/>
+          <p:cNvPr id="3" name="zone"/>
           <p:cNvSpPr/>
           <p:nvPr/>
         </p:nvSpPr>
         <p:spPr>
           <a:xfrm>
-            <a:off x="3879669" y="1143000"/>
-            <a:ext cx="0" cy="2670048"/>
+            <a:off x="3063240" y="1371600"/>
+            <a:ext cx="1371600" cy="1645920"/>
+          </a:xfrm>
+          <a:prstGeom prst="rect">
+            <a:avLst/>
+          </a:prstGeom>
+          <a:solidFill>
+            <a:srgbClr val="EBF3FA"/>
+          </a:solidFill>
+          <a:ln w="12700">
+            <a:solidFill>
+              <a:srgbClr val="EBF3FA"/>
+            </a:solidFill>
+            <a:prstDash val="solid"/>
+          </a:ln>
+        </p:spPr>
+      </p:sp>
+      <p:sp>
+        <p:nvSpPr>
+          <p:cNvPr id="4" name="Text 2"/>
+          <p:cNvSpPr txBox="1"/>
+          <p:nvPr/>
+        </p:nvSpPr>
+        <p:spPr>
+          <a:xfrm>
+            <a:off x="2606040" y="3364992"/>
+            <a:ext cx="2286000" cy="256032"/>
+          </a:xfrm>
+          <a:prstGeom prst="rect">
+            <a:avLst/>
+          </a:prstGeom>
+          <a:noFill/>
+          <a:ln/>
+        </p:spPr>
+        <p:txBody>
+          <a:bodyPr wrap="square" lIns="0" tIns="0" rIns="0" bIns="0" rtlCol="0" anchor="t"/>
+          <a:lstStyle/>
+          <a:p>
+            <a:pPr algn="ctr" indent="0" marL="0">
+              <a:buNone/>
+            </a:pPr>
+            <a:r>
+              <a:rPr lang="en-US" sz="1300" dirty="0">
+                <a:solidFill>
+                  <a:srgbClr val="2E75B6"/>
+                </a:solidFill>
+                <a:latin typeface="Arial" pitchFamily="34" charset="0"/>
+                <a:ea typeface="Arial" pitchFamily="34" charset="-122"/>
+                <a:cs typeface="Arial" pitchFamily="34" charset="-120"/>
+              </a:rPr>
+              <a:t>"no real difference" zone: ±2 cp</a:t>
+            </a:r>
+            <a:endParaRPr lang="en-US" sz="1300" dirty="0"/>
+          </a:p>
+        </p:txBody>
+      </p:sp>
+      <p:sp>
+        <p:nvSpPr>
+          <p:cNvPr id="5" name="zero"/>
+          <p:cNvSpPr/>
+          <p:nvPr/>
+        </p:nvSpPr>
+        <p:spPr>
+          <a:xfrm>
+            <a:off x="3749040" y="1325880"/>
+            <a:ext cx="0" cy="1737360"/>
           </a:xfrm>
           <a:prstGeom prst="line">
             <a:avLst/>
@@ -21803,14 +21610,14 @@
       </p:sp>
       <p:sp>
         <p:nvSpPr>
-          <p:cNvPr id="4" name="Text 2"/>
+          <p:cNvPr id="6" name="Text 4"/>
           <p:cNvSpPr txBox="1"/>
           <p:nvPr/>
         </p:nvSpPr>
         <p:spPr>
           <a:xfrm>
-            <a:off x="457200" y="1175004"/>
-            <a:ext cx="2240280" cy="457200"/>
+            <a:off x="457200" y="1554480"/>
+            <a:ext cx="1783080" cy="457200"/>
           </a:xfrm>
           <a:prstGeom prst="rect">
             <a:avLst/>
@@ -21834,7 +21641,7 @@
                 <a:ea typeface="Arial" pitchFamily="34" charset="-122"/>
                 <a:cs typeface="Arial" pitchFamily="34" charset="-120"/>
               </a:rPr>
-              <a:t>Main result</a:t>
+              <a:t>Lucky minus deserved, 90% interval</a:t>
             </a:r>
             <a:endParaRPr lang="en-US" sz="1400" dirty="0"/>
           </a:p>
@@ -21842,14 +21649,14 @@
       </p:sp>
       <p:sp>
         <p:nvSpPr>
-          <p:cNvPr id="5" name="ci 0"/>
+          <p:cNvPr id="7" name="ci 0"/>
           <p:cNvSpPr/>
           <p:nvPr/>
         </p:nvSpPr>
         <p:spPr>
           <a:xfrm>
-            <a:off x="4224528" y="1403604"/>
-            <a:ext cx="1363762" cy="0"/>
+            <a:off x="4047363" y="1783080"/>
+            <a:ext cx="750951" cy="0"/>
           </a:xfrm>
           <a:prstGeom prst="line">
             <a:avLst/>
@@ -21865,13 +21672,13 @@
       </p:sp>
       <p:sp>
         <p:nvSpPr>
-          <p:cNvPr id="6" name="est 0"/>
+          <p:cNvPr id="8" name="est 0"/>
           <p:cNvSpPr/>
           <p:nvPr/>
         </p:nvSpPr>
         <p:spPr>
           <a:xfrm>
-            <a:off x="4830645" y="1330452"/>
+            <a:off x="4347972" y="1709928"/>
             <a:ext cx="146304" cy="146304"/>
           </a:xfrm>
           <a:prstGeom prst="ellipse">
@@ -21890,13 +21697,13 @@
       </p:sp>
       <p:sp>
         <p:nvSpPr>
-          <p:cNvPr id="7" name="Text 5"/>
+          <p:cNvPr id="9" name="Text 7"/>
           <p:cNvSpPr txBox="1"/>
           <p:nvPr/>
         </p:nvSpPr>
         <p:spPr>
           <a:xfrm>
-            <a:off x="5661442" y="1275588"/>
+            <a:off x="4871466" y="1655064"/>
             <a:ext cx="548640" cy="256032"/>
           </a:xfrm>
           <a:prstGeom prst="rect">
@@ -21929,14 +21736,14 @@
       </p:sp>
       <p:sp>
         <p:nvSpPr>
-          <p:cNvPr id="8" name="Text 6"/>
+          <p:cNvPr id="10" name="Text 8"/>
           <p:cNvSpPr txBox="1"/>
           <p:nvPr/>
         </p:nvSpPr>
         <p:spPr>
           <a:xfrm>
-            <a:off x="457200" y="1604772"/>
-            <a:ext cx="2240280" cy="457200"/>
+            <a:off x="457200" y="2377440"/>
+            <a:ext cx="1783080" cy="457200"/>
           </a:xfrm>
           <a:prstGeom prst="rect">
             <a:avLst/>
@@ -21960,7 +21767,7 @@
                 <a:ea typeface="Arial" pitchFamily="34" charset="-122"/>
                 <a:cs typeface="Arial" pitchFamily="34" charset="-120"/>
               </a:rPr>
-              <a:t>10-minute games only</a:t>
+              <a:t>Lucky minus deserved, 95% interval</a:t>
             </a:r>
             <a:endParaRPr lang="en-US" sz="1400" dirty="0"/>
           </a:p>
@@ -21968,14 +21775,14 @@
       </p:sp>
       <p:sp>
         <p:nvSpPr>
-          <p:cNvPr id="9" name="ci 1"/>
+          <p:cNvPr id="11" name="ci 1"/>
           <p:cNvSpPr/>
           <p:nvPr/>
         </p:nvSpPr>
         <p:spPr>
           <a:xfrm>
-            <a:off x="4308130" y="1833372"/>
-            <a:ext cx="1536192" cy="0"/>
+            <a:off x="3975354" y="2606040"/>
+            <a:ext cx="894969" cy="0"/>
           </a:xfrm>
           <a:prstGeom prst="line">
             <a:avLst/>
@@ -21991,13 +21798,13 @@
       </p:sp>
       <p:sp>
         <p:nvSpPr>
-          <p:cNvPr id="10" name="est 1"/>
+          <p:cNvPr id="12" name="est 1"/>
           <p:cNvSpPr/>
           <p:nvPr/>
         </p:nvSpPr>
         <p:spPr>
           <a:xfrm>
-            <a:off x="5003074" y="1760220"/>
+            <a:off x="4347972" y="2532888"/>
             <a:ext cx="146304" cy="146304"/>
           </a:xfrm>
           <a:prstGeom prst="ellipse">
@@ -22016,13 +21823,13 @@
       </p:sp>
       <p:sp>
         <p:nvSpPr>
-          <p:cNvPr id="11" name="Text 9"/>
+          <p:cNvPr id="13" name="Text 11"/>
           <p:cNvSpPr txBox="1"/>
           <p:nvPr/>
         </p:nvSpPr>
         <p:spPr>
           <a:xfrm>
-            <a:off x="5917474" y="1705356"/>
+            <a:off x="4943475" y="2478024"/>
             <a:ext cx="548640" cy="256032"/>
           </a:xfrm>
           <a:prstGeom prst="rect">
@@ -22047,7 +21854,7 @@
                 <a:ea typeface="Arial" pitchFamily="34" charset="-122"/>
                 <a:cs typeface="Arial" pitchFamily="34" charset="-120"/>
               </a:rPr>
-              <a:t>+2.29</a:t>
+              <a:t>+1.96</a:t>
             </a:r>
             <a:endParaRPr lang="en-US" sz="1300" dirty="0"/>
           </a:p>
@@ -22055,518 +21862,14 @@
       </p:sp>
       <p:sp>
         <p:nvSpPr>
-          <p:cNvPr id="12" name="Text 10"/>
-          <p:cNvSpPr txBox="1"/>
-          <p:nvPr/>
-        </p:nvSpPr>
-        <p:spPr>
-          <a:xfrm>
-            <a:off x="457200" y="2034540"/>
-            <a:ext cx="2240280" cy="457200"/>
-          </a:xfrm>
-          <a:prstGeom prst="rect">
-            <a:avLst/>
-          </a:prstGeom>
-          <a:noFill/>
-          <a:ln/>
-        </p:spPr>
-        <p:txBody>
-          <a:bodyPr wrap="square" lIns="0" tIns="0" rIns="0" bIns="0" rtlCol="0" anchor="ctr"/>
-          <a:lstStyle/>
-          <a:p>
-            <a:pPr indent="0" marL="0">
-              <a:buNone/>
-            </a:pPr>
-            <a:r>
-              <a:rPr lang="en-US" sz="1400" dirty="0">
-                <a:solidFill>
-                  <a:schemeClr val="tx1"/>
-                </a:solidFill>
-                <a:latin typeface="Arial" pitchFamily="34" charset="0"/>
-                <a:ea typeface="Arial" pitchFamily="34" charset="-122"/>
-                <a:cs typeface="Arial" pitchFamily="34" charset="-120"/>
-              </a:rPr>
-              <a:t>Rematches removed</a:t>
-            </a:r>
-            <a:endParaRPr lang="en-US" sz="1400" dirty="0"/>
-          </a:p>
-        </p:txBody>
-      </p:sp>
-      <p:sp>
-        <p:nvSpPr>
-          <p:cNvPr id="13" name="ci 2"/>
+          <p:cNvPr id="14" name="axis"/>
           <p:cNvSpPr/>
           <p:nvPr/>
         </p:nvSpPr>
         <p:spPr>
           <a:xfrm>
-            <a:off x="4156601" y="2263140"/>
-            <a:ext cx="1384663" cy="0"/>
-          </a:xfrm>
-          <a:prstGeom prst="line">
-            <a:avLst/>
-          </a:prstGeom>
-          <a:noFill/>
-          <a:ln w="31750">
-            <a:solidFill>
-              <a:srgbClr val="1F4E79"/>
-            </a:solidFill>
-            <a:prstDash val="solid"/>
-          </a:ln>
-        </p:spPr>
-      </p:sp>
-      <p:sp>
-        <p:nvSpPr>
-          <p:cNvPr id="14" name="est 2"/>
-          <p:cNvSpPr/>
-          <p:nvPr/>
-        </p:nvSpPr>
-        <p:spPr>
-          <a:xfrm>
-            <a:off x="4773168" y="2189988"/>
-            <a:ext cx="146304" cy="146304"/>
-          </a:xfrm>
-          <a:prstGeom prst="ellipse">
-            <a:avLst/>
-          </a:prstGeom>
-          <a:solidFill>
-            <a:srgbClr val="1F4E79"/>
-          </a:solidFill>
-          <a:ln w="12700">
-            <a:solidFill>
-              <a:srgbClr val="1F4E79"/>
-            </a:solidFill>
-            <a:prstDash val="solid"/>
-          </a:ln>
-        </p:spPr>
-      </p:sp>
-      <p:sp>
-        <p:nvSpPr>
-          <p:cNvPr id="15" name="Text 13"/>
-          <p:cNvSpPr txBox="1"/>
-          <p:nvPr/>
-        </p:nvSpPr>
-        <p:spPr>
-          <a:xfrm>
-            <a:off x="5614416" y="2135124"/>
-            <a:ext cx="548640" cy="256032"/>
-          </a:xfrm>
-          <a:prstGeom prst="rect">
-            <a:avLst/>
-          </a:prstGeom>
-          <a:noFill/>
-          <a:ln/>
-        </p:spPr>
-        <p:txBody>
-          <a:bodyPr wrap="square" lIns="0" tIns="0" rIns="0" bIns="0" rtlCol="0" anchor="ctr"/>
-          <a:lstStyle/>
-          <a:p>
-            <a:pPr indent="0" marL="0">
-              <a:buNone/>
-            </a:pPr>
-            <a:r>
-              <a:rPr lang="en-US" sz="1300" b="1" dirty="0">
-                <a:solidFill>
-                  <a:srgbClr val="1F4E79"/>
-                </a:solidFill>
-                <a:latin typeface="Arial" pitchFamily="34" charset="0"/>
-                <a:ea typeface="Arial" pitchFamily="34" charset="-122"/>
-                <a:cs typeface="Arial" pitchFamily="34" charset="-120"/>
-              </a:rPr>
-              <a:t>+1.85</a:t>
-            </a:r>
-            <a:endParaRPr lang="en-US" sz="1300" dirty="0"/>
-          </a:p>
-        </p:txBody>
-      </p:sp>
-      <p:sp>
-        <p:nvSpPr>
-          <p:cNvPr id="16" name="Text 14"/>
-          <p:cNvSpPr txBox="1"/>
-          <p:nvPr/>
-        </p:nvSpPr>
-        <p:spPr>
-          <a:xfrm>
-            <a:off x="457200" y="2464308"/>
-            <a:ext cx="2240280" cy="457200"/>
-          </a:xfrm>
-          <a:prstGeom prst="rect">
-            <a:avLst/>
-          </a:prstGeom>
-          <a:noFill/>
-          <a:ln/>
-        </p:spPr>
-        <p:txBody>
-          <a:bodyPr wrap="square" lIns="0" tIns="0" rIns="0" bIns="0" rtlCol="0" anchor="ctr"/>
-          <a:lstStyle/>
-          <a:p>
-            <a:pPr indent="0" marL="0">
-              <a:buNone/>
-            </a:pPr>
-            <a:r>
-              <a:rPr lang="en-US" sz="1400" dirty="0">
-                <a:solidFill>
-                  <a:schemeClr val="tx1"/>
-                </a:solidFill>
-                <a:latin typeface="Arial" pitchFamily="34" charset="0"/>
-                <a:ea typeface="Arial" pitchFamily="34" charset="-122"/>
-                <a:cs typeface="Arial" pitchFamily="34" charset="-120"/>
-              </a:rPr>
-              <a:t>Rating 1200–1600</a:t>
-            </a:r>
-            <a:endParaRPr lang="en-US" sz="1400" dirty="0"/>
-          </a:p>
-        </p:txBody>
-      </p:sp>
-      <p:sp>
-        <p:nvSpPr>
-          <p:cNvPr id="17" name="ci 3"/>
-          <p:cNvSpPr/>
-          <p:nvPr/>
-        </p:nvSpPr>
-        <p:spPr>
-          <a:xfrm>
-            <a:off x="3790841" y="2692908"/>
-            <a:ext cx="2074382" cy="0"/>
-          </a:xfrm>
-          <a:prstGeom prst="line">
-            <a:avLst/>
-          </a:prstGeom>
-          <a:noFill/>
-          <a:ln w="31750">
-            <a:solidFill>
-              <a:srgbClr val="1F4E79"/>
-            </a:solidFill>
-            <a:prstDash val="solid"/>
-          </a:ln>
-        </p:spPr>
-      </p:sp>
-      <p:sp>
-        <p:nvSpPr>
-          <p:cNvPr id="18" name="est 3"/>
-          <p:cNvSpPr/>
-          <p:nvPr/>
-        </p:nvSpPr>
-        <p:spPr>
-          <a:xfrm>
-            <a:off x="4757493" y="2619756"/>
-            <a:ext cx="146304" cy="146304"/>
-          </a:xfrm>
-          <a:prstGeom prst="ellipse">
-            <a:avLst/>
-          </a:prstGeom>
-          <a:solidFill>
-            <a:srgbClr val="1F4E79"/>
-          </a:solidFill>
-          <a:ln w="12700">
-            <a:solidFill>
-              <a:srgbClr val="1F4E79"/>
-            </a:solidFill>
-            <a:prstDash val="solid"/>
-          </a:ln>
-        </p:spPr>
-      </p:sp>
-      <p:sp>
-        <p:nvSpPr>
-          <p:cNvPr id="19" name="Text 17"/>
-          <p:cNvSpPr txBox="1"/>
-          <p:nvPr/>
-        </p:nvSpPr>
-        <p:spPr>
-          <a:xfrm>
-            <a:off x="5938375" y="2564892"/>
-            <a:ext cx="548640" cy="256032"/>
-          </a:xfrm>
-          <a:prstGeom prst="rect">
-            <a:avLst/>
-          </a:prstGeom>
-          <a:noFill/>
-          <a:ln/>
-        </p:spPr>
-        <p:txBody>
-          <a:bodyPr wrap="square" lIns="0" tIns="0" rIns="0" bIns="0" rtlCol="0" anchor="ctr"/>
-          <a:lstStyle/>
-          <a:p>
-            <a:pPr indent="0" marL="0">
-              <a:buNone/>
-            </a:pPr>
-            <a:r>
-              <a:rPr lang="en-US" sz="1300" b="1" dirty="0">
-                <a:solidFill>
-                  <a:srgbClr val="1F4E79"/>
-                </a:solidFill>
-                <a:latin typeface="Arial" pitchFamily="34" charset="0"/>
-                <a:ea typeface="Arial" pitchFamily="34" charset="-122"/>
-                <a:cs typeface="Arial" pitchFamily="34" charset="-120"/>
-              </a:rPr>
-              <a:t>+1.82</a:t>
-            </a:r>
-            <a:endParaRPr lang="en-US" sz="1300" dirty="0"/>
-          </a:p>
-        </p:txBody>
-      </p:sp>
-      <p:sp>
-        <p:nvSpPr>
-          <p:cNvPr id="20" name="Text 18"/>
-          <p:cNvSpPr txBox="1"/>
-          <p:nvPr/>
-        </p:nvSpPr>
-        <p:spPr>
-          <a:xfrm>
-            <a:off x="457200" y="2894076"/>
-            <a:ext cx="2240280" cy="457200"/>
-          </a:xfrm>
-          <a:prstGeom prst="rect">
-            <a:avLst/>
-          </a:prstGeom>
-          <a:noFill/>
-          <a:ln/>
-        </p:spPr>
-        <p:txBody>
-          <a:bodyPr wrap="square" lIns="0" tIns="0" rIns="0" bIns="0" rtlCol="0" anchor="ctr"/>
-          <a:lstStyle/>
-          <a:p>
-            <a:pPr indent="0" marL="0">
-              <a:buNone/>
-            </a:pPr>
-            <a:r>
-              <a:rPr lang="en-US" sz="1400" dirty="0">
-                <a:solidFill>
-                  <a:schemeClr val="tx1"/>
-                </a:solidFill>
-                <a:latin typeface="Arial" pitchFamily="34" charset="0"/>
-                <a:ea typeface="Arial" pitchFamily="34" charset="-122"/>
-                <a:cs typeface="Arial" pitchFamily="34" charset="-120"/>
-              </a:rPr>
-              <a:t>Rating 1600–2000</a:t>
-            </a:r>
-            <a:endParaRPr lang="en-US" sz="1400" dirty="0"/>
-          </a:p>
-        </p:txBody>
-      </p:sp>
-      <p:sp>
-        <p:nvSpPr>
-          <p:cNvPr id="21" name="ci 4"/>
-          <p:cNvSpPr/>
-          <p:nvPr/>
-        </p:nvSpPr>
-        <p:spPr>
-          <a:xfrm>
-            <a:off x="4120025" y="3122676"/>
-            <a:ext cx="1734747" cy="0"/>
-          </a:xfrm>
-          <a:prstGeom prst="line">
-            <a:avLst/>
-          </a:prstGeom>
-          <a:noFill/>
-          <a:ln w="31750">
-            <a:solidFill>
-              <a:srgbClr val="1F4E79"/>
-            </a:solidFill>
-            <a:prstDash val="solid"/>
-          </a:ln>
-        </p:spPr>
-      </p:sp>
-      <p:sp>
-        <p:nvSpPr>
-          <p:cNvPr id="22" name="est 4"/>
-          <p:cNvSpPr/>
-          <p:nvPr/>
-        </p:nvSpPr>
-        <p:spPr>
-          <a:xfrm>
-            <a:off x="4914247" y="3049524"/>
-            <a:ext cx="146304" cy="146304"/>
-          </a:xfrm>
-          <a:prstGeom prst="ellipse">
-            <a:avLst/>
-          </a:prstGeom>
-          <a:solidFill>
-            <a:srgbClr val="1F4E79"/>
-          </a:solidFill>
-          <a:ln w="12700">
-            <a:solidFill>
-              <a:srgbClr val="1F4E79"/>
-            </a:solidFill>
-            <a:prstDash val="solid"/>
-          </a:ln>
-        </p:spPr>
-      </p:sp>
-      <p:sp>
-        <p:nvSpPr>
-          <p:cNvPr id="23" name="Text 21"/>
-          <p:cNvSpPr txBox="1"/>
-          <p:nvPr/>
-        </p:nvSpPr>
-        <p:spPr>
-          <a:xfrm>
-            <a:off x="5927925" y="2994660"/>
-            <a:ext cx="548640" cy="256032"/>
-          </a:xfrm>
-          <a:prstGeom prst="rect">
-            <a:avLst/>
-          </a:prstGeom>
-          <a:noFill/>
-          <a:ln/>
-        </p:spPr>
-        <p:txBody>
-          <a:bodyPr wrap="square" lIns="0" tIns="0" rIns="0" bIns="0" rtlCol="0" anchor="ctr"/>
-          <a:lstStyle/>
-          <a:p>
-            <a:pPr indent="0" marL="0">
-              <a:buNone/>
-            </a:pPr>
-            <a:r>
-              <a:rPr lang="en-US" sz="1300" b="1" dirty="0">
-                <a:solidFill>
-                  <a:srgbClr val="1F4E79"/>
-                </a:solidFill>
-                <a:latin typeface="Arial" pitchFamily="34" charset="0"/>
-                <a:ea typeface="Arial" pitchFamily="34" charset="-122"/>
-                <a:cs typeface="Arial" pitchFamily="34" charset="-120"/>
-              </a:rPr>
-              <a:t>+2.12</a:t>
-            </a:r>
-            <a:endParaRPr lang="en-US" sz="1300" dirty="0"/>
-          </a:p>
-        </p:txBody>
-      </p:sp>
-      <p:sp>
-        <p:nvSpPr>
-          <p:cNvPr id="24" name="Text 22"/>
-          <p:cNvSpPr txBox="1"/>
-          <p:nvPr/>
-        </p:nvSpPr>
-        <p:spPr>
-          <a:xfrm>
-            <a:off x="457200" y="3323844"/>
-            <a:ext cx="2240280" cy="457200"/>
-          </a:xfrm>
-          <a:prstGeom prst="rect">
-            <a:avLst/>
-          </a:prstGeom>
-          <a:noFill/>
-          <a:ln/>
-        </p:spPr>
-        <p:txBody>
-          <a:bodyPr wrap="square" lIns="0" tIns="0" rIns="0" bIns="0" rtlCol="0" anchor="ctr"/>
-          <a:lstStyle/>
-          <a:p>
-            <a:pPr indent="0" marL="0">
-              <a:buNone/>
-            </a:pPr>
-            <a:r>
-              <a:rPr lang="en-US" sz="1400" dirty="0">
-                <a:solidFill>
-                  <a:schemeClr val="tx1"/>
-                </a:solidFill>
-                <a:latin typeface="Arial" pitchFamily="34" charset="0"/>
-                <a:ea typeface="Arial" pitchFamily="34" charset="-122"/>
-                <a:cs typeface="Arial" pitchFamily="34" charset="-120"/>
-              </a:rPr>
-              <a:t>Lucky = losing by 3+ pawns</a:t>
-            </a:r>
-            <a:endParaRPr lang="en-US" sz="1400" dirty="0"/>
-          </a:p>
-        </p:txBody>
-      </p:sp>
-      <p:sp>
-        <p:nvSpPr>
-          <p:cNvPr id="25" name="ci 5"/>
-          <p:cNvSpPr/>
-          <p:nvPr/>
-        </p:nvSpPr>
-        <p:spPr>
-          <a:xfrm>
-            <a:off x="4146151" y="3552444"/>
-            <a:ext cx="1473490" cy="0"/>
-          </a:xfrm>
-          <a:prstGeom prst="line">
-            <a:avLst/>
-          </a:prstGeom>
-          <a:noFill/>
-          <a:ln w="31750">
-            <a:solidFill>
-              <a:srgbClr val="1F4E79"/>
-            </a:solidFill>
-            <a:prstDash val="solid"/>
-          </a:ln>
-        </p:spPr>
-      </p:sp>
-      <p:sp>
-        <p:nvSpPr>
-          <p:cNvPr id="26" name="est 5"/>
-          <p:cNvSpPr/>
-          <p:nvPr/>
-        </p:nvSpPr>
-        <p:spPr>
-          <a:xfrm>
-            <a:off x="4809744" y="3479292"/>
-            <a:ext cx="146304" cy="146304"/>
-          </a:xfrm>
-          <a:prstGeom prst="ellipse">
-            <a:avLst/>
-          </a:prstGeom>
-          <a:solidFill>
-            <a:srgbClr val="1F4E79"/>
-          </a:solidFill>
-          <a:ln w="12700">
-            <a:solidFill>
-              <a:srgbClr val="1F4E79"/>
-            </a:solidFill>
-            <a:prstDash val="solid"/>
-          </a:ln>
-        </p:spPr>
-      </p:sp>
-      <p:sp>
-        <p:nvSpPr>
-          <p:cNvPr id="27" name="Text 25"/>
-          <p:cNvSpPr txBox="1"/>
-          <p:nvPr/>
-        </p:nvSpPr>
-        <p:spPr>
-          <a:xfrm>
-            <a:off x="5692793" y="3424428"/>
-            <a:ext cx="548640" cy="256032"/>
-          </a:xfrm>
-          <a:prstGeom prst="rect">
-            <a:avLst/>
-          </a:prstGeom>
-          <a:noFill/>
-          <a:ln/>
-        </p:spPr>
-        <p:txBody>
-          <a:bodyPr wrap="square" lIns="0" tIns="0" rIns="0" bIns="0" rtlCol="0" anchor="ctr"/>
-          <a:lstStyle/>
-          <a:p>
-            <a:pPr indent="0" marL="0">
-              <a:buNone/>
-            </a:pPr>
-            <a:r>
-              <a:rPr lang="en-US" sz="1300" b="1" dirty="0">
-                <a:solidFill>
-                  <a:srgbClr val="1F4E79"/>
-                </a:solidFill>
-                <a:latin typeface="Arial" pitchFamily="34" charset="0"/>
-                <a:ea typeface="Arial" pitchFamily="34" charset="-122"/>
-                <a:cs typeface="Arial" pitchFamily="34" charset="-120"/>
-              </a:rPr>
-              <a:t>+1.92</a:t>
-            </a:r>
-            <a:endParaRPr lang="en-US" sz="1300" dirty="0"/>
-          </a:p>
-        </p:txBody>
-      </p:sp>
-      <p:sp>
-        <p:nvSpPr>
-          <p:cNvPr id="28" name="axis"/>
-          <p:cNvSpPr/>
-          <p:nvPr/>
-        </p:nvSpPr>
-        <p:spPr>
-          <a:xfrm>
-            <a:off x="2834640" y="3813048"/>
-            <a:ext cx="3657600" cy="0"/>
+            <a:off x="2377440" y="3063240"/>
+            <a:ext cx="2743200" cy="0"/>
           </a:xfrm>
           <a:prstGeom prst="line">
             <a:avLst/>
@@ -22582,13 +21885,52 @@
       </p:sp>
       <p:sp>
         <p:nvSpPr>
-          <p:cNvPr id="29" name="Text 27"/>
+          <p:cNvPr id="15" name="Text 13"/>
           <p:cNvSpPr txBox="1"/>
           <p:nvPr/>
         </p:nvSpPr>
         <p:spPr>
           <a:xfrm>
-            <a:off x="2560320" y="3849624"/>
+            <a:off x="2103120" y="3099816"/>
+            <a:ext cx="548640" cy="228600"/>
+          </a:xfrm>
+          <a:prstGeom prst="rect">
+            <a:avLst/>
+          </a:prstGeom>
+          <a:noFill/>
+          <a:ln/>
+        </p:spPr>
+        <p:txBody>
+          <a:bodyPr wrap="square" lIns="0" tIns="0" rIns="0" bIns="0" rtlCol="0" anchor="t"/>
+          <a:lstStyle/>
+          <a:p>
+            <a:pPr algn="ctr" indent="0" marL="0">
+              <a:buNone/>
+            </a:pPr>
+            <a:r>
+              <a:rPr lang="en-US" sz="1300" dirty="0">
+                <a:solidFill>
+                  <a:srgbClr val="777777"/>
+                </a:solidFill>
+                <a:latin typeface="Arial" pitchFamily="34" charset="0"/>
+                <a:ea typeface="Arial" pitchFamily="34" charset="-122"/>
+                <a:cs typeface="Arial" pitchFamily="34" charset="-120"/>
+              </a:rPr>
+              <a:t>-4</a:t>
+            </a:r>
+            <a:endParaRPr lang="en-US" sz="1300" dirty="0"/>
+          </a:p>
+        </p:txBody>
+      </p:sp>
+      <p:sp>
+        <p:nvSpPr>
+          <p:cNvPr id="16" name="Text 14"/>
+          <p:cNvSpPr txBox="1"/>
+          <p:nvPr/>
+        </p:nvSpPr>
+        <p:spPr>
+          <a:xfrm>
+            <a:off x="2788920" y="3099816"/>
             <a:ext cx="548640" cy="228600"/>
           </a:xfrm>
           <a:prstGeom prst="rect">
@@ -22621,13 +21963,13 @@
       </p:sp>
       <p:sp>
         <p:nvSpPr>
-          <p:cNvPr id="30" name="Text 28"/>
+          <p:cNvPr id="17" name="Text 15"/>
           <p:cNvSpPr txBox="1"/>
           <p:nvPr/>
         </p:nvSpPr>
         <p:spPr>
           <a:xfrm>
-            <a:off x="3605349" y="3849624"/>
+            <a:off x="3474720" y="3099816"/>
             <a:ext cx="548640" cy="228600"/>
           </a:xfrm>
           <a:prstGeom prst="rect">
@@ -22660,13 +22002,13 @@
       </p:sp>
       <p:sp>
         <p:nvSpPr>
-          <p:cNvPr id="31" name="Text 29"/>
+          <p:cNvPr id="18" name="Text 16"/>
           <p:cNvSpPr txBox="1"/>
           <p:nvPr/>
         </p:nvSpPr>
         <p:spPr>
           <a:xfrm>
-            <a:off x="4650377" y="3849624"/>
+            <a:off x="4160520" y="3099816"/>
             <a:ext cx="548640" cy="228600"/>
           </a:xfrm>
           <a:prstGeom prst="rect">
@@ -22699,13 +22041,13 @@
       </p:sp>
       <p:sp>
         <p:nvSpPr>
-          <p:cNvPr id="32" name="Text 30"/>
+          <p:cNvPr id="19" name="Text 17"/>
           <p:cNvSpPr txBox="1"/>
           <p:nvPr/>
         </p:nvSpPr>
         <p:spPr>
           <a:xfrm>
-            <a:off x="5695406" y="3849624"/>
+            <a:off x="4846320" y="3099816"/>
             <a:ext cx="548640" cy="228600"/>
           </a:xfrm>
           <a:prstGeom prst="rect">
@@ -22738,14 +22080,14 @@
       </p:sp>
       <p:sp>
         <p:nvSpPr>
-          <p:cNvPr id="33" name="Text 31"/>
+          <p:cNvPr id="20" name="Text 18"/>
           <p:cNvSpPr txBox="1"/>
           <p:nvPr/>
         </p:nvSpPr>
         <p:spPr>
           <a:xfrm>
-            <a:off x="2834640" y="4416552"/>
-            <a:ext cx="3657600" cy="256032"/>
+            <a:off x="2377440" y="3666744"/>
+            <a:ext cx="2743200" cy="256032"/>
           </a:xfrm>
           <a:prstGeom prst="rect">
             <a:avLst/>
@@ -22769,7 +22111,7 @@
                 <a:ea typeface="Arial" pitchFamily="34" charset="-122"/>
                 <a:cs typeface="Arial" pitchFamily="34" charset="-120"/>
               </a:rPr>
-              <a:t>Lucky minus deserved, cp (95% interval)</a:t>
+              <a:t>Difference in next-game ACPL, cp</a:t>
             </a:r>
             <a:endParaRPr lang="en-US" sz="1300" dirty="0"/>
           </a:p>
@@ -22777,14 +22119,14 @@
       </p:sp>
       <p:sp>
         <p:nvSpPr>
-          <p:cNvPr id="34" name="Text 32"/>
+          <p:cNvPr id="21" name="Text 19"/>
           <p:cNvSpPr txBox="1"/>
           <p:nvPr/>
         </p:nvSpPr>
         <p:spPr>
           <a:xfrm>
-            <a:off x="6766560" y="1188720"/>
-            <a:ext cx="1920240" cy="365760"/>
+            <a:off x="5669280" y="1234440"/>
+            <a:ext cx="3017520" cy="365760"/>
           </a:xfrm>
           <a:prstGeom prst="rect">
             <a:avLst/>
@@ -22808,7 +22150,7 @@
                 <a:ea typeface="Arial" pitchFamily="34" charset="-122"/>
                 <a:cs typeface="Arial" pitchFamily="34" charset="-120"/>
               </a:rPr>
-              <a:t>Why checks</a:t>
+              <a:t>What it means</a:t>
             </a:r>
             <a:endParaRPr lang="en-US" sz="2000" dirty="0"/>
           </a:p>
@@ -22816,14 +22158,14 @@
       </p:sp>
       <p:sp>
         <p:nvSpPr>
-          <p:cNvPr id="35" name="Text 33"/>
+          <p:cNvPr id="22" name="Text 20"/>
           <p:cNvSpPr txBox="1"/>
           <p:nvPr/>
         </p:nvSpPr>
         <p:spPr>
           <a:xfrm>
-            <a:off x="6766560" y="1645920"/>
-            <a:ext cx="1920240" cy="2011680"/>
+            <a:off x="5669280" y="1691640"/>
+            <a:ext cx="3017520" cy="2743200"/>
           </a:xfrm>
           <a:prstGeom prst="rect">
             <a:avLst/>
@@ -22835,8 +22177,12 @@
           <a:bodyPr wrap="square" lIns="0" tIns="0" rIns="0" bIns="0" rtlCol="0" anchor="t"/>
           <a:lstStyle/>
           <a:p>
-            <a:pPr indent="0" marL="0">
-              <a:buNone/>
+            <a:pPr marL="342900" indent="-342900">
+              <a:spcAft>
+                <a:spcPts val="1000"/>
+              </a:spcAft>
+              <a:buSzPct val="100000"/>
+              <a:buChar char="•"/>
             </a:pPr>
             <a:r>
               <a:rPr lang="en-US" sz="2000" dirty="0">
@@ -22847,46 +22193,88 @@
                 <a:ea typeface="Arial" pitchFamily="34" charset="-122"/>
                 <a:cs typeface="Arial" pitchFamily="34" charset="-120"/>
               </a:rPr>
-              <a:t>A real effect should survive changes to the method.</a:t>
+              <a:t>Not chance: p = 0.003</a:t>
             </a:r>
             <a:endParaRPr lang="en-US" sz="2000" dirty="0"/>
           </a:p>
-        </p:txBody>
-      </p:sp>
-      <p:sp>
-        <p:nvSpPr>
-          <p:cNvPr id="36" name="Text 34"/>
-          <p:cNvSpPr txBox="1"/>
-          <p:nvPr/>
-        </p:nvSpPr>
-        <p:spPr>
-          <a:xfrm>
-            <a:off x="457200" y="4709160"/>
-            <a:ext cx="7680960" cy="274320"/>
-          </a:xfrm>
-          <a:prstGeom prst="rect">
-            <a:avLst/>
-          </a:prstGeom>
-          <a:noFill/>
-          <a:ln/>
-        </p:spPr>
-        <p:txBody>
-          <a:bodyPr wrap="square" lIns="0" tIns="0" rIns="0" bIns="0" rtlCol="0" anchor="ctr"/>
-          <a:lstStyle/>
-          <a:p>
-            <a:pPr indent="0" marL="0">
-              <a:buNone/>
+          <a:p>
+            <a:pPr marL="342900" indent="-342900">
+              <a:spcAft>
+                <a:spcPts val="1000"/>
+              </a:spcAft>
+              <a:buSzPct val="100000"/>
+              <a:buChar char="•"/>
             </a:pPr>
             <a:r>
-              <a:rPr lang="en-US" sz="1200" dirty="0">
-                <a:solidFill>
-                  <a:srgbClr val="777777"/>
+              <a:rPr lang="en-US" sz="2000" dirty="0">
+                <a:solidFill>
+                  <a:schemeClr val="tx1"/>
                 </a:solidFill>
                 <a:latin typeface="Arial" pitchFamily="34" charset="0"/>
                 <a:ea typeface="Arial" pitchFamily="34" charset="-122"/>
                 <a:cs typeface="Arial" pitchFamily="34" charset="-120"/>
               </a:rPr>
-              <a:t>A mixed model with a separate starting level per player also gave 1.96 cp (95% interval 0.66 to 3.27)</a:t>
+              <a:t>Not equal: it leaves the ±2 zone</a:t>
+            </a:r>
+            <a:endParaRPr lang="en-US" sz="2000" dirty="0"/>
+          </a:p>
+          <a:p>
+            <a:pPr marL="342900" indent="-342900">
+              <a:spcAft>
+                <a:spcPts val="1000"/>
+              </a:spcAft>
+              <a:buSzPct val="100000"/>
+              <a:buChar char="•"/>
+            </a:pPr>
+            <a:r>
+              <a:rPr lang="en-US" sz="2000" dirty="0">
+                <a:solidFill>
+                  <a:schemeClr val="tx1"/>
+                </a:solidFill>
+                <a:latin typeface="Arial" pitchFamily="34" charset="0"/>
+                <a:ea typeface="Arial" pitchFamily="34" charset="-122"/>
+                <a:cs typeface="Arial" pitchFamily="34" charset="-120"/>
+              </a:rPr>
+              <a:t>Official verdict: inconclusive, as 1.96 &lt; 2</a:t>
+            </a:r>
+            <a:endParaRPr lang="en-US" sz="2000" dirty="0"/>
+          </a:p>
+        </p:txBody>
+      </p:sp>
+      <p:sp>
+        <p:nvSpPr>
+          <p:cNvPr id="23" name="Text 21"/>
+          <p:cNvSpPr txBox="1"/>
+          <p:nvPr/>
+        </p:nvSpPr>
+        <p:spPr>
+          <a:xfrm>
+            <a:off x="457200" y="4709160"/>
+            <a:ext cx="7680960" cy="274320"/>
+          </a:xfrm>
+          <a:prstGeom prst="rect">
+            <a:avLst/>
+          </a:prstGeom>
+          <a:noFill/>
+          <a:ln/>
+        </p:spPr>
+        <p:txBody>
+          <a:bodyPr wrap="square" lIns="0" tIns="0" rIns="0" bIns="0" rtlCol="0" anchor="ctr"/>
+          <a:lstStyle/>
+          <a:p>
+            <a:pPr indent="0" marL="0">
+              <a:buNone/>
+            </a:pPr>
+            <a:r>
+              <a:rPr lang="en-US" sz="1200" dirty="0">
+                <a:solidFill>
+                  <a:srgbClr val="777777"/>
+                </a:solidFill>
+                <a:latin typeface="Arial" pitchFamily="34" charset="0"/>
+                <a:ea typeface="Arial" pitchFamily="34" charset="-122"/>
+                <a:cs typeface="Arial" pitchFamily="34" charset="-120"/>
+              </a:rPr>
+              <a:t>Raw means: 74.38 cp after a lucky win, 72.28 after a deserved win; 12,033 and 11,962 pairs</a:t>
             </a:r>
             <a:endParaRPr lang="en-US" sz="1200" dirty="0"/>
           </a:p>
@@ -22997,7 +22385,7 @@
                   <a:schemeClr val="tx2"/>
                 </a:solidFill>
               </a:rPr>
-              <a:t>The type of win itself still barely matters: every gap stayed within about 3 cp</a:t>
+              <a:t>Every check gives the same answer: lucky winners play 1.8 to 2.3 cp worse</a:t>
             </a:r>
             <a:endParaRPr lang="en-US" sz="2600" dirty="0"/>
           </a:p>
@@ -23005,78 +22393,14 @@
       </p:sp>
       <p:sp>
         <p:nvSpPr>
-          <p:cNvPr id="3" name="zone"/>
+          <p:cNvPr id="3" name="zero"/>
           <p:cNvSpPr/>
           <p:nvPr/>
         </p:nvSpPr>
         <p:spPr>
           <a:xfrm>
-            <a:off x="3051810" y="1325880"/>
-            <a:ext cx="2400300" cy="1975104"/>
-          </a:xfrm>
-          <a:prstGeom prst="rect">
-            <a:avLst/>
-          </a:prstGeom>
-          <a:solidFill>
-            <a:srgbClr val="EBF3FA"/>
-          </a:solidFill>
-          <a:ln w="12700">
-            <a:solidFill>
-              <a:srgbClr val="EBF3FA"/>
-            </a:solidFill>
-            <a:prstDash val="solid"/>
-          </a:ln>
-        </p:spPr>
-      </p:sp>
-      <p:sp>
-        <p:nvSpPr>
-          <p:cNvPr id="4" name="Text 2"/>
-          <p:cNvSpPr txBox="1"/>
-          <p:nvPr/>
-        </p:nvSpPr>
-        <p:spPr>
-          <a:xfrm>
-            <a:off x="2594610" y="3648456"/>
-            <a:ext cx="3314700" cy="256032"/>
-          </a:xfrm>
-          <a:prstGeom prst="rect">
-            <a:avLst/>
-          </a:prstGeom>
-          <a:noFill/>
-          <a:ln/>
-        </p:spPr>
-        <p:txBody>
-          <a:bodyPr wrap="square" lIns="0" tIns="0" rIns="0" bIns="0" rtlCol="0" anchor="t"/>
-          <a:lstStyle/>
-          <a:p>
-            <a:pPr algn="ctr" indent="0" marL="0">
-              <a:buNone/>
-            </a:pPr>
-            <a:r>
-              <a:rPr lang="en-US" sz="1300" dirty="0">
-                <a:solidFill>
-                  <a:srgbClr val="2E75B6"/>
-                </a:solidFill>
-                <a:latin typeface="Arial" pitchFamily="34" charset="0"/>
-                <a:ea typeface="Arial" pitchFamily="34" charset="-122"/>
-                <a:cs typeface="Arial" pitchFamily="34" charset="-120"/>
-              </a:rPr>
-              <a:t>"no real difference" zone: ±3 cp</a:t>
-            </a:r>
-            <a:endParaRPr lang="en-US" sz="1300" dirty="0"/>
-          </a:p>
-        </p:txBody>
-      </p:sp>
-      <p:sp>
-        <p:nvSpPr>
-          <p:cNvPr id="5" name="zero"/>
-          <p:cNvSpPr/>
-          <p:nvPr/>
-        </p:nvSpPr>
-        <p:spPr>
-          <a:xfrm>
-            <a:off x="4251960" y="1280160"/>
-            <a:ext cx="0" cy="2066544"/>
+            <a:off x="3879669" y="1143000"/>
+            <a:ext cx="0" cy="2670048"/>
           </a:xfrm>
           <a:prstGeom prst="line">
             <a:avLst/>
@@ -23092,14 +22416,14 @@
       </p:sp>
       <p:sp>
         <p:nvSpPr>
-          <p:cNvPr id="6" name="Text 4"/>
+          <p:cNvPr id="4" name="Text 2"/>
           <p:cNvSpPr txBox="1"/>
           <p:nvPr/>
         </p:nvSpPr>
         <p:spPr>
           <a:xfrm>
-            <a:off x="457200" y="1426464"/>
-            <a:ext cx="2057400" cy="457200"/>
+            <a:off x="457200" y="1175004"/>
+            <a:ext cx="2240280" cy="457200"/>
           </a:xfrm>
           <a:prstGeom prst="rect">
             <a:avLst/>
@@ -23115,15 +22439,15 @@
               <a:buNone/>
             </a:pPr>
             <a:r>
-              <a:rPr lang="en-US" sz="1400" dirty="0">
-                <a:solidFill>
-                  <a:schemeClr val="tx1"/>
+              <a:rPr lang="en-US" sz="1400" b="1" dirty="0">
+                <a:solidFill>
+                  <a:srgbClr val="C27C0E"/>
                 </a:solidFill>
                 <a:latin typeface="Arial" pitchFamily="34" charset="0"/>
                 <a:ea typeface="Arial" pitchFamily="34" charset="-122"/>
                 <a:cs typeface="Arial" pitchFamily="34" charset="-120"/>
               </a:rPr>
-              <a:t>Time minus checkmate</a:t>
+              <a:t>Main result</a:t>
             </a:r>
             <a:endParaRPr lang="en-US" sz="1400" dirty="0"/>
           </a:p>
@@ -23131,14 +22455,140 @@
       </p:sp>
       <p:sp>
         <p:nvSpPr>
-          <p:cNvPr id="7" name="ci 0"/>
+          <p:cNvPr id="5" name="ci 0"/>
           <p:cNvSpPr/>
           <p:nvPr/>
         </p:nvSpPr>
         <p:spPr>
           <a:xfrm>
-            <a:off x="3415856" y="1655064"/>
-            <a:ext cx="1240155" cy="0"/>
+            <a:off x="4224528" y="1403604"/>
+            <a:ext cx="1363762" cy="0"/>
+          </a:xfrm>
+          <a:prstGeom prst="line">
+            <a:avLst/>
+          </a:prstGeom>
+          <a:noFill/>
+          <a:ln w="31750">
+            <a:solidFill>
+              <a:srgbClr val="C27C0E"/>
+            </a:solidFill>
+            <a:prstDash val="solid"/>
+          </a:ln>
+        </p:spPr>
+      </p:sp>
+      <p:sp>
+        <p:nvSpPr>
+          <p:cNvPr id="6" name="est 0"/>
+          <p:cNvSpPr/>
+          <p:nvPr/>
+        </p:nvSpPr>
+        <p:spPr>
+          <a:xfrm>
+            <a:off x="4830645" y="1330452"/>
+            <a:ext cx="146304" cy="146304"/>
+          </a:xfrm>
+          <a:prstGeom prst="ellipse">
+            <a:avLst/>
+          </a:prstGeom>
+          <a:solidFill>
+            <a:srgbClr val="C27C0E"/>
+          </a:solidFill>
+          <a:ln w="12700">
+            <a:solidFill>
+              <a:srgbClr val="C27C0E"/>
+            </a:solidFill>
+            <a:prstDash val="solid"/>
+          </a:ln>
+        </p:spPr>
+      </p:sp>
+      <p:sp>
+        <p:nvSpPr>
+          <p:cNvPr id="7" name="Text 5"/>
+          <p:cNvSpPr txBox="1"/>
+          <p:nvPr/>
+        </p:nvSpPr>
+        <p:spPr>
+          <a:xfrm>
+            <a:off x="5661442" y="1275588"/>
+            <a:ext cx="548640" cy="256032"/>
+          </a:xfrm>
+          <a:prstGeom prst="rect">
+            <a:avLst/>
+          </a:prstGeom>
+          <a:noFill/>
+          <a:ln/>
+        </p:spPr>
+        <p:txBody>
+          <a:bodyPr wrap="square" lIns="0" tIns="0" rIns="0" bIns="0" rtlCol="0" anchor="ctr"/>
+          <a:lstStyle/>
+          <a:p>
+            <a:pPr indent="0" marL="0">
+              <a:buNone/>
+            </a:pPr>
+            <a:r>
+              <a:rPr lang="en-US" sz="1300" b="1" dirty="0">
+                <a:solidFill>
+                  <a:srgbClr val="C27C0E"/>
+                </a:solidFill>
+                <a:latin typeface="Arial" pitchFamily="34" charset="0"/>
+                <a:ea typeface="Arial" pitchFamily="34" charset="-122"/>
+                <a:cs typeface="Arial" pitchFamily="34" charset="-120"/>
+              </a:rPr>
+              <a:t>+1.96</a:t>
+            </a:r>
+            <a:endParaRPr lang="en-US" sz="1300" dirty="0"/>
+          </a:p>
+        </p:txBody>
+      </p:sp>
+      <p:sp>
+        <p:nvSpPr>
+          <p:cNvPr id="8" name="Text 6"/>
+          <p:cNvSpPr txBox="1"/>
+          <p:nvPr/>
+        </p:nvSpPr>
+        <p:spPr>
+          <a:xfrm>
+            <a:off x="457200" y="1604772"/>
+            <a:ext cx="2240280" cy="457200"/>
+          </a:xfrm>
+          <a:prstGeom prst="rect">
+            <a:avLst/>
+          </a:prstGeom>
+          <a:noFill/>
+          <a:ln/>
+        </p:spPr>
+        <p:txBody>
+          <a:bodyPr wrap="square" lIns="0" tIns="0" rIns="0" bIns="0" rtlCol="0" anchor="ctr"/>
+          <a:lstStyle/>
+          <a:p>
+            <a:pPr indent="0" marL="0">
+              <a:buNone/>
+            </a:pPr>
+            <a:r>
+              <a:rPr lang="en-US" sz="1400" dirty="0">
+                <a:solidFill>
+                  <a:schemeClr val="tx1"/>
+                </a:solidFill>
+                <a:latin typeface="Arial" pitchFamily="34" charset="0"/>
+                <a:ea typeface="Arial" pitchFamily="34" charset="-122"/>
+                <a:cs typeface="Arial" pitchFamily="34" charset="-120"/>
+              </a:rPr>
+              <a:t>10-minute games only</a:t>
+            </a:r>
+            <a:endParaRPr lang="en-US" sz="1400" dirty="0"/>
+          </a:p>
+        </p:txBody>
+      </p:sp>
+      <p:sp>
+        <p:nvSpPr>
+          <p:cNvPr id="9" name="ci 1"/>
+          <p:cNvSpPr/>
+          <p:nvPr/>
+        </p:nvSpPr>
+        <p:spPr>
+          <a:xfrm>
+            <a:off x="4308130" y="1833372"/>
+            <a:ext cx="1536192" cy="0"/>
           </a:xfrm>
           <a:prstGeom prst="line">
             <a:avLst/>
@@ -23154,13 +22604,13 @@
       </p:sp>
       <p:sp>
         <p:nvSpPr>
-          <p:cNvPr id="8" name="est 0"/>
+          <p:cNvPr id="10" name="est 1"/>
           <p:cNvSpPr/>
           <p:nvPr/>
         </p:nvSpPr>
         <p:spPr>
           <a:xfrm>
-            <a:off x="3962781" y="1581912"/>
+            <a:off x="5003074" y="1760220"/>
             <a:ext cx="146304" cy="146304"/>
           </a:xfrm>
           <a:prstGeom prst="ellipse">
@@ -23179,13 +22629,13 @@
       </p:sp>
       <p:sp>
         <p:nvSpPr>
-          <p:cNvPr id="9" name="Text 7"/>
+          <p:cNvPr id="11" name="Text 9"/>
           <p:cNvSpPr txBox="1"/>
           <p:nvPr/>
         </p:nvSpPr>
         <p:spPr>
           <a:xfrm>
-            <a:off x="4729163" y="1527048"/>
+            <a:off x="5917474" y="1705356"/>
             <a:ext cx="548640" cy="256032"/>
           </a:xfrm>
           <a:prstGeom prst="rect">
@@ -23210,7 +22660,7 @@
                 <a:ea typeface="Arial" pitchFamily="34" charset="-122"/>
                 <a:cs typeface="Arial" pitchFamily="34" charset="-120"/>
               </a:rPr>
-              <a:t>-0.54</a:t>
+              <a:t>+2.29</a:t>
             </a:r>
             <a:endParaRPr lang="en-US" sz="1300" dirty="0"/>
           </a:p>
@@ -23218,14 +22668,14 @@
       </p:sp>
       <p:sp>
         <p:nvSpPr>
-          <p:cNvPr id="10" name="Text 8"/>
+          <p:cNvPr id="12" name="Text 10"/>
           <p:cNvSpPr txBox="1"/>
           <p:nvPr/>
         </p:nvSpPr>
         <p:spPr>
           <a:xfrm>
-            <a:off x="457200" y="2084832"/>
-            <a:ext cx="2057400" cy="457200"/>
+            <a:off x="457200" y="2034540"/>
+            <a:ext cx="2240280" cy="457200"/>
           </a:xfrm>
           <a:prstGeom prst="rect">
             <a:avLst/>
@@ -23249,7 +22699,7 @@
                 <a:ea typeface="Arial" pitchFamily="34" charset="-122"/>
                 <a:cs typeface="Arial" pitchFamily="34" charset="-120"/>
               </a:rPr>
-              <a:t>Resignation minus checkmate</a:t>
+              <a:t>Rematches removed</a:t>
             </a:r>
             <a:endParaRPr lang="en-US" sz="1400" dirty="0"/>
           </a:p>
@@ -23257,14 +22707,14 @@
       </p:sp>
       <p:sp>
         <p:nvSpPr>
-          <p:cNvPr id="11" name="ci 1"/>
+          <p:cNvPr id="13" name="ci 2"/>
           <p:cNvSpPr/>
           <p:nvPr/>
         </p:nvSpPr>
         <p:spPr>
           <a:xfrm>
-            <a:off x="4011930" y="2313432"/>
-            <a:ext cx="1256157" cy="0"/>
+            <a:off x="4156601" y="2263140"/>
+            <a:ext cx="1384663" cy="0"/>
           </a:xfrm>
           <a:prstGeom prst="line">
             <a:avLst/>
@@ -23280,13 +22730,13 @@
       </p:sp>
       <p:sp>
         <p:nvSpPr>
-          <p:cNvPr id="12" name="est 1"/>
+          <p:cNvPr id="14" name="est 2"/>
           <p:cNvSpPr/>
           <p:nvPr/>
         </p:nvSpPr>
         <p:spPr>
           <a:xfrm>
-            <a:off x="4566857" y="2240280"/>
+            <a:off x="4773168" y="2189988"/>
             <a:ext cx="146304" cy="146304"/>
           </a:xfrm>
           <a:prstGeom prst="ellipse">
@@ -23305,13 +22755,13 @@
       </p:sp>
       <p:sp>
         <p:nvSpPr>
-          <p:cNvPr id="13" name="Text 11"/>
+          <p:cNvPr id="15" name="Text 13"/>
           <p:cNvSpPr txBox="1"/>
           <p:nvPr/>
         </p:nvSpPr>
         <p:spPr>
           <a:xfrm>
-            <a:off x="5341239" y="2185416"/>
+            <a:off x="5614416" y="2135124"/>
             <a:ext cx="548640" cy="256032"/>
           </a:xfrm>
           <a:prstGeom prst="rect">
@@ -23336,7 +22786,7 @@
                 <a:ea typeface="Arial" pitchFamily="34" charset="-122"/>
                 <a:cs typeface="Arial" pitchFamily="34" charset="-120"/>
               </a:rPr>
-              <a:t>+0.97</a:t>
+              <a:t>+1.85</a:t>
             </a:r>
             <a:endParaRPr lang="en-US" sz="1300" dirty="0"/>
           </a:p>
@@ -23344,14 +22794,14 @@
       </p:sp>
       <p:sp>
         <p:nvSpPr>
-          <p:cNvPr id="14" name="Text 12"/>
+          <p:cNvPr id="16" name="Text 14"/>
           <p:cNvSpPr txBox="1"/>
           <p:nvPr/>
         </p:nvSpPr>
         <p:spPr>
           <a:xfrm>
-            <a:off x="457200" y="2743200"/>
-            <a:ext cx="2057400" cy="457200"/>
+            <a:off x="457200" y="2464308"/>
+            <a:ext cx="2240280" cy="457200"/>
           </a:xfrm>
           <a:prstGeom prst="rect">
             <a:avLst/>
@@ -23367,15 +22817,15 @@
               <a:buNone/>
             </a:pPr>
             <a:r>
-              <a:rPr lang="en-US" sz="1400" b="1" dirty="0">
-                <a:solidFill>
-                  <a:srgbClr val="C27C0E"/>
+              <a:rPr lang="en-US" sz="1400" dirty="0">
+                <a:solidFill>
+                  <a:schemeClr val="tx1"/>
                 </a:solidFill>
                 <a:latin typeface="Arial" pitchFamily="34" charset="0"/>
                 <a:ea typeface="Arial" pitchFamily="34" charset="-122"/>
                 <a:cs typeface="Arial" pitchFamily="34" charset="-120"/>
               </a:rPr>
-              <a:t>Time minus resignation</a:t>
+              <a:t>Rating 1200–1600</a:t>
             </a:r>
             <a:endParaRPr lang="en-US" sz="1400" dirty="0"/>
           </a:p>
@@ -23383,14 +22833,14 @@
       </p:sp>
       <p:sp>
         <p:nvSpPr>
-          <p:cNvPr id="15" name="ci 2"/>
+          <p:cNvPr id="17" name="ci 3"/>
           <p:cNvSpPr/>
           <p:nvPr/>
         </p:nvSpPr>
         <p:spPr>
           <a:xfrm>
-            <a:off x="3031808" y="2971800"/>
-            <a:ext cx="1232154" cy="0"/>
+            <a:off x="3790841" y="2692908"/>
+            <a:ext cx="2074382" cy="0"/>
           </a:xfrm>
           <a:prstGeom prst="line">
             <a:avLst/>
@@ -23398,7 +22848,7 @@
           <a:noFill/>
           <a:ln w="31750">
             <a:solidFill>
-              <a:srgbClr val="C27C0E"/>
+              <a:srgbClr val="1F4E79"/>
             </a:solidFill>
             <a:prstDash val="solid"/>
           </a:ln>
@@ -23406,24 +22856,24 @@
       </p:sp>
       <p:sp>
         <p:nvSpPr>
-          <p:cNvPr id="16" name="est 2"/>
+          <p:cNvPr id="18" name="est 3"/>
           <p:cNvSpPr/>
           <p:nvPr/>
         </p:nvSpPr>
         <p:spPr>
           <a:xfrm>
-            <a:off x="3574733" y="2898648"/>
+            <a:off x="4757493" y="2619756"/>
             <a:ext cx="146304" cy="146304"/>
           </a:xfrm>
           <a:prstGeom prst="ellipse">
             <a:avLst/>
           </a:prstGeom>
           <a:solidFill>
-            <a:srgbClr val="C27C0E"/>
+            <a:srgbClr val="1F4E79"/>
           </a:solidFill>
           <a:ln w="12700">
             <a:solidFill>
-              <a:srgbClr val="C27C0E"/>
+              <a:srgbClr val="1F4E79"/>
             </a:solidFill>
             <a:prstDash val="solid"/>
           </a:ln>
@@ -23431,13 +22881,13 @@
       </p:sp>
       <p:sp>
         <p:nvSpPr>
-          <p:cNvPr id="17" name="Text 15"/>
+          <p:cNvPr id="19" name="Text 17"/>
           <p:cNvSpPr txBox="1"/>
           <p:nvPr/>
         </p:nvSpPr>
         <p:spPr>
           <a:xfrm>
-            <a:off x="4337114" y="2843784"/>
+            <a:off x="5938375" y="2564892"/>
             <a:ext cx="548640" cy="256032"/>
           </a:xfrm>
           <a:prstGeom prst="rect">
@@ -23456,13 +22906,13 @@
             <a:r>
               <a:rPr lang="en-US" sz="1300" b="1" dirty="0">
                 <a:solidFill>
-                  <a:srgbClr val="C27C0E"/>
+                  <a:srgbClr val="1F4E79"/>
                 </a:solidFill>
                 <a:latin typeface="Arial" pitchFamily="34" charset="0"/>
                 <a:ea typeface="Arial" pitchFamily="34" charset="-122"/>
                 <a:cs typeface="Arial" pitchFamily="34" charset="-120"/>
               </a:rPr>
-              <a:t>-1.51</a:t>
+              <a:t>+1.82</a:t>
             </a:r>
             <a:endParaRPr lang="en-US" sz="1300" dirty="0"/>
           </a:p>
@@ -23470,14 +22920,266 @@
       </p:sp>
       <p:sp>
         <p:nvSpPr>
-          <p:cNvPr id="18" name="axis"/>
+          <p:cNvPr id="20" name="Text 18"/>
+          <p:cNvSpPr txBox="1"/>
+          <p:nvPr/>
+        </p:nvSpPr>
+        <p:spPr>
+          <a:xfrm>
+            <a:off x="457200" y="2894076"/>
+            <a:ext cx="2240280" cy="457200"/>
+          </a:xfrm>
+          <a:prstGeom prst="rect">
+            <a:avLst/>
+          </a:prstGeom>
+          <a:noFill/>
+          <a:ln/>
+        </p:spPr>
+        <p:txBody>
+          <a:bodyPr wrap="square" lIns="0" tIns="0" rIns="0" bIns="0" rtlCol="0" anchor="ctr"/>
+          <a:lstStyle/>
+          <a:p>
+            <a:pPr indent="0" marL="0">
+              <a:buNone/>
+            </a:pPr>
+            <a:r>
+              <a:rPr lang="en-US" sz="1400" dirty="0">
+                <a:solidFill>
+                  <a:schemeClr val="tx1"/>
+                </a:solidFill>
+                <a:latin typeface="Arial" pitchFamily="34" charset="0"/>
+                <a:ea typeface="Arial" pitchFamily="34" charset="-122"/>
+                <a:cs typeface="Arial" pitchFamily="34" charset="-120"/>
+              </a:rPr>
+              <a:t>Rating 1600–2000</a:t>
+            </a:r>
+            <a:endParaRPr lang="en-US" sz="1400" dirty="0"/>
+          </a:p>
+        </p:txBody>
+      </p:sp>
+      <p:sp>
+        <p:nvSpPr>
+          <p:cNvPr id="21" name="ci 4"/>
           <p:cNvSpPr/>
           <p:nvPr/>
         </p:nvSpPr>
         <p:spPr>
           <a:xfrm>
-            <a:off x="2651760" y="3346704"/>
-            <a:ext cx="3200400" cy="0"/>
+            <a:off x="4120025" y="3122676"/>
+            <a:ext cx="1734747" cy="0"/>
+          </a:xfrm>
+          <a:prstGeom prst="line">
+            <a:avLst/>
+          </a:prstGeom>
+          <a:noFill/>
+          <a:ln w="31750">
+            <a:solidFill>
+              <a:srgbClr val="1F4E79"/>
+            </a:solidFill>
+            <a:prstDash val="solid"/>
+          </a:ln>
+        </p:spPr>
+      </p:sp>
+      <p:sp>
+        <p:nvSpPr>
+          <p:cNvPr id="22" name="est 4"/>
+          <p:cNvSpPr/>
+          <p:nvPr/>
+        </p:nvSpPr>
+        <p:spPr>
+          <a:xfrm>
+            <a:off x="4914247" y="3049524"/>
+            <a:ext cx="146304" cy="146304"/>
+          </a:xfrm>
+          <a:prstGeom prst="ellipse">
+            <a:avLst/>
+          </a:prstGeom>
+          <a:solidFill>
+            <a:srgbClr val="1F4E79"/>
+          </a:solidFill>
+          <a:ln w="12700">
+            <a:solidFill>
+              <a:srgbClr val="1F4E79"/>
+            </a:solidFill>
+            <a:prstDash val="solid"/>
+          </a:ln>
+        </p:spPr>
+      </p:sp>
+      <p:sp>
+        <p:nvSpPr>
+          <p:cNvPr id="23" name="Text 21"/>
+          <p:cNvSpPr txBox="1"/>
+          <p:nvPr/>
+        </p:nvSpPr>
+        <p:spPr>
+          <a:xfrm>
+            <a:off x="5927925" y="2994660"/>
+            <a:ext cx="548640" cy="256032"/>
+          </a:xfrm>
+          <a:prstGeom prst="rect">
+            <a:avLst/>
+          </a:prstGeom>
+          <a:noFill/>
+          <a:ln/>
+        </p:spPr>
+        <p:txBody>
+          <a:bodyPr wrap="square" lIns="0" tIns="0" rIns="0" bIns="0" rtlCol="0" anchor="ctr"/>
+          <a:lstStyle/>
+          <a:p>
+            <a:pPr indent="0" marL="0">
+              <a:buNone/>
+            </a:pPr>
+            <a:r>
+              <a:rPr lang="en-US" sz="1300" b="1" dirty="0">
+                <a:solidFill>
+                  <a:srgbClr val="1F4E79"/>
+                </a:solidFill>
+                <a:latin typeface="Arial" pitchFamily="34" charset="0"/>
+                <a:ea typeface="Arial" pitchFamily="34" charset="-122"/>
+                <a:cs typeface="Arial" pitchFamily="34" charset="-120"/>
+              </a:rPr>
+              <a:t>+2.12</a:t>
+            </a:r>
+            <a:endParaRPr lang="en-US" sz="1300" dirty="0"/>
+          </a:p>
+        </p:txBody>
+      </p:sp>
+      <p:sp>
+        <p:nvSpPr>
+          <p:cNvPr id="24" name="Text 22"/>
+          <p:cNvSpPr txBox="1"/>
+          <p:nvPr/>
+        </p:nvSpPr>
+        <p:spPr>
+          <a:xfrm>
+            <a:off x="457200" y="3323844"/>
+            <a:ext cx="2240280" cy="457200"/>
+          </a:xfrm>
+          <a:prstGeom prst="rect">
+            <a:avLst/>
+          </a:prstGeom>
+          <a:noFill/>
+          <a:ln/>
+        </p:spPr>
+        <p:txBody>
+          <a:bodyPr wrap="square" lIns="0" tIns="0" rIns="0" bIns="0" rtlCol="0" anchor="ctr"/>
+          <a:lstStyle/>
+          <a:p>
+            <a:pPr indent="0" marL="0">
+              <a:buNone/>
+            </a:pPr>
+            <a:r>
+              <a:rPr lang="en-US" sz="1400" dirty="0">
+                <a:solidFill>
+                  <a:schemeClr val="tx1"/>
+                </a:solidFill>
+                <a:latin typeface="Arial" pitchFamily="34" charset="0"/>
+                <a:ea typeface="Arial" pitchFamily="34" charset="-122"/>
+                <a:cs typeface="Arial" pitchFamily="34" charset="-120"/>
+              </a:rPr>
+              <a:t>Lucky = losing by 3+ pawns</a:t>
+            </a:r>
+            <a:endParaRPr lang="en-US" sz="1400" dirty="0"/>
+          </a:p>
+        </p:txBody>
+      </p:sp>
+      <p:sp>
+        <p:nvSpPr>
+          <p:cNvPr id="25" name="ci 5"/>
+          <p:cNvSpPr/>
+          <p:nvPr/>
+        </p:nvSpPr>
+        <p:spPr>
+          <a:xfrm>
+            <a:off x="4146151" y="3552444"/>
+            <a:ext cx="1473490" cy="0"/>
+          </a:xfrm>
+          <a:prstGeom prst="line">
+            <a:avLst/>
+          </a:prstGeom>
+          <a:noFill/>
+          <a:ln w="31750">
+            <a:solidFill>
+              <a:srgbClr val="1F4E79"/>
+            </a:solidFill>
+            <a:prstDash val="solid"/>
+          </a:ln>
+        </p:spPr>
+      </p:sp>
+      <p:sp>
+        <p:nvSpPr>
+          <p:cNvPr id="26" name="est 5"/>
+          <p:cNvSpPr/>
+          <p:nvPr/>
+        </p:nvSpPr>
+        <p:spPr>
+          <a:xfrm>
+            <a:off x="4809744" y="3479292"/>
+            <a:ext cx="146304" cy="146304"/>
+          </a:xfrm>
+          <a:prstGeom prst="ellipse">
+            <a:avLst/>
+          </a:prstGeom>
+          <a:solidFill>
+            <a:srgbClr val="1F4E79"/>
+          </a:solidFill>
+          <a:ln w="12700">
+            <a:solidFill>
+              <a:srgbClr val="1F4E79"/>
+            </a:solidFill>
+            <a:prstDash val="solid"/>
+          </a:ln>
+        </p:spPr>
+      </p:sp>
+      <p:sp>
+        <p:nvSpPr>
+          <p:cNvPr id="27" name="Text 25"/>
+          <p:cNvSpPr txBox="1"/>
+          <p:nvPr/>
+        </p:nvSpPr>
+        <p:spPr>
+          <a:xfrm>
+            <a:off x="5692793" y="3424428"/>
+            <a:ext cx="548640" cy="256032"/>
+          </a:xfrm>
+          <a:prstGeom prst="rect">
+            <a:avLst/>
+          </a:prstGeom>
+          <a:noFill/>
+          <a:ln/>
+        </p:spPr>
+        <p:txBody>
+          <a:bodyPr wrap="square" lIns="0" tIns="0" rIns="0" bIns="0" rtlCol="0" anchor="ctr"/>
+          <a:lstStyle/>
+          <a:p>
+            <a:pPr indent="0" marL="0">
+              <a:buNone/>
+            </a:pPr>
+            <a:r>
+              <a:rPr lang="en-US" sz="1300" b="1" dirty="0">
+                <a:solidFill>
+                  <a:srgbClr val="1F4E79"/>
+                </a:solidFill>
+                <a:latin typeface="Arial" pitchFamily="34" charset="0"/>
+                <a:ea typeface="Arial" pitchFamily="34" charset="-122"/>
+                <a:cs typeface="Arial" pitchFamily="34" charset="-120"/>
+              </a:rPr>
+              <a:t>+1.92</a:t>
+            </a:r>
+            <a:endParaRPr lang="en-US" sz="1300" dirty="0"/>
+          </a:p>
+        </p:txBody>
+      </p:sp>
+      <p:sp>
+        <p:nvSpPr>
+          <p:cNvPr id="28" name="axis"/>
+          <p:cNvSpPr/>
+          <p:nvPr/>
+        </p:nvSpPr>
+        <p:spPr>
+          <a:xfrm>
+            <a:off x="2834640" y="3813048"/>
+            <a:ext cx="3657600" cy="0"/>
           </a:xfrm>
           <a:prstGeom prst="line">
             <a:avLst/>
@@ -23493,52 +23195,13 @@
       </p:sp>
       <p:sp>
         <p:nvSpPr>
-          <p:cNvPr id="19" name="Text 17"/>
+          <p:cNvPr id="29" name="Text 27"/>
           <p:cNvSpPr txBox="1"/>
           <p:nvPr/>
         </p:nvSpPr>
         <p:spPr>
           <a:xfrm>
-            <a:off x="2377440" y="3383280"/>
-            <a:ext cx="548640" cy="228600"/>
-          </a:xfrm>
-          <a:prstGeom prst="rect">
-            <a:avLst/>
-          </a:prstGeom>
-          <a:noFill/>
-          <a:ln/>
-        </p:spPr>
-        <p:txBody>
-          <a:bodyPr wrap="square" lIns="0" tIns="0" rIns="0" bIns="0" rtlCol="0" anchor="t"/>
-          <a:lstStyle/>
-          <a:p>
-            <a:pPr algn="ctr" indent="0" marL="0">
-              <a:buNone/>
-            </a:pPr>
-            <a:r>
-              <a:rPr lang="en-US" sz="1300" dirty="0">
-                <a:solidFill>
-                  <a:srgbClr val="777777"/>
-                </a:solidFill>
-                <a:latin typeface="Arial" pitchFamily="34" charset="0"/>
-                <a:ea typeface="Arial" pitchFamily="34" charset="-122"/>
-                <a:cs typeface="Arial" pitchFamily="34" charset="-120"/>
-              </a:rPr>
-              <a:t>-4</a:t>
-            </a:r>
-            <a:endParaRPr lang="en-US" sz="1300" dirty="0"/>
-          </a:p>
-        </p:txBody>
-      </p:sp>
-      <p:sp>
-        <p:nvSpPr>
-          <p:cNvPr id="20" name="Text 18"/>
-          <p:cNvSpPr txBox="1"/>
-          <p:nvPr/>
-        </p:nvSpPr>
-        <p:spPr>
-          <a:xfrm>
-            <a:off x="3177540" y="3383280"/>
+            <a:off x="2560320" y="3849624"/>
             <a:ext cx="548640" cy="228600"/>
           </a:xfrm>
           <a:prstGeom prst="rect">
@@ -23571,13 +23234,13 @@
       </p:sp>
       <p:sp>
         <p:nvSpPr>
-          <p:cNvPr id="21" name="Text 19"/>
+          <p:cNvPr id="30" name="Text 28"/>
           <p:cNvSpPr txBox="1"/>
           <p:nvPr/>
         </p:nvSpPr>
         <p:spPr>
           <a:xfrm>
-            <a:off x="3977640" y="3383280"/>
+            <a:off x="3605349" y="3849624"/>
             <a:ext cx="548640" cy="228600"/>
           </a:xfrm>
           <a:prstGeom prst="rect">
@@ -23610,13 +23273,13 @@
       </p:sp>
       <p:sp>
         <p:nvSpPr>
-          <p:cNvPr id="22" name="Text 20"/>
+          <p:cNvPr id="31" name="Text 29"/>
           <p:cNvSpPr txBox="1"/>
           <p:nvPr/>
         </p:nvSpPr>
         <p:spPr>
           <a:xfrm>
-            <a:off x="4777740" y="3383280"/>
+            <a:off x="4650377" y="3849624"/>
             <a:ext cx="548640" cy="228600"/>
           </a:xfrm>
           <a:prstGeom prst="rect">
@@ -23649,13 +23312,13 @@
       </p:sp>
       <p:sp>
         <p:nvSpPr>
-          <p:cNvPr id="23" name="Text 21"/>
+          <p:cNvPr id="32" name="Text 30"/>
           <p:cNvSpPr txBox="1"/>
           <p:nvPr/>
         </p:nvSpPr>
         <p:spPr>
           <a:xfrm>
-            <a:off x="5577840" y="3383280"/>
+            <a:off x="5695406" y="3849624"/>
             <a:ext cx="548640" cy="228600"/>
           </a:xfrm>
           <a:prstGeom prst="rect">
@@ -23688,14 +23351,14 @@
       </p:sp>
       <p:sp>
         <p:nvSpPr>
-          <p:cNvPr id="24" name="Text 22"/>
+          <p:cNvPr id="33" name="Text 31"/>
           <p:cNvSpPr txBox="1"/>
           <p:nvPr/>
         </p:nvSpPr>
         <p:spPr>
           <a:xfrm>
-            <a:off x="2651760" y="3950208"/>
-            <a:ext cx="3200400" cy="256032"/>
+            <a:off x="2834640" y="4416552"/>
+            <a:ext cx="3657600" cy="256032"/>
           </a:xfrm>
           <a:prstGeom prst="rect">
             <a:avLst/>
@@ -23719,7 +23382,7 @@
                 <a:ea typeface="Arial" pitchFamily="34" charset="-122"/>
                 <a:cs typeface="Arial" pitchFamily="34" charset="-120"/>
               </a:rPr>
-              <a:t>Difference in next-game ACPL, cp (90% interval)</a:t>
+              <a:t>Lucky minus deserved, cp (95% interval)</a:t>
             </a:r>
             <a:endParaRPr lang="en-US" sz="1300" dirty="0"/>
           </a:p>
@@ -23727,14 +23390,14 @@
       </p:sp>
       <p:sp>
         <p:nvSpPr>
-          <p:cNvPr id="25" name="Text 23"/>
+          <p:cNvPr id="34" name="Text 32"/>
           <p:cNvSpPr txBox="1"/>
           <p:nvPr/>
         </p:nvSpPr>
         <p:spPr>
           <a:xfrm>
-            <a:off x="6035040" y="1234440"/>
-            <a:ext cx="2651760" cy="365760"/>
+            <a:off x="6766560" y="1188720"/>
+            <a:ext cx="1920240" cy="365760"/>
           </a:xfrm>
           <a:prstGeom prst="rect">
             <a:avLst/>
@@ -23758,7 +23421,7 @@
                 <a:ea typeface="Arial" pitchFamily="34" charset="-122"/>
                 <a:cs typeface="Arial" pitchFamily="34" charset="-120"/>
               </a:rPr>
-              <a:t>Verdict: inconclusive</a:t>
+              <a:t>Why checks</a:t>
             </a:r>
             <a:endParaRPr lang="en-US" sz="2000" dirty="0"/>
           </a:p>
@@ -23766,14 +23429,14 @@
       </p:sp>
       <p:sp>
         <p:nvSpPr>
-          <p:cNvPr id="26" name="Text 24"/>
+          <p:cNvPr id="35" name="Text 33"/>
           <p:cNvSpPr txBox="1"/>
           <p:nvPr/>
         </p:nvSpPr>
         <p:spPr>
           <a:xfrm>
-            <a:off x="6035040" y="1691640"/>
-            <a:ext cx="2651760" cy="2743200"/>
+            <a:off x="6766560" y="1645920"/>
+            <a:ext cx="1920240" cy="2011680"/>
           </a:xfrm>
           <a:prstGeom prst="rect">
             <a:avLst/>
@@ -23785,12 +23448,8 @@
           <a:bodyPr wrap="square" lIns="0" tIns="0" rIns="0" bIns="0" rtlCol="0" anchor="t"/>
           <a:lstStyle/>
           <a:p>
-            <a:pPr marL="342900" indent="-342900">
-              <a:spcAft>
-                <a:spcPts val="1000"/>
-              </a:spcAft>
-              <a:buSzPct val="100000"/>
-              <a:buChar char="•"/>
+            <a:pPr indent="0" marL="0">
+              <a:buNone/>
             </a:pPr>
             <a:r>
               <a:rPr lang="en-US" sz="2000" dirty="0">
@@ -23801,67 +23460,46 @@
                 <a:ea typeface="Arial" pitchFamily="34" charset="-122"/>
                 <a:cs typeface="Arial" pitchFamily="34" charset="-120"/>
               </a:rPr>
-              <a:t>No gap was significant (p = 0.26)</a:t>
+              <a:t>A real effect should survive changes to the method.</a:t>
             </a:r>
             <a:endParaRPr lang="en-US" sz="2000" dirty="0"/>
           </a:p>
-          <a:p>
-            <a:pPr marL="342900" indent="-342900">
-              <a:spcAft>
-                <a:spcPts val="1000"/>
-              </a:spcAft>
-              <a:buSzPct val="100000"/>
-              <a:buChar char="•"/>
+        </p:txBody>
+      </p:sp>
+      <p:sp>
+        <p:nvSpPr>
+          <p:cNvPr id="36" name="Text 34"/>
+          <p:cNvSpPr txBox="1"/>
+          <p:nvPr/>
+        </p:nvSpPr>
+        <p:spPr>
+          <a:xfrm>
+            <a:off x="457200" y="4709160"/>
+            <a:ext cx="7680960" cy="274320"/>
+          </a:xfrm>
+          <a:prstGeom prst="rect">
+            <a:avLst/>
+          </a:prstGeom>
+          <a:noFill/>
+          <a:ln/>
+        </p:spPr>
+        <p:txBody>
+          <a:bodyPr wrap="square" lIns="0" tIns="0" rIns="0" bIns="0" rtlCol="0" anchor="ctr"/>
+          <a:lstStyle/>
+          <a:p>
+            <a:pPr indent="0" marL="0">
+              <a:buNone/>
             </a:pPr>
             <a:r>
-              <a:rPr lang="en-US" sz="2000" dirty="0">
-                <a:solidFill>
-                  <a:schemeClr val="tx1"/>
+              <a:rPr lang="en-US" sz="1200" dirty="0">
+                <a:solidFill>
+                  <a:srgbClr val="777777"/>
                 </a:solidFill>
                 <a:latin typeface="Arial" pitchFamily="34" charset="0"/>
                 <a:ea typeface="Arial" pitchFamily="34" charset="-122"/>
                 <a:cs typeface="Arial" pitchFamily="34" charset="-120"/>
               </a:rPr>
-              <a:t>One interval misses the zone by 0.05 cp</a:t>
-            </a:r>
-            <a:endParaRPr lang="en-US" sz="2000" dirty="0"/>
-          </a:p>
-        </p:txBody>
-      </p:sp>
-      <p:sp>
-        <p:nvSpPr>
-          <p:cNvPr id="27" name="Text 25"/>
-          <p:cNvSpPr txBox="1"/>
-          <p:nvPr/>
-        </p:nvSpPr>
-        <p:spPr>
-          <a:xfrm>
-            <a:off x="457200" y="4709160"/>
-            <a:ext cx="7680960" cy="274320"/>
-          </a:xfrm>
-          <a:prstGeom prst="rect">
-            <a:avLst/>
-          </a:prstGeom>
-          <a:noFill/>
-          <a:ln/>
-        </p:spPr>
-        <p:txBody>
-          <a:bodyPr wrap="square" lIns="0" tIns="0" rIns="0" bIns="0" rtlCol="0" anchor="ctr"/>
-          <a:lstStyle/>
-          <a:p>
-            <a:pPr indent="0" marL="0">
-              <a:buNone/>
-            </a:pPr>
-            <a:r>
-              <a:rPr lang="en-US" sz="1200" dirty="0">
-                <a:solidFill>
-                  <a:srgbClr val="777777"/>
-                </a:solidFill>
-                <a:latin typeface="Arial" pitchFamily="34" charset="0"/>
-                <a:ea typeface="Arial" pitchFamily="34" charset="-122"/>
-                <a:cs typeface="Arial" pitchFamily="34" charset="-120"/>
-              </a:rPr>
-              <a:t>About 6,000 pairs per group after a win on time, by checkmate and by resignation; Holm-corrected tests</a:t>
+              <a:t>A mixed model with a separate starting level per player also gave 1.96 cp (95% interval 0.66 to 3.27)</a:t>
             </a:r>
             <a:endParaRPr lang="en-US" sz="1200" dirty="0"/>
           </a:p>
@@ -23972,7 +23610,7 @@
                   <a:schemeClr val="tx2"/>
                 </a:solidFill>
               </a:rPr>
-              <a:t>Two separate studies on different games point the same way</a:t>
+              <a:t>The type of win itself still barely matters: every gap stayed within about 3 cp</a:t>
             </a:r>
             <a:endParaRPr lang="en-US" sz="2600" dirty="0"/>
           </a:p>
@@ -23980,14 +23618,78 @@
       </p:sp>
       <p:sp>
         <p:nvSpPr>
-          <p:cNvPr id="3" name="zero"/>
+          <p:cNvPr id="3" name="zone"/>
           <p:cNvSpPr/>
           <p:nvPr/>
         </p:nvSpPr>
         <p:spPr>
           <a:xfrm>
-            <a:off x="3977640" y="1417320"/>
-            <a:ext cx="0" cy="1828800"/>
+            <a:off x="3051810" y="1325880"/>
+            <a:ext cx="2400300" cy="1975104"/>
+          </a:xfrm>
+          <a:prstGeom prst="rect">
+            <a:avLst/>
+          </a:prstGeom>
+          <a:solidFill>
+            <a:srgbClr val="EBF3FA"/>
+          </a:solidFill>
+          <a:ln w="12700">
+            <a:solidFill>
+              <a:srgbClr val="EBF3FA"/>
+            </a:solidFill>
+            <a:prstDash val="solid"/>
+          </a:ln>
+        </p:spPr>
+      </p:sp>
+      <p:sp>
+        <p:nvSpPr>
+          <p:cNvPr id="4" name="Text 2"/>
+          <p:cNvSpPr txBox="1"/>
+          <p:nvPr/>
+        </p:nvSpPr>
+        <p:spPr>
+          <a:xfrm>
+            <a:off x="2594610" y="3648456"/>
+            <a:ext cx="3314700" cy="256032"/>
+          </a:xfrm>
+          <a:prstGeom prst="rect">
+            <a:avLst/>
+          </a:prstGeom>
+          <a:noFill/>
+          <a:ln/>
+        </p:spPr>
+        <p:txBody>
+          <a:bodyPr wrap="square" lIns="0" tIns="0" rIns="0" bIns="0" rtlCol="0" anchor="t"/>
+          <a:lstStyle/>
+          <a:p>
+            <a:pPr algn="ctr" indent="0" marL="0">
+              <a:buNone/>
+            </a:pPr>
+            <a:r>
+              <a:rPr lang="en-US" sz="1300" dirty="0">
+                <a:solidFill>
+                  <a:srgbClr val="2E75B6"/>
+                </a:solidFill>
+                <a:latin typeface="Arial" pitchFamily="34" charset="0"/>
+                <a:ea typeface="Arial" pitchFamily="34" charset="-122"/>
+                <a:cs typeface="Arial" pitchFamily="34" charset="-120"/>
+              </a:rPr>
+              <a:t>"no real difference" zone: ±3 cp</a:t>
+            </a:r>
+            <a:endParaRPr lang="en-US" sz="1300" dirty="0"/>
+          </a:p>
+        </p:txBody>
+      </p:sp>
+      <p:sp>
+        <p:nvSpPr>
+          <p:cNvPr id="5" name="zero"/>
+          <p:cNvSpPr/>
+          <p:nvPr/>
+        </p:nvSpPr>
+        <p:spPr>
+          <a:xfrm>
+            <a:off x="4251960" y="1280160"/>
+            <a:ext cx="0" cy="2066544"/>
           </a:xfrm>
           <a:prstGeom prst="line">
             <a:avLst/>
@@ -24003,14 +23705,14 @@
       </p:sp>
       <p:sp>
         <p:nvSpPr>
-          <p:cNvPr id="4" name="Text 2"/>
+          <p:cNvPr id="6" name="Text 4"/>
           <p:cNvSpPr txBox="1"/>
           <p:nvPr/>
         </p:nvSpPr>
         <p:spPr>
           <a:xfrm>
-            <a:off x="457200" y="1668780"/>
-            <a:ext cx="2606040" cy="457200"/>
+            <a:off x="457200" y="1426464"/>
+            <a:ext cx="2057400" cy="457200"/>
           </a:xfrm>
           <a:prstGeom prst="rect">
             <a:avLst/>
@@ -24034,7 +23736,7 @@
                 <a:ea typeface="Arial" pitchFamily="34" charset="-122"/>
                 <a:cs typeface="Arial" pitchFamily="34" charset="-120"/>
               </a:rPr>
-              <a:t>Study 1: lucky vs checkmate (unplanned, n = 1,288)</a:t>
+              <a:t>Time minus checkmate</a:t>
             </a:r>
             <a:endParaRPr lang="en-US" sz="1400" dirty="0"/>
           </a:p>
@@ -24042,14 +23744,14 @@
       </p:sp>
       <p:sp>
         <p:nvSpPr>
-          <p:cNvPr id="5" name="ci 0"/>
+          <p:cNvPr id="7" name="ci 0"/>
           <p:cNvSpPr/>
           <p:nvPr/>
         </p:nvSpPr>
         <p:spPr>
           <a:xfrm>
-            <a:off x="3655085" y="1897380"/>
-            <a:ext cx="2374468" cy="0"/>
+            <a:off x="3415856" y="1655064"/>
+            <a:ext cx="1240155" cy="0"/>
           </a:xfrm>
           <a:prstGeom prst="line">
             <a:avLst/>
@@ -24065,13 +23767,13 @@
       </p:sp>
       <p:sp>
         <p:nvSpPr>
-          <p:cNvPr id="6" name="est 0"/>
+          <p:cNvPr id="8" name="est 0"/>
           <p:cNvSpPr/>
           <p:nvPr/>
         </p:nvSpPr>
         <p:spPr>
           <a:xfrm>
-            <a:off x="4771111" y="1824228"/>
+            <a:off x="3962781" y="1581912"/>
             <a:ext cx="146304" cy="146304"/>
           </a:xfrm>
           <a:prstGeom prst="ellipse">
@@ -24090,13 +23792,13 @@
       </p:sp>
       <p:sp>
         <p:nvSpPr>
-          <p:cNvPr id="7" name="Text 5"/>
+          <p:cNvPr id="9" name="Text 7"/>
           <p:cNvSpPr txBox="1"/>
           <p:nvPr/>
         </p:nvSpPr>
         <p:spPr>
           <a:xfrm>
-            <a:off x="6102706" y="1769364"/>
+            <a:off x="4729163" y="1527048"/>
             <a:ext cx="548640" cy="256032"/>
           </a:xfrm>
           <a:prstGeom prst="rect">
@@ -24121,7 +23823,7 @@
                 <a:ea typeface="Arial" pitchFamily="34" charset="-122"/>
                 <a:cs typeface="Arial" pitchFamily="34" charset="-120"/>
               </a:rPr>
-              <a:t>+2.23</a:t>
+              <a:t>-0.54</a:t>
             </a:r>
             <a:endParaRPr lang="en-US" sz="1300" dirty="0"/>
           </a:p>
@@ -24129,14 +23831,14 @@
       </p:sp>
       <p:sp>
         <p:nvSpPr>
-          <p:cNvPr id="8" name="Text 6"/>
+          <p:cNvPr id="10" name="Text 8"/>
           <p:cNvSpPr txBox="1"/>
           <p:nvPr/>
         </p:nvSpPr>
         <p:spPr>
           <a:xfrm>
-            <a:off x="457200" y="2537460"/>
-            <a:ext cx="2606040" cy="457200"/>
+            <a:off x="457200" y="2084832"/>
+            <a:ext cx="2057400" cy="457200"/>
           </a:xfrm>
           <a:prstGeom prst="rect">
             <a:avLst/>
@@ -24152,15 +23854,15 @@
               <a:buNone/>
             </a:pPr>
             <a:r>
-              <a:rPr lang="en-US" sz="1400" b="1" dirty="0">
-                <a:solidFill>
-                  <a:srgbClr val="C27C0E"/>
+              <a:rPr lang="en-US" sz="1400" dirty="0">
+                <a:solidFill>
+                  <a:schemeClr val="tx1"/>
                 </a:solidFill>
                 <a:latin typeface="Arial" pitchFamily="34" charset="0"/>
                 <a:ea typeface="Arial" pitchFamily="34" charset="-122"/>
                 <a:cs typeface="Arial" pitchFamily="34" charset="-120"/>
               </a:rPr>
-              <a:t>Study 2: lucky vs deserved (planned, n = 12,033)</a:t>
+              <a:t>Resignation minus checkmate</a:t>
             </a:r>
             <a:endParaRPr lang="en-US" sz="1400" dirty="0"/>
           </a:p>
@@ -24168,14 +23870,140 @@
       </p:sp>
       <p:sp>
         <p:nvSpPr>
-          <p:cNvPr id="9" name="ci 1"/>
+          <p:cNvPr id="11" name="ci 1"/>
           <p:cNvSpPr/>
           <p:nvPr/>
         </p:nvSpPr>
         <p:spPr>
           <a:xfrm>
-            <a:off x="4234129" y="2766060"/>
-            <a:ext cx="1014298" cy="0"/>
+            <a:off x="4011930" y="2313432"/>
+            <a:ext cx="1256157" cy="0"/>
+          </a:xfrm>
+          <a:prstGeom prst="line">
+            <a:avLst/>
+          </a:prstGeom>
+          <a:noFill/>
+          <a:ln w="31750">
+            <a:solidFill>
+              <a:srgbClr val="1F4E79"/>
+            </a:solidFill>
+            <a:prstDash val="solid"/>
+          </a:ln>
+        </p:spPr>
+      </p:sp>
+      <p:sp>
+        <p:nvSpPr>
+          <p:cNvPr id="12" name="est 1"/>
+          <p:cNvSpPr/>
+          <p:nvPr/>
+        </p:nvSpPr>
+        <p:spPr>
+          <a:xfrm>
+            <a:off x="4566857" y="2240280"/>
+            <a:ext cx="146304" cy="146304"/>
+          </a:xfrm>
+          <a:prstGeom prst="ellipse">
+            <a:avLst/>
+          </a:prstGeom>
+          <a:solidFill>
+            <a:srgbClr val="1F4E79"/>
+          </a:solidFill>
+          <a:ln w="12700">
+            <a:solidFill>
+              <a:srgbClr val="1F4E79"/>
+            </a:solidFill>
+            <a:prstDash val="solid"/>
+          </a:ln>
+        </p:spPr>
+      </p:sp>
+      <p:sp>
+        <p:nvSpPr>
+          <p:cNvPr id="13" name="Text 11"/>
+          <p:cNvSpPr txBox="1"/>
+          <p:nvPr/>
+        </p:nvSpPr>
+        <p:spPr>
+          <a:xfrm>
+            <a:off x="5341239" y="2185416"/>
+            <a:ext cx="548640" cy="256032"/>
+          </a:xfrm>
+          <a:prstGeom prst="rect">
+            <a:avLst/>
+          </a:prstGeom>
+          <a:noFill/>
+          <a:ln/>
+        </p:spPr>
+        <p:txBody>
+          <a:bodyPr wrap="square" lIns="0" tIns="0" rIns="0" bIns="0" rtlCol="0" anchor="ctr"/>
+          <a:lstStyle/>
+          <a:p>
+            <a:pPr indent="0" marL="0">
+              <a:buNone/>
+            </a:pPr>
+            <a:r>
+              <a:rPr lang="en-US" sz="1300" b="1" dirty="0">
+                <a:solidFill>
+                  <a:srgbClr val="1F4E79"/>
+                </a:solidFill>
+                <a:latin typeface="Arial" pitchFamily="34" charset="0"/>
+                <a:ea typeface="Arial" pitchFamily="34" charset="-122"/>
+                <a:cs typeface="Arial" pitchFamily="34" charset="-120"/>
+              </a:rPr>
+              <a:t>+0.97</a:t>
+            </a:r>
+            <a:endParaRPr lang="en-US" sz="1300" dirty="0"/>
+          </a:p>
+        </p:txBody>
+      </p:sp>
+      <p:sp>
+        <p:nvSpPr>
+          <p:cNvPr id="14" name="Text 12"/>
+          <p:cNvSpPr txBox="1"/>
+          <p:nvPr/>
+        </p:nvSpPr>
+        <p:spPr>
+          <a:xfrm>
+            <a:off x="457200" y="2743200"/>
+            <a:ext cx="2057400" cy="457200"/>
+          </a:xfrm>
+          <a:prstGeom prst="rect">
+            <a:avLst/>
+          </a:prstGeom>
+          <a:noFill/>
+          <a:ln/>
+        </p:spPr>
+        <p:txBody>
+          <a:bodyPr wrap="square" lIns="0" tIns="0" rIns="0" bIns="0" rtlCol="0" anchor="ctr"/>
+          <a:lstStyle/>
+          <a:p>
+            <a:pPr indent="0" marL="0">
+              <a:buNone/>
+            </a:pPr>
+            <a:r>
+              <a:rPr lang="en-US" sz="1400" b="1" dirty="0">
+                <a:solidFill>
+                  <a:srgbClr val="C27C0E"/>
+                </a:solidFill>
+                <a:latin typeface="Arial" pitchFamily="34" charset="0"/>
+                <a:ea typeface="Arial" pitchFamily="34" charset="-122"/>
+                <a:cs typeface="Arial" pitchFamily="34" charset="-120"/>
+              </a:rPr>
+              <a:t>Time minus resignation</a:t>
+            </a:r>
+            <a:endParaRPr lang="en-US" sz="1400" dirty="0"/>
+          </a:p>
+        </p:txBody>
+      </p:sp>
+      <p:sp>
+        <p:nvSpPr>
+          <p:cNvPr id="15" name="ci 2"/>
+          <p:cNvSpPr/>
+          <p:nvPr/>
+        </p:nvSpPr>
+        <p:spPr>
+          <a:xfrm>
+            <a:off x="3031808" y="2971800"/>
+            <a:ext cx="1232154" cy="0"/>
           </a:xfrm>
           <a:prstGeom prst="line">
             <a:avLst/>
@@ -24191,13 +24019,13 @@
       </p:sp>
       <p:sp>
         <p:nvSpPr>
-          <p:cNvPr id="10" name="est 1"/>
+          <p:cNvPr id="16" name="est 2"/>
           <p:cNvSpPr/>
           <p:nvPr/>
         </p:nvSpPr>
         <p:spPr>
           <a:xfrm>
-            <a:off x="4666183" y="2692908"/>
+            <a:off x="3574733" y="2898648"/>
             <a:ext cx="146304" cy="146304"/>
           </a:xfrm>
           <a:prstGeom prst="ellipse">
@@ -24216,13 +24044,13 @@
       </p:sp>
       <p:sp>
         <p:nvSpPr>
-          <p:cNvPr id="11" name="Text 9"/>
+          <p:cNvPr id="17" name="Text 15"/>
           <p:cNvSpPr txBox="1"/>
           <p:nvPr/>
         </p:nvSpPr>
         <p:spPr>
           <a:xfrm>
-            <a:off x="5321579" y="2638044"/>
+            <a:off x="4337114" y="2843784"/>
             <a:ext cx="548640" cy="256032"/>
           </a:xfrm>
           <a:prstGeom prst="rect">
@@ -24247,7 +24075,7 @@
                 <a:ea typeface="Arial" pitchFamily="34" charset="-122"/>
                 <a:cs typeface="Arial" pitchFamily="34" charset="-120"/>
               </a:rPr>
-              <a:t>+1.96</a:t>
+              <a:t>-1.51</a:t>
             </a:r>
             <a:endParaRPr lang="en-US" sz="1300" dirty="0"/>
           </a:p>
@@ -24255,14 +24083,14 @@
       </p:sp>
       <p:sp>
         <p:nvSpPr>
-          <p:cNvPr id="12" name="axis"/>
+          <p:cNvPr id="18" name="axis"/>
           <p:cNvSpPr/>
           <p:nvPr/>
         </p:nvSpPr>
         <p:spPr>
           <a:xfrm>
-            <a:off x="3200400" y="3246120"/>
-            <a:ext cx="3108960" cy="0"/>
+            <a:off x="2651760" y="3346704"/>
+            <a:ext cx="3200400" cy="0"/>
           </a:xfrm>
           <a:prstGeom prst="line">
             <a:avLst/>
@@ -24278,13 +24106,52 @@
       </p:sp>
       <p:sp>
         <p:nvSpPr>
-          <p:cNvPr id="13" name="Text 11"/>
+          <p:cNvPr id="19" name="Text 17"/>
           <p:cNvSpPr txBox="1"/>
           <p:nvPr/>
         </p:nvSpPr>
         <p:spPr>
           <a:xfrm>
-            <a:off x="2926080" y="3282696"/>
+            <a:off x="2377440" y="3383280"/>
+            <a:ext cx="548640" cy="228600"/>
+          </a:xfrm>
+          <a:prstGeom prst="rect">
+            <a:avLst/>
+          </a:prstGeom>
+          <a:noFill/>
+          <a:ln/>
+        </p:spPr>
+        <p:txBody>
+          <a:bodyPr wrap="square" lIns="0" tIns="0" rIns="0" bIns="0" rtlCol="0" anchor="t"/>
+          <a:lstStyle/>
+          <a:p>
+            <a:pPr algn="ctr" indent="0" marL="0">
+              <a:buNone/>
+            </a:pPr>
+            <a:r>
+              <a:rPr lang="en-US" sz="1300" dirty="0">
+                <a:solidFill>
+                  <a:srgbClr val="777777"/>
+                </a:solidFill>
+                <a:latin typeface="Arial" pitchFamily="34" charset="0"/>
+                <a:ea typeface="Arial" pitchFamily="34" charset="-122"/>
+                <a:cs typeface="Arial" pitchFamily="34" charset="-120"/>
+              </a:rPr>
+              <a:t>-4</a:t>
+            </a:r>
+            <a:endParaRPr lang="en-US" sz="1300" dirty="0"/>
+          </a:p>
+        </p:txBody>
+      </p:sp>
+      <p:sp>
+        <p:nvSpPr>
+          <p:cNvPr id="20" name="Text 18"/>
+          <p:cNvSpPr txBox="1"/>
+          <p:nvPr/>
+        </p:nvSpPr>
+        <p:spPr>
+          <a:xfrm>
+            <a:off x="3177540" y="3383280"/>
             <a:ext cx="548640" cy="228600"/>
           </a:xfrm>
           <a:prstGeom prst="rect">
@@ -24317,13 +24184,13 @@
       </p:sp>
       <p:sp>
         <p:nvSpPr>
-          <p:cNvPr id="14" name="Text 12"/>
+          <p:cNvPr id="21" name="Text 19"/>
           <p:cNvSpPr txBox="1"/>
           <p:nvPr/>
         </p:nvSpPr>
         <p:spPr>
           <a:xfrm>
-            <a:off x="3703320" y="3282696"/>
+            <a:off x="3977640" y="3383280"/>
             <a:ext cx="548640" cy="228600"/>
           </a:xfrm>
           <a:prstGeom prst="rect">
@@ -24356,13 +24223,13 @@
       </p:sp>
       <p:sp>
         <p:nvSpPr>
-          <p:cNvPr id="15" name="Text 13"/>
+          <p:cNvPr id="22" name="Text 20"/>
           <p:cNvSpPr txBox="1"/>
           <p:nvPr/>
         </p:nvSpPr>
         <p:spPr>
           <a:xfrm>
-            <a:off x="4480560" y="3282696"/>
+            <a:off x="4777740" y="3383280"/>
             <a:ext cx="548640" cy="228600"/>
           </a:xfrm>
           <a:prstGeom prst="rect">
@@ -24395,13 +24262,13 @@
       </p:sp>
       <p:sp>
         <p:nvSpPr>
-          <p:cNvPr id="16" name="Text 14"/>
+          <p:cNvPr id="23" name="Text 21"/>
           <p:cNvSpPr txBox="1"/>
           <p:nvPr/>
         </p:nvSpPr>
         <p:spPr>
           <a:xfrm>
-            <a:off x="5257800" y="3282696"/>
+            <a:off x="5577840" y="3383280"/>
             <a:ext cx="548640" cy="228600"/>
           </a:xfrm>
           <a:prstGeom prst="rect">
@@ -24434,14 +24301,14 @@
       </p:sp>
       <p:sp>
         <p:nvSpPr>
-          <p:cNvPr id="17" name="Text 15"/>
+          <p:cNvPr id="24" name="Text 22"/>
           <p:cNvSpPr txBox="1"/>
           <p:nvPr/>
         </p:nvSpPr>
         <p:spPr>
           <a:xfrm>
-            <a:off x="6035040" y="3282696"/>
-            <a:ext cx="548640" cy="228600"/>
+            <a:off x="2651760" y="3950208"/>
+            <a:ext cx="3200400" cy="256032"/>
           </a:xfrm>
           <a:prstGeom prst="rect">
             <a:avLst/>
@@ -24465,7 +24332,7 @@
                 <a:ea typeface="Arial" pitchFamily="34" charset="-122"/>
                 <a:cs typeface="Arial" pitchFamily="34" charset="-120"/>
               </a:rPr>
-              <a:t>+6</a:t>
+              <a:t>Difference in next-game ACPL, cp (90% interval)</a:t>
             </a:r>
             <a:endParaRPr lang="en-US" sz="1300" dirty="0"/>
           </a:p>
@@ -24473,14 +24340,14 @@
       </p:sp>
       <p:sp>
         <p:nvSpPr>
-          <p:cNvPr id="18" name="Text 16"/>
+          <p:cNvPr id="25" name="Text 23"/>
           <p:cNvSpPr txBox="1"/>
           <p:nvPr/>
         </p:nvSpPr>
         <p:spPr>
           <a:xfrm>
-            <a:off x="3200400" y="3849624"/>
-            <a:ext cx="3108960" cy="256032"/>
+            <a:off x="6035040" y="1234440"/>
+            <a:ext cx="2651760" cy="365760"/>
           </a:xfrm>
           <a:prstGeom prst="rect">
             <a:avLst/>
@@ -24492,34 +24359,34 @@
           <a:bodyPr wrap="square" lIns="0" tIns="0" rIns="0" bIns="0" rtlCol="0" anchor="t"/>
           <a:lstStyle/>
           <a:p>
-            <a:pPr algn="ctr" indent="0" marL="0">
+            <a:pPr indent="0" marL="0">
               <a:buNone/>
             </a:pPr>
             <a:r>
-              <a:rPr lang="en-US" sz="1300" dirty="0">
-                <a:solidFill>
-                  <a:srgbClr val="777777"/>
+              <a:rPr lang="en-US" sz="2000" b="1" dirty="0">
+                <a:solidFill>
+                  <a:srgbClr val="2E75B6"/>
                 </a:solidFill>
                 <a:latin typeface="Arial" pitchFamily="34" charset="0"/>
                 <a:ea typeface="Arial" pitchFamily="34" charset="-122"/>
                 <a:cs typeface="Arial" pitchFamily="34" charset="-120"/>
               </a:rPr>
-              <a:t>Extra next-game mistakes after a lucky win, cp (95% interval)</a:t>
-            </a:r>
-            <a:endParaRPr lang="en-US" sz="1300" dirty="0"/>
-          </a:p>
-        </p:txBody>
-      </p:sp>
-      <p:sp>
-        <p:nvSpPr>
-          <p:cNvPr id="19" name="Text 17"/>
+              <a:t>Verdict: inconclusive</a:t>
+            </a:r>
+            <a:endParaRPr lang="en-US" sz="2000" dirty="0"/>
+          </a:p>
+        </p:txBody>
+      </p:sp>
+      <p:sp>
+        <p:nvSpPr>
+          <p:cNvPr id="26" name="Text 24"/>
           <p:cNvSpPr txBox="1"/>
           <p:nvPr/>
         </p:nvSpPr>
         <p:spPr>
           <a:xfrm>
-            <a:off x="6583680" y="1325880"/>
-            <a:ext cx="2103120" cy="365760"/>
+            <a:off x="6035040" y="1691640"/>
+            <a:ext cx="2651760" cy="2743200"/>
           </a:xfrm>
           <a:prstGeom prst="rect">
             <a:avLst/>
@@ -24531,47 +24398,33 @@
           <a:bodyPr wrap="square" lIns="0" tIns="0" rIns="0" bIns="0" rtlCol="0" anchor="t"/>
           <a:lstStyle/>
           <a:p>
-            <a:pPr indent="0" marL="0">
-              <a:buNone/>
+            <a:pPr marL="342900" indent="-342900">
+              <a:spcAft>
+                <a:spcPts val="1000"/>
+              </a:spcAft>
+              <a:buSzPct val="100000"/>
+              <a:buChar char="•"/>
             </a:pPr>
             <a:r>
-              <a:rPr lang="en-US" sz="2000" b="1" dirty="0">
-                <a:solidFill>
-                  <a:srgbClr val="2E75B6"/>
+              <a:rPr lang="en-US" sz="2000" dirty="0">
+                <a:solidFill>
+                  <a:schemeClr val="tx1"/>
                 </a:solidFill>
                 <a:latin typeface="Arial" pitchFamily="34" charset="0"/>
                 <a:ea typeface="Arial" pitchFamily="34" charset="-122"/>
                 <a:cs typeface="Arial" pitchFamily="34" charset="-120"/>
               </a:rPr>
-              <a:t>9× more data</a:t>
+              <a:t>No gap was significant (p = 0.26)</a:t>
             </a:r>
             <a:endParaRPr lang="en-US" sz="2000" dirty="0"/>
           </a:p>
-        </p:txBody>
-      </p:sp>
-      <p:sp>
-        <p:nvSpPr>
-          <p:cNvPr id="20" name="Text 18"/>
-          <p:cNvSpPr txBox="1"/>
-          <p:nvPr/>
-        </p:nvSpPr>
-        <p:spPr>
-          <a:xfrm>
-            <a:off x="6583680" y="1828800"/>
-            <a:ext cx="2103120" cy="2011680"/>
-          </a:xfrm>
-          <a:prstGeom prst="rect">
-            <a:avLst/>
-          </a:prstGeom>
-          <a:noFill/>
-          <a:ln/>
-        </p:spPr>
-        <p:txBody>
-          <a:bodyPr wrap="square" lIns="0" tIns="0" rIns="0" bIns="0" rtlCol="0" anchor="t"/>
-          <a:lstStyle/>
-          <a:p>
-            <a:pPr indent="0" marL="0">
-              <a:buNone/>
+          <a:p>
+            <a:pPr marL="342900" indent="-342900">
+              <a:spcAft>
+                <a:spcPts val="1000"/>
+              </a:spcAft>
+              <a:buSzPct val="100000"/>
+              <a:buChar char="•"/>
             </a:pPr>
             <a:r>
               <a:rPr lang="en-US" sz="2000" dirty="0">
@@ -24582,7 +24435,7 @@
                 <a:ea typeface="Arial" pitchFamily="34" charset="-122"/>
                 <a:cs typeface="Arial" pitchFamily="34" charset="-120"/>
               </a:rPr>
-              <a:t>Same direction, similar size, much tighter interval.</a:t>
+              <a:t>One interval misses the zone by 0.05 cp</a:t>
             </a:r>
             <a:endParaRPr lang="en-US" sz="2000" dirty="0"/>
           </a:p>
@@ -24590,7 +24443,7 @@
       </p:sp>
       <p:sp>
         <p:nvSpPr>
-          <p:cNvPr id="21" name="Text 19"/>
+          <p:cNvPr id="27" name="Text 25"/>
           <p:cNvSpPr txBox="1"/>
           <p:nvPr/>
         </p:nvSpPr>
@@ -24621,7 +24474,7 @@
                 <a:ea typeface="Arial" pitchFamily="34" charset="-122"/>
                 <a:cs typeface="Arial" pitchFamily="34" charset="-120"/>
               </a:rPr>
-              <a:t>Study 1: 1 to 5 Aug and 1 to 5 Sep 2026. Study 2: 6 to 30 Sep 2026. No game appears in both.</a:t>
+              <a:t>About 6,000 pairs per group after a win on time, by checkmate and by resignation; Holm-corrected tests</a:t>
             </a:r>
             <a:endParaRPr lang="en-US" sz="1200" dirty="0"/>
           </a:p>
@@ -24705,13 +24558,13 @@
           <p:cNvPr id="2" name="Text 0"/>
           <p:cNvSpPr/>
           <p:nvPr>
-            <p:ph idx="100" type="body" hasCustomPrompt="1"/>
+            <p:ph idx="100" type="title" hasCustomPrompt="1"/>
           </p:nvPr>
         </p:nvSpPr>
         <p:spPr>
           <a:xfrm>
-            <a:off x="640080" y="1554480"/>
-            <a:ext cx="7863840" cy="457200"/>
+            <a:off x="457200" y="228600"/>
+            <a:ext cx="8229600" cy="822960"/>
           </a:xfrm>
           <a:prstGeom prst="rect">
             <a:avLst/>
@@ -24727,29 +24580,50 @@
               <a:buNone/>
             </a:pPr>
             <a:r>
-              <a:rPr lang="en-US" sz="1800" dirty="0">
-                <a:solidFill>
-                  <a:schemeClr val="accent5"/>
+              <a:rPr lang="en-US" sz="2600" b="1" dirty="0">
+                <a:solidFill>
+                  <a:schemeClr val="tx2"/>
                 </a:solidFill>
               </a:rPr>
-              <a:t>Part 6</a:t>
-            </a:r>
-            <a:endParaRPr lang="en-US" sz="1800" dirty="0"/>
-          </a:p>
-        </p:txBody>
-      </p:sp>
-      <p:sp>
-        <p:nvSpPr>
-          <p:cNvPr id="3" name="Text 0"/>
+              <a:t>Two separate studies on different games point the same way</a:t>
+            </a:r>
+            <a:endParaRPr lang="en-US" sz="2600" dirty="0"/>
+          </a:p>
+        </p:txBody>
+      </p:sp>
+      <p:sp>
+        <p:nvSpPr>
+          <p:cNvPr id="3" name="zero"/>
           <p:cNvSpPr/>
-          <p:nvPr>
-            <p:ph idx="101" type="title" hasCustomPrompt="1"/>
-          </p:nvPr>
-        </p:nvSpPr>
-        <p:spPr>
-          <a:xfrm>
-            <a:off x="640080" y="2011680"/>
-            <a:ext cx="7863840" cy="1280160"/>
+          <p:nvPr/>
+        </p:nvSpPr>
+        <p:spPr>
+          <a:xfrm>
+            <a:off x="3977640" y="1417320"/>
+            <a:ext cx="0" cy="1828800"/>
+          </a:xfrm>
+          <a:prstGeom prst="line">
+            <a:avLst/>
+          </a:prstGeom>
+          <a:noFill/>
+          <a:ln w="12700">
+            <a:solidFill>
+              <a:srgbClr val="777777"/>
+            </a:solidFill>
+            <a:prstDash val="dash"/>
+          </a:ln>
+        </p:spPr>
+      </p:sp>
+      <p:sp>
+        <p:nvSpPr>
+          <p:cNvPr id="4" name="Text 2"/>
+          <p:cNvSpPr txBox="1"/>
+          <p:nvPr/>
+        </p:nvSpPr>
+        <p:spPr>
+          <a:xfrm>
+            <a:off x="457200" y="1668780"/>
+            <a:ext cx="2606040" cy="457200"/>
           </a:xfrm>
           <a:prstGeom prst="rect">
             <a:avLst/>
@@ -24758,21 +24632,659 @@
           <a:ln/>
         </p:spPr>
         <p:txBody>
-          <a:bodyPr wrap="square" lIns="0" tIns="0" rIns="0" bIns="0" rtlCol="0" anchor="t"/>
-          <a:lstStyle/>
-          <a:p>
-            <a:pPr algn="l" indent="0" marL="0">
+          <a:bodyPr wrap="square" lIns="0" tIns="0" rIns="0" bIns="0" rtlCol="0" anchor="ctr"/>
+          <a:lstStyle/>
+          <a:p>
+            <a:pPr indent="0" marL="0">
               <a:buNone/>
             </a:pPr>
             <a:r>
-              <a:rPr lang="en-US" sz="3600" b="1" dirty="0">
-                <a:solidFill>
-                  <a:schemeClr val="bg1"/>
-                </a:solidFill>
+              <a:rPr lang="en-US" sz="1400" dirty="0">
+                <a:solidFill>
+                  <a:schemeClr val="tx1"/>
+                </a:solidFill>
+                <a:latin typeface="Arial" pitchFamily="34" charset="0"/>
+                <a:ea typeface="Arial" pitchFamily="34" charset="-122"/>
+                <a:cs typeface="Arial" pitchFamily="34" charset="-120"/>
               </a:rPr>
-              <a:t>What it means</a:t>
-            </a:r>
-            <a:endParaRPr lang="en-US" sz="3600" dirty="0"/>
+              <a:t>Study 1: lucky vs checkmate (unplanned, n = 1,288)</a:t>
+            </a:r>
+            <a:endParaRPr lang="en-US" sz="1400" dirty="0"/>
+          </a:p>
+        </p:txBody>
+      </p:sp>
+      <p:sp>
+        <p:nvSpPr>
+          <p:cNvPr id="5" name="ci 0"/>
+          <p:cNvSpPr/>
+          <p:nvPr/>
+        </p:nvSpPr>
+        <p:spPr>
+          <a:xfrm>
+            <a:off x="3655085" y="1897380"/>
+            <a:ext cx="2374468" cy="0"/>
+          </a:xfrm>
+          <a:prstGeom prst="line">
+            <a:avLst/>
+          </a:prstGeom>
+          <a:noFill/>
+          <a:ln w="31750">
+            <a:solidFill>
+              <a:srgbClr val="1F4E79"/>
+            </a:solidFill>
+            <a:prstDash val="solid"/>
+          </a:ln>
+        </p:spPr>
+      </p:sp>
+      <p:sp>
+        <p:nvSpPr>
+          <p:cNvPr id="6" name="est 0"/>
+          <p:cNvSpPr/>
+          <p:nvPr/>
+        </p:nvSpPr>
+        <p:spPr>
+          <a:xfrm>
+            <a:off x="4771111" y="1824228"/>
+            <a:ext cx="146304" cy="146304"/>
+          </a:xfrm>
+          <a:prstGeom prst="ellipse">
+            <a:avLst/>
+          </a:prstGeom>
+          <a:solidFill>
+            <a:srgbClr val="1F4E79"/>
+          </a:solidFill>
+          <a:ln w="12700">
+            <a:solidFill>
+              <a:srgbClr val="1F4E79"/>
+            </a:solidFill>
+            <a:prstDash val="solid"/>
+          </a:ln>
+        </p:spPr>
+      </p:sp>
+      <p:sp>
+        <p:nvSpPr>
+          <p:cNvPr id="7" name="Text 5"/>
+          <p:cNvSpPr txBox="1"/>
+          <p:nvPr/>
+        </p:nvSpPr>
+        <p:spPr>
+          <a:xfrm>
+            <a:off x="6102706" y="1769364"/>
+            <a:ext cx="548640" cy="256032"/>
+          </a:xfrm>
+          <a:prstGeom prst="rect">
+            <a:avLst/>
+          </a:prstGeom>
+          <a:noFill/>
+          <a:ln/>
+        </p:spPr>
+        <p:txBody>
+          <a:bodyPr wrap="square" lIns="0" tIns="0" rIns="0" bIns="0" rtlCol="0" anchor="ctr"/>
+          <a:lstStyle/>
+          <a:p>
+            <a:pPr indent="0" marL="0">
+              <a:buNone/>
+            </a:pPr>
+            <a:r>
+              <a:rPr lang="en-US" sz="1300" b="1" dirty="0">
+                <a:solidFill>
+                  <a:srgbClr val="1F4E79"/>
+                </a:solidFill>
+                <a:latin typeface="Arial" pitchFamily="34" charset="0"/>
+                <a:ea typeface="Arial" pitchFamily="34" charset="-122"/>
+                <a:cs typeface="Arial" pitchFamily="34" charset="-120"/>
+              </a:rPr>
+              <a:t>+2.23</a:t>
+            </a:r>
+            <a:endParaRPr lang="en-US" sz="1300" dirty="0"/>
+          </a:p>
+        </p:txBody>
+      </p:sp>
+      <p:sp>
+        <p:nvSpPr>
+          <p:cNvPr id="8" name="Text 6"/>
+          <p:cNvSpPr txBox="1"/>
+          <p:nvPr/>
+        </p:nvSpPr>
+        <p:spPr>
+          <a:xfrm>
+            <a:off x="457200" y="2537460"/>
+            <a:ext cx="2606040" cy="457200"/>
+          </a:xfrm>
+          <a:prstGeom prst="rect">
+            <a:avLst/>
+          </a:prstGeom>
+          <a:noFill/>
+          <a:ln/>
+        </p:spPr>
+        <p:txBody>
+          <a:bodyPr wrap="square" lIns="0" tIns="0" rIns="0" bIns="0" rtlCol="0" anchor="ctr"/>
+          <a:lstStyle/>
+          <a:p>
+            <a:pPr indent="0" marL="0">
+              <a:buNone/>
+            </a:pPr>
+            <a:r>
+              <a:rPr lang="en-US" sz="1400" b="1" dirty="0">
+                <a:solidFill>
+                  <a:srgbClr val="C27C0E"/>
+                </a:solidFill>
+                <a:latin typeface="Arial" pitchFamily="34" charset="0"/>
+                <a:ea typeface="Arial" pitchFamily="34" charset="-122"/>
+                <a:cs typeface="Arial" pitchFamily="34" charset="-120"/>
+              </a:rPr>
+              <a:t>Study 2: lucky vs deserved (planned, n = 12,033)</a:t>
+            </a:r>
+            <a:endParaRPr lang="en-US" sz="1400" dirty="0"/>
+          </a:p>
+        </p:txBody>
+      </p:sp>
+      <p:sp>
+        <p:nvSpPr>
+          <p:cNvPr id="9" name="ci 1"/>
+          <p:cNvSpPr/>
+          <p:nvPr/>
+        </p:nvSpPr>
+        <p:spPr>
+          <a:xfrm>
+            <a:off x="4234129" y="2766060"/>
+            <a:ext cx="1014298" cy="0"/>
+          </a:xfrm>
+          <a:prstGeom prst="line">
+            <a:avLst/>
+          </a:prstGeom>
+          <a:noFill/>
+          <a:ln w="31750">
+            <a:solidFill>
+              <a:srgbClr val="C27C0E"/>
+            </a:solidFill>
+            <a:prstDash val="solid"/>
+          </a:ln>
+        </p:spPr>
+      </p:sp>
+      <p:sp>
+        <p:nvSpPr>
+          <p:cNvPr id="10" name="est 1"/>
+          <p:cNvSpPr/>
+          <p:nvPr/>
+        </p:nvSpPr>
+        <p:spPr>
+          <a:xfrm>
+            <a:off x="4666183" y="2692908"/>
+            <a:ext cx="146304" cy="146304"/>
+          </a:xfrm>
+          <a:prstGeom prst="ellipse">
+            <a:avLst/>
+          </a:prstGeom>
+          <a:solidFill>
+            <a:srgbClr val="C27C0E"/>
+          </a:solidFill>
+          <a:ln w="12700">
+            <a:solidFill>
+              <a:srgbClr val="C27C0E"/>
+            </a:solidFill>
+            <a:prstDash val="solid"/>
+          </a:ln>
+        </p:spPr>
+      </p:sp>
+      <p:sp>
+        <p:nvSpPr>
+          <p:cNvPr id="11" name="Text 9"/>
+          <p:cNvSpPr txBox="1"/>
+          <p:nvPr/>
+        </p:nvSpPr>
+        <p:spPr>
+          <a:xfrm>
+            <a:off x="5321579" y="2638044"/>
+            <a:ext cx="548640" cy="256032"/>
+          </a:xfrm>
+          <a:prstGeom prst="rect">
+            <a:avLst/>
+          </a:prstGeom>
+          <a:noFill/>
+          <a:ln/>
+        </p:spPr>
+        <p:txBody>
+          <a:bodyPr wrap="square" lIns="0" tIns="0" rIns="0" bIns="0" rtlCol="0" anchor="ctr"/>
+          <a:lstStyle/>
+          <a:p>
+            <a:pPr indent="0" marL="0">
+              <a:buNone/>
+            </a:pPr>
+            <a:r>
+              <a:rPr lang="en-US" sz="1300" b="1" dirty="0">
+                <a:solidFill>
+                  <a:srgbClr val="C27C0E"/>
+                </a:solidFill>
+                <a:latin typeface="Arial" pitchFamily="34" charset="0"/>
+                <a:ea typeface="Arial" pitchFamily="34" charset="-122"/>
+                <a:cs typeface="Arial" pitchFamily="34" charset="-120"/>
+              </a:rPr>
+              <a:t>+1.96</a:t>
+            </a:r>
+            <a:endParaRPr lang="en-US" sz="1300" dirty="0"/>
+          </a:p>
+        </p:txBody>
+      </p:sp>
+      <p:sp>
+        <p:nvSpPr>
+          <p:cNvPr id="12" name="axis"/>
+          <p:cNvSpPr/>
+          <p:nvPr/>
+        </p:nvSpPr>
+        <p:spPr>
+          <a:xfrm>
+            <a:off x="3200400" y="3246120"/>
+            <a:ext cx="3108960" cy="0"/>
+          </a:xfrm>
+          <a:prstGeom prst="line">
+            <a:avLst/>
+          </a:prstGeom>
+          <a:noFill/>
+          <a:ln w="12700">
+            <a:solidFill>
+              <a:srgbClr val="777777"/>
+            </a:solidFill>
+            <a:prstDash val="solid"/>
+          </a:ln>
+        </p:spPr>
+      </p:sp>
+      <p:sp>
+        <p:nvSpPr>
+          <p:cNvPr id="13" name="Text 11"/>
+          <p:cNvSpPr txBox="1"/>
+          <p:nvPr/>
+        </p:nvSpPr>
+        <p:spPr>
+          <a:xfrm>
+            <a:off x="2926080" y="3282696"/>
+            <a:ext cx="548640" cy="228600"/>
+          </a:xfrm>
+          <a:prstGeom prst="rect">
+            <a:avLst/>
+          </a:prstGeom>
+          <a:noFill/>
+          <a:ln/>
+        </p:spPr>
+        <p:txBody>
+          <a:bodyPr wrap="square" lIns="0" tIns="0" rIns="0" bIns="0" rtlCol="0" anchor="t"/>
+          <a:lstStyle/>
+          <a:p>
+            <a:pPr algn="ctr" indent="0" marL="0">
+              <a:buNone/>
+            </a:pPr>
+            <a:r>
+              <a:rPr lang="en-US" sz="1300" dirty="0">
+                <a:solidFill>
+                  <a:srgbClr val="777777"/>
+                </a:solidFill>
+                <a:latin typeface="Arial" pitchFamily="34" charset="0"/>
+                <a:ea typeface="Arial" pitchFamily="34" charset="-122"/>
+                <a:cs typeface="Arial" pitchFamily="34" charset="-120"/>
+              </a:rPr>
+              <a:t>-2</a:t>
+            </a:r>
+            <a:endParaRPr lang="en-US" sz="1300" dirty="0"/>
+          </a:p>
+        </p:txBody>
+      </p:sp>
+      <p:sp>
+        <p:nvSpPr>
+          <p:cNvPr id="14" name="Text 12"/>
+          <p:cNvSpPr txBox="1"/>
+          <p:nvPr/>
+        </p:nvSpPr>
+        <p:spPr>
+          <a:xfrm>
+            <a:off x="3703320" y="3282696"/>
+            <a:ext cx="548640" cy="228600"/>
+          </a:xfrm>
+          <a:prstGeom prst="rect">
+            <a:avLst/>
+          </a:prstGeom>
+          <a:noFill/>
+          <a:ln/>
+        </p:spPr>
+        <p:txBody>
+          <a:bodyPr wrap="square" lIns="0" tIns="0" rIns="0" bIns="0" rtlCol="0" anchor="t"/>
+          <a:lstStyle/>
+          <a:p>
+            <a:pPr algn="ctr" indent="0" marL="0">
+              <a:buNone/>
+            </a:pPr>
+            <a:r>
+              <a:rPr lang="en-US" sz="1300" dirty="0">
+                <a:solidFill>
+                  <a:srgbClr val="777777"/>
+                </a:solidFill>
+                <a:latin typeface="Arial" pitchFamily="34" charset="0"/>
+                <a:ea typeface="Arial" pitchFamily="34" charset="-122"/>
+                <a:cs typeface="Arial" pitchFamily="34" charset="-120"/>
+              </a:rPr>
+              <a:t>0</a:t>
+            </a:r>
+            <a:endParaRPr lang="en-US" sz="1300" dirty="0"/>
+          </a:p>
+        </p:txBody>
+      </p:sp>
+      <p:sp>
+        <p:nvSpPr>
+          <p:cNvPr id="15" name="Text 13"/>
+          <p:cNvSpPr txBox="1"/>
+          <p:nvPr/>
+        </p:nvSpPr>
+        <p:spPr>
+          <a:xfrm>
+            <a:off x="4480560" y="3282696"/>
+            <a:ext cx="548640" cy="228600"/>
+          </a:xfrm>
+          <a:prstGeom prst="rect">
+            <a:avLst/>
+          </a:prstGeom>
+          <a:noFill/>
+          <a:ln/>
+        </p:spPr>
+        <p:txBody>
+          <a:bodyPr wrap="square" lIns="0" tIns="0" rIns="0" bIns="0" rtlCol="0" anchor="t"/>
+          <a:lstStyle/>
+          <a:p>
+            <a:pPr algn="ctr" indent="0" marL="0">
+              <a:buNone/>
+            </a:pPr>
+            <a:r>
+              <a:rPr lang="en-US" sz="1300" dirty="0">
+                <a:solidFill>
+                  <a:srgbClr val="777777"/>
+                </a:solidFill>
+                <a:latin typeface="Arial" pitchFamily="34" charset="0"/>
+                <a:ea typeface="Arial" pitchFamily="34" charset="-122"/>
+                <a:cs typeface="Arial" pitchFamily="34" charset="-120"/>
+              </a:rPr>
+              <a:t>+2</a:t>
+            </a:r>
+            <a:endParaRPr lang="en-US" sz="1300" dirty="0"/>
+          </a:p>
+        </p:txBody>
+      </p:sp>
+      <p:sp>
+        <p:nvSpPr>
+          <p:cNvPr id="16" name="Text 14"/>
+          <p:cNvSpPr txBox="1"/>
+          <p:nvPr/>
+        </p:nvSpPr>
+        <p:spPr>
+          <a:xfrm>
+            <a:off x="5257800" y="3282696"/>
+            <a:ext cx="548640" cy="228600"/>
+          </a:xfrm>
+          <a:prstGeom prst="rect">
+            <a:avLst/>
+          </a:prstGeom>
+          <a:noFill/>
+          <a:ln/>
+        </p:spPr>
+        <p:txBody>
+          <a:bodyPr wrap="square" lIns="0" tIns="0" rIns="0" bIns="0" rtlCol="0" anchor="t"/>
+          <a:lstStyle/>
+          <a:p>
+            <a:pPr algn="ctr" indent="0" marL="0">
+              <a:buNone/>
+            </a:pPr>
+            <a:r>
+              <a:rPr lang="en-US" sz="1300" dirty="0">
+                <a:solidFill>
+                  <a:srgbClr val="777777"/>
+                </a:solidFill>
+                <a:latin typeface="Arial" pitchFamily="34" charset="0"/>
+                <a:ea typeface="Arial" pitchFamily="34" charset="-122"/>
+                <a:cs typeface="Arial" pitchFamily="34" charset="-120"/>
+              </a:rPr>
+              <a:t>+4</a:t>
+            </a:r>
+            <a:endParaRPr lang="en-US" sz="1300" dirty="0"/>
+          </a:p>
+        </p:txBody>
+      </p:sp>
+      <p:sp>
+        <p:nvSpPr>
+          <p:cNvPr id="17" name="Text 15"/>
+          <p:cNvSpPr txBox="1"/>
+          <p:nvPr/>
+        </p:nvSpPr>
+        <p:spPr>
+          <a:xfrm>
+            <a:off x="6035040" y="3282696"/>
+            <a:ext cx="548640" cy="228600"/>
+          </a:xfrm>
+          <a:prstGeom prst="rect">
+            <a:avLst/>
+          </a:prstGeom>
+          <a:noFill/>
+          <a:ln/>
+        </p:spPr>
+        <p:txBody>
+          <a:bodyPr wrap="square" lIns="0" tIns="0" rIns="0" bIns="0" rtlCol="0" anchor="t"/>
+          <a:lstStyle/>
+          <a:p>
+            <a:pPr algn="ctr" indent="0" marL="0">
+              <a:buNone/>
+            </a:pPr>
+            <a:r>
+              <a:rPr lang="en-US" sz="1300" dirty="0">
+                <a:solidFill>
+                  <a:srgbClr val="777777"/>
+                </a:solidFill>
+                <a:latin typeface="Arial" pitchFamily="34" charset="0"/>
+                <a:ea typeface="Arial" pitchFamily="34" charset="-122"/>
+                <a:cs typeface="Arial" pitchFamily="34" charset="-120"/>
+              </a:rPr>
+              <a:t>+6</a:t>
+            </a:r>
+            <a:endParaRPr lang="en-US" sz="1300" dirty="0"/>
+          </a:p>
+        </p:txBody>
+      </p:sp>
+      <p:sp>
+        <p:nvSpPr>
+          <p:cNvPr id="18" name="Text 16"/>
+          <p:cNvSpPr txBox="1"/>
+          <p:nvPr/>
+        </p:nvSpPr>
+        <p:spPr>
+          <a:xfrm>
+            <a:off x="3200400" y="3849624"/>
+            <a:ext cx="3108960" cy="256032"/>
+          </a:xfrm>
+          <a:prstGeom prst="rect">
+            <a:avLst/>
+          </a:prstGeom>
+          <a:noFill/>
+          <a:ln/>
+        </p:spPr>
+        <p:txBody>
+          <a:bodyPr wrap="square" lIns="0" tIns="0" rIns="0" bIns="0" rtlCol="0" anchor="t"/>
+          <a:lstStyle/>
+          <a:p>
+            <a:pPr algn="ctr" indent="0" marL="0">
+              <a:buNone/>
+            </a:pPr>
+            <a:r>
+              <a:rPr lang="en-US" sz="1300" dirty="0">
+                <a:solidFill>
+                  <a:srgbClr val="777777"/>
+                </a:solidFill>
+                <a:latin typeface="Arial" pitchFamily="34" charset="0"/>
+                <a:ea typeface="Arial" pitchFamily="34" charset="-122"/>
+                <a:cs typeface="Arial" pitchFamily="34" charset="-120"/>
+              </a:rPr>
+              <a:t>Extra next-game mistakes after a lucky win, cp (95% interval)</a:t>
+            </a:r>
+            <a:endParaRPr lang="en-US" sz="1300" dirty="0"/>
+          </a:p>
+        </p:txBody>
+      </p:sp>
+      <p:sp>
+        <p:nvSpPr>
+          <p:cNvPr id="19" name="Text 17"/>
+          <p:cNvSpPr txBox="1"/>
+          <p:nvPr/>
+        </p:nvSpPr>
+        <p:spPr>
+          <a:xfrm>
+            <a:off x="6583680" y="1325880"/>
+            <a:ext cx="2103120" cy="365760"/>
+          </a:xfrm>
+          <a:prstGeom prst="rect">
+            <a:avLst/>
+          </a:prstGeom>
+          <a:noFill/>
+          <a:ln/>
+        </p:spPr>
+        <p:txBody>
+          <a:bodyPr wrap="square" lIns="0" tIns="0" rIns="0" bIns="0" rtlCol="0" anchor="t"/>
+          <a:lstStyle/>
+          <a:p>
+            <a:pPr indent="0" marL="0">
+              <a:buNone/>
+            </a:pPr>
+            <a:r>
+              <a:rPr lang="en-US" sz="2000" b="1" dirty="0">
+                <a:solidFill>
+                  <a:srgbClr val="2E75B6"/>
+                </a:solidFill>
+                <a:latin typeface="Arial" pitchFamily="34" charset="0"/>
+                <a:ea typeface="Arial" pitchFamily="34" charset="-122"/>
+                <a:cs typeface="Arial" pitchFamily="34" charset="-120"/>
+              </a:rPr>
+              <a:t>9× more data</a:t>
+            </a:r>
+            <a:endParaRPr lang="en-US" sz="2000" dirty="0"/>
+          </a:p>
+        </p:txBody>
+      </p:sp>
+      <p:sp>
+        <p:nvSpPr>
+          <p:cNvPr id="20" name="Text 18"/>
+          <p:cNvSpPr txBox="1"/>
+          <p:nvPr/>
+        </p:nvSpPr>
+        <p:spPr>
+          <a:xfrm>
+            <a:off x="6583680" y="1828800"/>
+            <a:ext cx="2103120" cy="2011680"/>
+          </a:xfrm>
+          <a:prstGeom prst="rect">
+            <a:avLst/>
+          </a:prstGeom>
+          <a:noFill/>
+          <a:ln/>
+        </p:spPr>
+        <p:txBody>
+          <a:bodyPr wrap="square" lIns="0" tIns="0" rIns="0" bIns="0" rtlCol="0" anchor="t"/>
+          <a:lstStyle/>
+          <a:p>
+            <a:pPr indent="0" marL="0">
+              <a:buNone/>
+            </a:pPr>
+            <a:r>
+              <a:rPr lang="en-US" sz="2000" dirty="0">
+                <a:solidFill>
+                  <a:schemeClr val="tx1"/>
+                </a:solidFill>
+                <a:latin typeface="Arial" pitchFamily="34" charset="0"/>
+                <a:ea typeface="Arial" pitchFamily="34" charset="-122"/>
+                <a:cs typeface="Arial" pitchFamily="34" charset="-120"/>
+              </a:rPr>
+              <a:t>Same direction, similar size, much tighter interval.</a:t>
+            </a:r>
+            <a:endParaRPr lang="en-US" sz="2000" dirty="0"/>
+          </a:p>
+        </p:txBody>
+      </p:sp>
+      <p:sp>
+        <p:nvSpPr>
+          <p:cNvPr id="21" name="Text 19"/>
+          <p:cNvSpPr txBox="1"/>
+          <p:nvPr/>
+        </p:nvSpPr>
+        <p:spPr>
+          <a:xfrm>
+            <a:off x="457200" y="4709160"/>
+            <a:ext cx="7680960" cy="274320"/>
+          </a:xfrm>
+          <a:prstGeom prst="rect">
+            <a:avLst/>
+          </a:prstGeom>
+          <a:noFill/>
+          <a:ln/>
+        </p:spPr>
+        <p:txBody>
+          <a:bodyPr wrap="square" lIns="0" tIns="0" rIns="0" bIns="0" rtlCol="0" anchor="ctr"/>
+          <a:lstStyle/>
+          <a:p>
+            <a:pPr indent="0" marL="0">
+              <a:buNone/>
+            </a:pPr>
+            <a:r>
+              <a:rPr lang="en-US" sz="1200" dirty="0">
+                <a:solidFill>
+                  <a:srgbClr val="777777"/>
+                </a:solidFill>
+                <a:latin typeface="Arial" pitchFamily="34" charset="0"/>
+                <a:ea typeface="Arial" pitchFamily="34" charset="-122"/>
+                <a:cs typeface="Arial" pitchFamily="34" charset="-120"/>
+              </a:rPr>
+              <a:t>Study 1: 1 to 5 Aug and 1 to 5 Sep 2026. Study 2: 6 to 30 Sep 2026. No game appears in both.</a:t>
+            </a:r>
+            <a:endParaRPr lang="en-US" sz="1200" dirty="0"/>
+          </a:p>
+        </p:txBody>
+      </p:sp>
+      <p:sp>
+        <p:nvSpPr>
+          <p:cNvPr id="25" name="Slide Number Placeholder 0"/>
+          <p:cNvSpPr>
+            <a:spLocks noGrp="1"/>
+          </p:cNvSpPr>
+          <p:nvPr>
+            <p:ph type="sldNum" sz="quarter" idx="4294967295"/>
+          </p:nvPr>
+        </p:nvSpPr>
+        <p:spPr>
+          <a:xfrm>
+            <a:off x="8321040" y="4754880"/>
+            <a:ext cx="457200" cy="274320"/>
+          </a:xfrm>
+          <a:prstGeom prst="rect">
+            <a:avLst/>
+          </a:prstGeom>
+          <a:extLst>
+            <a:ext uri="{C572A759-6A51-4108-AA02-DFA0A04FC94B}">
+              <ma14:wrappingTextBoxFlag xmlns:ma14="http://schemas.microsoft.com/office/mac/drawingml/2011/main" val="0"/>
+            </a:ext>
+          </a:extLst>
+        </p:spPr>
+        <p:txBody>
+          <a:bodyPr/>
+          <a:lstStyle>
+            <a:lvl1pPr>
+              <a:defRPr sz="1100">
+                <a:solidFill>
+                  <a:srgbClr val="777777"/>
+                </a:solidFill>
+                <a:latin typeface="Arial"/>
+                <a:ea typeface="Arial"/>
+                <a:cs typeface="Arial"/>
+              </a:defRPr>
+            </a:lvl1pPr>
+          </a:lstStyle>
+          <a:p>
+            <a:pPr algn="l"/>
+            <a:fld id="{F7021451-1387-4CA6-816F-3879F97B5CBC}" type="slidenum">
+              <a:rPr b="0" lang="en-US"/>
+              <a:t>36</a:t>
+            </a:fld>
+            <a:endParaRPr lang="en-US"/>
           </a:p>
         </p:txBody>
       </p:sp>
@@ -24806,13 +25318,13 @@
           <p:cNvPr id="2" name="Text 0"/>
           <p:cNvSpPr/>
           <p:nvPr>
-            <p:ph idx="100" type="title" hasCustomPrompt="1"/>
+            <p:ph idx="100" type="body" hasCustomPrompt="1"/>
           </p:nvPr>
         </p:nvSpPr>
         <p:spPr>
           <a:xfrm>
-            <a:off x="457200" y="228600"/>
-            <a:ext cx="8229600" cy="822960"/>
+            <a:off x="640080" y="1554480"/>
+            <a:ext cx="7863840" cy="457200"/>
           </a:xfrm>
           <a:prstGeom prst="rect">
             <a:avLst/>
@@ -24828,27 +25340,29 @@
               <a:buNone/>
             </a:pPr>
             <a:r>
-              <a:rPr lang="en-US" sz="2600" b="1" dirty="0">
-                <a:solidFill>
-                  <a:schemeClr val="tx2"/>
+              <a:rPr lang="en-US" sz="1800" dirty="0">
+                <a:solidFill>
+                  <a:schemeClr val="accent5"/>
                 </a:solidFill>
               </a:rPr>
-              <a:t>An undeserved win leaves a small after-effect, worth about 53 rating points</a:t>
-            </a:r>
-            <a:endParaRPr lang="en-US" sz="2600" dirty="0"/>
-          </a:p>
-        </p:txBody>
-      </p:sp>
-      <p:sp>
-        <p:nvSpPr>
-          <p:cNvPr id="3" name="Text 1"/>
-          <p:cNvSpPr txBox="1"/>
-          <p:nvPr/>
-        </p:nvSpPr>
-        <p:spPr>
-          <a:xfrm>
-            <a:off x="457200" y="1188720"/>
-            <a:ext cx="3931920" cy="365760"/>
+              <a:t>Part 6</a:t>
+            </a:r>
+            <a:endParaRPr lang="en-US" sz="1800" dirty="0"/>
+          </a:p>
+        </p:txBody>
+      </p:sp>
+      <p:sp>
+        <p:nvSpPr>
+          <p:cNvPr id="3" name="Text 0"/>
+          <p:cNvSpPr/>
+          <p:nvPr>
+            <p:ph idx="101" type="title" hasCustomPrompt="1"/>
+          </p:nvPr>
+        </p:nvSpPr>
+        <p:spPr>
+          <a:xfrm>
+            <a:off x="640080" y="2011680"/>
+            <a:ext cx="7863840" cy="1280160"/>
           </a:xfrm>
           <a:prstGeom prst="rect">
             <a:avLst/>
@@ -24860,317 +25374,18 @@
           <a:bodyPr wrap="square" lIns="0" tIns="0" rIns="0" bIns="0" rtlCol="0" anchor="t"/>
           <a:lstStyle/>
           <a:p>
-            <a:pPr indent="0" marL="0">
+            <a:pPr algn="l" indent="0" marL="0">
               <a:buNone/>
             </a:pPr>
             <a:r>
-              <a:rPr lang="en-US" sz="2000" b="1" dirty="0">
-                <a:solidFill>
-                  <a:srgbClr val="2E75B6"/>
-                </a:solidFill>
-                <a:latin typeface="Arial" pitchFamily="34" charset="0"/>
-                <a:ea typeface="Arial" pitchFamily="34" charset="-122"/>
-                <a:cs typeface="Arial" pitchFamily="34" charset="-120"/>
+              <a:rPr lang="en-US" sz="3600" b="1" dirty="0">
+                <a:solidFill>
+                  <a:schemeClr val="bg1"/>
+                </a:solidFill>
               </a:rPr>
-              <a:t>What we can say</a:t>
-            </a:r>
-            <a:endParaRPr lang="en-US" sz="2000" dirty="0"/>
-          </a:p>
-        </p:txBody>
-      </p:sp>
-      <p:sp>
-        <p:nvSpPr>
-          <p:cNvPr id="4" name="Text 2"/>
-          <p:cNvSpPr txBox="1"/>
-          <p:nvPr/>
-        </p:nvSpPr>
-        <p:spPr>
-          <a:xfrm>
-            <a:off x="457200" y="1645920"/>
-            <a:ext cx="3931920" cy="2743200"/>
-          </a:xfrm>
-          <a:prstGeom prst="rect">
-            <a:avLst/>
-          </a:prstGeom>
-          <a:noFill/>
-          <a:ln/>
-        </p:spPr>
-        <p:txBody>
-          <a:bodyPr wrap="square" lIns="0" tIns="0" rIns="0" bIns="0" rtlCol="0" anchor="t"/>
-          <a:lstStyle/>
-          <a:p>
-            <a:pPr marL="342900" indent="-342900">
-              <a:spcAft>
-                <a:spcPts val="1000"/>
-              </a:spcAft>
-              <a:buSzPct val="100000"/>
-              <a:buChar char="•"/>
-            </a:pPr>
-            <a:r>
-              <a:rPr lang="en-US" sz="2000" dirty="0">
-                <a:solidFill>
-                  <a:schemeClr val="tx1"/>
-                </a:solidFill>
-                <a:latin typeface="Arial" pitchFamily="34" charset="0"/>
-                <a:ea typeface="Arial" pitchFamily="34" charset="-122"/>
-                <a:cs typeface="Arial" pitchFamily="34" charset="-120"/>
-              </a:rPr>
-              <a:t>Lucky winners play slightly worse next game</a:t>
-            </a:r>
-            <a:endParaRPr lang="en-US" sz="2000" dirty="0"/>
-          </a:p>
-          <a:p>
-            <a:pPr marL="342900" indent="-342900">
-              <a:spcAft>
-                <a:spcPts val="1000"/>
-              </a:spcAft>
-              <a:buSzPct val="100000"/>
-              <a:buChar char="•"/>
-            </a:pPr>
-            <a:r>
-              <a:rPr lang="en-US" sz="2000" dirty="0">
-                <a:solidFill>
-                  <a:schemeClr val="tx1"/>
-                </a:solidFill>
-                <a:latin typeface="Arial" pitchFamily="34" charset="0"/>
-                <a:ea typeface="Arial" pitchFamily="34" charset="-122"/>
-                <a:cs typeface="Arial" pitchFamily="34" charset="-120"/>
-              </a:rPr>
-              <a:t>The effect is consistent, not chance</a:t>
-            </a:r>
-            <a:endParaRPr lang="en-US" sz="2000" dirty="0"/>
-          </a:p>
-          <a:p>
-            <a:pPr marL="342900" indent="-342900">
-              <a:spcAft>
-                <a:spcPts val="1000"/>
-              </a:spcAft>
-              <a:buSzPct val="100000"/>
-              <a:buChar char="•"/>
-            </a:pPr>
-            <a:r>
-              <a:rPr lang="en-US" sz="2000" dirty="0">
-                <a:solidFill>
-                  <a:schemeClr val="tx1"/>
-                </a:solidFill>
-                <a:latin typeface="Arial" pitchFamily="34" charset="0"/>
-                <a:ea typeface="Arial" pitchFamily="34" charset="-122"/>
-                <a:cs typeface="Arial" pitchFamily="34" charset="-120"/>
-              </a:rPr>
-              <a:t>It sits on our 'matters' threshold</a:t>
-            </a:r>
-            <a:endParaRPr lang="en-US" sz="2000" dirty="0"/>
-          </a:p>
-        </p:txBody>
-      </p:sp>
-      <p:sp>
-        <p:nvSpPr>
-          <p:cNvPr id="5" name="Text 3"/>
-          <p:cNvSpPr txBox="1"/>
-          <p:nvPr/>
-        </p:nvSpPr>
-        <p:spPr>
-          <a:xfrm>
-            <a:off x="4754880" y="1188720"/>
-            <a:ext cx="3931920" cy="365760"/>
-          </a:xfrm>
-          <a:prstGeom prst="rect">
-            <a:avLst/>
-          </a:prstGeom>
-          <a:noFill/>
-          <a:ln/>
-        </p:spPr>
-        <p:txBody>
-          <a:bodyPr wrap="square" lIns="0" tIns="0" rIns="0" bIns="0" rtlCol="0" anchor="t"/>
-          <a:lstStyle/>
-          <a:p>
-            <a:pPr indent="0" marL="0">
-              <a:buNone/>
-            </a:pPr>
-            <a:r>
-              <a:rPr lang="en-US" sz="2000" b="1" dirty="0">
-                <a:solidFill>
-                  <a:srgbClr val="C27C0E"/>
-                </a:solidFill>
-                <a:latin typeface="Arial" pitchFamily="34" charset="0"/>
-                <a:ea typeface="Arial" pitchFamily="34" charset="-122"/>
-                <a:cs typeface="Arial" pitchFamily="34" charset="-120"/>
-              </a:rPr>
-              <a:t>What we cannot say</a:t>
-            </a:r>
-            <a:endParaRPr lang="en-US" sz="2000" dirty="0"/>
-          </a:p>
-        </p:txBody>
-      </p:sp>
-      <p:sp>
-        <p:nvSpPr>
-          <p:cNvPr id="6" name="Text 4"/>
-          <p:cNvSpPr txBox="1"/>
-          <p:nvPr/>
-        </p:nvSpPr>
-        <p:spPr>
-          <a:xfrm>
-            <a:off x="4754880" y="1645920"/>
-            <a:ext cx="3931920" cy="2743200"/>
-          </a:xfrm>
-          <a:prstGeom prst="rect">
-            <a:avLst/>
-          </a:prstGeom>
-          <a:noFill/>
-          <a:ln/>
-        </p:spPr>
-        <p:txBody>
-          <a:bodyPr wrap="square" lIns="0" tIns="0" rIns="0" bIns="0" rtlCol="0" anchor="t"/>
-          <a:lstStyle/>
-          <a:p>
-            <a:pPr marL="342900" indent="-342900">
-              <a:spcAft>
-                <a:spcPts val="1000"/>
-              </a:spcAft>
-              <a:buSzPct val="100000"/>
-              <a:buChar char="•"/>
-            </a:pPr>
-            <a:r>
-              <a:rPr lang="en-US" sz="2000" dirty="0">
-                <a:solidFill>
-                  <a:schemeClr val="tx1"/>
-                </a:solidFill>
-                <a:latin typeface="Arial" pitchFamily="34" charset="0"/>
-                <a:ea typeface="Arial" pitchFamily="34" charset="-122"/>
-                <a:cs typeface="Arial" pitchFamily="34" charset="-120"/>
-              </a:rPr>
-              <a:t>Why it happens</a:t>
-            </a:r>
-            <a:endParaRPr lang="en-US" sz="2000" dirty="0"/>
-          </a:p>
-          <a:p>
-            <a:pPr marL="342900" indent="-342900">
-              <a:spcAft>
-                <a:spcPts val="1000"/>
-              </a:spcAft>
-              <a:buSzPct val="100000"/>
-              <a:buChar char="•"/>
-            </a:pPr>
-            <a:r>
-              <a:rPr lang="en-US" sz="2000" dirty="0">
-                <a:solidFill>
-                  <a:schemeClr val="tx1"/>
-                </a:solidFill>
-                <a:latin typeface="Arial" pitchFamily="34" charset="0"/>
-                <a:ea typeface="Arial" pitchFamily="34" charset="-122"/>
-                <a:cs typeface="Arial" pitchFamily="34" charset="-120"/>
-              </a:rPr>
-              <a:t>Anything about blitz or bullet</a:t>
-            </a:r>
-            <a:endParaRPr lang="en-US" sz="2000" dirty="0"/>
-          </a:p>
-          <a:p>
-            <a:pPr marL="342900" indent="-342900">
-              <a:spcAft>
-                <a:spcPts val="1000"/>
-              </a:spcAft>
-              <a:buSzPct val="100000"/>
-              <a:buChar char="•"/>
-            </a:pPr>
-            <a:r>
-              <a:rPr lang="en-US" sz="2000" dirty="0">
-                <a:solidFill>
-                  <a:schemeClr val="tx1"/>
-                </a:solidFill>
-                <a:latin typeface="Arial" pitchFamily="34" charset="0"/>
-                <a:ea typeface="Arial" pitchFamily="34" charset="-122"/>
-                <a:cs typeface="Arial" pitchFamily="34" charset="-120"/>
-              </a:rPr>
-              <a:t>Anything beyond moves 15–30</a:t>
-            </a:r>
-            <a:endParaRPr lang="en-US" sz="2000" dirty="0"/>
-          </a:p>
-        </p:txBody>
-      </p:sp>
-      <p:sp>
-        <p:nvSpPr>
-          <p:cNvPr id="7" name="Text 5"/>
-          <p:cNvSpPr txBox="1"/>
-          <p:nvPr/>
-        </p:nvSpPr>
-        <p:spPr>
-          <a:xfrm>
-            <a:off x="457200" y="4709160"/>
-            <a:ext cx="7680960" cy="274320"/>
-          </a:xfrm>
-          <a:prstGeom prst="rect">
-            <a:avLst/>
-          </a:prstGeom>
-          <a:noFill/>
-          <a:ln/>
-        </p:spPr>
-        <p:txBody>
-          <a:bodyPr wrap="square" lIns="0" tIns="0" rIns="0" bIns="0" rtlCol="0" anchor="ctr"/>
-          <a:lstStyle/>
-          <a:p>
-            <a:pPr indent="0" marL="0">
-              <a:buNone/>
-            </a:pPr>
-            <a:r>
-              <a:rPr lang="en-US" sz="1200" dirty="0">
-                <a:solidFill>
-                  <a:srgbClr val="777777"/>
-                </a:solidFill>
-                <a:latin typeface="Arial" pitchFamily="34" charset="0"/>
-                <a:ea typeface="Arial" pitchFamily="34" charset="-122"/>
-                <a:cs typeface="Arial" pitchFamily="34" charset="-120"/>
-              </a:rPr>
-              <a:t>Other limits: one month of data; ratings 1200–2000; run before teacher approval of the plan</a:t>
-            </a:r>
-            <a:endParaRPr lang="en-US" sz="1200" dirty="0"/>
-          </a:p>
-        </p:txBody>
-      </p:sp>
-      <p:sp>
-        <p:nvSpPr>
-          <p:cNvPr id="25" name="Slide Number Placeholder 0"/>
-          <p:cNvSpPr>
-            <a:spLocks noGrp="1"/>
-          </p:cNvSpPr>
-          <p:nvPr>
-            <p:ph type="sldNum" sz="quarter" idx="4294967295"/>
-          </p:nvPr>
-        </p:nvSpPr>
-        <p:spPr>
-          <a:xfrm>
-            <a:off x="8321040" y="4754880"/>
-            <a:ext cx="457200" cy="274320"/>
-          </a:xfrm>
-          <a:prstGeom prst="rect">
-            <a:avLst/>
-          </a:prstGeom>
-          <a:extLst>
-            <a:ext uri="{C572A759-6A51-4108-AA02-DFA0A04FC94B}">
-              <ma14:wrappingTextBoxFlag xmlns:ma14="http://schemas.microsoft.com/office/mac/drawingml/2011/main" val="0"/>
-            </a:ext>
-          </a:extLst>
-        </p:spPr>
-        <p:txBody>
-          <a:bodyPr/>
-          <a:lstStyle>
-            <a:lvl1pPr>
-              <a:defRPr sz="1100">
-                <a:solidFill>
-                  <a:srgbClr val="777777"/>
-                </a:solidFill>
-                <a:latin typeface="Arial"/>
-                <a:ea typeface="Arial"/>
-                <a:cs typeface="Arial"/>
-              </a:defRPr>
-            </a:lvl1pPr>
-          </a:lstStyle>
-          <a:p>
-            <a:pPr algn="l"/>
-            <a:fld id="{F7021451-1387-4CA6-816F-3879F97B5CBC}" type="slidenum">
-              <a:rPr b="0" lang="en-US"/>
-              <a:t>37</a:t>
-            </a:fld>
-            <a:endParaRPr lang="en-US"/>
+              <a:t>What it means</a:t>
+            </a:r>
+            <a:endParaRPr lang="en-US" sz="3600" dirty="0"/>
           </a:p>
         </p:txBody>
       </p:sp>
@@ -25209,8 +25424,8 @@
         </p:nvSpPr>
         <p:spPr>
           <a:xfrm>
-            <a:off x="457200" y="274320"/>
-            <a:ext cx="8229600" cy="457200"/>
+            <a:off x="457200" y="228600"/>
+            <a:ext cx="8229600" cy="822960"/>
           </a:xfrm>
           <a:prstGeom prst="rect">
             <a:avLst/>
@@ -25226,14 +25441,14 @@
               <a:buNone/>
             </a:pPr>
             <a:r>
-              <a:rPr lang="en-US" sz="2000" dirty="0">
-                <a:solidFill>
-                  <a:schemeClr val="accent5"/>
+              <a:rPr lang="en-US" sz="2600" b="1" dirty="0">
+                <a:solidFill>
+                  <a:schemeClr val="tx2"/>
                 </a:solidFill>
               </a:rPr>
-              <a:t>Conclusions</a:t>
-            </a:r>
-            <a:endParaRPr lang="en-US" sz="2000" dirty="0"/>
+              <a:t>An undeserved win leaves a small after-effect, worth about 53 rating points</a:t>
+            </a:r>
+            <a:endParaRPr lang="en-US" sz="2600" dirty="0"/>
           </a:p>
         </p:txBody>
       </p:sp>
@@ -25245,8 +25460,8 @@
         </p:nvSpPr>
         <p:spPr>
           <a:xfrm>
-            <a:off x="457200" y="868680"/>
-            <a:ext cx="8229600" cy="3108960"/>
+            <a:off x="457200" y="1188720"/>
+            <a:ext cx="3931920" cy="365760"/>
           </a:xfrm>
           <a:prstGeom prst="rect">
             <a:avLst/>
@@ -25259,95 +25474,142 @@
           <a:lstStyle/>
           <a:p>
             <a:pPr indent="0" marL="0">
-              <a:spcAft>
-                <a:spcPts val="1800"/>
-              </a:spcAft>
               <a:buNone/>
             </a:pPr>
             <a:r>
               <a:rPr lang="en-US" sz="2000" b="1" dirty="0">
                 <a:solidFill>
-                  <a:schemeClr val="bg1"/>
+                  <a:srgbClr val="2E75B6"/>
                 </a:solidFill>
                 <a:latin typeface="Arial" pitchFamily="34" charset="0"/>
                 <a:ea typeface="Arial" pitchFamily="34" charset="-122"/>
                 <a:cs typeface="Arial" pitchFamily="34" charset="-120"/>
               </a:rPr>
-              <a:t>1. Lucky time winners played worse next game: </a:t>
-            </a:r>
-            <a:pPr indent="0" marL="0">
+              <a:t>What we can say</a:t>
+            </a:r>
+            <a:endParaRPr lang="en-US" sz="2000" dirty="0"/>
+          </a:p>
+        </p:txBody>
+      </p:sp>
+      <p:sp>
+        <p:nvSpPr>
+          <p:cNvPr id="4" name="Text 2"/>
+          <p:cNvSpPr txBox="1"/>
+          <p:nvPr/>
+        </p:nvSpPr>
+        <p:spPr>
+          <a:xfrm>
+            <a:off x="457200" y="1645920"/>
+            <a:ext cx="3931920" cy="2743200"/>
+          </a:xfrm>
+          <a:prstGeom prst="rect">
+            <a:avLst/>
+          </a:prstGeom>
+          <a:noFill/>
+          <a:ln/>
+        </p:spPr>
+        <p:txBody>
+          <a:bodyPr wrap="square" lIns="0" tIns="0" rIns="0" bIns="0" rtlCol="0" anchor="t"/>
+          <a:lstStyle/>
+          <a:p>
+            <a:pPr marL="342900" indent="-342900">
               <a:spcAft>
-                <a:spcPts val="1800"/>
+                <a:spcPts val="1000"/>
               </a:spcAft>
-              <a:buNone/>
+              <a:buSzPct val="100000"/>
+              <a:buChar char="•"/>
             </a:pPr>
             <a:r>
               <a:rPr lang="en-US" sz="2000" dirty="0">
                 <a:solidFill>
-                  <a:schemeClr val="bg1"/>
+                  <a:schemeClr val="tx1"/>
                 </a:solidFill>
                 <a:latin typeface="Arial" pitchFamily="34" charset="0"/>
                 <a:ea typeface="Arial" pitchFamily="34" charset="-122"/>
                 <a:cs typeface="Arial" pitchFamily="34" charset="-120"/>
               </a:rPr>
-              <a:t>+1.96 cp per move (p = 0.003), about 53 rating points.</a:t>
+              <a:t>Lucky winners play slightly worse next game</a:t>
             </a:r>
             <a:endParaRPr lang="en-US" sz="2000" dirty="0"/>
           </a:p>
           <a:p>
-            <a:pPr indent="0" marL="0">
+            <a:pPr marL="342900" indent="-342900">
               <a:spcAft>
-                <a:spcPts val="1800"/>
+                <a:spcPts val="1000"/>
               </a:spcAft>
-              <a:buNone/>
+              <a:buSzPct val="100000"/>
+              <a:buChar char="•"/>
             </a:pPr>
             <a:r>
-              <a:rPr lang="en-US" sz="2000" b="1" dirty="0">
-                <a:solidFill>
-                  <a:schemeClr val="bg1"/>
+              <a:rPr lang="en-US" sz="2000" dirty="0">
+                <a:solidFill>
+                  <a:schemeClr val="tx1"/>
                 </a:solidFill>
                 <a:latin typeface="Arial" pitchFamily="34" charset="0"/>
                 <a:ea typeface="Arial" pitchFamily="34" charset="-122"/>
                 <a:cs typeface="Arial" pitchFamily="34" charset="-120"/>
               </a:rPr>
-              <a:t>2. 'Players reset' was not supported, </a:t>
-            </a:r>
-            <a:pPr indent="0" marL="0">
+              <a:t>The effect is consistent, not chance</a:t>
+            </a:r>
+            <a:endParaRPr lang="en-US" sz="2000" dirty="0"/>
+          </a:p>
+          <a:p>
+            <a:pPr marL="342900" indent="-342900">
               <a:spcAft>
-                <a:spcPts val="1800"/>
+                <a:spcPts val="1000"/>
               </a:spcAft>
-              <a:buNone/>
+              <a:buSzPct val="100000"/>
+              <a:buChar char="•"/>
             </a:pPr>
             <a:r>
               <a:rPr lang="en-US" sz="2000" dirty="0">
                 <a:solidFill>
-                  <a:schemeClr val="bg1"/>
+                  <a:schemeClr val="tx1"/>
                 </a:solidFill>
                 <a:latin typeface="Arial" pitchFamily="34" charset="0"/>
                 <a:ea typeface="Arial" pitchFamily="34" charset="-122"/>
                 <a:cs typeface="Arial" pitchFamily="34" charset="-120"/>
               </a:rPr>
-              <a:t>but the result sits 0.04 cp short of the planned 'refuted' bar.</a:t>
+              <a:t>It sits on our 'matters' threshold</a:t>
             </a:r>
             <a:endParaRPr lang="en-US" sz="2000" dirty="0"/>
           </a:p>
+        </p:txBody>
+      </p:sp>
+      <p:sp>
+        <p:nvSpPr>
+          <p:cNvPr id="5" name="Text 3"/>
+          <p:cNvSpPr txBox="1"/>
+          <p:nvPr/>
+        </p:nvSpPr>
+        <p:spPr>
+          <a:xfrm>
+            <a:off x="4754880" y="1188720"/>
+            <a:ext cx="3931920" cy="365760"/>
+          </a:xfrm>
+          <a:prstGeom prst="rect">
+            <a:avLst/>
+          </a:prstGeom>
+          <a:noFill/>
+          <a:ln/>
+        </p:spPr>
+        <p:txBody>
+          <a:bodyPr wrap="square" lIns="0" tIns="0" rIns="0" bIns="0" rtlCol="0" anchor="t"/>
+          <a:lstStyle/>
           <a:p>
             <a:pPr indent="0" marL="0">
-              <a:spcAft>
-                <a:spcPts val="1800"/>
-              </a:spcAft>
               <a:buNone/>
             </a:pPr>
             <a:r>
               <a:rPr lang="en-US" sz="2000" b="1" dirty="0">
                 <a:solidFill>
-                  <a:schemeClr val="bg1"/>
+                  <a:srgbClr val="C27C0E"/>
                 </a:solidFill>
                 <a:latin typeface="Arial" pitchFamily="34" charset="0"/>
                 <a:ea typeface="Arial" pitchFamily="34" charset="-122"/>
                 <a:cs typeface="Arial" pitchFamily="34" charset="-120"/>
               </a:rPr>
-              <a:t>3. How you win barely matters; whether you deserved it might.</a:t>
+              <a:t>What we cannot say</a:t>
             </a:r>
             <a:endParaRPr lang="en-US" sz="2000" dirty="0"/>
           </a:p>
@@ -25355,14 +25617,14 @@
       </p:sp>
       <p:sp>
         <p:nvSpPr>
-          <p:cNvPr id="4" name="Text 2"/>
+          <p:cNvPr id="6" name="Text 4"/>
           <p:cNvSpPr txBox="1"/>
           <p:nvPr/>
         </p:nvSpPr>
         <p:spPr>
           <a:xfrm>
-            <a:off x="457200" y="4389120"/>
-            <a:ext cx="8229600" cy="365760"/>
+            <a:off x="4754880" y="1645920"/>
+            <a:ext cx="3931920" cy="2743200"/>
           </a:xfrm>
           <a:prstGeom prst="rect">
             <a:avLst/>
@@ -25374,21 +25636,154 @@
           <a:bodyPr wrap="square" lIns="0" tIns="0" rIns="0" bIns="0" rtlCol="0" anchor="t"/>
           <a:lstStyle/>
           <a:p>
-            <a:pPr indent="0" marL="0">
-              <a:buNone/>
+            <a:pPr marL="342900" indent="-342900">
+              <a:spcAft>
+                <a:spcPts val="1000"/>
+              </a:spcAft>
+              <a:buSzPct val="100000"/>
+              <a:buChar char="•"/>
             </a:pPr>
             <a:r>
-              <a:rPr lang="en-US" sz="1400" dirty="0">
-                <a:solidFill>
-                  <a:srgbClr val="A0BBDD"/>
+              <a:rPr lang="en-US" sz="2000" dirty="0">
+                <a:solidFill>
+                  <a:schemeClr val="tx1"/>
                 </a:solidFill>
                 <a:latin typeface="Arial" pitchFamily="34" charset="0"/>
                 <a:ea typeface="Arial" pitchFamily="34" charset="-122"/>
                 <a:cs typeface="Arial" pitchFamily="34" charset="-120"/>
               </a:rPr>
-              <a:t>Code, data and both preregistrations: github.com/KaranaGulati/ContinuedLearningResearch</a:t>
-            </a:r>
-            <a:endParaRPr lang="en-US" sz="1400" dirty="0"/>
+              <a:t>Why it happens</a:t>
+            </a:r>
+            <a:endParaRPr lang="en-US" sz="2000" dirty="0"/>
+          </a:p>
+          <a:p>
+            <a:pPr marL="342900" indent="-342900">
+              <a:spcAft>
+                <a:spcPts val="1000"/>
+              </a:spcAft>
+              <a:buSzPct val="100000"/>
+              <a:buChar char="•"/>
+            </a:pPr>
+            <a:r>
+              <a:rPr lang="en-US" sz="2000" dirty="0">
+                <a:solidFill>
+                  <a:schemeClr val="tx1"/>
+                </a:solidFill>
+                <a:latin typeface="Arial" pitchFamily="34" charset="0"/>
+                <a:ea typeface="Arial" pitchFamily="34" charset="-122"/>
+                <a:cs typeface="Arial" pitchFamily="34" charset="-120"/>
+              </a:rPr>
+              <a:t>Anything about blitz or bullet</a:t>
+            </a:r>
+            <a:endParaRPr lang="en-US" sz="2000" dirty="0"/>
+          </a:p>
+          <a:p>
+            <a:pPr marL="342900" indent="-342900">
+              <a:spcAft>
+                <a:spcPts val="1000"/>
+              </a:spcAft>
+              <a:buSzPct val="100000"/>
+              <a:buChar char="•"/>
+            </a:pPr>
+            <a:r>
+              <a:rPr lang="en-US" sz="2000" dirty="0">
+                <a:solidFill>
+                  <a:schemeClr val="tx1"/>
+                </a:solidFill>
+                <a:latin typeface="Arial" pitchFamily="34" charset="0"/>
+                <a:ea typeface="Arial" pitchFamily="34" charset="-122"/>
+                <a:cs typeface="Arial" pitchFamily="34" charset="-120"/>
+              </a:rPr>
+              <a:t>Anything beyond moves 15–30</a:t>
+            </a:r>
+            <a:endParaRPr lang="en-US" sz="2000" dirty="0"/>
+          </a:p>
+        </p:txBody>
+      </p:sp>
+      <p:sp>
+        <p:nvSpPr>
+          <p:cNvPr id="7" name="Text 5"/>
+          <p:cNvSpPr txBox="1"/>
+          <p:nvPr/>
+        </p:nvSpPr>
+        <p:spPr>
+          <a:xfrm>
+            <a:off x="457200" y="4709160"/>
+            <a:ext cx="7680960" cy="274320"/>
+          </a:xfrm>
+          <a:prstGeom prst="rect">
+            <a:avLst/>
+          </a:prstGeom>
+          <a:noFill/>
+          <a:ln/>
+        </p:spPr>
+        <p:txBody>
+          <a:bodyPr wrap="square" lIns="0" tIns="0" rIns="0" bIns="0" rtlCol="0" anchor="ctr"/>
+          <a:lstStyle/>
+          <a:p>
+            <a:pPr indent="0" marL="0">
+              <a:buNone/>
+            </a:pPr>
+            <a:r>
+              <a:rPr lang="en-US" sz="1200" dirty="0">
+                <a:solidFill>
+                  <a:srgbClr val="777777"/>
+                </a:solidFill>
+                <a:latin typeface="Arial" pitchFamily="34" charset="0"/>
+                <a:ea typeface="Arial" pitchFamily="34" charset="-122"/>
+                <a:cs typeface="Arial" pitchFamily="34" charset="-120"/>
+              </a:rPr>
+              <a:t>Other limits: one month of data; ratings 1200–2000; run before teacher approval of the plan</a:t>
+            </a:r>
+            <a:endParaRPr lang="en-US" sz="1200" dirty="0"/>
+          </a:p>
+        </p:txBody>
+      </p:sp>
+      <p:sp>
+        <p:nvSpPr>
+          <p:cNvPr id="25" name="Slide Number Placeholder 0"/>
+          <p:cNvSpPr>
+            <a:spLocks noGrp="1"/>
+          </p:cNvSpPr>
+          <p:nvPr>
+            <p:ph type="sldNum" sz="quarter" idx="4294967295"/>
+          </p:nvPr>
+        </p:nvSpPr>
+        <p:spPr>
+          <a:xfrm>
+            <a:off x="8321040" y="4754880"/>
+            <a:ext cx="457200" cy="274320"/>
+          </a:xfrm>
+          <a:prstGeom prst="rect">
+            <a:avLst/>
+          </a:prstGeom>
+          <a:extLst>
+            <a:ext uri="{C572A759-6A51-4108-AA02-DFA0A04FC94B}">
+              <ma14:wrappingTextBoxFlag xmlns:ma14="http://schemas.microsoft.com/office/mac/drawingml/2011/main" val="0"/>
+            </a:ext>
+          </a:extLst>
+        </p:spPr>
+        <p:txBody>
+          <a:bodyPr/>
+          <a:lstStyle>
+            <a:lvl1pPr>
+              <a:defRPr sz="1100">
+                <a:solidFill>
+                  <a:srgbClr val="777777"/>
+                </a:solidFill>
+                <a:latin typeface="Arial"/>
+                <a:ea typeface="Arial"/>
+                <a:cs typeface="Arial"/>
+              </a:defRPr>
+            </a:lvl1pPr>
+          </a:lstStyle>
+          <a:p>
+            <a:pPr algn="l"/>
+            <a:fld id="{F7021451-1387-4CA6-816F-3879F97B5CBC}" type="slidenum">
+              <a:rPr b="0" lang="en-US"/>
+              <a:t>38</a:t>
+            </a:fld>
+            <a:endParaRPr lang="en-US"/>
           </a:p>
         </p:txBody>
       </p:sp>
@@ -25427,8 +25822,8 @@
         </p:nvSpPr>
         <p:spPr>
           <a:xfrm>
-            <a:off x="457200" y="228600"/>
-            <a:ext cx="8229600" cy="822960"/>
+            <a:off x="457200" y="274320"/>
+            <a:ext cx="8229600" cy="457200"/>
           </a:xfrm>
           <a:prstGeom prst="rect">
             <a:avLst/>
@@ -25444,14 +25839,14 @@
               <a:buNone/>
             </a:pPr>
             <a:r>
-              <a:rPr lang="en-US" sz="2600" b="1" dirty="0">
-                <a:solidFill>
-                  <a:schemeClr val="tx2"/>
+              <a:rPr lang="en-US" sz="2000" dirty="0">
+                <a:solidFill>
+                  <a:schemeClr val="accent5"/>
                 </a:solidFill>
               </a:rPr>
-              <a:t>References</a:t>
-            </a:r>
-            <a:endParaRPr lang="en-US" sz="2600" dirty="0"/>
+              <a:t>Conclusions</a:t>
+            </a:r>
+            <a:endParaRPr lang="en-US" sz="2000" dirty="0"/>
           </a:p>
         </p:txBody>
       </p:sp>
@@ -25463,8 +25858,8 @@
         </p:nvSpPr>
         <p:spPr>
           <a:xfrm>
-            <a:off x="457200" y="1097280"/>
-            <a:ext cx="8229600" cy="3566160"/>
+            <a:off x="457200" y="868680"/>
+            <a:ext cx="8229600" cy="3108960"/>
           </a:xfrm>
           <a:prstGeom prst="rect">
             <a:avLst/>
@@ -25478,230 +25873,135 @@
           <a:p>
             <a:pPr indent="0" marL="0">
               <a:spcAft>
-                <a:spcPts val="600"/>
+                <a:spcPts val="1800"/>
               </a:spcAft>
               <a:buNone/>
             </a:pPr>
             <a:r>
-              <a:rPr lang="en-US" sz="1200" dirty="0">
-                <a:solidFill>
-                  <a:schemeClr val="tx1"/>
+              <a:rPr lang="en-US" sz="2000" b="1" dirty="0">
+                <a:solidFill>
+                  <a:schemeClr val="bg1"/>
                 </a:solidFill>
                 <a:latin typeface="Arial" pitchFamily="34" charset="0"/>
                 <a:ea typeface="Arial" pitchFamily="34" charset="-122"/>
                 <a:cs typeface="Arial" pitchFamily="34" charset="-120"/>
               </a:rPr>
-              <a:t>Backus, Cubel, Guid, Sanchez-Pages &amp; Lopez Manas (2023). Quantitative Economics, 14(1), 349-380.</a:t>
-            </a:r>
-            <a:endParaRPr lang="en-US" sz="1200" dirty="0"/>
-          </a:p>
-          <a:p>
+              <a:t>1. Lucky time winners played worse next game: </a:t>
+            </a:r>
             <a:pPr indent="0" marL="0">
               <a:spcAft>
-                <a:spcPts val="600"/>
+                <a:spcPts val="1800"/>
               </a:spcAft>
               <a:buNone/>
             </a:pPr>
             <a:r>
-              <a:rPr lang="en-US" sz="1200" dirty="0">
-                <a:solidFill>
-                  <a:schemeClr val="tx1"/>
+              <a:rPr lang="en-US" sz="2000" dirty="0">
+                <a:solidFill>
+                  <a:schemeClr val="bg1"/>
                 </a:solidFill>
                 <a:latin typeface="Arial" pitchFamily="34" charset="0"/>
                 <a:ea typeface="Arial" pitchFamily="34" charset="-122"/>
                 <a:cs typeface="Arial" pitchFamily="34" charset="-120"/>
               </a:rPr>
-              <a:t>Chowdhary, Iacopini &amp; Battiston (2023). Scientific Reports, 13, 2113.</a:t>
-            </a:r>
-            <a:endParaRPr lang="en-US" sz="1200" dirty="0"/>
+              <a:t>+1.96 cp per move (p = 0.003), about 53 rating points.</a:t>
+            </a:r>
+            <a:endParaRPr lang="en-US" sz="2000" dirty="0"/>
           </a:p>
           <a:p>
             <a:pPr indent="0" marL="0">
               <a:spcAft>
-                <a:spcPts val="600"/>
+                <a:spcPts val="1800"/>
               </a:spcAft>
               <a:buNone/>
             </a:pPr>
             <a:r>
-              <a:rPr lang="en-US" sz="1200" dirty="0">
-                <a:solidFill>
-                  <a:schemeClr val="tx1"/>
+              <a:rPr lang="en-US" sz="2000" b="1" dirty="0">
+                <a:solidFill>
+                  <a:schemeClr val="bg1"/>
                 </a:solidFill>
                 <a:latin typeface="Arial" pitchFamily="34" charset="0"/>
                 <a:ea typeface="Arial" pitchFamily="34" charset="-122"/>
                 <a:cs typeface="Arial" pitchFamily="34" charset="-120"/>
               </a:rPr>
-              <a:t>Gee, Seese, Curley &amp; Ward (2025). Journal of Quantitative Analysis in Sports, 22(2), 117-132. Preprint arXiv:2503.21713.</a:t>
-            </a:r>
-            <a:endParaRPr lang="en-US" sz="1200" dirty="0"/>
-          </a:p>
-          <a:p>
+              <a:t>2. 'Players reset' was not supported, </a:t>
+            </a:r>
             <a:pPr indent="0" marL="0">
               <a:spcAft>
-                <a:spcPts val="600"/>
+                <a:spcPts val="1800"/>
               </a:spcAft>
               <a:buNone/>
             </a:pPr>
             <a:r>
-              <a:rPr lang="en-US" sz="1200" dirty="0">
-                <a:solidFill>
-                  <a:schemeClr val="tx1"/>
+              <a:rPr lang="en-US" sz="2000" dirty="0">
+                <a:solidFill>
+                  <a:schemeClr val="bg1"/>
                 </a:solidFill>
                 <a:latin typeface="Arial" pitchFamily="34" charset="0"/>
                 <a:ea typeface="Arial" pitchFamily="34" charset="-122"/>
                 <a:cs typeface="Arial" pitchFamily="34" charset="-120"/>
               </a:rPr>
-              <a:t>Guid &amp; Bratko (2006). Computer analysis of world chess champions. ICGA Journal, 29(2), 65-73.</a:t>
-            </a:r>
-            <a:endParaRPr lang="en-US" sz="1200" dirty="0"/>
+              <a:t>but the result sits 0.04 cp short of the planned 'refuted' bar.</a:t>
+            </a:r>
+            <a:endParaRPr lang="en-US" sz="2000" dirty="0"/>
           </a:p>
           <a:p>
             <a:pPr indent="0" marL="0">
               <a:spcAft>
-                <a:spcPts val="600"/>
+                <a:spcPts val="1800"/>
               </a:spcAft>
               <a:buNone/>
             </a:pPr>
             <a:r>
-              <a:rPr lang="en-US" sz="1200" dirty="0">
-                <a:solidFill>
-                  <a:schemeClr val="tx1"/>
+              <a:rPr lang="en-US" sz="2000" b="1" dirty="0">
+                <a:solidFill>
+                  <a:schemeClr val="bg1"/>
                 </a:solidFill>
                 <a:latin typeface="Arial" pitchFamily="34" charset="0"/>
                 <a:ea typeface="Arial" pitchFamily="34" charset="-122"/>
                 <a:cs typeface="Arial" pitchFamily="34" charset="-120"/>
               </a:rPr>
-              <a:t>Kuenn, Seel &amp; Zegners (2020). Cognitive performance in the home office. IZA DP 13491; The Economic Journal, 132(643), 1218-1232 (2022).</a:t>
-            </a:r>
-            <a:endParaRPr lang="en-US" sz="1200" dirty="0"/>
-          </a:p>
+              <a:t>3. How you win barely matters; whether you deserved it might.</a:t>
+            </a:r>
+            <a:endParaRPr lang="en-US" sz="2000" dirty="0"/>
+          </a:p>
+        </p:txBody>
+      </p:sp>
+      <p:sp>
+        <p:nvSpPr>
+          <p:cNvPr id="4" name="Text 2"/>
+          <p:cNvSpPr txBox="1"/>
+          <p:nvPr/>
+        </p:nvSpPr>
+        <p:spPr>
+          <a:xfrm>
+            <a:off x="457200" y="4389120"/>
+            <a:ext cx="8229600" cy="365760"/>
+          </a:xfrm>
+          <a:prstGeom prst="rect">
+            <a:avLst/>
+          </a:prstGeom>
+          <a:noFill/>
+          <a:ln/>
+        </p:spPr>
+        <p:txBody>
+          <a:bodyPr wrap="square" lIns="0" tIns="0" rIns="0" bIns="0" rtlCol="0" anchor="t"/>
+          <a:lstStyle/>
           <a:p>
             <a:pPr indent="0" marL="0">
-              <a:spcAft>
-                <a:spcPts val="600"/>
-              </a:spcAft>
               <a:buNone/>
             </a:pPr>
             <a:r>
-              <a:rPr lang="en-US" sz="1200" dirty="0">
-                <a:solidFill>
-                  <a:schemeClr val="tx1"/>
+              <a:rPr lang="en-US" sz="1400" dirty="0">
+                <a:solidFill>
+                  <a:srgbClr val="A0BBDD"/>
                 </a:solidFill>
                 <a:latin typeface="Arial" pitchFamily="34" charset="0"/>
                 <a:ea typeface="Arial" pitchFamily="34" charset="-122"/>
                 <a:cs typeface="Arial" pitchFamily="34" charset="-120"/>
               </a:rPr>
-              <a:t>Regan, Biswas &amp; Zhou (2014). Human and computer preferences at chess. AAAI-14 Workshop on Advances in Preference Handling.</a:t>
-            </a:r>
-            <a:endParaRPr lang="en-US" sz="1200" dirty="0"/>
-          </a:p>
-          <a:p>
-            <a:pPr indent="0" marL="0">
-              <a:spcAft>
-                <a:spcPts val="600"/>
-              </a:spcAft>
-              <a:buNone/>
-            </a:pPr>
-            <a:r>
-              <a:rPr lang="en-US" sz="1200" dirty="0">
-                <a:solidFill>
-                  <a:schemeClr val="tx1"/>
-                </a:solidFill>
-                <a:latin typeface="Arial" pitchFamily="34" charset="0"/>
-                <a:ea typeface="Arial" pitchFamily="34" charset="-122"/>
-                <a:cs typeface="Arial" pitchFamily="34" charset="-120"/>
-              </a:rPr>
-              <a:t>Sunde, Zegners &amp; Strittmatter (2022). arXiv:2201.10808; published as Speed and quality of complex strategic decisions, PNAS, 123(20), e2531472123 (2026).</a:t>
-            </a:r>
-            <a:endParaRPr lang="en-US" sz="1200" dirty="0"/>
-          </a:p>
-          <a:p>
-            <a:pPr indent="0" marL="0">
-              <a:spcAft>
-                <a:spcPts val="600"/>
-              </a:spcAft>
-              <a:buNone/>
-            </a:pPr>
-            <a:r>
-              <a:rPr lang="en-US" sz="1200" dirty="0">
-                <a:solidFill>
-                  <a:schemeClr val="tx1"/>
-                </a:solidFill>
-                <a:latin typeface="Arial" pitchFamily="34" charset="0"/>
-                <a:ea typeface="Arial" pitchFamily="34" charset="-122"/>
-                <a:cs typeface="Arial" pitchFamily="34" charset="-120"/>
-              </a:rPr>
-              <a:t>Lichess open database (2026). database.lichess.org, CC0.</a:t>
-            </a:r>
-            <a:endParaRPr lang="en-US" sz="1200" dirty="0"/>
-          </a:p>
-          <a:p>
-            <a:pPr indent="0" marL="0">
-              <a:spcAft>
-                <a:spcPts val="600"/>
-              </a:spcAft>
-              <a:buNone/>
-            </a:pPr>
-            <a:r>
-              <a:rPr lang="en-US" sz="1200" dirty="0">
-                <a:solidFill>
-                  <a:schemeClr val="tx1"/>
-                </a:solidFill>
-                <a:latin typeface="Arial" pitchFamily="34" charset="0"/>
-                <a:ea typeface="Arial" pitchFamily="34" charset="-122"/>
-                <a:cs typeface="Arial" pitchFamily="34" charset="-120"/>
-              </a:rPr>
-              <a:t>Karana Gulati (2026). Study 1 and study 2 preregistrations and results. github.com/KaranaGulati/ContinuedLearningResearch.</a:t>
-            </a:r>
-            <a:endParaRPr lang="en-US" sz="1200" dirty="0"/>
-          </a:p>
-        </p:txBody>
-      </p:sp>
-      <p:sp>
-        <p:nvSpPr>
-          <p:cNvPr id="25" name="Slide Number Placeholder 0"/>
-          <p:cNvSpPr>
-            <a:spLocks noGrp="1"/>
-          </p:cNvSpPr>
-          <p:nvPr>
-            <p:ph type="sldNum" sz="quarter" idx="4294967295"/>
-          </p:nvPr>
-        </p:nvSpPr>
-        <p:spPr>
-          <a:xfrm>
-            <a:off x="8321040" y="4754880"/>
-            <a:ext cx="457200" cy="274320"/>
-          </a:xfrm>
-          <a:prstGeom prst="rect">
-            <a:avLst/>
-          </a:prstGeom>
-          <a:extLst>
-            <a:ext uri="{C572A759-6A51-4108-AA02-DFA0A04FC94B}">
-              <ma14:wrappingTextBoxFlag xmlns:ma14="http://schemas.microsoft.com/office/mac/drawingml/2011/main" val="0"/>
-            </a:ext>
-          </a:extLst>
-        </p:spPr>
-        <p:txBody>
-          <a:bodyPr/>
-          <a:lstStyle>
-            <a:lvl1pPr>
-              <a:defRPr sz="1100">
-                <a:solidFill>
-                  <a:srgbClr val="777777"/>
-                </a:solidFill>
-                <a:latin typeface="Arial"/>
-                <a:ea typeface="Arial"/>
-                <a:cs typeface="Arial"/>
-              </a:defRPr>
-            </a:lvl1pPr>
-          </a:lstStyle>
-          <a:p>
-            <a:pPr algn="l"/>
-            <a:fld id="{F7021451-1387-4CA6-816F-3879F97B5CBC}" type="slidenum">
-              <a:rPr b="0" lang="en-US"/>
-              <a:t>39</a:t>
-            </a:fld>
-            <a:endParaRPr lang="en-US"/>
+              <a:t>Code, data and both preregistrations: github.com/KaranaGulati/ContinuedLearningResearch</a:t>
+            </a:r>
+            <a:endParaRPr lang="en-US" sz="1400" dirty="0"/>
           </a:p>
         </p:txBody>
       </p:sp>
@@ -26175,6 +26475,319 @@
                   <a:schemeClr val="tx2"/>
                 </a:solidFill>
               </a:rPr>
+              <a:t>References</a:t>
+            </a:r>
+            <a:endParaRPr lang="en-US" sz="2600" dirty="0"/>
+          </a:p>
+        </p:txBody>
+      </p:sp>
+      <p:sp>
+        <p:nvSpPr>
+          <p:cNvPr id="3" name="Text 1"/>
+          <p:cNvSpPr txBox="1"/>
+          <p:nvPr/>
+        </p:nvSpPr>
+        <p:spPr>
+          <a:xfrm>
+            <a:off x="457200" y="1097280"/>
+            <a:ext cx="8229600" cy="3566160"/>
+          </a:xfrm>
+          <a:prstGeom prst="rect">
+            <a:avLst/>
+          </a:prstGeom>
+          <a:noFill/>
+          <a:ln/>
+        </p:spPr>
+        <p:txBody>
+          <a:bodyPr wrap="square" lIns="0" tIns="0" rIns="0" bIns="0" rtlCol="0" anchor="t"/>
+          <a:lstStyle/>
+          <a:p>
+            <a:pPr indent="0" marL="0">
+              <a:spcAft>
+                <a:spcPts val="600"/>
+              </a:spcAft>
+              <a:buNone/>
+            </a:pPr>
+            <a:r>
+              <a:rPr lang="en-US" sz="1200" dirty="0">
+                <a:solidFill>
+                  <a:schemeClr val="tx1"/>
+                </a:solidFill>
+                <a:latin typeface="Arial" pitchFamily="34" charset="0"/>
+                <a:ea typeface="Arial" pitchFamily="34" charset="-122"/>
+                <a:cs typeface="Arial" pitchFamily="34" charset="-120"/>
+              </a:rPr>
+              <a:t>Backus, Cubel, Guid, Sanchez-Pages &amp; Lopez Manas (2023). Quantitative Economics, 14(1), 349-380.</a:t>
+            </a:r>
+            <a:endParaRPr lang="en-US" sz="1200" dirty="0"/>
+          </a:p>
+          <a:p>
+            <a:pPr indent="0" marL="0">
+              <a:spcAft>
+                <a:spcPts val="600"/>
+              </a:spcAft>
+              <a:buNone/>
+            </a:pPr>
+            <a:r>
+              <a:rPr lang="en-US" sz="1200" dirty="0">
+                <a:solidFill>
+                  <a:schemeClr val="tx1"/>
+                </a:solidFill>
+                <a:latin typeface="Arial" pitchFamily="34" charset="0"/>
+                <a:ea typeface="Arial" pitchFamily="34" charset="-122"/>
+                <a:cs typeface="Arial" pitchFamily="34" charset="-120"/>
+              </a:rPr>
+              <a:t>Chowdhary, Iacopini &amp; Battiston (2023). Scientific Reports, 13, 2113.</a:t>
+            </a:r>
+            <a:endParaRPr lang="en-US" sz="1200" dirty="0"/>
+          </a:p>
+          <a:p>
+            <a:pPr indent="0" marL="0">
+              <a:spcAft>
+                <a:spcPts val="600"/>
+              </a:spcAft>
+              <a:buNone/>
+            </a:pPr>
+            <a:r>
+              <a:rPr lang="en-US" sz="1200" dirty="0">
+                <a:solidFill>
+                  <a:schemeClr val="tx1"/>
+                </a:solidFill>
+                <a:latin typeface="Arial" pitchFamily="34" charset="0"/>
+                <a:ea typeface="Arial" pitchFamily="34" charset="-122"/>
+                <a:cs typeface="Arial" pitchFamily="34" charset="-120"/>
+              </a:rPr>
+              <a:t>Gee, Seese, Curley &amp; Ward (2025). Journal of Quantitative Analysis in Sports, 22(2), 117-132. Preprint arXiv:2503.21713.</a:t>
+            </a:r>
+            <a:endParaRPr lang="en-US" sz="1200" dirty="0"/>
+          </a:p>
+          <a:p>
+            <a:pPr indent="0" marL="0">
+              <a:spcAft>
+                <a:spcPts val="600"/>
+              </a:spcAft>
+              <a:buNone/>
+            </a:pPr>
+            <a:r>
+              <a:rPr lang="en-US" sz="1200" dirty="0">
+                <a:solidFill>
+                  <a:schemeClr val="tx1"/>
+                </a:solidFill>
+                <a:latin typeface="Arial" pitchFamily="34" charset="0"/>
+                <a:ea typeface="Arial" pitchFamily="34" charset="-122"/>
+                <a:cs typeface="Arial" pitchFamily="34" charset="-120"/>
+              </a:rPr>
+              <a:t>Guid &amp; Bratko (2006). Computer analysis of world chess champions. ICGA Journal, 29(2), 65-73.</a:t>
+            </a:r>
+            <a:endParaRPr lang="en-US" sz="1200" dirty="0"/>
+          </a:p>
+          <a:p>
+            <a:pPr indent="0" marL="0">
+              <a:spcAft>
+                <a:spcPts val="600"/>
+              </a:spcAft>
+              <a:buNone/>
+            </a:pPr>
+            <a:r>
+              <a:rPr lang="en-US" sz="1200" dirty="0">
+                <a:solidFill>
+                  <a:schemeClr val="tx1"/>
+                </a:solidFill>
+                <a:latin typeface="Arial" pitchFamily="34" charset="0"/>
+                <a:ea typeface="Arial" pitchFamily="34" charset="-122"/>
+                <a:cs typeface="Arial" pitchFamily="34" charset="-120"/>
+              </a:rPr>
+              <a:t>Kuenn, Seel &amp; Zegners (2020). Cognitive performance in the home office. IZA DP 13491; The Economic Journal, 132(643), 1218-1232 (2022).</a:t>
+            </a:r>
+            <a:endParaRPr lang="en-US" sz="1200" dirty="0"/>
+          </a:p>
+          <a:p>
+            <a:pPr indent="0" marL="0">
+              <a:spcAft>
+                <a:spcPts val="600"/>
+              </a:spcAft>
+              <a:buNone/>
+            </a:pPr>
+            <a:r>
+              <a:rPr lang="en-US" sz="1200" dirty="0">
+                <a:solidFill>
+                  <a:schemeClr val="tx1"/>
+                </a:solidFill>
+                <a:latin typeface="Arial" pitchFamily="34" charset="0"/>
+                <a:ea typeface="Arial" pitchFamily="34" charset="-122"/>
+                <a:cs typeface="Arial" pitchFamily="34" charset="-120"/>
+              </a:rPr>
+              <a:t>Regan, Biswas &amp; Zhou (2014). Human and computer preferences at chess. AAAI-14 Workshop on Advances in Preference Handling.</a:t>
+            </a:r>
+            <a:endParaRPr lang="en-US" sz="1200" dirty="0"/>
+          </a:p>
+          <a:p>
+            <a:pPr indent="0" marL="0">
+              <a:spcAft>
+                <a:spcPts val="600"/>
+              </a:spcAft>
+              <a:buNone/>
+            </a:pPr>
+            <a:r>
+              <a:rPr lang="en-US" sz="1200" dirty="0">
+                <a:solidFill>
+                  <a:schemeClr val="tx1"/>
+                </a:solidFill>
+                <a:latin typeface="Arial" pitchFamily="34" charset="0"/>
+                <a:ea typeface="Arial" pitchFamily="34" charset="-122"/>
+                <a:cs typeface="Arial" pitchFamily="34" charset="-120"/>
+              </a:rPr>
+              <a:t>Sunde, Zegners &amp; Strittmatter (2022). arXiv:2201.10808; published as Speed and quality of complex strategic decisions, PNAS, 123(20), e2531472123 (2026).</a:t>
+            </a:r>
+            <a:endParaRPr lang="en-US" sz="1200" dirty="0"/>
+          </a:p>
+          <a:p>
+            <a:pPr indent="0" marL="0">
+              <a:spcAft>
+                <a:spcPts val="600"/>
+              </a:spcAft>
+              <a:buNone/>
+            </a:pPr>
+            <a:r>
+              <a:rPr lang="en-US" sz="1200" dirty="0">
+                <a:solidFill>
+                  <a:schemeClr val="tx1"/>
+                </a:solidFill>
+                <a:latin typeface="Arial" pitchFamily="34" charset="0"/>
+                <a:ea typeface="Arial" pitchFamily="34" charset="-122"/>
+                <a:cs typeface="Arial" pitchFamily="34" charset="-120"/>
+              </a:rPr>
+              <a:t>Lichess open database (2026). database.lichess.org, CC0.</a:t>
+            </a:r>
+            <a:endParaRPr lang="en-US" sz="1200" dirty="0"/>
+          </a:p>
+          <a:p>
+            <a:pPr indent="0" marL="0">
+              <a:spcAft>
+                <a:spcPts val="600"/>
+              </a:spcAft>
+              <a:buNone/>
+            </a:pPr>
+            <a:r>
+              <a:rPr lang="en-US" sz="1200" dirty="0">
+                <a:solidFill>
+                  <a:schemeClr val="tx1"/>
+                </a:solidFill>
+                <a:latin typeface="Arial" pitchFamily="34" charset="0"/>
+                <a:ea typeface="Arial" pitchFamily="34" charset="-122"/>
+                <a:cs typeface="Arial" pitchFamily="34" charset="-120"/>
+              </a:rPr>
+              <a:t>Karana Gulati (2026). Study 1 and study 2 preregistrations and results. github.com/KaranaGulati/ContinuedLearningResearch.</a:t>
+            </a:r>
+            <a:endParaRPr lang="en-US" sz="1200" dirty="0"/>
+          </a:p>
+        </p:txBody>
+      </p:sp>
+      <p:sp>
+        <p:nvSpPr>
+          <p:cNvPr id="25" name="Slide Number Placeholder 0"/>
+          <p:cNvSpPr>
+            <a:spLocks noGrp="1"/>
+          </p:cNvSpPr>
+          <p:nvPr>
+            <p:ph type="sldNum" sz="quarter" idx="4294967295"/>
+          </p:nvPr>
+        </p:nvSpPr>
+        <p:spPr>
+          <a:xfrm>
+            <a:off x="8321040" y="4754880"/>
+            <a:ext cx="457200" cy="274320"/>
+          </a:xfrm>
+          <a:prstGeom prst="rect">
+            <a:avLst/>
+          </a:prstGeom>
+          <a:extLst>
+            <a:ext uri="{C572A759-6A51-4108-AA02-DFA0A04FC94B}">
+              <ma14:wrappingTextBoxFlag xmlns:ma14="http://schemas.microsoft.com/office/mac/drawingml/2011/main" val="0"/>
+            </a:ext>
+          </a:extLst>
+        </p:spPr>
+        <p:txBody>
+          <a:bodyPr/>
+          <a:lstStyle>
+            <a:lvl1pPr>
+              <a:defRPr sz="1100">
+                <a:solidFill>
+                  <a:srgbClr val="777777"/>
+                </a:solidFill>
+                <a:latin typeface="Arial"/>
+                <a:ea typeface="Arial"/>
+                <a:cs typeface="Arial"/>
+              </a:defRPr>
+            </a:lvl1pPr>
+          </a:lstStyle>
+          <a:p>
+            <a:pPr algn="l"/>
+            <a:fld id="{F7021451-1387-4CA6-816F-3879F97B5CBC}" type="slidenum">
+              <a:rPr b="0" lang="en-US"/>
+              <a:t>40</a:t>
+            </a:fld>
+            <a:endParaRPr lang="en-US"/>
+          </a:p>
+        </p:txBody>
+      </p:sp>
+    </p:spTree>
+  </p:cSld>
+  <p:clrMapOvr>
+    <a:masterClrMapping/>
+  </p:clrMapOvr>
+</p:sld>
+</file>
+
+<file path=ppt/slides/slide41.xml><?xml version="1.0" encoding="utf-8"?>
+<p:sld xmlns:a="http://schemas.openxmlformats.org/drawingml/2006/main" xmlns:r="http://schemas.openxmlformats.org/officeDocument/2006/relationships" xmlns:p="http://schemas.openxmlformats.org/presentationml/2006/main">
+  <p:cSld name="Slide 41">
+    <p:spTree>
+      <p:nvGrpSpPr>
+        <p:cNvPr id="1" name=""/>
+        <p:cNvGrpSpPr/>
+        <p:nvPr/>
+      </p:nvGrpSpPr>
+      <p:grpSpPr>
+        <a:xfrm>
+          <a:off x="0" y="0"/>
+          <a:ext cx="0" cy="0"/>
+          <a:chOff x="0" y="0"/>
+          <a:chExt cx="0" cy="0"/>
+        </a:xfrm>
+      </p:grpSpPr>
+      <p:sp>
+        <p:nvSpPr>
+          <p:cNvPr id="2" name="Text 0"/>
+          <p:cNvSpPr/>
+          <p:nvPr>
+            <p:ph idx="100" type="title" hasCustomPrompt="1"/>
+          </p:nvPr>
+        </p:nvSpPr>
+        <p:spPr>
+          <a:xfrm>
+            <a:off x="457200" y="228600"/>
+            <a:ext cx="8229600" cy="822960"/>
+          </a:xfrm>
+          <a:prstGeom prst="rect">
+            <a:avLst/>
+          </a:prstGeom>
+          <a:noFill/>
+          <a:ln/>
+        </p:spPr>
+        <p:txBody>
+          <a:bodyPr wrap="square" lIns="0" tIns="0" rIns="0" bIns="0" rtlCol="0" anchor="t"/>
+          <a:lstStyle/>
+          <a:p>
+            <a:pPr algn="l" indent="0" marL="0">
+              <a:buNone/>
+            </a:pPr>
+            <a:r>
+              <a:rPr lang="en-US" sz="2600" b="1" dirty="0">
+                <a:solidFill>
+                  <a:schemeClr val="tx2"/>
+                </a:solidFill>
+              </a:rPr>
               <a:t>Appendix: glossary of every term used</a:t>
             </a:r>
             <a:endParaRPr lang="en-US" sz="2600" dirty="0"/>
@@ -26183,7 +26796,7 @@
       </p:sp>
       <p:graphicFrame>
         <p:nvGraphicFramePr>
-          <p:cNvPr id="41" name="Table 0"/>
+          <p:cNvPr id="42" name="Table 0"/>
           <p:cNvGraphicFramePr>
             <a:graphicFrameLocks noGrp="1"/>
           </p:cNvGraphicFramePr>
@@ -27579,7 +28192,7 @@
             <a:pPr algn="l"/>
             <a:fld id="{F7021451-1387-4CA6-816F-3879F97B5CBC}" type="slidenum">
               <a:rPr b="0" lang="en-US"/>
-              <a:t>40</a:t>
+              <a:t>41</a:t>
             </a:fld>
             <a:endParaRPr lang="en-US"/>
           </a:p>

--- a/slides/study2-final.pptx
+++ b/slides/study2-final.pptx
@@ -147,12 +147,12 @@
   <p:extLst>
     <p:ext uri="{521415D9-36F7-43E2-AB2F-B90AF26B5E84}">
       <p14:sectionLst xmlns:p14="http://schemas.microsoft.com/office/powerpoint/2010/main">
-        <p14:section name="Introduction" id="{2eecf3f0-fdd8-2790-daed-11de7fca8c3e}">
+        <p14:section name="Introduction" id="{f0b6ee70-608d-4f21-4e7d-6da32e4a5453}">
           <p14:sldIdLst>
             <p14:sldId id="256"/>
           </p14:sldIdLst>
         </p14:section>
-        <p14:section name="The basics, no chess needed" id="{31b834b9-3a71-2961-630c-157ed7a7e5c6}">
+        <p14:section name="The basics, no chess needed" id="{96580502-b5aa-903b-8fbe-88f0eec218e8}">
           <p14:sldIdLst>
             <p14:sldId id="257"/>
             <p14:sldId id="258"/>
@@ -163,7 +163,7 @@
             <p14:sldId id="263"/>
           </p14:sldIdLst>
         </p14:section>
-        <p14:section name="What other researchers have found" id="{049a14ef-8982-be68-1c3f-62e7f5f6a845}">
+        <p14:section name="What other researchers have found" id="{eae89b07-a93b-0bb3-9e9c-53429ac43a0f}">
           <p14:sldIdLst>
             <p14:sldId id="264"/>
             <p14:sldId id="265"/>
@@ -175,17 +175,17 @@
             <p14:sldId id="271"/>
             <p14:sldId id="272"/>
             <p14:sldId id="273"/>
+            <p14:sldId id="274"/>
           </p14:sldIdLst>
         </p14:section>
-        <p14:section name="The questions" id="{7615d33b-9d1e-dde9-0138-577228543ae0}">
+        <p14:section name="The questions" id="{e961eb00-a2c5-95a8-96a8-ac0ca7e35ab7}">
           <p14:sldIdLst>
-            <p14:sldId id="274"/>
             <p14:sldId id="275"/>
+            <p14:sldId id="276"/>
           </p14:sldIdLst>
         </p14:section>
-        <p14:section name="How it was measured" id="{24c34d47-0e1e-83c2-0330-29700cc1d9fa}">
+        <p14:section name="How it was measured" id="{a93bf0b7-c02d-482e-54d4-f6f4756d599c}">
           <p14:sldIdLst>
-            <p14:sldId id="276"/>
             <p14:sldId id="277"/>
             <p14:sldId id="278"/>
             <p14:sldId id="279"/>
@@ -198,7 +198,7 @@
             <p14:sldId id="286"/>
           </p14:sldIdLst>
         </p14:section>
-        <p14:section name="Results" id="{74e42cb8-4157-753e-0f47-95b4f6af3ded}">
+        <p14:section name="Results" id="{6b6005a8-fd2d-0c06-28e0-759882e36d5f}">
           <p14:sldIdLst>
             <p14:sldId id="287"/>
             <p14:sldId id="288"/>
@@ -207,18 +207,18 @@
             <p14:sldId id="291"/>
           </p14:sldIdLst>
         </p14:section>
-        <p14:section name="What it means" id="{816a2873-f64a-3477-4f38-16f9349a2a63}">
+        <p14:section name="What it means" id="{7a8d72b1-c255-085c-0256-a91c95d8620f}">
           <p14:sldIdLst>
             <p14:sldId id="292"/>
             <p14:sldId id="293"/>
           </p14:sldIdLst>
         </p14:section>
-        <p14:section name="Conclusions" id="{3c6214e2-8c8c-3915-5433-6dc46d706545}">
+        <p14:section name="Conclusions" id="{4e48f390-d790-cd77-261e-46b7ade84a68}">
           <p14:sldIdLst>
             <p14:sldId id="294"/>
           </p14:sldIdLst>
         </p14:section>
-        <p14:section name="Backup" id="{e02a5700-6ac6-dd1b-8552-6d3c17c22421}">
+        <p14:section name="Backup" id="{ff37d876-79f1-28a5-fd20-5ad141673f56}">
           <p14:sldIdLst>
             <p14:sldId id="295"/>
             <p14:sldId id="296"/>
@@ -1420,7 +1420,7 @@
           <a:p>
             <a:r>
               <a:rPr lang="en-US" dirty="0"/>
-              <a:t>These economists used chess to study working from home. When lockdown moved top tournaments online, they could compare the same eight elite players at the same time control, online and in person. The engine graded every move after the opening. Players made bigger errors online. Their appendix has the clear example we use to explain a loss: the score goes from -0.13 before a move to -1.09 after, so the move lost 0.96 of a pawn. Their sample is small and very elite, so it says little about club players, but it shows the method works on rapid games.</a:t>
+              <a:t>Why do we only score moves 15 to 30? We copied this from Backus and colleagues, who took it from Guid and Bratko. On page 359 they write: 'Following Guid and Bratko (2006, 2011), we base our quality of play variable on the analysis of moves n = 15, ..., 30, in each game g with total length N of at least 15 moves. We consider this subset of moves for two reasons. First, to limit the substantial computational burden of calculating so many moves (about 1.5 million in our full sample). Second, because we want to focus on the middle game, which is least likely to follow an established plan as experienced players, like those in our sample, tend to study the opening moves of their opponents and practice endgames in advance.' Their footnote 15 adds that each extra move of search depth roughly doubles the computing time. Their players were experienced tournament players. Ours are club players online, who probably memorise fewer openings, so for us the window mostly skips habitual opening moves and keeps the computing manageable. Either way, the same window is used for every game in every group, and it was fixed before any data was scored, so it cannot favour one group over another.</a:t>
             </a:r>
             <a:endParaRPr lang="en-US" dirty="0"/>
           </a:p>
@@ -1508,7 +1508,7 @@
           <a:p>
             <a:r>
               <a:rPr lang="en-US" dirty="0"/>
-              <a:t>Ken Regan is a computer scientist best known for detecting cheating in chess. This paper compares human and computer play using a very large set of positions, each run through four programs. Two findings matter for us. First, the size of a centipawn depends on the program: in 2014, Stockfish gave numbers about one and a half times bigger than the others. That is why our 72 centipawns cannot be compared with another study's numbers, and why every game in our study is scored with the same program and depth. Second, human mistakes grow when one side is far ahead, which is a reason not to judge a lucky win by the moves inside it, where the winner was losing badly. Their programs were 2014 versions, so the 1.5 figure is not known to hold for Stockfish 16.</a:t>
+              <a:t>These economists used chess to study working from home. When lockdown moved top tournaments online, they could compare the same eight elite players at the same time control, online and in person. The engine graded every move after the opening. Players made bigger errors online. Their appendix has the clear example we use to explain a loss: the score goes from -0.13 before a move to -1.09 after, so the move lost 0.96 of a pawn. Their sample is small and very elite, so it says little about club players, but it shows the method works on rapid games.</a:t>
             </a:r>
             <a:endParaRPr lang="en-US" dirty="0"/>
           </a:p>
@@ -1596,7 +1596,7 @@
           <a:p>
             <a:r>
               <a:rPr lang="en-US" dirty="0"/>
-              <a:t>This is a study of decision making that uses chess because every decision is timed and can be graded. The puzzle is that more thinking time should help, yet the hardest moves are also the slowest ones. They found that quick moves were usually better, because quick moves are often easy moves. The interesting part for us is the sign flip: if you ignore how long the player thought, having more time on the clock looks bad; once you account for it, more time helps. So the clock affects quality in a tangled way. Their players were grandmasters over the board, not club players online, so we use this as a reason for caution rather than a direct finding about Lichess.</a:t>
+              <a:t>Ken Regan is a computer scientist best known for detecting cheating in chess. This paper compares human and computer play using a very large set of positions, each run through four programs. Two findings matter for us. First, the size of a centipawn depends on the program: in 2014, Stockfish gave numbers about one and a half times bigger than the others. That is why our 72 centipawns cannot be compared with another study's numbers, and why every game in our study is scored with the same program and depth. Second, human mistakes grow when one side is far ahead, which is a reason not to judge a lucky win by the moves inside it, where the winner was losing badly. Their programs were 2014 versions, so the 1.5 figure is not known to hold for Stockfish 16.</a:t>
             </a:r>
             <a:endParaRPr lang="en-US" dirty="0"/>
           </a:p>
@@ -1684,7 +1684,7 @@
           <a:p>
             <a:r>
               <a:rPr lang="en-US" dirty="0"/>
-              <a:t>Putting it together. Gee and Chowdhary looked at results, not at how well the moves were played. Backus, Kuenn and Sunde measured move quality, but not in relation to how the previous game ended. So the cell 'how the last game was won, against how well the next game was played' was empty in the work we read. Study 1 filled it for the three ways of winning; study 2 asks the sharper question of lucky against deserved wins. This is a claim about the papers we read, not a full search of everything ever published.</a:t>
+              <a:t>This is a study of decision making that uses chess because every decision is timed and can be graded. The puzzle is that more thinking time should help, yet the hardest moves are also the slowest ones. They found that quick moves were usually better, because quick moves are often easy moves. The interesting part for us is the sign flip: if you ignore how long the player thought, having more time on the clock looks bad; once you account for it, more time helps. So the clock affects quality in a tangled way. Their players were grandmasters over the board, not club players online, so we use this as a reason for caution rather than a direct finding about Lichess.</a:t>
             </a:r>
             <a:endParaRPr lang="en-US" dirty="0"/>
           </a:p>
@@ -1772,7 +1772,7 @@
           <a:p>
             <a:r>
               <a:rPr lang="en-US" dirty="0"/>
-              <a:t>Next, exactly what study 2 asked, and what was predicted before any of its data was looked at.</a:t>
+              <a:t>Putting it together. Gee and Chowdhary looked at results, not at how well the moves were played. Backus, Kuenn and Sunde measured move quality, but not in relation to how the previous game ended. So the cell 'how the last game was won, against how well the next game was played' was empty in the work we read. Study 1 filled it for the three ways of winning; study 2 asks the sharper question of lucky against deserved wins. This is a claim about the papers we read, not a full search of everything ever published.</a:t>
             </a:r>
             <a:endParaRPr lang="en-US" dirty="0"/>
           </a:p>
@@ -1948,7 +1948,7 @@
           <a:p>
             <a:r>
               <a:rPr lang="en-US" dirty="0"/>
-              <a:t>Both predictions were written down, dated and saved publicly before a single game was scored. Why? If you look at the data first, with dozens of ways to slice it, something will look interesting by pure chance. Writing the prediction first means the result can be trusted.</a:t>
+              <a:t>Next, exactly what study 2 asked, and what was predicted before any of its data was looked at.</a:t>
             </a:r>
             <a:endParaRPr lang="en-US" dirty="0"/>
           </a:p>
@@ -2036,7 +2036,7 @@
           <a:p>
             <a:r>
               <a:rPr lang="en-US" dirty="0"/>
-              <a:t>Now the method: where the games came from, how lucky wins were found, how the comparison was made fair, and how the numbers were tested.</a:t>
+              <a:t>Both predictions were written down, dated and saved publicly before a single game was scored. Why? If you look at the data first, with dozens of ways to slice it, something will look interesting by pure chance. Writing the prediction first means the result can be trusted.</a:t>
             </a:r>
             <a:endParaRPr lang="en-US" dirty="0"/>
           </a:p>
@@ -2124,7 +2124,7 @@
           <a:p>
             <a:r>
               <a:rPr lang="en-US" dirty="0"/>
-              <a:t>We started with every rated game played on Lichess in September 2026, nearly 90 million. We kept rapid games, which last about 10 to 15 minutes, removed computer accounts, and kept players rated 1200 to 2000. Then we took one time win per player, checked 70,000 of them with the chess computer, and ended with about 12,000 lucky and 12,000 deserved pairs.</a:t>
+              <a:t>Now the method: where the games came from, how lucky wins were found, how the comparison was made fair, and how the numbers were tested.</a:t>
             </a:r>
             <a:endParaRPr lang="en-US" dirty="0"/>
           </a:p>
@@ -2212,7 +2212,7 @@
           <a:p>
             <a:r>
               <a:rPr lang="en-US" dirty="0"/>
-              <a:t>Each data point is a pair. Game A is the win. Game B is the same player's next rated game, which must start within 30 minutes with no other game in between. Any after-effect of a lucky win should show up right away, not days later. We only measure accuracy in game B.</a:t>
+              <a:t>We started with every rated game played on Lichess in September 2026, nearly 90 million. We kept rapid games, which last about 10 to 15 minutes, removed computer accounts, and kept players rated 1200 to 2000. Then we took one time win per player, checked 70,000 of them with the chess computer, and ended with about 12,000 lucky and 12,000 deserved pairs.</a:t>
             </a:r>
             <a:endParaRPr lang="en-US" dirty="0"/>
           </a:p>
@@ -2300,7 +2300,7 @@
           <a:p>
             <a:r>
               <a:rPr lang="en-US" dirty="0"/>
-              <a:t>For every time win, the chess computer scored the final position from the winner's side. If the winner was more than one pawn behind, minus 100 centipawns or worse, the win counts as lucky. Otherwise it is deserved. We also ran a stricter version, losing by more than three pawns, as a check.</a:t>
+              <a:t>Each data point is a pair. Game A is the win. Game B is the same player's next rated game, which must start within 30 minutes with no other game in between. Any after-effect of a lucky win should show up right away, not days later. We only measure accuracy in game B.</a:t>
             </a:r>
             <a:endParaRPr lang="en-US" dirty="0"/>
           </a:p>
@@ -2388,7 +2388,7 @@
           <a:p>
             <a:r>
               <a:rPr lang="en-US" dirty="0"/>
-              <a:t>To be fair, the two groups must contain similar players. So for every rating band and game speed, we took exactly as many deserved wins as lucky wins. If lucky winners were, say, weaker players, they would look worse for that reason alone. Matching removes that.</a:t>
+              <a:t>For every time win, the chess computer scored the final position from the winner's side. If the winner was more than one pawn behind, minus 100 centipawns or worse, the win counts as lucky. Otherwise it is deserved. We also ran a stricter version, losing by more than three pawns, as a check.</a:t>
             </a:r>
             <a:endParaRPr lang="en-US" dirty="0"/>
           </a:p>
@@ -2476,7 +2476,7 @@
           <a:p>
             <a:r>
               <a:rPr lang="en-US" dirty="0"/>
-              <a:t>Every game goes through the same machine with the same settings. A fixed depth means the computer thinks equally hard about every position, so anyone can rerun this and get the same numbers. We skip the first 14 moves because players often play memorised openings there.</a:t>
+              <a:t>To be fair, the two groups must contain similar players. So for every rating band and game speed, we took exactly as many deserved wins as lucky wins. If lucky winners were, say, weaker players, they would look worse for that reason alone. Matching removes that.</a:t>
             </a:r>
             <a:endParaRPr lang="en-US" dirty="0"/>
           </a:p>
@@ -2564,7 +2564,7 @@
           <a:p>
             <a:r>
               <a:rPr lang="en-US" dirty="0"/>
-              <a:t>Why do we only score moves 15 to 30? We copied this from Backus and colleagues, who took it from Guid and Bratko. On page 359 they write: 'Following Guid and Bratko (2006, 2011), we base our quality of play variable on the analysis of moves n = 15, ..., 30, in each game g with total length N of at least 15 moves. We consider this subset of moves for two reasons. First, to limit the substantial computational burden of calculating so many moves (about 1.5 million in our full sample). Second, because we want to focus on the middle game, which is least likely to follow an established plan as experienced players, like those in our sample, tend to study the opening moves of their opponents and practice endgames in advance.' Their footnote 15 adds that each extra move of search depth roughly doubles the computing time. Their players were experienced tournament players. Ours are club players online, who probably memorise fewer openings, so for us the window mostly skips habitual opening moves and keeps the computing manageable. Either way, the same window is used for every game in every group, and it was fixed before any data was scored, so it cannot favour one group over another.</a:t>
+              <a:t>Every game goes through the same machine with the same settings. A fixed depth means the computer thinks equally hard about every position, so anyone can rerun this and get the same numbers. We skip the first 14 moves because players often play memorised openings there.</a:t>
             </a:r>
             <a:endParaRPr lang="en-US" dirty="0"/>
           </a:p>
@@ -8604,7 +8604,7 @@
                   <a:schemeClr val="tx2"/>
                 </a:solidFill>
               </a:rPr>
-              <a:t>Kuenn et al.: top players made bigger mistakes online than over the board</a:t>
+              <a:t>Why only moves 15 to 30: Backus et al. gave two reasons, following Guid and Bratko</a:t>
             </a:r>
             <a:endParaRPr lang="en-US" sz="2600" dirty="0"/>
           </a:p>
@@ -8612,18 +8612,18 @@
       </p:sp>
       <p:sp>
         <p:nvSpPr>
-          <p:cNvPr id="3" name="What they asked"/>
+          <p:cNvPr id="3" name="quote"/>
           <p:cNvSpPr/>
           <p:nvPr/>
         </p:nvSpPr>
         <p:spPr>
           <a:xfrm>
             <a:off x="457200" y="1115568"/>
-            <a:ext cx="1600200" cy="658368"/>
+            <a:ext cx="8229600" cy="1097280"/>
           </a:xfrm>
           <a:prstGeom prst="roundRect">
             <a:avLst>
-              <a:gd name="adj" fmla="val 8333"/>
+              <a:gd name="adj" fmla="val 5000"/>
             </a:avLst>
           </a:prstGeom>
           <a:solidFill>
@@ -8645,8 +8645,8 @@
         </p:nvSpPr>
         <p:spPr>
           <a:xfrm>
-            <a:off x="548640" y="1115568"/>
-            <a:ext cx="1417320" cy="658368"/>
+            <a:off x="640080" y="1115568"/>
+            <a:ext cx="7863840" cy="1097280"/>
           </a:xfrm>
           <a:prstGeom prst="rect">
             <a:avLst/>
@@ -8662,7 +8662,7 @@
               <a:buNone/>
             </a:pPr>
             <a:r>
-              <a:rPr lang="en-US" sz="1500" b="1" dirty="0">
+              <a:rPr lang="en-US" sz="1500" i="1" dirty="0">
                 <a:solidFill>
                   <a:srgbClr val="1F4E79"/>
                 </a:solidFill>
@@ -8670,46 +8670,24 @@
                 <a:ea typeface="Arial" pitchFamily="34" charset="-122"/>
                 <a:cs typeface="Arial" pitchFamily="34" charset="-120"/>
               </a:rPr>
-              <a:t>What they asked</a:t>
+              <a:t>“We consider this subset of moves for two reasons. First, to limit the substantial computational burden … Second, because we want to focus on the middle game, which is least likely to follow an established plan …”</a:t>
             </a:r>
             <a:endParaRPr lang="en-US" sz="1500" dirty="0"/>
           </a:p>
-        </p:txBody>
-      </p:sp>
-      <p:sp>
-        <p:nvSpPr>
-          <p:cNvPr id="5" name="Text 3"/>
-          <p:cNvSpPr txBox="1"/>
-          <p:nvPr/>
-        </p:nvSpPr>
-        <p:spPr>
-          <a:xfrm>
-            <a:off x="2194560" y="1115568"/>
-            <a:ext cx="6492240" cy="658368"/>
-          </a:xfrm>
-          <a:prstGeom prst="rect">
-            <a:avLst/>
-          </a:prstGeom>
-          <a:noFill/>
-          <a:ln/>
-        </p:spPr>
-        <p:txBody>
-          <a:bodyPr wrap="square" lIns="0" tIns="0" rIns="0" bIns="0" rtlCol="0" anchor="ctr"/>
-          <a:lstStyle/>
           <a:p>
             <a:pPr indent="0" marL="0">
               <a:buNone/>
             </a:pPr>
             <a:r>
-              <a:rPr lang="en-US" sz="1500" dirty="0">
-                <a:solidFill>
-                  <a:schemeClr val="tx1"/>
+              <a:rPr lang="en-US" sz="1300" dirty="0">
+                <a:solidFill>
+                  <a:srgbClr val="777777"/>
                 </a:solidFill>
                 <a:latin typeface="Arial" pitchFamily="34" charset="0"/>
                 <a:ea typeface="Arial" pitchFamily="34" charset="-122"/>
                 <a:cs typeface="Arial" pitchFamily="34" charset="-120"/>
               </a:rPr>
-              <a:t>Does moving brain-heavy work from the office to home, online, hurt performance? COVID-19 lockdowns gave a natural test.</a:t>
+              <a:t>Backus et al. (2023), p. 359</a:t>
             </a:r>
             <a:endParaRPr lang="en-US" sz="1500" dirty="0"/>
           </a:p>
@@ -8717,22 +8695,22 @@
       </p:sp>
       <p:sp>
         <p:nvSpPr>
-          <p:cNvPr id="6" name="What they did"/>
+          <p:cNvPr id="5" name="1. Computer time"/>
           <p:cNvSpPr/>
           <p:nvPr/>
         </p:nvSpPr>
         <p:spPr>
           <a:xfrm>
-            <a:off x="457200" y="1847088"/>
-            <a:ext cx="1600200" cy="1115568"/>
+            <a:off x="457200" y="2377440"/>
+            <a:ext cx="3977640" cy="1234440"/>
           </a:xfrm>
           <a:prstGeom prst="roundRect">
             <a:avLst>
-              <a:gd name="adj" fmla="val 4918"/>
+              <a:gd name="adj" fmla="val 4444"/>
             </a:avLst>
           </a:prstGeom>
           <a:solidFill>
-            <a:srgbClr val="EBF3FA"/>
+            <a:srgbClr val="FFFFFF"/>
           </a:solidFill>
           <a:ln w="12700">
             <a:solidFill>
@@ -8744,14 +8722,14 @@
       </p:sp>
       <p:sp>
         <p:nvSpPr>
-          <p:cNvPr id="7" name="Text 5"/>
+          <p:cNvPr id="6" name="Text 4"/>
           <p:cNvSpPr txBox="1"/>
           <p:nvPr/>
         </p:nvSpPr>
         <p:spPr>
           <a:xfrm>
-            <a:off x="548640" y="1847088"/>
-            <a:ext cx="1417320" cy="1115568"/>
+            <a:off x="640080" y="2450592"/>
+            <a:ext cx="3611880" cy="320040"/>
           </a:xfrm>
           <a:prstGeom prst="rect">
             <a:avLst/>
@@ -8760,37 +8738,37 @@
           <a:ln/>
         </p:spPr>
         <p:txBody>
-          <a:bodyPr wrap="square" lIns="0" tIns="0" rIns="0" bIns="0" rtlCol="0" anchor="ctr"/>
+          <a:bodyPr wrap="square" lIns="0" tIns="0" rIns="0" bIns="0" rtlCol="0" anchor="t"/>
           <a:lstStyle/>
           <a:p>
             <a:pPr indent="0" marL="0">
               <a:buNone/>
             </a:pPr>
             <a:r>
-              <a:rPr lang="en-US" sz="1500" b="1" dirty="0">
-                <a:solidFill>
-                  <a:srgbClr val="1F4E79"/>
+              <a:rPr lang="en-US" sz="1600" b="1" dirty="0">
+                <a:solidFill>
+                  <a:srgbClr val="2E75B6"/>
                 </a:solidFill>
                 <a:latin typeface="Arial" pitchFamily="34" charset="0"/>
                 <a:ea typeface="Arial" pitchFamily="34" charset="-122"/>
                 <a:cs typeface="Arial" pitchFamily="34" charset="-120"/>
               </a:rPr>
-              <a:t>What they did</a:t>
-            </a:r>
-            <a:endParaRPr lang="en-US" sz="1500" dirty="0"/>
-          </a:p>
-        </p:txBody>
-      </p:sp>
-      <p:sp>
-        <p:nvSpPr>
-          <p:cNvPr id="8" name="Text 6"/>
+              <a:t>1. Computer time</a:t>
+            </a:r>
+            <a:endParaRPr lang="en-US" sz="1600" dirty="0"/>
+          </a:p>
+        </p:txBody>
+      </p:sp>
+      <p:sp>
+        <p:nvSpPr>
+          <p:cNvPr id="7" name="Text 5"/>
           <p:cNvSpPr txBox="1"/>
           <p:nvPr/>
         </p:nvSpPr>
         <p:spPr>
           <a:xfrm>
-            <a:off x="2194560" y="1847088"/>
-            <a:ext cx="6492240" cy="1115568"/>
+            <a:off x="640080" y="2788920"/>
+            <a:ext cx="3611880" cy="777240"/>
           </a:xfrm>
           <a:prstGeom prst="rect">
             <a:avLst/>
@@ -8799,14 +8777,14 @@
           <a:ln/>
         </p:spPr>
         <p:txBody>
-          <a:bodyPr wrap="square" lIns="0" tIns="0" rIns="0" bIns="0" rtlCol="0" anchor="ctr"/>
+          <a:bodyPr wrap="square" lIns="0" tIns="0" rIns="0" bIns="0" rtlCol="0" anchor="t"/>
           <a:lstStyle/>
           <a:p>
             <a:pPr indent="0" marL="0">
               <a:buNone/>
             </a:pPr>
             <a:r>
-              <a:rPr lang="en-US" sz="1500" dirty="0">
+              <a:rPr lang="en-US" sz="1400" dirty="0">
                 <a:solidFill>
                   <a:schemeClr val="tx1"/>
                 </a:solidFill>
@@ -8814,30 +8792,30 @@
                 <a:ea typeface="Arial" pitchFamily="34" charset="-122"/>
                 <a:cs typeface="Arial" pitchFamily="34" charset="-120"/>
               </a:rPr>
-              <a:t>Eight of the world's top players. Their online games in the Magnus Carlsen Invitational (April to May 2020) were compared with their over-the-board World Rapid Championship games (2015 to 2019), both at 15 minutes plus 10 seconds a move. First 15 moves dropped; graded by Stockfish 11 at depth 25.</a:t>
-            </a:r>
-            <a:endParaRPr lang="en-US" sz="1500" dirty="0"/>
-          </a:p>
-        </p:txBody>
-      </p:sp>
-      <p:sp>
-        <p:nvSpPr>
-          <p:cNvPr id="9" name="What they found"/>
+              <a:t>Their sample had about 1.5 million moves, and each extra step of search depth roughly doubles the computing time.</a:t>
+            </a:r>
+            <a:endParaRPr lang="en-US" sz="1400" dirty="0"/>
+          </a:p>
+        </p:txBody>
+      </p:sp>
+      <p:sp>
+        <p:nvSpPr>
+          <p:cNvPr id="8" name="2. Skip prepared play"/>
           <p:cNvSpPr/>
           <p:nvPr/>
         </p:nvSpPr>
         <p:spPr>
           <a:xfrm>
-            <a:off x="457200" y="3035808"/>
-            <a:ext cx="1600200" cy="914400"/>
+            <a:off x="4709160" y="2377440"/>
+            <a:ext cx="3977640" cy="1234440"/>
           </a:xfrm>
           <a:prstGeom prst="roundRect">
             <a:avLst>
-              <a:gd name="adj" fmla="val 6000"/>
+              <a:gd name="adj" fmla="val 4444"/>
             </a:avLst>
           </a:prstGeom>
           <a:solidFill>
-            <a:srgbClr val="EBF3FA"/>
+            <a:srgbClr val="FFFFFF"/>
           </a:solidFill>
           <a:ln w="12700">
             <a:solidFill>
@@ -8849,14 +8827,14 @@
       </p:sp>
       <p:sp>
         <p:nvSpPr>
-          <p:cNvPr id="10" name="Text 8"/>
+          <p:cNvPr id="9" name="Text 7"/>
           <p:cNvSpPr txBox="1"/>
           <p:nvPr/>
         </p:nvSpPr>
         <p:spPr>
           <a:xfrm>
-            <a:off x="548640" y="3035808"/>
-            <a:ext cx="1417320" cy="914400"/>
+            <a:off x="4892040" y="2450592"/>
+            <a:ext cx="3611880" cy="320040"/>
           </a:xfrm>
           <a:prstGeom prst="rect">
             <a:avLst/>
@@ -8865,37 +8843,37 @@
           <a:ln/>
         </p:spPr>
         <p:txBody>
-          <a:bodyPr wrap="square" lIns="0" tIns="0" rIns="0" bIns="0" rtlCol="0" anchor="ctr"/>
+          <a:bodyPr wrap="square" lIns="0" tIns="0" rIns="0" bIns="0" rtlCol="0" anchor="t"/>
           <a:lstStyle/>
           <a:p>
             <a:pPr indent="0" marL="0">
               <a:buNone/>
             </a:pPr>
             <a:r>
-              <a:rPr lang="en-US" sz="1500" b="1" dirty="0">
-                <a:solidFill>
-                  <a:srgbClr val="1F4E79"/>
+              <a:rPr lang="en-US" sz="1600" b="1" dirty="0">
+                <a:solidFill>
+                  <a:srgbClr val="2E75B6"/>
                 </a:solidFill>
                 <a:latin typeface="Arial" pitchFamily="34" charset="0"/>
                 <a:ea typeface="Arial" pitchFamily="34" charset="-122"/>
                 <a:cs typeface="Arial" pitchFamily="34" charset="-120"/>
               </a:rPr>
-              <a:t>What they found</a:t>
-            </a:r>
-            <a:endParaRPr lang="en-US" sz="1500" dirty="0"/>
-          </a:p>
-        </p:txBody>
-      </p:sp>
-      <p:sp>
-        <p:nvSpPr>
-          <p:cNvPr id="11" name="Text 9"/>
+              <a:t>2. Skip prepared play</a:t>
+            </a:r>
+            <a:endParaRPr lang="en-US" sz="1600" dirty="0"/>
+          </a:p>
+        </p:txBody>
+      </p:sp>
+      <p:sp>
+        <p:nvSpPr>
+          <p:cNvPr id="10" name="Text 8"/>
           <p:cNvSpPr txBox="1"/>
           <p:nvPr/>
         </p:nvSpPr>
         <p:spPr>
           <a:xfrm>
-            <a:off x="2194560" y="3035808"/>
-            <a:ext cx="6492240" cy="914400"/>
+            <a:off x="4892040" y="2788920"/>
+            <a:ext cx="3611880" cy="777240"/>
           </a:xfrm>
           <a:prstGeom prst="rect">
             <a:avLst/>
@@ -8904,14 +8882,14 @@
           <a:ln/>
         </p:spPr>
         <p:txBody>
-          <a:bodyPr wrap="square" lIns="0" tIns="0" rIns="0" bIns="0" rtlCol="0" anchor="ctr"/>
+          <a:bodyPr wrap="square" lIns="0" tIns="0" rIns="0" bIns="0" rtlCol="0" anchor="t"/>
           <a:lstStyle/>
           <a:p>
             <a:pPr indent="0" marL="0">
               <a:buNone/>
             </a:pPr>
             <a:r>
-              <a:rPr lang="en-US" sz="1500" dirty="0">
+              <a:rPr lang="en-US" sz="1400" dirty="0">
                 <a:solidFill>
                   <a:schemeClr val="tx1"/>
                 </a:solidFill>
@@ -8919,26 +8897,26 @@
                 <a:ea typeface="Arial" pitchFamily="34" charset="-122"/>
                 <a:cs typeface="Arial" pitchFamily="34" charset="-120"/>
               </a:rPr>
-              <a:t>When players made a mistake, it was on average 16.8% larger online than over the board.</a:t>
-            </a:r>
-            <a:endParaRPr lang="en-US" sz="1500" dirty="0"/>
-          </a:p>
-        </p:txBody>
-      </p:sp>
-      <p:sp>
-        <p:nvSpPr>
-          <p:cNvPr id="12" name="why it matters"/>
+              <a:t>Strong players study openings and practise endgames in advance, so the middle game shows their own decisions best.</a:t>
+            </a:r>
+            <a:endParaRPr lang="en-US" sz="1400" dirty="0"/>
+          </a:p>
+        </p:txBody>
+      </p:sp>
+      <p:sp>
+        <p:nvSpPr>
+          <p:cNvPr id="11" name="our players"/>
           <p:cNvSpPr/>
           <p:nvPr/>
         </p:nvSpPr>
         <p:spPr>
           <a:xfrm>
-            <a:off x="457200" y="4041648"/>
-            <a:ext cx="8229600" cy="603504"/>
+            <a:off x="457200" y="3767328"/>
+            <a:ext cx="8229600" cy="841248"/>
           </a:xfrm>
           <a:prstGeom prst="roundRect">
             <a:avLst>
-              <a:gd name="adj" fmla="val 9091"/>
+              <a:gd name="adj" fmla="val 6522"/>
             </a:avLst>
           </a:prstGeom>
           <a:solidFill>
@@ -8954,14 +8932,14 @@
       </p:sp>
       <p:sp>
         <p:nvSpPr>
-          <p:cNvPr id="13" name="Text 11"/>
+          <p:cNvPr id="12" name="Text 10"/>
           <p:cNvSpPr txBox="1"/>
           <p:nvPr/>
         </p:nvSpPr>
         <p:spPr>
           <a:xfrm>
-            <a:off x="594360" y="4041648"/>
-            <a:ext cx="7955280" cy="603504"/>
+            <a:off x="594360" y="3767328"/>
+            <a:ext cx="7955280" cy="841248"/>
           </a:xfrm>
           <a:prstGeom prst="rect">
             <a:avLst/>
@@ -8977,7 +8955,7 @@
               <a:buNone/>
             </a:pPr>
             <a:r>
-              <a:rPr lang="en-US" sz="1500" b="1" dirty="0">
+              <a:rPr lang="en-US" sz="1400" b="1" dirty="0">
                 <a:solidFill>
                   <a:srgbClr val="C27C0E"/>
                 </a:solidFill>
@@ -8985,13 +8963,13 @@
                 <a:ea typeface="Arial" pitchFamily="34" charset="-122"/>
                 <a:cs typeface="Arial" pitchFamily="34" charset="-120"/>
               </a:rPr>
-              <a:t>Why it matters for us: </a:t>
+              <a:t>For our players: </a:t>
             </a:r>
             <a:pPr indent="0" marL="0">
               <a:buNone/>
             </a:pPr>
             <a:r>
-              <a:rPr lang="en-US" sz="1500" dirty="0">
+              <a:rPr lang="en-US" sz="1400" dirty="0">
                 <a:solidFill>
                   <a:schemeClr val="tx1"/>
                 </a:solidFill>
@@ -8999,15 +8977,15 @@
                 <a:ea typeface="Arial" pitchFamily="34" charset="-122"/>
                 <a:cs typeface="Arial" pitchFamily="34" charset="-120"/>
               </a:rPr>
-              <a:t>the same grading method works for rapid games, and their worked example is how we explain the loss formula.</a:t>
-            </a:r>
-            <a:endParaRPr lang="en-US" sz="1500" dirty="0"/>
-          </a:p>
-        </p:txBody>
-      </p:sp>
-      <p:sp>
-        <p:nvSpPr>
-          <p:cNvPr id="14" name="Text 12"/>
+              <a:t>club players rated 1200 to 2000 probably memorise less, so here the window mainly skips habitual opening moves and keeps the computing manageable. It was fixed in the preregistration before any game was scored.</a:t>
+            </a:r>
+            <a:endParaRPr lang="en-US" sz="1400" dirty="0"/>
+          </a:p>
+        </p:txBody>
+      </p:sp>
+      <p:sp>
+        <p:nvSpPr>
+          <p:cNvPr id="13" name="Text 11"/>
           <p:cNvSpPr txBox="1"/>
           <p:nvPr/>
         </p:nvSpPr>
@@ -9038,7 +9016,7 @@
                 <a:ea typeface="Arial" pitchFamily="34" charset="-122"/>
                 <a:cs typeface="Arial" pitchFamily="34" charset="-120"/>
               </a:rPr>
-              <a:t>Kuenn, Seel &amp; Zegners (2020), IZA Discussion Paper 13491; published in The Economic Journal 132(643), 2022</a:t>
+              <a:t>Backus et al. (2023), Quantitative Economics 14(1), 349-380; window from Guid &amp; Bratko (2006, 2011)</a:t>
             </a:r>
             <a:endParaRPr lang="en-US" sz="1200" dirty="0"/>
           </a:p>
@@ -9149,7 +9127,7 @@
                   <a:schemeClr val="tx2"/>
                 </a:solidFill>
               </a:rPr>
-              <a:t>Regan et al.: different chess programs score the same move differently</a:t>
+              <a:t>Kuenn et al.: top players made bigger mistakes online than over the board</a:t>
             </a:r>
             <a:endParaRPr lang="en-US" sz="2600" dirty="0"/>
           </a:p>
@@ -9254,7 +9232,7 @@
                 <a:ea typeface="Arial" pitchFamily="34" charset="-122"/>
                 <a:cs typeface="Arial" pitchFamily="34" charset="-120"/>
               </a:rPr>
-              <a:t>How do the mistakes and choices of human players differ from those of computers?</a:t>
+              <a:t>Does moving brain-heavy work from the office to home, online, hurt performance? COVID-19 lockdowns gave a natural test.</a:t>
             </a:r>
             <a:endParaRPr lang="en-US" sz="1500" dirty="0"/>
           </a:p>
@@ -9359,7 +9337,7 @@
                 <a:ea typeface="Arial" pitchFamily="34" charset="-122"/>
                 <a:cs typeface="Arial" pitchFamily="34" charset="-120"/>
               </a:rPr>
-              <a:t>726,120 positions from 208 top tournaments (2010 to 2012), each analysed by four different chess programs.</a:t>
+              <a:t>Eight of the world's top players. Their online games in the Magnus Carlsen Invitational (April to May 2020) were compared with their over-the-board World Rapid Championship games (2015 to 2019), both at 15 minutes plus 10 seconds a move. First 15 moves dropped; graded by Stockfish 11 at depth 25.</a:t>
             </a:r>
             <a:endParaRPr lang="en-US" sz="1500" dirty="0"/>
           </a:p>
@@ -9464,7 +9442,7 @@
                 <a:ea typeface="Arial" pitchFamily="34" charset="-122"/>
                 <a:cs typeface="Arial" pitchFamily="34" charset="-120"/>
               </a:rPr>
-              <a:t>Humans err more the bigger either side's advantage, far more than computers do. A player's expected score is 2-3% lower when it is their turn to move. Stockfish's scores were about 1.5 times larger than other programs'.</a:t>
+              <a:t>When players made a mistake, it was on average 16.8% larger online than over the board.</a:t>
             </a:r>
             <a:endParaRPr lang="en-US" sz="1500" dirty="0"/>
           </a:p>
@@ -9544,7 +9522,7 @@
                 <a:ea typeface="Arial" pitchFamily="34" charset="-122"/>
                 <a:cs typeface="Arial" pitchFamily="34" charset="-120"/>
               </a:rPr>
-              <a:t>a centipawn from one program is not a centipawn from another, so we only compare groups scored by one program at one setting.</a:t>
+              <a:t>the same grading method works for rapid games, and their worked example is how we explain the loss formula.</a:t>
             </a:r>
             <a:endParaRPr lang="en-US" sz="1500" dirty="0"/>
           </a:p>
@@ -9583,7 +9561,7 @@
                 <a:ea typeface="Arial" pitchFamily="34" charset="-122"/>
                 <a:cs typeface="Arial" pitchFamily="34" charset="-120"/>
               </a:rPr>
-              <a:t>Regan, Biswas &amp; Zhou (2014), AAAI-14 Workshop on Advances in Preference Handling</a:t>
+              <a:t>Kuenn, Seel &amp; Zegners (2020), IZA Discussion Paper 13491; published in The Economic Journal 132(643), 2022</a:t>
             </a:r>
             <a:endParaRPr lang="en-US" sz="1200" dirty="0"/>
           </a:p>
@@ -9694,7 +9672,7 @@
                   <a:schemeClr val="tx2"/>
                 </a:solidFill>
               </a:rPr>
-              <a:t>Sunde et al.: quicker moves were better, and clock time only helps once thinking time is counted</a:t>
+              <a:t>Regan et al.: different chess programs score the same move differently</a:t>
             </a:r>
             <a:endParaRPr lang="en-US" sz="2600" dirty="0"/>
           </a:p>
@@ -9799,7 +9777,7 @@
                 <a:ea typeface="Arial" pitchFamily="34" charset="-122"/>
                 <a:cs typeface="Arial" pitchFamily="34" charset="-120"/>
               </a:rPr>
-              <a:t>Are slow decisions better, because of more thought, or worse, because slow means the problem was hard? The two ideas predict opposite results.</a:t>
+              <a:t>How do the mistakes and choices of human players differ from those of computers?</a:t>
             </a:r>
             <a:endParaRPr lang="en-US" sz="1500" dirty="0"/>
           </a:p>
@@ -9904,7 +9882,7 @@
                 <a:ea typeface="Arial" pitchFamily="34" charset="-122"/>
                 <a:cs typeface="Arial" pitchFamily="34" charset="-120"/>
               </a:rPr>
-              <a:t>About 80,000 moves from 1,600 grandmaster-level over-the-board games (2014 to 2017, rated 2,500 or more, at least 2 hours each). For every move: time spent, time left, how hard the position was, and whether the best move was played (Stockfish 14). The 2026 version adds rapid and blitz: 215,000 moves.</a:t>
+              <a:t>726,120 positions from 208 top tournaments (2010 to 2012), each analysed by four different chess programs.</a:t>
             </a:r>
             <a:endParaRPr lang="en-US" sz="1500" dirty="0"/>
           </a:p>
@@ -10009,7 +9987,7 @@
                 <a:ea typeface="Arial" pitchFamily="34" charset="-122"/>
                 <a:cs typeface="Arial" pitchFamily="34" charset="-120"/>
               </a:rPr>
-              <a:t>Quicker moves were more often the best move. Time left on the clock looked harmful on its own, but helpful once time spent on the move was held fixed: the sign flips. The time link was stronger in rapid and blitz.</a:t>
+              <a:t>Humans err more the bigger either side's advantage, far more than computers do. A player's expected score is 2-3% lower when it is their turn to move. Stockfish's scores were about 1.5 times larger than other programs'.</a:t>
             </a:r>
             <a:endParaRPr lang="en-US" sz="1500" dirty="0"/>
           </a:p>
@@ -10089,7 +10067,7 @@
                 <a:ea typeface="Arial" pitchFamily="34" charset="-122"/>
                 <a:cs typeface="Arial" pitchFamily="34" charset="-120"/>
               </a:rPr>
-              <a:t>clock time and move quality are tangled, more so in fast chess, so we studied rapid games and left bullet and blitz out.</a:t>
+              <a:t>a centipawn from one program is not a centipawn from another, so we only compare groups scored by one program at one setting.</a:t>
             </a:r>
             <a:endParaRPr lang="en-US" sz="1500" dirty="0"/>
           </a:p>
@@ -10128,7 +10106,7 @@
                 <a:ea typeface="Arial" pitchFamily="34" charset="-122"/>
                 <a:cs typeface="Arial" pitchFamily="34" charset="-120"/>
               </a:rPr>
-              <a:t>Sunde, Zegners &amp; Strittmatter (2022), arXiv:2201.10808; published in PNAS 123(20), e2531472123 (2026)</a:t>
+              <a:t>Regan, Biswas &amp; Zhou (2014), AAAI-14 Workshop on Advances in Preference Handling</a:t>
             </a:r>
             <a:endParaRPr lang="en-US" sz="1200" dirty="0"/>
           </a:p>
@@ -10239,6 +10217,551 @@
                   <a:schemeClr val="tx2"/>
                 </a:solidFill>
               </a:rPr>
+              <a:t>Sunde et al.: quicker moves were better, and clock time only helps once thinking time is counted</a:t>
+            </a:r>
+            <a:endParaRPr lang="en-US" sz="2600" dirty="0"/>
+          </a:p>
+        </p:txBody>
+      </p:sp>
+      <p:sp>
+        <p:nvSpPr>
+          <p:cNvPr id="3" name="What they asked"/>
+          <p:cNvSpPr/>
+          <p:nvPr/>
+        </p:nvSpPr>
+        <p:spPr>
+          <a:xfrm>
+            <a:off x="457200" y="1115568"/>
+            <a:ext cx="1600200" cy="658368"/>
+          </a:xfrm>
+          <a:prstGeom prst="roundRect">
+            <a:avLst>
+              <a:gd name="adj" fmla="val 8333"/>
+            </a:avLst>
+          </a:prstGeom>
+          <a:solidFill>
+            <a:srgbClr val="EBF3FA"/>
+          </a:solidFill>
+          <a:ln w="12700">
+            <a:solidFill>
+              <a:srgbClr val="2E75B6"/>
+            </a:solidFill>
+            <a:prstDash val="solid"/>
+          </a:ln>
+        </p:spPr>
+      </p:sp>
+      <p:sp>
+        <p:nvSpPr>
+          <p:cNvPr id="4" name="Text 2"/>
+          <p:cNvSpPr txBox="1"/>
+          <p:nvPr/>
+        </p:nvSpPr>
+        <p:spPr>
+          <a:xfrm>
+            <a:off x="548640" y="1115568"/>
+            <a:ext cx="1417320" cy="658368"/>
+          </a:xfrm>
+          <a:prstGeom prst="rect">
+            <a:avLst/>
+          </a:prstGeom>
+          <a:noFill/>
+          <a:ln/>
+        </p:spPr>
+        <p:txBody>
+          <a:bodyPr wrap="square" lIns="0" tIns="0" rIns="0" bIns="0" rtlCol="0" anchor="ctr"/>
+          <a:lstStyle/>
+          <a:p>
+            <a:pPr indent="0" marL="0">
+              <a:buNone/>
+            </a:pPr>
+            <a:r>
+              <a:rPr lang="en-US" sz="1500" b="1" dirty="0">
+                <a:solidFill>
+                  <a:srgbClr val="1F4E79"/>
+                </a:solidFill>
+                <a:latin typeface="Arial" pitchFamily="34" charset="0"/>
+                <a:ea typeface="Arial" pitchFamily="34" charset="-122"/>
+                <a:cs typeface="Arial" pitchFamily="34" charset="-120"/>
+              </a:rPr>
+              <a:t>What they asked</a:t>
+            </a:r>
+            <a:endParaRPr lang="en-US" sz="1500" dirty="0"/>
+          </a:p>
+        </p:txBody>
+      </p:sp>
+      <p:sp>
+        <p:nvSpPr>
+          <p:cNvPr id="5" name="Text 3"/>
+          <p:cNvSpPr txBox="1"/>
+          <p:nvPr/>
+        </p:nvSpPr>
+        <p:spPr>
+          <a:xfrm>
+            <a:off x="2194560" y="1115568"/>
+            <a:ext cx="6492240" cy="658368"/>
+          </a:xfrm>
+          <a:prstGeom prst="rect">
+            <a:avLst/>
+          </a:prstGeom>
+          <a:noFill/>
+          <a:ln/>
+        </p:spPr>
+        <p:txBody>
+          <a:bodyPr wrap="square" lIns="0" tIns="0" rIns="0" bIns="0" rtlCol="0" anchor="ctr"/>
+          <a:lstStyle/>
+          <a:p>
+            <a:pPr indent="0" marL="0">
+              <a:buNone/>
+            </a:pPr>
+            <a:r>
+              <a:rPr lang="en-US" sz="1500" dirty="0">
+                <a:solidFill>
+                  <a:schemeClr val="tx1"/>
+                </a:solidFill>
+                <a:latin typeface="Arial" pitchFamily="34" charset="0"/>
+                <a:ea typeface="Arial" pitchFamily="34" charset="-122"/>
+                <a:cs typeface="Arial" pitchFamily="34" charset="-120"/>
+              </a:rPr>
+              <a:t>Are slow decisions better, because of more thought, or worse, because slow means the problem was hard? The two ideas predict opposite results.</a:t>
+            </a:r>
+            <a:endParaRPr lang="en-US" sz="1500" dirty="0"/>
+          </a:p>
+        </p:txBody>
+      </p:sp>
+      <p:sp>
+        <p:nvSpPr>
+          <p:cNvPr id="6" name="What they did"/>
+          <p:cNvSpPr/>
+          <p:nvPr/>
+        </p:nvSpPr>
+        <p:spPr>
+          <a:xfrm>
+            <a:off x="457200" y="1847088"/>
+            <a:ext cx="1600200" cy="1115568"/>
+          </a:xfrm>
+          <a:prstGeom prst="roundRect">
+            <a:avLst>
+              <a:gd name="adj" fmla="val 4918"/>
+            </a:avLst>
+          </a:prstGeom>
+          <a:solidFill>
+            <a:srgbClr val="EBF3FA"/>
+          </a:solidFill>
+          <a:ln w="12700">
+            <a:solidFill>
+              <a:srgbClr val="2E75B6"/>
+            </a:solidFill>
+            <a:prstDash val="solid"/>
+          </a:ln>
+        </p:spPr>
+      </p:sp>
+      <p:sp>
+        <p:nvSpPr>
+          <p:cNvPr id="7" name="Text 5"/>
+          <p:cNvSpPr txBox="1"/>
+          <p:nvPr/>
+        </p:nvSpPr>
+        <p:spPr>
+          <a:xfrm>
+            <a:off x="548640" y="1847088"/>
+            <a:ext cx="1417320" cy="1115568"/>
+          </a:xfrm>
+          <a:prstGeom prst="rect">
+            <a:avLst/>
+          </a:prstGeom>
+          <a:noFill/>
+          <a:ln/>
+        </p:spPr>
+        <p:txBody>
+          <a:bodyPr wrap="square" lIns="0" tIns="0" rIns="0" bIns="0" rtlCol="0" anchor="ctr"/>
+          <a:lstStyle/>
+          <a:p>
+            <a:pPr indent="0" marL="0">
+              <a:buNone/>
+            </a:pPr>
+            <a:r>
+              <a:rPr lang="en-US" sz="1500" b="1" dirty="0">
+                <a:solidFill>
+                  <a:srgbClr val="1F4E79"/>
+                </a:solidFill>
+                <a:latin typeface="Arial" pitchFamily="34" charset="0"/>
+                <a:ea typeface="Arial" pitchFamily="34" charset="-122"/>
+                <a:cs typeface="Arial" pitchFamily="34" charset="-120"/>
+              </a:rPr>
+              <a:t>What they did</a:t>
+            </a:r>
+            <a:endParaRPr lang="en-US" sz="1500" dirty="0"/>
+          </a:p>
+        </p:txBody>
+      </p:sp>
+      <p:sp>
+        <p:nvSpPr>
+          <p:cNvPr id="8" name="Text 6"/>
+          <p:cNvSpPr txBox="1"/>
+          <p:nvPr/>
+        </p:nvSpPr>
+        <p:spPr>
+          <a:xfrm>
+            <a:off x="2194560" y="1847088"/>
+            <a:ext cx="6492240" cy="1115568"/>
+          </a:xfrm>
+          <a:prstGeom prst="rect">
+            <a:avLst/>
+          </a:prstGeom>
+          <a:noFill/>
+          <a:ln/>
+        </p:spPr>
+        <p:txBody>
+          <a:bodyPr wrap="square" lIns="0" tIns="0" rIns="0" bIns="0" rtlCol="0" anchor="ctr"/>
+          <a:lstStyle/>
+          <a:p>
+            <a:pPr indent="0" marL="0">
+              <a:buNone/>
+            </a:pPr>
+            <a:r>
+              <a:rPr lang="en-US" sz="1500" dirty="0">
+                <a:solidFill>
+                  <a:schemeClr val="tx1"/>
+                </a:solidFill>
+                <a:latin typeface="Arial" pitchFamily="34" charset="0"/>
+                <a:ea typeface="Arial" pitchFamily="34" charset="-122"/>
+                <a:cs typeface="Arial" pitchFamily="34" charset="-120"/>
+              </a:rPr>
+              <a:t>About 80,000 moves from 1,600 grandmaster-level over-the-board games (2014 to 2017, rated 2,500 or more, at least 2 hours each). For every move: time spent, time left, how hard the position was, and whether the best move was played (Stockfish 14). The 2026 version adds rapid and blitz: 215,000 moves.</a:t>
+            </a:r>
+            <a:endParaRPr lang="en-US" sz="1500" dirty="0"/>
+          </a:p>
+        </p:txBody>
+      </p:sp>
+      <p:sp>
+        <p:nvSpPr>
+          <p:cNvPr id="9" name="What they found"/>
+          <p:cNvSpPr/>
+          <p:nvPr/>
+        </p:nvSpPr>
+        <p:spPr>
+          <a:xfrm>
+            <a:off x="457200" y="3035808"/>
+            <a:ext cx="1600200" cy="914400"/>
+          </a:xfrm>
+          <a:prstGeom prst="roundRect">
+            <a:avLst>
+              <a:gd name="adj" fmla="val 6000"/>
+            </a:avLst>
+          </a:prstGeom>
+          <a:solidFill>
+            <a:srgbClr val="EBF3FA"/>
+          </a:solidFill>
+          <a:ln w="12700">
+            <a:solidFill>
+              <a:srgbClr val="2E75B6"/>
+            </a:solidFill>
+            <a:prstDash val="solid"/>
+          </a:ln>
+        </p:spPr>
+      </p:sp>
+      <p:sp>
+        <p:nvSpPr>
+          <p:cNvPr id="10" name="Text 8"/>
+          <p:cNvSpPr txBox="1"/>
+          <p:nvPr/>
+        </p:nvSpPr>
+        <p:spPr>
+          <a:xfrm>
+            <a:off x="548640" y="3035808"/>
+            <a:ext cx="1417320" cy="914400"/>
+          </a:xfrm>
+          <a:prstGeom prst="rect">
+            <a:avLst/>
+          </a:prstGeom>
+          <a:noFill/>
+          <a:ln/>
+        </p:spPr>
+        <p:txBody>
+          <a:bodyPr wrap="square" lIns="0" tIns="0" rIns="0" bIns="0" rtlCol="0" anchor="ctr"/>
+          <a:lstStyle/>
+          <a:p>
+            <a:pPr indent="0" marL="0">
+              <a:buNone/>
+            </a:pPr>
+            <a:r>
+              <a:rPr lang="en-US" sz="1500" b="1" dirty="0">
+                <a:solidFill>
+                  <a:srgbClr val="1F4E79"/>
+                </a:solidFill>
+                <a:latin typeface="Arial" pitchFamily="34" charset="0"/>
+                <a:ea typeface="Arial" pitchFamily="34" charset="-122"/>
+                <a:cs typeface="Arial" pitchFamily="34" charset="-120"/>
+              </a:rPr>
+              <a:t>What they found</a:t>
+            </a:r>
+            <a:endParaRPr lang="en-US" sz="1500" dirty="0"/>
+          </a:p>
+        </p:txBody>
+      </p:sp>
+      <p:sp>
+        <p:nvSpPr>
+          <p:cNvPr id="11" name="Text 9"/>
+          <p:cNvSpPr txBox="1"/>
+          <p:nvPr/>
+        </p:nvSpPr>
+        <p:spPr>
+          <a:xfrm>
+            <a:off x="2194560" y="3035808"/>
+            <a:ext cx="6492240" cy="914400"/>
+          </a:xfrm>
+          <a:prstGeom prst="rect">
+            <a:avLst/>
+          </a:prstGeom>
+          <a:noFill/>
+          <a:ln/>
+        </p:spPr>
+        <p:txBody>
+          <a:bodyPr wrap="square" lIns="0" tIns="0" rIns="0" bIns="0" rtlCol="0" anchor="ctr"/>
+          <a:lstStyle/>
+          <a:p>
+            <a:pPr indent="0" marL="0">
+              <a:buNone/>
+            </a:pPr>
+            <a:r>
+              <a:rPr lang="en-US" sz="1500" dirty="0">
+                <a:solidFill>
+                  <a:schemeClr val="tx1"/>
+                </a:solidFill>
+                <a:latin typeface="Arial" pitchFamily="34" charset="0"/>
+                <a:ea typeface="Arial" pitchFamily="34" charset="-122"/>
+                <a:cs typeface="Arial" pitchFamily="34" charset="-120"/>
+              </a:rPr>
+              <a:t>Quicker moves were more often the best move. Time left on the clock looked harmful on its own, but helpful once time spent on the move was held fixed: the sign flips. The time link was stronger in rapid and blitz.</a:t>
+            </a:r>
+            <a:endParaRPr lang="en-US" sz="1500" dirty="0"/>
+          </a:p>
+        </p:txBody>
+      </p:sp>
+      <p:sp>
+        <p:nvSpPr>
+          <p:cNvPr id="12" name="why it matters"/>
+          <p:cNvSpPr/>
+          <p:nvPr/>
+        </p:nvSpPr>
+        <p:spPr>
+          <a:xfrm>
+            <a:off x="457200" y="4041648"/>
+            <a:ext cx="8229600" cy="603504"/>
+          </a:xfrm>
+          <a:prstGeom prst="roundRect">
+            <a:avLst>
+              <a:gd name="adj" fmla="val 9091"/>
+            </a:avLst>
+          </a:prstGeom>
+          <a:solidFill>
+            <a:srgbClr val="FFF2CC"/>
+          </a:solidFill>
+          <a:ln w="12700">
+            <a:solidFill>
+              <a:srgbClr val="C27C0E"/>
+            </a:solidFill>
+            <a:prstDash val="solid"/>
+          </a:ln>
+        </p:spPr>
+      </p:sp>
+      <p:sp>
+        <p:nvSpPr>
+          <p:cNvPr id="13" name="Text 11"/>
+          <p:cNvSpPr txBox="1"/>
+          <p:nvPr/>
+        </p:nvSpPr>
+        <p:spPr>
+          <a:xfrm>
+            <a:off x="594360" y="4041648"/>
+            <a:ext cx="7955280" cy="603504"/>
+          </a:xfrm>
+          <a:prstGeom prst="rect">
+            <a:avLst/>
+          </a:prstGeom>
+          <a:noFill/>
+          <a:ln/>
+        </p:spPr>
+        <p:txBody>
+          <a:bodyPr wrap="square" lIns="0" tIns="0" rIns="0" bIns="0" rtlCol="0" anchor="ctr"/>
+          <a:lstStyle/>
+          <a:p>
+            <a:pPr indent="0" marL="0">
+              <a:buNone/>
+            </a:pPr>
+            <a:r>
+              <a:rPr lang="en-US" sz="1500" b="1" dirty="0">
+                <a:solidFill>
+                  <a:srgbClr val="C27C0E"/>
+                </a:solidFill>
+                <a:latin typeface="Arial" pitchFamily="34" charset="0"/>
+                <a:ea typeface="Arial" pitchFamily="34" charset="-122"/>
+                <a:cs typeface="Arial" pitchFamily="34" charset="-120"/>
+              </a:rPr>
+              <a:t>Why it matters for us: </a:t>
+            </a:r>
+            <a:pPr indent="0" marL="0">
+              <a:buNone/>
+            </a:pPr>
+            <a:r>
+              <a:rPr lang="en-US" sz="1500" dirty="0">
+                <a:solidFill>
+                  <a:schemeClr val="tx1"/>
+                </a:solidFill>
+                <a:latin typeface="Arial" pitchFamily="34" charset="0"/>
+                <a:ea typeface="Arial" pitchFamily="34" charset="-122"/>
+                <a:cs typeface="Arial" pitchFamily="34" charset="-120"/>
+              </a:rPr>
+              <a:t>clock time and move quality are tangled, more so in fast chess, so we studied rapid games and left bullet and blitz out.</a:t>
+            </a:r>
+            <a:endParaRPr lang="en-US" sz="1500" dirty="0"/>
+          </a:p>
+        </p:txBody>
+      </p:sp>
+      <p:sp>
+        <p:nvSpPr>
+          <p:cNvPr id="14" name="Text 12"/>
+          <p:cNvSpPr txBox="1"/>
+          <p:nvPr/>
+        </p:nvSpPr>
+        <p:spPr>
+          <a:xfrm>
+            <a:off x="457200" y="4709160"/>
+            <a:ext cx="7680960" cy="274320"/>
+          </a:xfrm>
+          <a:prstGeom prst="rect">
+            <a:avLst/>
+          </a:prstGeom>
+          <a:noFill/>
+          <a:ln/>
+        </p:spPr>
+        <p:txBody>
+          <a:bodyPr wrap="square" lIns="0" tIns="0" rIns="0" bIns="0" rtlCol="0" anchor="ctr"/>
+          <a:lstStyle/>
+          <a:p>
+            <a:pPr indent="0" marL="0">
+              <a:buNone/>
+            </a:pPr>
+            <a:r>
+              <a:rPr lang="en-US" sz="1200" dirty="0">
+                <a:solidFill>
+                  <a:srgbClr val="777777"/>
+                </a:solidFill>
+                <a:latin typeface="Arial" pitchFamily="34" charset="0"/>
+                <a:ea typeface="Arial" pitchFamily="34" charset="-122"/>
+                <a:cs typeface="Arial" pitchFamily="34" charset="-120"/>
+              </a:rPr>
+              <a:t>Sunde, Zegners &amp; Strittmatter (2022), arXiv:2201.10808; published in PNAS 123(20), e2531472123 (2026)</a:t>
+            </a:r>
+            <a:endParaRPr lang="en-US" sz="1200" dirty="0"/>
+          </a:p>
+        </p:txBody>
+      </p:sp>
+      <p:sp>
+        <p:nvSpPr>
+          <p:cNvPr id="25" name="Slide Number Placeholder 0"/>
+          <p:cNvSpPr>
+            <a:spLocks noGrp="1"/>
+          </p:cNvSpPr>
+          <p:nvPr>
+            <p:ph type="sldNum" sz="quarter" idx="4294967295"/>
+          </p:nvPr>
+        </p:nvSpPr>
+        <p:spPr>
+          <a:xfrm>
+            <a:off x="8321040" y="4754880"/>
+            <a:ext cx="457200" cy="274320"/>
+          </a:xfrm>
+          <a:prstGeom prst="rect">
+            <a:avLst/>
+          </a:prstGeom>
+          <a:extLst>
+            <a:ext uri="{C572A759-6A51-4108-AA02-DFA0A04FC94B}">
+              <ma14:wrappingTextBoxFlag xmlns:ma14="http://schemas.microsoft.com/office/mac/drawingml/2011/main" val="0"/>
+            </a:ext>
+          </a:extLst>
+        </p:spPr>
+        <p:txBody>
+          <a:bodyPr/>
+          <a:lstStyle>
+            <a:lvl1pPr>
+              <a:defRPr sz="1100">
+                <a:solidFill>
+                  <a:srgbClr val="777777"/>
+                </a:solidFill>
+                <a:latin typeface="Arial"/>
+                <a:ea typeface="Arial"/>
+                <a:cs typeface="Arial"/>
+              </a:defRPr>
+            </a:lvl1pPr>
+          </a:lstStyle>
+          <a:p>
+            <a:pPr algn="l"/>
+            <a:fld id="{F7021451-1387-4CA6-816F-3879F97B5CBC}" type="slidenum">
+              <a:rPr b="0" lang="en-US"/>
+              <a:t>18</a:t>
+            </a:fld>
+            <a:endParaRPr lang="en-US"/>
+          </a:p>
+        </p:txBody>
+      </p:sp>
+    </p:spTree>
+  </p:cSld>
+  <p:clrMapOvr>
+    <a:masterClrMapping/>
+  </p:clrMapOvr>
+</p:sld>
+</file>
+
+<file path=ppt/slides/slide19.xml><?xml version="1.0" encoding="utf-8"?>
+<p:sld xmlns:a="http://schemas.openxmlformats.org/drawingml/2006/main" xmlns:r="http://schemas.openxmlformats.org/officeDocument/2006/relationships" xmlns:p="http://schemas.openxmlformats.org/presentationml/2006/main">
+  <p:cSld name="Slide 19">
+    <p:spTree>
+      <p:nvGrpSpPr>
+        <p:cNvPr id="1" name=""/>
+        <p:cNvGrpSpPr/>
+        <p:nvPr/>
+      </p:nvGrpSpPr>
+      <p:grpSpPr>
+        <a:xfrm>
+          <a:off x="0" y="0"/>
+          <a:ext cx="0" cy="0"/>
+          <a:chOff x="0" y="0"/>
+          <a:chExt cx="0" cy="0"/>
+        </a:xfrm>
+      </p:grpSpPr>
+      <p:sp>
+        <p:nvSpPr>
+          <p:cNvPr id="2" name="Text 0"/>
+          <p:cNvSpPr/>
+          <p:nvPr>
+            <p:ph idx="100" type="title" hasCustomPrompt="1"/>
+          </p:nvPr>
+        </p:nvSpPr>
+        <p:spPr>
+          <a:xfrm>
+            <a:off x="457200" y="228600"/>
+            <a:ext cx="8229600" cy="822960"/>
+          </a:xfrm>
+          <a:prstGeom prst="rect">
+            <a:avLst/>
+          </a:prstGeom>
+          <a:noFill/>
+          <a:ln/>
+        </p:spPr>
+        <p:txBody>
+          <a:bodyPr wrap="square" lIns="0" tIns="0" rIns="0" bIns="0" rtlCol="0" anchor="t"/>
+          <a:lstStyle/>
+          <a:p>
+            <a:pPr algn="l" indent="0" marL="0">
+              <a:buNone/>
+            </a:pPr>
+            <a:r>
+              <a:rPr lang="en-US" sz="2600" b="1" dirty="0">
+                <a:solidFill>
+                  <a:schemeClr val="tx2"/>
+                </a:solidFill>
+              </a:rPr>
               <a:t>No study we found measured how well the next game is played after different kinds of win</a:t>
             </a:r>
             <a:endParaRPr lang="en-US" sz="2600" dirty="0"/>
@@ -10247,7 +10770,7 @@
       </p:sp>
       <p:graphicFrame>
         <p:nvGraphicFramePr>
-          <p:cNvPr id="19" name="Table 0"/>
+          <p:cNvPr id="20" name="Table 0"/>
           <p:cNvGraphicFramePr>
             <a:graphicFrameLocks noGrp="1"/>
           </p:cNvGraphicFramePr>
@@ -11942,110 +12465,9 @@
             <a:pPr algn="l"/>
             <a:fld id="{F7021451-1387-4CA6-816F-3879F97B5CBC}" type="slidenum">
               <a:rPr b="0" lang="en-US"/>
-              <a:t>18</a:t>
+              <a:t>19</a:t>
             </a:fld>
             <a:endParaRPr lang="en-US"/>
-          </a:p>
-        </p:txBody>
-      </p:sp>
-    </p:spTree>
-  </p:cSld>
-  <p:clrMapOvr>
-    <a:masterClrMapping/>
-  </p:clrMapOvr>
-</p:sld>
-</file>
-
-<file path=ppt/slides/slide19.xml><?xml version="1.0" encoding="utf-8"?>
-<p:sld xmlns:a="http://schemas.openxmlformats.org/drawingml/2006/main" xmlns:r="http://schemas.openxmlformats.org/officeDocument/2006/relationships" xmlns:p="http://schemas.openxmlformats.org/presentationml/2006/main">
-  <p:cSld name="Slide 19">
-    <p:spTree>
-      <p:nvGrpSpPr>
-        <p:cNvPr id="1" name=""/>
-        <p:cNvGrpSpPr/>
-        <p:nvPr/>
-      </p:nvGrpSpPr>
-      <p:grpSpPr>
-        <a:xfrm>
-          <a:off x="0" y="0"/>
-          <a:ext cx="0" cy="0"/>
-          <a:chOff x="0" y="0"/>
-          <a:chExt cx="0" cy="0"/>
-        </a:xfrm>
-      </p:grpSpPr>
-      <p:sp>
-        <p:nvSpPr>
-          <p:cNvPr id="2" name="Text 0"/>
-          <p:cNvSpPr/>
-          <p:nvPr>
-            <p:ph idx="100" type="body" hasCustomPrompt="1"/>
-          </p:nvPr>
-        </p:nvSpPr>
-        <p:spPr>
-          <a:xfrm>
-            <a:off x="640080" y="1554480"/>
-            <a:ext cx="7863840" cy="457200"/>
-          </a:xfrm>
-          <a:prstGeom prst="rect">
-            <a:avLst/>
-          </a:prstGeom>
-          <a:noFill/>
-          <a:ln/>
-        </p:spPr>
-        <p:txBody>
-          <a:bodyPr wrap="square" lIns="0" tIns="0" rIns="0" bIns="0" rtlCol="0" anchor="t"/>
-          <a:lstStyle/>
-          <a:p>
-            <a:pPr algn="l" indent="0" marL="0">
-              <a:buNone/>
-            </a:pPr>
-            <a:r>
-              <a:rPr lang="en-US" sz="1800" dirty="0">
-                <a:solidFill>
-                  <a:schemeClr val="accent5"/>
-                </a:solidFill>
-              </a:rPr>
-              <a:t>Part 3</a:t>
-            </a:r>
-            <a:endParaRPr lang="en-US" sz="1800" dirty="0"/>
-          </a:p>
-        </p:txBody>
-      </p:sp>
-      <p:sp>
-        <p:nvSpPr>
-          <p:cNvPr id="3" name="Text 0"/>
-          <p:cNvSpPr/>
-          <p:nvPr>
-            <p:ph idx="101" type="title" hasCustomPrompt="1"/>
-          </p:nvPr>
-        </p:nvSpPr>
-        <p:spPr>
-          <a:xfrm>
-            <a:off x="640080" y="2011680"/>
-            <a:ext cx="7863840" cy="1280160"/>
-          </a:xfrm>
-          <a:prstGeom prst="rect">
-            <a:avLst/>
-          </a:prstGeom>
-          <a:noFill/>
-          <a:ln/>
-        </p:spPr>
-        <p:txBody>
-          <a:bodyPr wrap="square" lIns="0" tIns="0" rIns="0" bIns="0" rtlCol="0" anchor="t"/>
-          <a:lstStyle/>
-          <a:p>
-            <a:pPr algn="l" indent="0" marL="0">
-              <a:buNone/>
-            </a:pPr>
-            <a:r>
-              <a:rPr lang="en-US" sz="3600" b="1" dirty="0">
-                <a:solidFill>
-                  <a:schemeClr val="bg1"/>
-                </a:solidFill>
-              </a:rPr>
-              <a:t>The questions</a:t>
-            </a:r>
-            <a:endParaRPr lang="en-US" sz="3600" dirty="0"/>
           </a:p>
         </p:txBody>
       </p:sp>
@@ -12180,13 +12602,13 @@
           <p:cNvPr id="2" name="Text 0"/>
           <p:cNvSpPr/>
           <p:nvPr>
-            <p:ph idx="100" type="title" hasCustomPrompt="1"/>
+            <p:ph idx="100" type="body" hasCustomPrompt="1"/>
           </p:nvPr>
         </p:nvSpPr>
         <p:spPr>
           <a:xfrm>
-            <a:off x="457200" y="228600"/>
-            <a:ext cx="8229600" cy="822960"/>
+            <a:off x="640080" y="1554480"/>
+            <a:ext cx="7863840" cy="457200"/>
           </a:xfrm>
           <a:prstGeom prst="rect">
             <a:avLst/>
@@ -12202,54 +12624,29 @@
               <a:buNone/>
             </a:pPr>
             <a:r>
-              <a:rPr lang="en-US" sz="2600" b="1" dirty="0">
-                <a:solidFill>
-                  <a:schemeClr val="tx2"/>
+              <a:rPr lang="en-US" sz="1800" dirty="0">
+                <a:solidFill>
+                  <a:schemeClr val="accent5"/>
                 </a:solidFill>
               </a:rPr>
-              <a:t>Two questions, each with a prediction fixed and dated before any data was scored</a:t>
-            </a:r>
-            <a:endParaRPr lang="en-US" sz="2600" dirty="0"/>
-          </a:p>
-        </p:txBody>
-      </p:sp>
-      <p:sp>
-        <p:nvSpPr>
-          <p:cNvPr id="3" name="RQ2 (main)"/>
+              <a:t>Part 3</a:t>
+            </a:r>
+            <a:endParaRPr lang="en-US" sz="1800" dirty="0"/>
+          </a:p>
+        </p:txBody>
+      </p:sp>
+      <p:sp>
+        <p:nvSpPr>
+          <p:cNvPr id="3" name="Text 0"/>
           <p:cNvSpPr/>
-          <p:nvPr/>
-        </p:nvSpPr>
-        <p:spPr>
-          <a:xfrm>
-            <a:off x="457200" y="1188720"/>
-            <a:ext cx="3977640" cy="2514600"/>
-          </a:xfrm>
-          <a:prstGeom prst="roundRect">
-            <a:avLst>
-              <a:gd name="adj" fmla="val 2182"/>
-            </a:avLst>
-          </a:prstGeom>
-          <a:solidFill>
-            <a:srgbClr val="EBF3FA"/>
-          </a:solidFill>
-          <a:ln w="12700">
-            <a:solidFill>
-              <a:srgbClr val="2E75B6"/>
-            </a:solidFill>
-            <a:prstDash val="solid"/>
-          </a:ln>
-        </p:spPr>
-      </p:sp>
-      <p:sp>
-        <p:nvSpPr>
-          <p:cNvPr id="4" name="Text 2"/>
-          <p:cNvSpPr txBox="1"/>
-          <p:nvPr/>
-        </p:nvSpPr>
-        <p:spPr>
-          <a:xfrm>
-            <a:off x="685800" y="1298448"/>
-            <a:ext cx="3566160" cy="365760"/>
+          <p:nvPr>
+            <p:ph idx="101" type="title" hasCustomPrompt="1"/>
+          </p:nvPr>
+        </p:nvSpPr>
+        <p:spPr>
+          <a:xfrm>
+            <a:off x="640080" y="2011680"/>
+            <a:ext cx="7863840" cy="1280160"/>
           </a:xfrm>
           <a:prstGeom prst="rect">
             <a:avLst/>
@@ -12261,369 +12658,18 @@
           <a:bodyPr wrap="square" lIns="0" tIns="0" rIns="0" bIns="0" rtlCol="0" anchor="t"/>
           <a:lstStyle/>
           <a:p>
-            <a:pPr indent="0" marL="0">
+            <a:pPr algn="l" indent="0" marL="0">
               <a:buNone/>
             </a:pPr>
             <a:r>
-              <a:rPr lang="en-US" sz="2000" b="1" dirty="0">
-                <a:solidFill>
-                  <a:srgbClr val="2E75B6"/>
-                </a:solidFill>
-                <a:latin typeface="Arial" pitchFamily="34" charset="0"/>
-                <a:ea typeface="Arial" pitchFamily="34" charset="-122"/>
-                <a:cs typeface="Arial" pitchFamily="34" charset="-120"/>
+              <a:rPr lang="en-US" sz="3600" b="1" dirty="0">
+                <a:solidFill>
+                  <a:schemeClr val="bg1"/>
+                </a:solidFill>
               </a:rPr>
-              <a:t>RQ2 (main)</a:t>
-            </a:r>
-            <a:endParaRPr lang="en-US" sz="2000" dirty="0"/>
-          </a:p>
-        </p:txBody>
-      </p:sp>
-      <p:sp>
-        <p:nvSpPr>
-          <p:cNvPr id="5" name="Text 3"/>
-          <p:cNvSpPr txBox="1"/>
-          <p:nvPr/>
-        </p:nvSpPr>
-        <p:spPr>
-          <a:xfrm>
-            <a:off x="685800" y="1719072"/>
-            <a:ext cx="3566160" cy="914400"/>
-          </a:xfrm>
-          <a:prstGeom prst="rect">
-            <a:avLst/>
-          </a:prstGeom>
-          <a:noFill/>
-          <a:ln/>
-        </p:spPr>
-        <p:txBody>
-          <a:bodyPr wrap="square" lIns="0" tIns="0" rIns="0" bIns="0" rtlCol="0" anchor="t"/>
-          <a:lstStyle/>
-          <a:p>
-            <a:pPr indent="0" marL="0">
-              <a:buNone/>
-            </a:pPr>
-            <a:r>
-              <a:rPr lang="en-US" sz="2000" dirty="0">
-                <a:solidFill>
-                  <a:srgbClr val="1F4E79"/>
-                </a:solidFill>
-                <a:latin typeface="Arial" pitchFamily="34" charset="0"/>
-                <a:ea typeface="Arial" pitchFamily="34" charset="-122"/>
-                <a:cs typeface="Arial" pitchFamily="34" charset="-120"/>
-              </a:rPr>
-              <a:t>Does a lucky time win change the next game?</a:t>
-            </a:r>
-            <a:endParaRPr lang="en-US" sz="2000" dirty="0"/>
-          </a:p>
-        </p:txBody>
-      </p:sp>
-      <p:sp>
-        <p:nvSpPr>
-          <p:cNvPr id="6" name="Text 4"/>
-          <p:cNvSpPr txBox="1"/>
-          <p:nvPr/>
-        </p:nvSpPr>
-        <p:spPr>
-          <a:xfrm>
-            <a:off x="685800" y="2651760"/>
-            <a:ext cx="3566160" cy="1005840"/>
-          </a:xfrm>
-          <a:prstGeom prst="rect">
-            <a:avLst/>
-          </a:prstGeom>
-          <a:noFill/>
-          <a:ln/>
-        </p:spPr>
-        <p:txBody>
-          <a:bodyPr wrap="square" lIns="0" tIns="0" rIns="0" bIns="0" rtlCol="0" anchor="t"/>
-          <a:lstStyle/>
-          <a:p>
-            <a:pPr indent="0" marL="0">
-              <a:buNone/>
-            </a:pPr>
-            <a:r>
-              <a:rPr lang="en-US" sz="2000" dirty="0">
-                <a:solidFill>
-                  <a:schemeClr val="tx1"/>
-                </a:solidFill>
-                <a:latin typeface="Arial" pitchFamily="34" charset="0"/>
-                <a:ea typeface="Arial" pitchFamily="34" charset="-122"/>
-                <a:cs typeface="Arial" pitchFamily="34" charset="-120"/>
-              </a:rPr>
-              <a:t>Prediction: no. Players reset, within ±2 cp.</a:t>
-            </a:r>
-            <a:endParaRPr lang="en-US" sz="2000" dirty="0"/>
-          </a:p>
-        </p:txBody>
-      </p:sp>
-      <p:sp>
-        <p:nvSpPr>
-          <p:cNvPr id="7" name="RQ1 (repeat)"/>
-          <p:cNvSpPr/>
-          <p:nvPr/>
-        </p:nvSpPr>
-        <p:spPr>
-          <a:xfrm>
-            <a:off x="4709160" y="1188720"/>
-            <a:ext cx="3977640" cy="2514600"/>
-          </a:xfrm>
-          <a:prstGeom prst="roundRect">
-            <a:avLst>
-              <a:gd name="adj" fmla="val 2182"/>
-            </a:avLst>
-          </a:prstGeom>
-          <a:solidFill>
-            <a:srgbClr val="EBF3FA"/>
-          </a:solidFill>
-          <a:ln w="12700">
-            <a:solidFill>
-              <a:srgbClr val="2E75B6"/>
-            </a:solidFill>
-            <a:prstDash val="solid"/>
-          </a:ln>
-        </p:spPr>
-      </p:sp>
-      <p:sp>
-        <p:nvSpPr>
-          <p:cNvPr id="8" name="Text 6"/>
-          <p:cNvSpPr txBox="1"/>
-          <p:nvPr/>
-        </p:nvSpPr>
-        <p:spPr>
-          <a:xfrm>
-            <a:off x="4937760" y="1298448"/>
-            <a:ext cx="3566160" cy="365760"/>
-          </a:xfrm>
-          <a:prstGeom prst="rect">
-            <a:avLst/>
-          </a:prstGeom>
-          <a:noFill/>
-          <a:ln/>
-        </p:spPr>
-        <p:txBody>
-          <a:bodyPr wrap="square" lIns="0" tIns="0" rIns="0" bIns="0" rtlCol="0" anchor="t"/>
-          <a:lstStyle/>
-          <a:p>
-            <a:pPr indent="0" marL="0">
-              <a:buNone/>
-            </a:pPr>
-            <a:r>
-              <a:rPr lang="en-US" sz="2000" b="1" dirty="0">
-                <a:solidFill>
-                  <a:srgbClr val="2E75B6"/>
-                </a:solidFill>
-                <a:latin typeface="Arial" pitchFamily="34" charset="0"/>
-                <a:ea typeface="Arial" pitchFamily="34" charset="-122"/>
-                <a:cs typeface="Arial" pitchFamily="34" charset="-120"/>
-              </a:rPr>
-              <a:t>RQ1 (repeat)</a:t>
-            </a:r>
-            <a:endParaRPr lang="en-US" sz="2000" dirty="0"/>
-          </a:p>
-        </p:txBody>
-      </p:sp>
-      <p:sp>
-        <p:nvSpPr>
-          <p:cNvPr id="9" name="Text 7"/>
-          <p:cNvSpPr txBox="1"/>
-          <p:nvPr/>
-        </p:nvSpPr>
-        <p:spPr>
-          <a:xfrm>
-            <a:off x="4937760" y="1719072"/>
-            <a:ext cx="3566160" cy="914400"/>
-          </a:xfrm>
-          <a:prstGeom prst="rect">
-            <a:avLst/>
-          </a:prstGeom>
-          <a:noFill/>
-          <a:ln/>
-        </p:spPr>
-        <p:txBody>
-          <a:bodyPr wrap="square" lIns="0" tIns="0" rIns="0" bIns="0" rtlCol="0" anchor="t"/>
-          <a:lstStyle/>
-          <a:p>
-            <a:pPr indent="0" marL="0">
-              <a:buNone/>
-            </a:pPr>
-            <a:r>
-              <a:rPr lang="en-US" sz="2000" dirty="0">
-                <a:solidFill>
-                  <a:srgbClr val="1F4E79"/>
-                </a:solidFill>
-                <a:latin typeface="Arial" pitchFamily="34" charset="0"/>
-                <a:ea typeface="Arial" pitchFamily="34" charset="-122"/>
-                <a:cs typeface="Arial" pitchFamily="34" charset="-120"/>
-              </a:rPr>
-              <a:t>Does the type of win change the next game?</a:t>
-            </a:r>
-            <a:endParaRPr lang="en-US" sz="2000" dirty="0"/>
-          </a:p>
-        </p:txBody>
-      </p:sp>
-      <p:sp>
-        <p:nvSpPr>
-          <p:cNvPr id="10" name="Text 8"/>
-          <p:cNvSpPr txBox="1"/>
-          <p:nvPr/>
-        </p:nvSpPr>
-        <p:spPr>
-          <a:xfrm>
-            <a:off x="4937760" y="2651760"/>
-            <a:ext cx="3566160" cy="1005840"/>
-          </a:xfrm>
-          <a:prstGeom prst="rect">
-            <a:avLst/>
-          </a:prstGeom>
-          <a:noFill/>
-          <a:ln/>
-        </p:spPr>
-        <p:txBody>
-          <a:bodyPr wrap="square" lIns="0" tIns="0" rIns="0" bIns="0" rtlCol="0" anchor="t"/>
-          <a:lstStyle/>
-          <a:p>
-            <a:pPr indent="0" marL="0">
-              <a:buNone/>
-            </a:pPr>
-            <a:r>
-              <a:rPr lang="en-US" sz="2000" dirty="0">
-                <a:solidFill>
-                  <a:schemeClr val="tx1"/>
-                </a:solidFill>
-                <a:latin typeface="Arial" pitchFamily="34" charset="0"/>
-                <a:ea typeface="Arial" pitchFamily="34" charset="-122"/>
-                <a:cs typeface="Arial" pitchFamily="34" charset="-120"/>
-              </a:rPr>
-              <a:t>Prediction: no. Within ±3 cp, as in study 1.</a:t>
-            </a:r>
-            <a:endParaRPr lang="en-US" sz="2000" dirty="0"/>
-          </a:p>
-        </p:txBody>
-      </p:sp>
-      <p:sp>
-        <p:nvSpPr>
-          <p:cNvPr id="11" name="Text 9"/>
-          <p:cNvSpPr txBox="1"/>
-          <p:nvPr/>
-        </p:nvSpPr>
-        <p:spPr>
-          <a:xfrm>
-            <a:off x="457200" y="3931920"/>
-            <a:ext cx="8229600" cy="685800"/>
-          </a:xfrm>
-          <a:prstGeom prst="rect">
-            <a:avLst/>
-          </a:prstGeom>
-          <a:noFill/>
-          <a:ln/>
-        </p:spPr>
-        <p:txBody>
-          <a:bodyPr wrap="square" lIns="0" tIns="0" rIns="0" bIns="0" rtlCol="0" anchor="t"/>
-          <a:lstStyle/>
-          <a:p>
-            <a:pPr indent="0" marL="0">
-              <a:buNone/>
-            </a:pPr>
-            <a:r>
-              <a:rPr lang="en-US" sz="1800" dirty="0">
-                <a:solidFill>
-                  <a:srgbClr val="777777"/>
-                </a:solidFill>
-                <a:latin typeface="Arial" pitchFamily="34" charset="0"/>
-                <a:ea typeface="Arial" pitchFamily="34" charset="-122"/>
-                <a:cs typeface="Arial" pitchFamily="34" charset="-120"/>
-              </a:rPr>
-              <a:t>Fixing the prediction first is like painting the target before shooting the arrow.</a:t>
-            </a:r>
-            <a:endParaRPr lang="en-US" sz="1800" dirty="0"/>
-          </a:p>
-        </p:txBody>
-      </p:sp>
-      <p:sp>
-        <p:nvSpPr>
-          <p:cNvPr id="12" name="Text 10"/>
-          <p:cNvSpPr txBox="1"/>
-          <p:nvPr/>
-        </p:nvSpPr>
-        <p:spPr>
-          <a:xfrm>
-            <a:off x="457200" y="4709160"/>
-            <a:ext cx="7680960" cy="274320"/>
-          </a:xfrm>
-          <a:prstGeom prst="rect">
-            <a:avLst/>
-          </a:prstGeom>
-          <a:noFill/>
-          <a:ln/>
-        </p:spPr>
-        <p:txBody>
-          <a:bodyPr wrap="square" lIns="0" tIns="0" rIns="0" bIns="0" rtlCol="0" anchor="ctr"/>
-          <a:lstStyle/>
-          <a:p>
-            <a:pPr indent="0" marL="0">
-              <a:buNone/>
-            </a:pPr>
-            <a:r>
-              <a:rPr lang="en-US" sz="1200" dirty="0">
-                <a:solidFill>
-                  <a:srgbClr val="777777"/>
-                </a:solidFill>
-                <a:latin typeface="Arial" pitchFamily="34" charset="0"/>
-                <a:ea typeface="Arial" pitchFamily="34" charset="-122"/>
-                <a:cs typeface="Arial" pitchFamily="34" charset="-120"/>
-              </a:rPr>
-              <a:t>PREREGISTRATION_STUDY2.md, committed 12 October 2026, 11:02 UTC</a:t>
-            </a:r>
-            <a:endParaRPr lang="en-US" sz="1200" dirty="0"/>
-          </a:p>
-        </p:txBody>
-      </p:sp>
-      <p:sp>
-        <p:nvSpPr>
-          <p:cNvPr id="25" name="Slide Number Placeholder 0"/>
-          <p:cNvSpPr>
-            <a:spLocks noGrp="1"/>
-          </p:cNvSpPr>
-          <p:nvPr>
-            <p:ph type="sldNum" sz="quarter" idx="4294967295"/>
-          </p:nvPr>
-        </p:nvSpPr>
-        <p:spPr>
-          <a:xfrm>
-            <a:off x="8321040" y="4754880"/>
-            <a:ext cx="457200" cy="274320"/>
-          </a:xfrm>
-          <a:prstGeom prst="rect">
-            <a:avLst/>
-          </a:prstGeom>
-          <a:extLst>
-            <a:ext uri="{C572A759-6A51-4108-AA02-DFA0A04FC94B}">
-              <ma14:wrappingTextBoxFlag xmlns:ma14="http://schemas.microsoft.com/office/mac/drawingml/2011/main" val="0"/>
-            </a:ext>
-          </a:extLst>
-        </p:spPr>
-        <p:txBody>
-          <a:bodyPr/>
-          <a:lstStyle>
-            <a:lvl1pPr>
-              <a:defRPr sz="1100">
-                <a:solidFill>
-                  <a:srgbClr val="777777"/>
-                </a:solidFill>
-                <a:latin typeface="Arial"/>
-                <a:ea typeface="Arial"/>
-                <a:cs typeface="Arial"/>
-              </a:defRPr>
-            </a:lvl1pPr>
-          </a:lstStyle>
-          <a:p>
-            <a:pPr algn="l"/>
-            <a:fld id="{F7021451-1387-4CA6-816F-3879F97B5CBC}" type="slidenum">
-              <a:rPr b="0" lang="en-US"/>
-              <a:t>20</a:t>
-            </a:fld>
-            <a:endParaRPr lang="en-US"/>
+              <a:t>The questions</a:t>
+            </a:r>
+            <a:endParaRPr lang="en-US" sz="3600" dirty="0"/>
           </a:p>
         </p:txBody>
       </p:sp>
@@ -12657,13 +12703,13 @@
           <p:cNvPr id="2" name="Text 0"/>
           <p:cNvSpPr/>
           <p:nvPr>
-            <p:ph idx="100" type="body" hasCustomPrompt="1"/>
+            <p:ph idx="100" type="title" hasCustomPrompt="1"/>
           </p:nvPr>
         </p:nvSpPr>
         <p:spPr>
           <a:xfrm>
-            <a:off x="640080" y="1554480"/>
-            <a:ext cx="7863840" cy="457200"/>
+            <a:off x="457200" y="228600"/>
+            <a:ext cx="8229600" cy="822960"/>
           </a:xfrm>
           <a:prstGeom prst="rect">
             <a:avLst/>
@@ -12679,29 +12725,54 @@
               <a:buNone/>
             </a:pPr>
             <a:r>
-              <a:rPr lang="en-US" sz="1800" dirty="0">
-                <a:solidFill>
-                  <a:schemeClr val="accent5"/>
+              <a:rPr lang="en-US" sz="2600" b="1" dirty="0">
+                <a:solidFill>
+                  <a:schemeClr val="tx2"/>
                 </a:solidFill>
               </a:rPr>
-              <a:t>Part 4</a:t>
-            </a:r>
-            <a:endParaRPr lang="en-US" sz="1800" dirty="0"/>
-          </a:p>
-        </p:txBody>
-      </p:sp>
-      <p:sp>
-        <p:nvSpPr>
-          <p:cNvPr id="3" name="Text 0"/>
+              <a:t>Two questions, each with a prediction fixed and dated before any data was scored</a:t>
+            </a:r>
+            <a:endParaRPr lang="en-US" sz="2600" dirty="0"/>
+          </a:p>
+        </p:txBody>
+      </p:sp>
+      <p:sp>
+        <p:nvSpPr>
+          <p:cNvPr id="3" name="RQ2 (main)"/>
           <p:cNvSpPr/>
-          <p:nvPr>
-            <p:ph idx="101" type="title" hasCustomPrompt="1"/>
-          </p:nvPr>
-        </p:nvSpPr>
-        <p:spPr>
-          <a:xfrm>
-            <a:off x="640080" y="2011680"/>
-            <a:ext cx="7863840" cy="1280160"/>
+          <p:nvPr/>
+        </p:nvSpPr>
+        <p:spPr>
+          <a:xfrm>
+            <a:off x="457200" y="1188720"/>
+            <a:ext cx="3977640" cy="2514600"/>
+          </a:xfrm>
+          <a:prstGeom prst="roundRect">
+            <a:avLst>
+              <a:gd name="adj" fmla="val 2182"/>
+            </a:avLst>
+          </a:prstGeom>
+          <a:solidFill>
+            <a:srgbClr val="EBF3FA"/>
+          </a:solidFill>
+          <a:ln w="12700">
+            <a:solidFill>
+              <a:srgbClr val="2E75B6"/>
+            </a:solidFill>
+            <a:prstDash val="solid"/>
+          </a:ln>
+        </p:spPr>
+      </p:sp>
+      <p:sp>
+        <p:nvSpPr>
+          <p:cNvPr id="4" name="Text 2"/>
+          <p:cNvSpPr txBox="1"/>
+          <p:nvPr/>
+        </p:nvSpPr>
+        <p:spPr>
+          <a:xfrm>
+            <a:off x="685800" y="1298448"/>
+            <a:ext cx="3566160" cy="365760"/>
           </a:xfrm>
           <a:prstGeom prst="rect">
             <a:avLst/>
@@ -12713,18 +12784,369 @@
           <a:bodyPr wrap="square" lIns="0" tIns="0" rIns="0" bIns="0" rtlCol="0" anchor="t"/>
           <a:lstStyle/>
           <a:p>
-            <a:pPr algn="l" indent="0" marL="0">
+            <a:pPr indent="0" marL="0">
               <a:buNone/>
             </a:pPr>
             <a:r>
-              <a:rPr lang="en-US" sz="3600" b="1" dirty="0">
-                <a:solidFill>
-                  <a:schemeClr val="bg1"/>
-                </a:solidFill>
+              <a:rPr lang="en-US" sz="2000" b="1" dirty="0">
+                <a:solidFill>
+                  <a:srgbClr val="2E75B6"/>
+                </a:solidFill>
+                <a:latin typeface="Arial" pitchFamily="34" charset="0"/>
+                <a:ea typeface="Arial" pitchFamily="34" charset="-122"/>
+                <a:cs typeface="Arial" pitchFamily="34" charset="-120"/>
               </a:rPr>
-              <a:t>How it was measured</a:t>
-            </a:r>
-            <a:endParaRPr lang="en-US" sz="3600" dirty="0"/>
+              <a:t>RQ2 (main)</a:t>
+            </a:r>
+            <a:endParaRPr lang="en-US" sz="2000" dirty="0"/>
+          </a:p>
+        </p:txBody>
+      </p:sp>
+      <p:sp>
+        <p:nvSpPr>
+          <p:cNvPr id="5" name="Text 3"/>
+          <p:cNvSpPr txBox="1"/>
+          <p:nvPr/>
+        </p:nvSpPr>
+        <p:spPr>
+          <a:xfrm>
+            <a:off x="685800" y="1719072"/>
+            <a:ext cx="3566160" cy="914400"/>
+          </a:xfrm>
+          <a:prstGeom prst="rect">
+            <a:avLst/>
+          </a:prstGeom>
+          <a:noFill/>
+          <a:ln/>
+        </p:spPr>
+        <p:txBody>
+          <a:bodyPr wrap="square" lIns="0" tIns="0" rIns="0" bIns="0" rtlCol="0" anchor="t"/>
+          <a:lstStyle/>
+          <a:p>
+            <a:pPr indent="0" marL="0">
+              <a:buNone/>
+            </a:pPr>
+            <a:r>
+              <a:rPr lang="en-US" sz="2000" dirty="0">
+                <a:solidFill>
+                  <a:srgbClr val="1F4E79"/>
+                </a:solidFill>
+                <a:latin typeface="Arial" pitchFamily="34" charset="0"/>
+                <a:ea typeface="Arial" pitchFamily="34" charset="-122"/>
+                <a:cs typeface="Arial" pitchFamily="34" charset="-120"/>
+              </a:rPr>
+              <a:t>Does a lucky time win change the next game?</a:t>
+            </a:r>
+            <a:endParaRPr lang="en-US" sz="2000" dirty="0"/>
+          </a:p>
+        </p:txBody>
+      </p:sp>
+      <p:sp>
+        <p:nvSpPr>
+          <p:cNvPr id="6" name="Text 4"/>
+          <p:cNvSpPr txBox="1"/>
+          <p:nvPr/>
+        </p:nvSpPr>
+        <p:spPr>
+          <a:xfrm>
+            <a:off x="685800" y="2651760"/>
+            <a:ext cx="3566160" cy="1005840"/>
+          </a:xfrm>
+          <a:prstGeom prst="rect">
+            <a:avLst/>
+          </a:prstGeom>
+          <a:noFill/>
+          <a:ln/>
+        </p:spPr>
+        <p:txBody>
+          <a:bodyPr wrap="square" lIns="0" tIns="0" rIns="0" bIns="0" rtlCol="0" anchor="t"/>
+          <a:lstStyle/>
+          <a:p>
+            <a:pPr indent="0" marL="0">
+              <a:buNone/>
+            </a:pPr>
+            <a:r>
+              <a:rPr lang="en-US" sz="2000" dirty="0">
+                <a:solidFill>
+                  <a:schemeClr val="tx1"/>
+                </a:solidFill>
+                <a:latin typeface="Arial" pitchFamily="34" charset="0"/>
+                <a:ea typeface="Arial" pitchFamily="34" charset="-122"/>
+                <a:cs typeface="Arial" pitchFamily="34" charset="-120"/>
+              </a:rPr>
+              <a:t>Prediction: no. Players reset, within ±2 cp.</a:t>
+            </a:r>
+            <a:endParaRPr lang="en-US" sz="2000" dirty="0"/>
+          </a:p>
+        </p:txBody>
+      </p:sp>
+      <p:sp>
+        <p:nvSpPr>
+          <p:cNvPr id="7" name="RQ1 (repeat)"/>
+          <p:cNvSpPr/>
+          <p:nvPr/>
+        </p:nvSpPr>
+        <p:spPr>
+          <a:xfrm>
+            <a:off x="4709160" y="1188720"/>
+            <a:ext cx="3977640" cy="2514600"/>
+          </a:xfrm>
+          <a:prstGeom prst="roundRect">
+            <a:avLst>
+              <a:gd name="adj" fmla="val 2182"/>
+            </a:avLst>
+          </a:prstGeom>
+          <a:solidFill>
+            <a:srgbClr val="EBF3FA"/>
+          </a:solidFill>
+          <a:ln w="12700">
+            <a:solidFill>
+              <a:srgbClr val="2E75B6"/>
+            </a:solidFill>
+            <a:prstDash val="solid"/>
+          </a:ln>
+        </p:spPr>
+      </p:sp>
+      <p:sp>
+        <p:nvSpPr>
+          <p:cNvPr id="8" name="Text 6"/>
+          <p:cNvSpPr txBox="1"/>
+          <p:nvPr/>
+        </p:nvSpPr>
+        <p:spPr>
+          <a:xfrm>
+            <a:off x="4937760" y="1298448"/>
+            <a:ext cx="3566160" cy="365760"/>
+          </a:xfrm>
+          <a:prstGeom prst="rect">
+            <a:avLst/>
+          </a:prstGeom>
+          <a:noFill/>
+          <a:ln/>
+        </p:spPr>
+        <p:txBody>
+          <a:bodyPr wrap="square" lIns="0" tIns="0" rIns="0" bIns="0" rtlCol="0" anchor="t"/>
+          <a:lstStyle/>
+          <a:p>
+            <a:pPr indent="0" marL="0">
+              <a:buNone/>
+            </a:pPr>
+            <a:r>
+              <a:rPr lang="en-US" sz="2000" b="1" dirty="0">
+                <a:solidFill>
+                  <a:srgbClr val="2E75B6"/>
+                </a:solidFill>
+                <a:latin typeface="Arial" pitchFamily="34" charset="0"/>
+                <a:ea typeface="Arial" pitchFamily="34" charset="-122"/>
+                <a:cs typeface="Arial" pitchFamily="34" charset="-120"/>
+              </a:rPr>
+              <a:t>RQ1 (repeat)</a:t>
+            </a:r>
+            <a:endParaRPr lang="en-US" sz="2000" dirty="0"/>
+          </a:p>
+        </p:txBody>
+      </p:sp>
+      <p:sp>
+        <p:nvSpPr>
+          <p:cNvPr id="9" name="Text 7"/>
+          <p:cNvSpPr txBox="1"/>
+          <p:nvPr/>
+        </p:nvSpPr>
+        <p:spPr>
+          <a:xfrm>
+            <a:off x="4937760" y="1719072"/>
+            <a:ext cx="3566160" cy="914400"/>
+          </a:xfrm>
+          <a:prstGeom prst="rect">
+            <a:avLst/>
+          </a:prstGeom>
+          <a:noFill/>
+          <a:ln/>
+        </p:spPr>
+        <p:txBody>
+          <a:bodyPr wrap="square" lIns="0" tIns="0" rIns="0" bIns="0" rtlCol="0" anchor="t"/>
+          <a:lstStyle/>
+          <a:p>
+            <a:pPr indent="0" marL="0">
+              <a:buNone/>
+            </a:pPr>
+            <a:r>
+              <a:rPr lang="en-US" sz="2000" dirty="0">
+                <a:solidFill>
+                  <a:srgbClr val="1F4E79"/>
+                </a:solidFill>
+                <a:latin typeface="Arial" pitchFamily="34" charset="0"/>
+                <a:ea typeface="Arial" pitchFamily="34" charset="-122"/>
+                <a:cs typeface="Arial" pitchFamily="34" charset="-120"/>
+              </a:rPr>
+              <a:t>Does the type of win change the next game?</a:t>
+            </a:r>
+            <a:endParaRPr lang="en-US" sz="2000" dirty="0"/>
+          </a:p>
+        </p:txBody>
+      </p:sp>
+      <p:sp>
+        <p:nvSpPr>
+          <p:cNvPr id="10" name="Text 8"/>
+          <p:cNvSpPr txBox="1"/>
+          <p:nvPr/>
+        </p:nvSpPr>
+        <p:spPr>
+          <a:xfrm>
+            <a:off x="4937760" y="2651760"/>
+            <a:ext cx="3566160" cy="1005840"/>
+          </a:xfrm>
+          <a:prstGeom prst="rect">
+            <a:avLst/>
+          </a:prstGeom>
+          <a:noFill/>
+          <a:ln/>
+        </p:spPr>
+        <p:txBody>
+          <a:bodyPr wrap="square" lIns="0" tIns="0" rIns="0" bIns="0" rtlCol="0" anchor="t"/>
+          <a:lstStyle/>
+          <a:p>
+            <a:pPr indent="0" marL="0">
+              <a:buNone/>
+            </a:pPr>
+            <a:r>
+              <a:rPr lang="en-US" sz="2000" dirty="0">
+                <a:solidFill>
+                  <a:schemeClr val="tx1"/>
+                </a:solidFill>
+                <a:latin typeface="Arial" pitchFamily="34" charset="0"/>
+                <a:ea typeface="Arial" pitchFamily="34" charset="-122"/>
+                <a:cs typeface="Arial" pitchFamily="34" charset="-120"/>
+              </a:rPr>
+              <a:t>Prediction: no. Within ±3 cp, as in study 1.</a:t>
+            </a:r>
+            <a:endParaRPr lang="en-US" sz="2000" dirty="0"/>
+          </a:p>
+        </p:txBody>
+      </p:sp>
+      <p:sp>
+        <p:nvSpPr>
+          <p:cNvPr id="11" name="Text 9"/>
+          <p:cNvSpPr txBox="1"/>
+          <p:nvPr/>
+        </p:nvSpPr>
+        <p:spPr>
+          <a:xfrm>
+            <a:off x="457200" y="3931920"/>
+            <a:ext cx="8229600" cy="685800"/>
+          </a:xfrm>
+          <a:prstGeom prst="rect">
+            <a:avLst/>
+          </a:prstGeom>
+          <a:noFill/>
+          <a:ln/>
+        </p:spPr>
+        <p:txBody>
+          <a:bodyPr wrap="square" lIns="0" tIns="0" rIns="0" bIns="0" rtlCol="0" anchor="t"/>
+          <a:lstStyle/>
+          <a:p>
+            <a:pPr indent="0" marL="0">
+              <a:buNone/>
+            </a:pPr>
+            <a:r>
+              <a:rPr lang="en-US" sz="1800" dirty="0">
+                <a:solidFill>
+                  <a:srgbClr val="777777"/>
+                </a:solidFill>
+                <a:latin typeface="Arial" pitchFamily="34" charset="0"/>
+                <a:ea typeface="Arial" pitchFamily="34" charset="-122"/>
+                <a:cs typeface="Arial" pitchFamily="34" charset="-120"/>
+              </a:rPr>
+              <a:t>Fixing the prediction first is like painting the target before shooting the arrow.</a:t>
+            </a:r>
+            <a:endParaRPr lang="en-US" sz="1800" dirty="0"/>
+          </a:p>
+        </p:txBody>
+      </p:sp>
+      <p:sp>
+        <p:nvSpPr>
+          <p:cNvPr id="12" name="Text 10"/>
+          <p:cNvSpPr txBox="1"/>
+          <p:nvPr/>
+        </p:nvSpPr>
+        <p:spPr>
+          <a:xfrm>
+            <a:off x="457200" y="4709160"/>
+            <a:ext cx="7680960" cy="274320"/>
+          </a:xfrm>
+          <a:prstGeom prst="rect">
+            <a:avLst/>
+          </a:prstGeom>
+          <a:noFill/>
+          <a:ln/>
+        </p:spPr>
+        <p:txBody>
+          <a:bodyPr wrap="square" lIns="0" tIns="0" rIns="0" bIns="0" rtlCol="0" anchor="ctr"/>
+          <a:lstStyle/>
+          <a:p>
+            <a:pPr indent="0" marL="0">
+              <a:buNone/>
+            </a:pPr>
+            <a:r>
+              <a:rPr lang="en-US" sz="1200" dirty="0">
+                <a:solidFill>
+                  <a:srgbClr val="777777"/>
+                </a:solidFill>
+                <a:latin typeface="Arial" pitchFamily="34" charset="0"/>
+                <a:ea typeface="Arial" pitchFamily="34" charset="-122"/>
+                <a:cs typeface="Arial" pitchFamily="34" charset="-120"/>
+              </a:rPr>
+              <a:t>PREREGISTRATION_STUDY2.md, committed 12 October 2026, 11:02 UTC</a:t>
+            </a:r>
+            <a:endParaRPr lang="en-US" sz="1200" dirty="0"/>
+          </a:p>
+        </p:txBody>
+      </p:sp>
+      <p:sp>
+        <p:nvSpPr>
+          <p:cNvPr id="25" name="Slide Number Placeholder 0"/>
+          <p:cNvSpPr>
+            <a:spLocks noGrp="1"/>
+          </p:cNvSpPr>
+          <p:nvPr>
+            <p:ph type="sldNum" sz="quarter" idx="4294967295"/>
+          </p:nvPr>
+        </p:nvSpPr>
+        <p:spPr>
+          <a:xfrm>
+            <a:off x="8321040" y="4754880"/>
+            <a:ext cx="457200" cy="274320"/>
+          </a:xfrm>
+          <a:prstGeom prst="rect">
+            <a:avLst/>
+          </a:prstGeom>
+          <a:extLst>
+            <a:ext uri="{C572A759-6A51-4108-AA02-DFA0A04FC94B}">
+              <ma14:wrappingTextBoxFlag xmlns:ma14="http://schemas.microsoft.com/office/mac/drawingml/2011/main" val="0"/>
+            </a:ext>
+          </a:extLst>
+        </p:spPr>
+        <p:txBody>
+          <a:bodyPr/>
+          <a:lstStyle>
+            <a:lvl1pPr>
+              <a:defRPr sz="1100">
+                <a:solidFill>
+                  <a:srgbClr val="777777"/>
+                </a:solidFill>
+                <a:latin typeface="Arial"/>
+                <a:ea typeface="Arial"/>
+                <a:cs typeface="Arial"/>
+              </a:defRPr>
+            </a:lvl1pPr>
+          </a:lstStyle>
+          <a:p>
+            <a:pPr algn="l"/>
+            <a:fld id="{F7021451-1387-4CA6-816F-3879F97B5CBC}" type="slidenum">
+              <a:rPr b="0" lang="en-US"/>
+              <a:t>21</a:t>
+            </a:fld>
+            <a:endParaRPr lang="en-US"/>
           </a:p>
         </p:txBody>
       </p:sp>
@@ -12758,13 +13180,13 @@
           <p:cNvPr id="2" name="Text 0"/>
           <p:cNvSpPr/>
           <p:nvPr>
-            <p:ph idx="100" type="title" hasCustomPrompt="1"/>
+            <p:ph idx="100" type="body" hasCustomPrompt="1"/>
           </p:nvPr>
         </p:nvSpPr>
         <p:spPr>
           <a:xfrm>
-            <a:off x="457200" y="228600"/>
-            <a:ext cx="8229600" cy="822960"/>
+            <a:off x="640080" y="1554480"/>
+            <a:ext cx="7863840" cy="457200"/>
           </a:xfrm>
           <a:prstGeom prst="rect">
             <a:avLst/>
@@ -12780,54 +13202,29 @@
               <a:buNone/>
             </a:pPr>
             <a:r>
-              <a:rPr lang="en-US" sz="2600" b="1" dirty="0">
-                <a:solidFill>
-                  <a:schemeClr val="tx2"/>
+              <a:rPr lang="en-US" sz="1800" dirty="0">
+                <a:solidFill>
+                  <a:schemeClr val="accent5"/>
                 </a:solidFill>
               </a:rPr>
-              <a:t>From 89.6 million games to about 24,000 comparable pairs</a:t>
-            </a:r>
-            <a:endParaRPr lang="en-US" sz="2600" dirty="0"/>
-          </a:p>
-        </p:txBody>
-      </p:sp>
-      <p:sp>
-        <p:nvSpPr>
-          <p:cNvPr id="3" name="funnel 0"/>
+              <a:t>Part 4</a:t>
+            </a:r>
+            <a:endParaRPr lang="en-US" sz="1800" dirty="0"/>
+          </a:p>
+        </p:txBody>
+      </p:sp>
+      <p:sp>
+        <p:nvSpPr>
+          <p:cNvPr id="3" name="Text 0"/>
           <p:cNvSpPr/>
-          <p:nvPr/>
-        </p:nvSpPr>
-        <p:spPr>
-          <a:xfrm>
-            <a:off x="457200" y="1143000"/>
-            <a:ext cx="8229600" cy="457200"/>
-          </a:xfrm>
-          <a:prstGeom prst="roundRect">
-            <a:avLst>
-              <a:gd name="adj" fmla="val 12000"/>
-            </a:avLst>
-          </a:prstGeom>
-          <a:solidFill>
-            <a:srgbClr val="EBF3FA"/>
-          </a:solidFill>
-          <a:ln w="12700">
-            <a:solidFill>
-              <a:srgbClr val="2E75B6"/>
-            </a:solidFill>
-            <a:prstDash val="solid"/>
-          </a:ln>
-        </p:spPr>
-      </p:sp>
-      <p:sp>
-        <p:nvSpPr>
-          <p:cNvPr id="4" name="Text 2"/>
-          <p:cNvSpPr txBox="1"/>
-          <p:nvPr/>
-        </p:nvSpPr>
-        <p:spPr>
-          <a:xfrm>
-            <a:off x="594360" y="1143000"/>
-            <a:ext cx="7955280" cy="457200"/>
+          <p:nvPr>
+            <p:ph idx="101" type="title" hasCustomPrompt="1"/>
+          </p:nvPr>
+        </p:nvSpPr>
+        <p:spPr>
+          <a:xfrm>
+            <a:off x="640080" y="2011680"/>
+            <a:ext cx="7863840" cy="1280160"/>
           </a:xfrm>
           <a:prstGeom prst="rect">
             <a:avLst/>
@@ -12836,525 +13233,21 @@
           <a:ln/>
         </p:spPr>
         <p:txBody>
-          <a:bodyPr wrap="square" lIns="0" tIns="0" rIns="0" bIns="0" rtlCol="0" anchor="ctr"/>
-          <a:lstStyle/>
-          <a:p>
-            <a:pPr algn="ctr" indent="0" marL="0">
+          <a:bodyPr wrap="square" lIns="0" tIns="0" rIns="0" bIns="0" rtlCol="0" anchor="t"/>
+          <a:lstStyle/>
+          <a:p>
+            <a:pPr algn="l" indent="0" marL="0">
               <a:buNone/>
             </a:pPr>
             <a:r>
-              <a:rPr lang="en-US" sz="1500" b="1" dirty="0">
-                <a:solidFill>
-                  <a:srgbClr val="1F4E79"/>
-                </a:solidFill>
-                <a:latin typeface="Arial" pitchFamily="34" charset="0"/>
-                <a:ea typeface="Arial" pitchFamily="34" charset="-122"/>
-                <a:cs typeface="Arial" pitchFamily="34" charset="-120"/>
+              <a:rPr lang="en-US" sz="3600" b="1" dirty="0">
+                <a:solidFill>
+                  <a:schemeClr val="bg1"/>
+                </a:solidFill>
               </a:rPr>
-              <a:t>89,616,462  </a:t>
-            </a:r>
-            <a:pPr algn="ctr" indent="0" marL="0">
-              <a:buNone/>
-            </a:pPr>
-            <a:r>
-              <a:rPr lang="en-US" sz="1500" dirty="0">
-                <a:solidFill>
-                  <a:schemeClr val="tx1"/>
-                </a:solidFill>
-                <a:latin typeface="Arial" pitchFamily="34" charset="0"/>
-                <a:ea typeface="Arial" pitchFamily="34" charset="-122"/>
-                <a:cs typeface="Arial" pitchFamily="34" charset="-120"/>
-              </a:rPr>
-              <a:t>all rated games, September 2026</a:t>
-            </a:r>
-            <a:endParaRPr lang="en-US" sz="1500" dirty="0"/>
-          </a:p>
-        </p:txBody>
-      </p:sp>
-      <p:sp>
-        <p:nvSpPr>
-          <p:cNvPr id="5" name="funnel 1"/>
-          <p:cNvSpPr/>
-          <p:nvPr/>
-        </p:nvSpPr>
-        <p:spPr>
-          <a:xfrm>
-            <a:off x="731520" y="1691640"/>
-            <a:ext cx="7680960" cy="457200"/>
-          </a:xfrm>
-          <a:prstGeom prst="roundRect">
-            <a:avLst>
-              <a:gd name="adj" fmla="val 12000"/>
-            </a:avLst>
-          </a:prstGeom>
-          <a:solidFill>
-            <a:srgbClr val="EBF3FA"/>
-          </a:solidFill>
-          <a:ln w="12700">
-            <a:solidFill>
-              <a:srgbClr val="2E75B6"/>
-            </a:solidFill>
-            <a:prstDash val="solid"/>
-          </a:ln>
-        </p:spPr>
-      </p:sp>
-      <p:sp>
-        <p:nvSpPr>
-          <p:cNvPr id="6" name="Text 4"/>
-          <p:cNvSpPr txBox="1"/>
-          <p:nvPr/>
-        </p:nvSpPr>
-        <p:spPr>
-          <a:xfrm>
-            <a:off x="868680" y="1691640"/>
-            <a:ext cx="7406640" cy="457200"/>
-          </a:xfrm>
-          <a:prstGeom prst="rect">
-            <a:avLst/>
-          </a:prstGeom>
-          <a:noFill/>
-          <a:ln/>
-        </p:spPr>
-        <p:txBody>
-          <a:bodyPr wrap="square" lIns="0" tIns="0" rIns="0" bIns="0" rtlCol="0" anchor="ctr"/>
-          <a:lstStyle/>
-          <a:p>
-            <a:pPr algn="ctr" indent="0" marL="0">
-              <a:buNone/>
-            </a:pPr>
-            <a:r>
-              <a:rPr lang="en-US" sz="1500" b="1" dirty="0">
-                <a:solidFill>
-                  <a:srgbClr val="1F4E79"/>
-                </a:solidFill>
-                <a:latin typeface="Arial" pitchFamily="34" charset="0"/>
-                <a:ea typeface="Arial" pitchFamily="34" charset="-122"/>
-                <a:cs typeface="Arial" pitchFamily="34" charset="-120"/>
-              </a:rPr>
-              <a:t>14,935,862  </a:t>
-            </a:r>
-            <a:pPr algn="ctr" indent="0" marL="0">
-              <a:buNone/>
-            </a:pPr>
-            <a:r>
-              <a:rPr lang="en-US" sz="1500" dirty="0">
-                <a:solidFill>
-                  <a:schemeClr val="tx1"/>
-                </a:solidFill>
-                <a:latin typeface="Arial" pitchFamily="34" charset="0"/>
-                <a:ea typeface="Arial" pitchFamily="34" charset="-122"/>
-                <a:cs typeface="Arial" pitchFamily="34" charset="-120"/>
-              </a:rPr>
-              <a:t>rapid games, standard chess, no computer accounts</a:t>
-            </a:r>
-            <a:endParaRPr lang="en-US" sz="1500" dirty="0"/>
-          </a:p>
-        </p:txBody>
-      </p:sp>
-      <p:sp>
-        <p:nvSpPr>
-          <p:cNvPr id="7" name="funnel 2"/>
-          <p:cNvSpPr/>
-          <p:nvPr/>
-        </p:nvSpPr>
-        <p:spPr>
-          <a:xfrm>
-            <a:off x="1005840" y="2240280"/>
-            <a:ext cx="7132320" cy="457200"/>
-          </a:xfrm>
-          <a:prstGeom prst="roundRect">
-            <a:avLst>
-              <a:gd name="adj" fmla="val 12000"/>
-            </a:avLst>
-          </a:prstGeom>
-          <a:solidFill>
-            <a:srgbClr val="EBF3FA"/>
-          </a:solidFill>
-          <a:ln w="12700">
-            <a:solidFill>
-              <a:srgbClr val="2E75B6"/>
-            </a:solidFill>
-            <a:prstDash val="solid"/>
-          </a:ln>
-        </p:spPr>
-      </p:sp>
-      <p:sp>
-        <p:nvSpPr>
-          <p:cNvPr id="8" name="Text 6"/>
-          <p:cNvSpPr txBox="1"/>
-          <p:nvPr/>
-        </p:nvSpPr>
-        <p:spPr>
-          <a:xfrm>
-            <a:off x="1143000" y="2240280"/>
-            <a:ext cx="6858000" cy="457200"/>
-          </a:xfrm>
-          <a:prstGeom prst="rect">
-            <a:avLst/>
-          </a:prstGeom>
-          <a:noFill/>
-          <a:ln/>
-        </p:spPr>
-        <p:txBody>
-          <a:bodyPr wrap="square" lIns="0" tIns="0" rIns="0" bIns="0" rtlCol="0" anchor="ctr"/>
-          <a:lstStyle/>
-          <a:p>
-            <a:pPr algn="ctr" indent="0" marL="0">
-              <a:buNone/>
-            </a:pPr>
-            <a:r>
-              <a:rPr lang="en-US" sz="1500" b="1" dirty="0">
-                <a:solidFill>
-                  <a:srgbClr val="1F4E79"/>
-                </a:solidFill>
-                <a:latin typeface="Arial" pitchFamily="34" charset="0"/>
-                <a:ea typeface="Arial" pitchFamily="34" charset="-122"/>
-                <a:cs typeface="Arial" pitchFamily="34" charset="-120"/>
-              </a:rPr>
-              <a:t>454,791  </a:t>
-            </a:r>
-            <a:pPr algn="ctr" indent="0" marL="0">
-              <a:buNone/>
-            </a:pPr>
-            <a:r>
-              <a:rPr lang="en-US" sz="1500" dirty="0">
-                <a:solidFill>
-                  <a:schemeClr val="tx1"/>
-                </a:solidFill>
-                <a:latin typeface="Arial" pitchFamily="34" charset="0"/>
-                <a:ea typeface="Arial" pitchFamily="34" charset="-122"/>
-                <a:cs typeface="Arial" pitchFamily="34" charset="-120"/>
-              </a:rPr>
-              <a:t>time wins followed by a next game, rating 1200–2000, 6–30 Sep</a:t>
-            </a:r>
-            <a:endParaRPr lang="en-US" sz="1500" dirty="0"/>
-          </a:p>
-        </p:txBody>
-      </p:sp>
-      <p:sp>
-        <p:nvSpPr>
-          <p:cNvPr id="9" name="funnel 3"/>
-          <p:cNvSpPr/>
-          <p:nvPr/>
-        </p:nvSpPr>
-        <p:spPr>
-          <a:xfrm>
-            <a:off x="1280160" y="2788920"/>
-            <a:ext cx="6583680" cy="457200"/>
-          </a:xfrm>
-          <a:prstGeom prst="roundRect">
-            <a:avLst>
-              <a:gd name="adj" fmla="val 12000"/>
-            </a:avLst>
-          </a:prstGeom>
-          <a:solidFill>
-            <a:srgbClr val="EBF3FA"/>
-          </a:solidFill>
-          <a:ln w="12700">
-            <a:solidFill>
-              <a:srgbClr val="2E75B6"/>
-            </a:solidFill>
-            <a:prstDash val="solid"/>
-          </a:ln>
-        </p:spPr>
-      </p:sp>
-      <p:sp>
-        <p:nvSpPr>
-          <p:cNvPr id="10" name="Text 8"/>
-          <p:cNvSpPr txBox="1"/>
-          <p:nvPr/>
-        </p:nvSpPr>
-        <p:spPr>
-          <a:xfrm>
-            <a:off x="1417320" y="2788920"/>
-            <a:ext cx="6309360" cy="457200"/>
-          </a:xfrm>
-          <a:prstGeom prst="rect">
-            <a:avLst/>
-          </a:prstGeom>
-          <a:noFill/>
-          <a:ln/>
-        </p:spPr>
-        <p:txBody>
-          <a:bodyPr wrap="square" lIns="0" tIns="0" rIns="0" bIns="0" rtlCol="0" anchor="ctr"/>
-          <a:lstStyle/>
-          <a:p>
-            <a:pPr algn="ctr" indent="0" marL="0">
-              <a:buNone/>
-            </a:pPr>
-            <a:r>
-              <a:rPr lang="en-US" sz="1500" b="1" dirty="0">
-                <a:solidFill>
-                  <a:srgbClr val="1F4E79"/>
-                </a:solidFill>
-                <a:latin typeface="Arial" pitchFamily="34" charset="0"/>
-                <a:ea typeface="Arial" pitchFamily="34" charset="-122"/>
-                <a:cs typeface="Arial" pitchFamily="34" charset="-120"/>
-              </a:rPr>
-              <a:t>148,277  </a:t>
-            </a:r>
-            <a:pPr algn="ctr" indent="0" marL="0">
-              <a:buNone/>
-            </a:pPr>
-            <a:r>
-              <a:rPr lang="en-US" sz="1500" dirty="0">
-                <a:solidFill>
-                  <a:schemeClr val="tx1"/>
-                </a:solidFill>
-                <a:latin typeface="Arial" pitchFamily="34" charset="0"/>
-                <a:ea typeface="Arial" pitchFamily="34" charset="-122"/>
-                <a:cs typeface="Arial" pitchFamily="34" charset="-120"/>
-              </a:rPr>
-              <a:t>one per player</a:t>
-            </a:r>
-            <a:endParaRPr lang="en-US" sz="1500" dirty="0"/>
-          </a:p>
-        </p:txBody>
-      </p:sp>
-      <p:sp>
-        <p:nvSpPr>
-          <p:cNvPr id="11" name="funnel 4"/>
-          <p:cNvSpPr/>
-          <p:nvPr/>
-        </p:nvSpPr>
-        <p:spPr>
-          <a:xfrm>
-            <a:off x="1554480" y="3337560"/>
-            <a:ext cx="6035040" cy="457200"/>
-          </a:xfrm>
-          <a:prstGeom prst="roundRect">
-            <a:avLst>
-              <a:gd name="adj" fmla="val 12000"/>
-            </a:avLst>
-          </a:prstGeom>
-          <a:solidFill>
-            <a:srgbClr val="EBF3FA"/>
-          </a:solidFill>
-          <a:ln w="12700">
-            <a:solidFill>
-              <a:srgbClr val="2E75B6"/>
-            </a:solidFill>
-            <a:prstDash val="solid"/>
-          </a:ln>
-        </p:spPr>
-      </p:sp>
-      <p:sp>
-        <p:nvSpPr>
-          <p:cNvPr id="12" name="Text 10"/>
-          <p:cNvSpPr txBox="1"/>
-          <p:nvPr/>
-        </p:nvSpPr>
-        <p:spPr>
-          <a:xfrm>
-            <a:off x="1691640" y="3337560"/>
-            <a:ext cx="5760720" cy="457200"/>
-          </a:xfrm>
-          <a:prstGeom prst="rect">
-            <a:avLst/>
-          </a:prstGeom>
-          <a:noFill/>
-          <a:ln/>
-        </p:spPr>
-        <p:txBody>
-          <a:bodyPr wrap="square" lIns="0" tIns="0" rIns="0" bIns="0" rtlCol="0" anchor="ctr"/>
-          <a:lstStyle/>
-          <a:p>
-            <a:pPr algn="ctr" indent="0" marL="0">
-              <a:buNone/>
-            </a:pPr>
-            <a:r>
-              <a:rPr lang="en-US" sz="1500" b="1" dirty="0">
-                <a:solidFill>
-                  <a:srgbClr val="1F4E79"/>
-                </a:solidFill>
-                <a:latin typeface="Arial" pitchFamily="34" charset="0"/>
-                <a:ea typeface="Arial" pitchFamily="34" charset="-122"/>
-                <a:cs typeface="Arial" pitchFamily="34" charset="-120"/>
-              </a:rPr>
-              <a:t>70,000  </a:t>
-            </a:r>
-            <a:pPr algn="ctr" indent="0" marL="0">
-              <a:buNone/>
-            </a:pPr>
-            <a:r>
-              <a:rPr lang="en-US" sz="1500" dirty="0">
-                <a:solidFill>
-                  <a:schemeClr val="tx1"/>
-                </a:solidFill>
-                <a:latin typeface="Arial" pitchFamily="34" charset="0"/>
-                <a:ea typeface="Arial" pitchFamily="34" charset="-122"/>
-                <a:cs typeface="Arial" pitchFamily="34" charset="-120"/>
-              </a:rPr>
-              <a:t>checked by the chess computer, in random order</a:t>
-            </a:r>
-            <a:endParaRPr lang="en-US" sz="1500" dirty="0"/>
-          </a:p>
-        </p:txBody>
-      </p:sp>
-      <p:sp>
-        <p:nvSpPr>
-          <p:cNvPr id="13" name="funnel 5"/>
-          <p:cNvSpPr/>
-          <p:nvPr/>
-        </p:nvSpPr>
-        <p:spPr>
-          <a:xfrm>
-            <a:off x="1828800" y="3886200"/>
-            <a:ext cx="5486400" cy="457200"/>
-          </a:xfrm>
-          <a:prstGeom prst="roundRect">
-            <a:avLst>
-              <a:gd name="adj" fmla="val 12000"/>
-            </a:avLst>
-          </a:prstGeom>
-          <a:solidFill>
-            <a:srgbClr val="FFF2CC"/>
-          </a:solidFill>
-          <a:ln w="12700">
-            <a:solidFill>
-              <a:srgbClr val="C27C0E"/>
-            </a:solidFill>
-            <a:prstDash val="solid"/>
-          </a:ln>
-        </p:spPr>
-      </p:sp>
-      <p:sp>
-        <p:nvSpPr>
-          <p:cNvPr id="14" name="Text 12"/>
-          <p:cNvSpPr txBox="1"/>
-          <p:nvPr/>
-        </p:nvSpPr>
-        <p:spPr>
-          <a:xfrm>
-            <a:off x="1965960" y="3886200"/>
-            <a:ext cx="5212080" cy="457200"/>
-          </a:xfrm>
-          <a:prstGeom prst="rect">
-            <a:avLst/>
-          </a:prstGeom>
-          <a:noFill/>
-          <a:ln/>
-        </p:spPr>
-        <p:txBody>
-          <a:bodyPr wrap="square" lIns="0" tIns="0" rIns="0" bIns="0" rtlCol="0" anchor="ctr"/>
-          <a:lstStyle/>
-          <a:p>
-            <a:pPr algn="ctr" indent="0" marL="0">
-              <a:buNone/>
-            </a:pPr>
-            <a:r>
-              <a:rPr lang="en-US" sz="1500" b="1" dirty="0">
-                <a:solidFill>
-                  <a:srgbClr val="C27C0E"/>
-                </a:solidFill>
-                <a:latin typeface="Arial" pitchFamily="34" charset="0"/>
-                <a:ea typeface="Arial" pitchFamily="34" charset="-122"/>
-                <a:cs typeface="Arial" pitchFamily="34" charset="-120"/>
-              </a:rPr>
-              <a:t>12,033 + 11,962  </a:t>
-            </a:r>
-            <a:pPr algn="ctr" indent="0" marL="0">
-              <a:buNone/>
-            </a:pPr>
-            <a:r>
-              <a:rPr lang="en-US" sz="1500" dirty="0">
-                <a:solidFill>
-                  <a:schemeClr val="tx1"/>
-                </a:solidFill>
-                <a:latin typeface="Arial" pitchFamily="34" charset="0"/>
-                <a:ea typeface="Arial" pitchFamily="34" charset="-122"/>
-                <a:cs typeface="Arial" pitchFamily="34" charset="-120"/>
-              </a:rPr>
-              <a:t>lucky + deserved pairs scored</a:t>
-            </a:r>
-            <a:endParaRPr lang="en-US" sz="1500" dirty="0"/>
-          </a:p>
-        </p:txBody>
-      </p:sp>
-      <p:sp>
-        <p:nvSpPr>
-          <p:cNvPr id="15" name="Text 13"/>
-          <p:cNvSpPr txBox="1"/>
-          <p:nvPr/>
-        </p:nvSpPr>
-        <p:spPr>
-          <a:xfrm>
-            <a:off x="457200" y="4709160"/>
-            <a:ext cx="7680960" cy="274320"/>
-          </a:xfrm>
-          <a:prstGeom prst="rect">
-            <a:avLst/>
-          </a:prstGeom>
-          <a:noFill/>
-          <a:ln/>
-        </p:spPr>
-        <p:txBody>
-          <a:bodyPr wrap="square" lIns="0" tIns="0" rIns="0" bIns="0" rtlCol="0" anchor="ctr"/>
-          <a:lstStyle/>
-          <a:p>
-            <a:pPr indent="0" marL="0">
-              <a:buNone/>
-            </a:pPr>
-            <a:r>
-              <a:rPr lang="en-US" sz="1200" dirty="0">
-                <a:solidFill>
-                  <a:srgbClr val="777777"/>
-                </a:solidFill>
-                <a:latin typeface="Arial" pitchFamily="34" charset="0"/>
-                <a:ea typeface="Arial" pitchFamily="34" charset="-122"/>
-                <a:cs typeface="Arial" pitchFamily="34" charset="-120"/>
-              </a:rPr>
-              <a:t>Lichess open database (database.lichess.org, CC0). Box widths are not to scale.</a:t>
-            </a:r>
-            <a:endParaRPr lang="en-US" sz="1200" dirty="0"/>
-          </a:p>
-        </p:txBody>
-      </p:sp>
-      <p:sp>
-        <p:nvSpPr>
-          <p:cNvPr id="25" name="Slide Number Placeholder 0"/>
-          <p:cNvSpPr>
-            <a:spLocks noGrp="1"/>
-          </p:cNvSpPr>
-          <p:nvPr>
-            <p:ph type="sldNum" sz="quarter" idx="4294967295"/>
-          </p:nvPr>
-        </p:nvSpPr>
-        <p:spPr>
-          <a:xfrm>
-            <a:off x="8321040" y="4754880"/>
-            <a:ext cx="457200" cy="274320"/>
-          </a:xfrm>
-          <a:prstGeom prst="rect">
-            <a:avLst/>
-          </a:prstGeom>
-          <a:extLst>
-            <a:ext uri="{C572A759-6A51-4108-AA02-DFA0A04FC94B}">
-              <ma14:wrappingTextBoxFlag xmlns:ma14="http://schemas.microsoft.com/office/mac/drawingml/2011/main" val="0"/>
-            </a:ext>
-          </a:extLst>
-        </p:spPr>
-        <p:txBody>
-          <a:bodyPr/>
-          <a:lstStyle>
-            <a:lvl1pPr>
-              <a:defRPr sz="1100">
-                <a:solidFill>
-                  <a:srgbClr val="777777"/>
-                </a:solidFill>
-                <a:latin typeface="Arial"/>
-                <a:ea typeface="Arial"/>
-                <a:cs typeface="Arial"/>
-              </a:defRPr>
-            </a:lvl1pPr>
-          </a:lstStyle>
-          <a:p>
-            <a:pPr algn="l"/>
-            <a:fld id="{F7021451-1387-4CA6-816F-3879F97B5CBC}" type="slidenum">
-              <a:rPr b="0" lang="en-US"/>
-              <a:t>22</a:t>
-            </a:fld>
-            <a:endParaRPr lang="en-US"/>
+              <a:t>How it was measured</a:t>
+            </a:r>
+            <a:endParaRPr lang="en-US" sz="3600" dirty="0"/>
           </a:p>
         </p:txBody>
       </p:sp>
@@ -13415,7 +13308,7 @@
                   <a:schemeClr val="tx2"/>
                 </a:solidFill>
               </a:rPr>
-              <a:t>A pair is one win plus the same player's very next game, started within 30 minutes</a:t>
+              <a:t>From 89.6 million games to about 24,000 comparable pairs</a:t>
             </a:r>
             <a:endParaRPr lang="en-US" sz="2600" dirty="0"/>
           </a:p>
@@ -13423,18 +13316,18 @@
       </p:sp>
       <p:sp>
         <p:nvSpPr>
-          <p:cNvPr id="3" name="game A"/>
+          <p:cNvPr id="3" name="funnel 0"/>
           <p:cNvSpPr/>
           <p:nvPr/>
         </p:nvSpPr>
         <p:spPr>
           <a:xfrm>
-            <a:off x="457200" y="1463040"/>
-            <a:ext cx="2743200" cy="1280160"/>
+            <a:off x="457200" y="1143000"/>
+            <a:ext cx="8229600" cy="457200"/>
           </a:xfrm>
           <a:prstGeom prst="roundRect">
             <a:avLst>
-              <a:gd name="adj" fmla="val 4286"/>
+              <a:gd name="adj" fmla="val 12000"/>
             </a:avLst>
           </a:prstGeom>
           <a:solidFill>
@@ -13456,8 +13349,8 @@
         </p:nvSpPr>
         <p:spPr>
           <a:xfrm>
-            <a:off x="640080" y="1463040"/>
-            <a:ext cx="2377440" cy="1280160"/>
+            <a:off x="594360" y="1143000"/>
+            <a:ext cx="7955280" cy="457200"/>
           </a:xfrm>
           <a:prstGeom prst="rect">
             <a:avLst/>
@@ -13469,11 +13362,11 @@
           <a:bodyPr wrap="square" lIns="0" tIns="0" rIns="0" bIns="0" rtlCol="0" anchor="ctr"/>
           <a:lstStyle/>
           <a:p>
-            <a:pPr indent="0" marL="0">
+            <a:pPr algn="ctr" indent="0" marL="0">
               <a:buNone/>
             </a:pPr>
             <a:r>
-              <a:rPr lang="en-US" sz="2000" b="1" dirty="0">
+              <a:rPr lang="en-US" sz="1500" b="1" dirty="0">
                 <a:solidFill>
                   <a:srgbClr val="1F4E79"/>
                 </a:solidFill>
@@ -13481,49 +13374,48 @@
                 <a:ea typeface="Arial" pitchFamily="34" charset="-122"/>
                 <a:cs typeface="Arial" pitchFamily="34" charset="-120"/>
               </a:rPr>
-              <a:t>Game A</a:t>
-            </a:r>
-            <a:endParaRPr lang="en-US" sz="2000" dirty="0"/>
-          </a:p>
-          <a:p>
-            <a:pPr indent="0" marL="0">
+              <a:t>89,616,462  </a:t>
+            </a:r>
+            <a:pPr algn="ctr" indent="0" marL="0">
               <a:buNone/>
             </a:pPr>
             <a:r>
-              <a:rPr lang="en-US" sz="2000" dirty="0">
-                <a:solidFill>
-                  <a:srgbClr val="1F4E79"/>
+              <a:rPr lang="en-US" sz="1500" dirty="0">
+                <a:solidFill>
+                  <a:schemeClr val="tx1"/>
                 </a:solidFill>
                 <a:latin typeface="Arial" pitchFamily="34" charset="0"/>
                 <a:ea typeface="Arial" pitchFamily="34" charset="-122"/>
                 <a:cs typeface="Arial" pitchFamily="34" charset="-120"/>
               </a:rPr>
-              <a:t>the win (lucky or deserved)</a:t>
-            </a:r>
-            <a:endParaRPr lang="en-US" sz="2000" dirty="0"/>
-          </a:p>
-        </p:txBody>
-      </p:sp>
-      <p:sp>
-        <p:nvSpPr>
-          <p:cNvPr id="5" name="arrow"/>
+              <a:t>all rated games, September 2026</a:t>
+            </a:r>
+            <a:endParaRPr lang="en-US" sz="1500" dirty="0"/>
+          </a:p>
+        </p:txBody>
+      </p:sp>
+      <p:sp>
+        <p:nvSpPr>
+          <p:cNvPr id="5" name="funnel 1"/>
           <p:cNvSpPr/>
           <p:nvPr/>
         </p:nvSpPr>
         <p:spPr>
           <a:xfrm>
-            <a:off x="3337560" y="1920240"/>
-            <a:ext cx="1554480" cy="365760"/>
-          </a:xfrm>
-          <a:prstGeom prst="rightArrow">
-            <a:avLst/>
+            <a:off x="731520" y="1691640"/>
+            <a:ext cx="7680960" cy="457200"/>
+          </a:xfrm>
+          <a:prstGeom prst="roundRect">
+            <a:avLst>
+              <a:gd name="adj" fmla="val 12000"/>
+            </a:avLst>
           </a:prstGeom>
           <a:solidFill>
-            <a:srgbClr val="777777"/>
+            <a:srgbClr val="EBF3FA"/>
           </a:solidFill>
           <a:ln w="12700">
             <a:solidFill>
-              <a:srgbClr val="777777"/>
+              <a:srgbClr val="2E75B6"/>
             </a:solidFill>
             <a:prstDash val="solid"/>
           </a:ln>
@@ -13537,8 +13429,8 @@
         </p:nvSpPr>
         <p:spPr>
           <a:xfrm>
-            <a:off x="3154680" y="2377440"/>
-            <a:ext cx="1920240" cy="548640"/>
+            <a:off x="868680" y="1691640"/>
+            <a:ext cx="7406640" cy="457200"/>
           </a:xfrm>
           <a:prstGeom prst="rect">
             <a:avLst/>
@@ -13547,41 +13439,295 @@
           <a:ln/>
         </p:spPr>
         <p:txBody>
-          <a:bodyPr wrap="square" lIns="0" tIns="0" rIns="0" bIns="0" rtlCol="0" anchor="t"/>
+          <a:bodyPr wrap="square" lIns="0" tIns="0" rIns="0" bIns="0" rtlCol="0" anchor="ctr"/>
           <a:lstStyle/>
           <a:p>
             <a:pPr algn="ctr" indent="0" marL="0">
               <a:buNone/>
             </a:pPr>
             <a:r>
-              <a:rPr lang="en-US" sz="1400" dirty="0">
-                <a:solidFill>
-                  <a:srgbClr val="777777"/>
+              <a:rPr lang="en-US" sz="1500" b="1" dirty="0">
+                <a:solidFill>
+                  <a:srgbClr val="1F4E79"/>
                 </a:solidFill>
                 <a:latin typeface="Arial" pitchFamily="34" charset="0"/>
                 <a:ea typeface="Arial" pitchFamily="34" charset="-122"/>
                 <a:cs typeface="Arial" pitchFamily="34" charset="-120"/>
               </a:rPr>
-              <a:t>≤ 30 min, no game in between</a:t>
-            </a:r>
-            <a:endParaRPr lang="en-US" sz="1400" dirty="0"/>
-          </a:p>
-        </p:txBody>
-      </p:sp>
-      <p:sp>
-        <p:nvSpPr>
-          <p:cNvPr id="7" name="game B"/>
+              <a:t>14,935,862  </a:t>
+            </a:r>
+            <a:pPr algn="ctr" indent="0" marL="0">
+              <a:buNone/>
+            </a:pPr>
+            <a:r>
+              <a:rPr lang="en-US" sz="1500" dirty="0">
+                <a:solidFill>
+                  <a:schemeClr val="tx1"/>
+                </a:solidFill>
+                <a:latin typeface="Arial" pitchFamily="34" charset="0"/>
+                <a:ea typeface="Arial" pitchFamily="34" charset="-122"/>
+                <a:cs typeface="Arial" pitchFamily="34" charset="-120"/>
+              </a:rPr>
+              <a:t>rapid games, standard chess, no computer accounts</a:t>
+            </a:r>
+            <a:endParaRPr lang="en-US" sz="1500" dirty="0"/>
+          </a:p>
+        </p:txBody>
+      </p:sp>
+      <p:sp>
+        <p:nvSpPr>
+          <p:cNvPr id="7" name="funnel 2"/>
           <p:cNvSpPr/>
           <p:nvPr/>
         </p:nvSpPr>
         <p:spPr>
           <a:xfrm>
-            <a:off x="5029200" y="1463040"/>
-            <a:ext cx="3657600" cy="1280160"/>
+            <a:off x="1005840" y="2240280"/>
+            <a:ext cx="7132320" cy="457200"/>
           </a:xfrm>
           <a:prstGeom prst="roundRect">
             <a:avLst>
-              <a:gd name="adj" fmla="val 4286"/>
+              <a:gd name="adj" fmla="val 12000"/>
+            </a:avLst>
+          </a:prstGeom>
+          <a:solidFill>
+            <a:srgbClr val="EBF3FA"/>
+          </a:solidFill>
+          <a:ln w="12700">
+            <a:solidFill>
+              <a:srgbClr val="2E75B6"/>
+            </a:solidFill>
+            <a:prstDash val="solid"/>
+          </a:ln>
+        </p:spPr>
+      </p:sp>
+      <p:sp>
+        <p:nvSpPr>
+          <p:cNvPr id="8" name="Text 6"/>
+          <p:cNvSpPr txBox="1"/>
+          <p:nvPr/>
+        </p:nvSpPr>
+        <p:spPr>
+          <a:xfrm>
+            <a:off x="1143000" y="2240280"/>
+            <a:ext cx="6858000" cy="457200"/>
+          </a:xfrm>
+          <a:prstGeom prst="rect">
+            <a:avLst/>
+          </a:prstGeom>
+          <a:noFill/>
+          <a:ln/>
+        </p:spPr>
+        <p:txBody>
+          <a:bodyPr wrap="square" lIns="0" tIns="0" rIns="0" bIns="0" rtlCol="0" anchor="ctr"/>
+          <a:lstStyle/>
+          <a:p>
+            <a:pPr algn="ctr" indent="0" marL="0">
+              <a:buNone/>
+            </a:pPr>
+            <a:r>
+              <a:rPr lang="en-US" sz="1500" b="1" dirty="0">
+                <a:solidFill>
+                  <a:srgbClr val="1F4E79"/>
+                </a:solidFill>
+                <a:latin typeface="Arial" pitchFamily="34" charset="0"/>
+                <a:ea typeface="Arial" pitchFamily="34" charset="-122"/>
+                <a:cs typeface="Arial" pitchFamily="34" charset="-120"/>
+              </a:rPr>
+              <a:t>454,791  </a:t>
+            </a:r>
+            <a:pPr algn="ctr" indent="0" marL="0">
+              <a:buNone/>
+            </a:pPr>
+            <a:r>
+              <a:rPr lang="en-US" sz="1500" dirty="0">
+                <a:solidFill>
+                  <a:schemeClr val="tx1"/>
+                </a:solidFill>
+                <a:latin typeface="Arial" pitchFamily="34" charset="0"/>
+                <a:ea typeface="Arial" pitchFamily="34" charset="-122"/>
+                <a:cs typeface="Arial" pitchFamily="34" charset="-120"/>
+              </a:rPr>
+              <a:t>time wins followed by a next game, rating 1200–2000, 6–30 Sep</a:t>
+            </a:r>
+            <a:endParaRPr lang="en-US" sz="1500" dirty="0"/>
+          </a:p>
+        </p:txBody>
+      </p:sp>
+      <p:sp>
+        <p:nvSpPr>
+          <p:cNvPr id="9" name="funnel 3"/>
+          <p:cNvSpPr/>
+          <p:nvPr/>
+        </p:nvSpPr>
+        <p:spPr>
+          <a:xfrm>
+            <a:off x="1280160" y="2788920"/>
+            <a:ext cx="6583680" cy="457200"/>
+          </a:xfrm>
+          <a:prstGeom prst="roundRect">
+            <a:avLst>
+              <a:gd name="adj" fmla="val 12000"/>
+            </a:avLst>
+          </a:prstGeom>
+          <a:solidFill>
+            <a:srgbClr val="EBF3FA"/>
+          </a:solidFill>
+          <a:ln w="12700">
+            <a:solidFill>
+              <a:srgbClr val="2E75B6"/>
+            </a:solidFill>
+            <a:prstDash val="solid"/>
+          </a:ln>
+        </p:spPr>
+      </p:sp>
+      <p:sp>
+        <p:nvSpPr>
+          <p:cNvPr id="10" name="Text 8"/>
+          <p:cNvSpPr txBox="1"/>
+          <p:nvPr/>
+        </p:nvSpPr>
+        <p:spPr>
+          <a:xfrm>
+            <a:off x="1417320" y="2788920"/>
+            <a:ext cx="6309360" cy="457200"/>
+          </a:xfrm>
+          <a:prstGeom prst="rect">
+            <a:avLst/>
+          </a:prstGeom>
+          <a:noFill/>
+          <a:ln/>
+        </p:spPr>
+        <p:txBody>
+          <a:bodyPr wrap="square" lIns="0" tIns="0" rIns="0" bIns="0" rtlCol="0" anchor="ctr"/>
+          <a:lstStyle/>
+          <a:p>
+            <a:pPr algn="ctr" indent="0" marL="0">
+              <a:buNone/>
+            </a:pPr>
+            <a:r>
+              <a:rPr lang="en-US" sz="1500" b="1" dirty="0">
+                <a:solidFill>
+                  <a:srgbClr val="1F4E79"/>
+                </a:solidFill>
+                <a:latin typeface="Arial" pitchFamily="34" charset="0"/>
+                <a:ea typeface="Arial" pitchFamily="34" charset="-122"/>
+                <a:cs typeface="Arial" pitchFamily="34" charset="-120"/>
+              </a:rPr>
+              <a:t>148,277  </a:t>
+            </a:r>
+            <a:pPr algn="ctr" indent="0" marL="0">
+              <a:buNone/>
+            </a:pPr>
+            <a:r>
+              <a:rPr lang="en-US" sz="1500" dirty="0">
+                <a:solidFill>
+                  <a:schemeClr val="tx1"/>
+                </a:solidFill>
+                <a:latin typeface="Arial" pitchFamily="34" charset="0"/>
+                <a:ea typeface="Arial" pitchFamily="34" charset="-122"/>
+                <a:cs typeface="Arial" pitchFamily="34" charset="-120"/>
+              </a:rPr>
+              <a:t>one per player</a:t>
+            </a:r>
+            <a:endParaRPr lang="en-US" sz="1500" dirty="0"/>
+          </a:p>
+        </p:txBody>
+      </p:sp>
+      <p:sp>
+        <p:nvSpPr>
+          <p:cNvPr id="11" name="funnel 4"/>
+          <p:cNvSpPr/>
+          <p:nvPr/>
+        </p:nvSpPr>
+        <p:spPr>
+          <a:xfrm>
+            <a:off x="1554480" y="3337560"/>
+            <a:ext cx="6035040" cy="457200"/>
+          </a:xfrm>
+          <a:prstGeom prst="roundRect">
+            <a:avLst>
+              <a:gd name="adj" fmla="val 12000"/>
+            </a:avLst>
+          </a:prstGeom>
+          <a:solidFill>
+            <a:srgbClr val="EBF3FA"/>
+          </a:solidFill>
+          <a:ln w="12700">
+            <a:solidFill>
+              <a:srgbClr val="2E75B6"/>
+            </a:solidFill>
+            <a:prstDash val="solid"/>
+          </a:ln>
+        </p:spPr>
+      </p:sp>
+      <p:sp>
+        <p:nvSpPr>
+          <p:cNvPr id="12" name="Text 10"/>
+          <p:cNvSpPr txBox="1"/>
+          <p:nvPr/>
+        </p:nvSpPr>
+        <p:spPr>
+          <a:xfrm>
+            <a:off x="1691640" y="3337560"/>
+            <a:ext cx="5760720" cy="457200"/>
+          </a:xfrm>
+          <a:prstGeom prst="rect">
+            <a:avLst/>
+          </a:prstGeom>
+          <a:noFill/>
+          <a:ln/>
+        </p:spPr>
+        <p:txBody>
+          <a:bodyPr wrap="square" lIns="0" tIns="0" rIns="0" bIns="0" rtlCol="0" anchor="ctr"/>
+          <a:lstStyle/>
+          <a:p>
+            <a:pPr algn="ctr" indent="0" marL="0">
+              <a:buNone/>
+            </a:pPr>
+            <a:r>
+              <a:rPr lang="en-US" sz="1500" b="1" dirty="0">
+                <a:solidFill>
+                  <a:srgbClr val="1F4E79"/>
+                </a:solidFill>
+                <a:latin typeface="Arial" pitchFamily="34" charset="0"/>
+                <a:ea typeface="Arial" pitchFamily="34" charset="-122"/>
+                <a:cs typeface="Arial" pitchFamily="34" charset="-120"/>
+              </a:rPr>
+              <a:t>70,000  </a:t>
+            </a:r>
+            <a:pPr algn="ctr" indent="0" marL="0">
+              <a:buNone/>
+            </a:pPr>
+            <a:r>
+              <a:rPr lang="en-US" sz="1500" dirty="0">
+                <a:solidFill>
+                  <a:schemeClr val="tx1"/>
+                </a:solidFill>
+                <a:latin typeface="Arial" pitchFamily="34" charset="0"/>
+                <a:ea typeface="Arial" pitchFamily="34" charset="-122"/>
+                <a:cs typeface="Arial" pitchFamily="34" charset="-120"/>
+              </a:rPr>
+              <a:t>checked by the chess computer, in random order</a:t>
+            </a:r>
+            <a:endParaRPr lang="en-US" sz="1500" dirty="0"/>
+          </a:p>
+        </p:txBody>
+      </p:sp>
+      <p:sp>
+        <p:nvSpPr>
+          <p:cNvPr id="13" name="funnel 5"/>
+          <p:cNvSpPr/>
+          <p:nvPr/>
+        </p:nvSpPr>
+        <p:spPr>
+          <a:xfrm>
+            <a:off x="1828800" y="3886200"/>
+            <a:ext cx="5486400" cy="457200"/>
+          </a:xfrm>
+          <a:prstGeom prst="roundRect">
+            <a:avLst>
+              <a:gd name="adj" fmla="val 12000"/>
             </a:avLst>
           </a:prstGeom>
           <a:solidFill>
@@ -13597,14 +13743,14 @@
       </p:sp>
       <p:sp>
         <p:nvSpPr>
-          <p:cNvPr id="8" name="Text 6"/>
+          <p:cNvPr id="14" name="Text 12"/>
           <p:cNvSpPr txBox="1"/>
           <p:nvPr/>
         </p:nvSpPr>
         <p:spPr>
           <a:xfrm>
-            <a:off x="5212080" y="1463040"/>
-            <a:ext cx="3291840" cy="1280160"/>
+            <a:off x="1965960" y="3886200"/>
+            <a:ext cx="5212080" cy="457200"/>
           </a:xfrm>
           <a:prstGeom prst="rect">
             <a:avLst/>
@@ -13616,11 +13762,11 @@
           <a:bodyPr wrap="square" lIns="0" tIns="0" rIns="0" bIns="0" rtlCol="0" anchor="ctr"/>
           <a:lstStyle/>
           <a:p>
-            <a:pPr indent="0" marL="0">
+            <a:pPr algn="ctr" indent="0" marL="0">
               <a:buNone/>
             </a:pPr>
             <a:r>
-              <a:rPr lang="en-US" sz="2000" b="1" dirty="0">
+              <a:rPr lang="en-US" sz="1500" b="1" dirty="0">
                 <a:solidFill>
                   <a:srgbClr val="C27C0E"/>
                 </a:solidFill>
@@ -13628,39 +13774,36 @@
                 <a:ea typeface="Arial" pitchFamily="34" charset="-122"/>
                 <a:cs typeface="Arial" pitchFamily="34" charset="-120"/>
               </a:rPr>
-              <a:t>Game B</a:t>
-            </a:r>
-            <a:endParaRPr lang="en-US" sz="2000" dirty="0"/>
-          </a:p>
-          <a:p>
-            <a:pPr indent="0" marL="0">
+              <a:t>12,033 + 11,962  </a:t>
+            </a:r>
+            <a:pPr algn="ctr" indent="0" marL="0">
               <a:buNone/>
             </a:pPr>
             <a:r>
-              <a:rPr lang="en-US" sz="2000" dirty="0">
-                <a:solidFill>
-                  <a:srgbClr val="C27C0E"/>
+              <a:rPr lang="en-US" sz="1500" dirty="0">
+                <a:solidFill>
+                  <a:schemeClr val="tx1"/>
                 </a:solidFill>
                 <a:latin typeface="Arial" pitchFamily="34" charset="0"/>
                 <a:ea typeface="Arial" pitchFamily="34" charset="-122"/>
                 <a:cs typeface="Arial" pitchFamily="34" charset="-120"/>
               </a:rPr>
-              <a:t>the next game: moves 15 to 30 are scored</a:t>
-            </a:r>
-            <a:endParaRPr lang="en-US" sz="2000" dirty="0"/>
-          </a:p>
-        </p:txBody>
-      </p:sp>
-      <p:sp>
-        <p:nvSpPr>
-          <p:cNvPr id="9" name="Text 7"/>
+              <a:t>lucky + deserved pairs scored</a:t>
+            </a:r>
+            <a:endParaRPr lang="en-US" sz="1500" dirty="0"/>
+          </a:p>
+        </p:txBody>
+      </p:sp>
+      <p:sp>
+        <p:nvSpPr>
+          <p:cNvPr id="15" name="Text 13"/>
           <p:cNvSpPr txBox="1"/>
           <p:nvPr/>
         </p:nvSpPr>
         <p:spPr>
           <a:xfrm>
-            <a:off x="457200" y="3200400"/>
-            <a:ext cx="8229600" cy="1280160"/>
+            <a:off x="457200" y="4709160"/>
+            <a:ext cx="7680960" cy="274320"/>
           </a:xfrm>
           <a:prstGeom prst="rect">
             <a:avLst/>
@@ -13669,49 +13812,24 @@
           <a:ln/>
         </p:spPr>
         <p:txBody>
-          <a:bodyPr wrap="square" lIns="0" tIns="0" rIns="0" bIns="0" rtlCol="0" anchor="t"/>
-          <a:lstStyle/>
-          <a:p>
-            <a:pPr marL="342900" indent="-342900">
-              <a:spcAft>
-                <a:spcPts val="1000"/>
-              </a:spcAft>
-              <a:buSzPct val="100000"/>
-              <a:buChar char="•"/>
+          <a:bodyPr wrap="square" lIns="0" tIns="0" rIns="0" bIns="0" rtlCol="0" anchor="ctr"/>
+          <a:lstStyle/>
+          <a:p>
+            <a:pPr indent="0" marL="0">
+              <a:buNone/>
             </a:pPr>
             <a:r>
-              <a:rPr lang="en-US" sz="2000" dirty="0">
-                <a:solidFill>
-                  <a:schemeClr val="tx1"/>
+              <a:rPr lang="en-US" sz="1200" dirty="0">
+                <a:solidFill>
+                  <a:srgbClr val="777777"/>
                 </a:solidFill>
                 <a:latin typeface="Arial" pitchFamily="34" charset="0"/>
                 <a:ea typeface="Arial" pitchFamily="34" charset="-122"/>
                 <a:cs typeface="Arial" pitchFamily="34" charset="-120"/>
               </a:rPr>
-              <a:t>We measure how well game B was played</a:t>
-            </a:r>
-            <a:endParaRPr lang="en-US" sz="2000" dirty="0"/>
-          </a:p>
-          <a:p>
-            <a:pPr marL="342900" indent="-342900">
-              <a:spcAft>
-                <a:spcPts val="1000"/>
-              </a:spcAft>
-              <a:buSzPct val="100000"/>
-              <a:buChar char="•"/>
-            </a:pPr>
-            <a:r>
-              <a:rPr lang="en-US" sz="2000" dirty="0">
-                <a:solidFill>
-                  <a:schemeClr val="tx1"/>
-                </a:solidFill>
-                <a:latin typeface="Arial" pitchFamily="34" charset="0"/>
-                <a:ea typeface="Arial" pitchFamily="34" charset="-122"/>
-                <a:cs typeface="Arial" pitchFamily="34" charset="-120"/>
-              </a:rPr>
-              <a:t>Game A only tells us which group the pair is in</a:t>
-            </a:r>
-            <a:endParaRPr lang="en-US" sz="2000" dirty="0"/>
+              <a:t>Lichess open database (database.lichess.org, CC0). Box widths are not to scale.</a:t>
+            </a:r>
+            <a:endParaRPr lang="en-US" sz="1200" dirty="0"/>
           </a:p>
         </p:txBody>
       </p:sp>
@@ -13820,7 +13938,7 @@
                   <a:schemeClr val="tx2"/>
                 </a:solidFill>
               </a:rPr>
-              <a:t>The computer's score at the end of game A decides whether the win was lucky</a:t>
+              <a:t>A pair is one win plus the same player's very next game, started within 30 minutes</a:t>
             </a:r>
             <a:endParaRPr lang="en-US" sz="2600" dirty="0"/>
           </a:p>
@@ -13828,17 +13946,166 @@
       </p:sp>
       <p:sp>
         <p:nvSpPr>
-          <p:cNvPr id="3" name="lucky zone"/>
+          <p:cNvPr id="3" name="game A"/>
           <p:cNvSpPr/>
           <p:nvPr/>
         </p:nvSpPr>
         <p:spPr>
           <a:xfrm>
-            <a:off x="914400" y="1417320"/>
-            <a:ext cx="3291840" cy="502920"/>
+            <a:off x="457200" y="1463040"/>
+            <a:ext cx="2743200" cy="1280160"/>
+          </a:xfrm>
+          <a:prstGeom prst="roundRect">
+            <a:avLst>
+              <a:gd name="adj" fmla="val 4286"/>
+            </a:avLst>
+          </a:prstGeom>
+          <a:solidFill>
+            <a:srgbClr val="EBF3FA"/>
+          </a:solidFill>
+          <a:ln w="12700">
+            <a:solidFill>
+              <a:srgbClr val="2E75B6"/>
+            </a:solidFill>
+            <a:prstDash val="solid"/>
+          </a:ln>
+        </p:spPr>
+      </p:sp>
+      <p:sp>
+        <p:nvSpPr>
+          <p:cNvPr id="4" name="Text 2"/>
+          <p:cNvSpPr txBox="1"/>
+          <p:nvPr/>
+        </p:nvSpPr>
+        <p:spPr>
+          <a:xfrm>
+            <a:off x="640080" y="1463040"/>
+            <a:ext cx="2377440" cy="1280160"/>
           </a:xfrm>
           <a:prstGeom prst="rect">
             <a:avLst/>
+          </a:prstGeom>
+          <a:noFill/>
+          <a:ln/>
+        </p:spPr>
+        <p:txBody>
+          <a:bodyPr wrap="square" lIns="0" tIns="0" rIns="0" bIns="0" rtlCol="0" anchor="ctr"/>
+          <a:lstStyle/>
+          <a:p>
+            <a:pPr indent="0" marL="0">
+              <a:buNone/>
+            </a:pPr>
+            <a:r>
+              <a:rPr lang="en-US" sz="2000" b="1" dirty="0">
+                <a:solidFill>
+                  <a:srgbClr val="1F4E79"/>
+                </a:solidFill>
+                <a:latin typeface="Arial" pitchFamily="34" charset="0"/>
+                <a:ea typeface="Arial" pitchFamily="34" charset="-122"/>
+                <a:cs typeface="Arial" pitchFamily="34" charset="-120"/>
+              </a:rPr>
+              <a:t>Game A</a:t>
+            </a:r>
+            <a:endParaRPr lang="en-US" sz="2000" dirty="0"/>
+          </a:p>
+          <a:p>
+            <a:pPr indent="0" marL="0">
+              <a:buNone/>
+            </a:pPr>
+            <a:r>
+              <a:rPr lang="en-US" sz="2000" dirty="0">
+                <a:solidFill>
+                  <a:srgbClr val="1F4E79"/>
+                </a:solidFill>
+                <a:latin typeface="Arial" pitchFamily="34" charset="0"/>
+                <a:ea typeface="Arial" pitchFamily="34" charset="-122"/>
+                <a:cs typeface="Arial" pitchFamily="34" charset="-120"/>
+              </a:rPr>
+              <a:t>the win (lucky or deserved)</a:t>
+            </a:r>
+            <a:endParaRPr lang="en-US" sz="2000" dirty="0"/>
+          </a:p>
+        </p:txBody>
+      </p:sp>
+      <p:sp>
+        <p:nvSpPr>
+          <p:cNvPr id="5" name="arrow"/>
+          <p:cNvSpPr/>
+          <p:nvPr/>
+        </p:nvSpPr>
+        <p:spPr>
+          <a:xfrm>
+            <a:off x="3337560" y="1920240"/>
+            <a:ext cx="1554480" cy="365760"/>
+          </a:xfrm>
+          <a:prstGeom prst="rightArrow">
+            <a:avLst/>
+          </a:prstGeom>
+          <a:solidFill>
+            <a:srgbClr val="777777"/>
+          </a:solidFill>
+          <a:ln w="12700">
+            <a:solidFill>
+              <a:srgbClr val="777777"/>
+            </a:solidFill>
+            <a:prstDash val="solid"/>
+          </a:ln>
+        </p:spPr>
+      </p:sp>
+      <p:sp>
+        <p:nvSpPr>
+          <p:cNvPr id="6" name="Text 4"/>
+          <p:cNvSpPr txBox="1"/>
+          <p:nvPr/>
+        </p:nvSpPr>
+        <p:spPr>
+          <a:xfrm>
+            <a:off x="3154680" y="2377440"/>
+            <a:ext cx="1920240" cy="548640"/>
+          </a:xfrm>
+          <a:prstGeom prst="rect">
+            <a:avLst/>
+          </a:prstGeom>
+          <a:noFill/>
+          <a:ln/>
+        </p:spPr>
+        <p:txBody>
+          <a:bodyPr wrap="square" lIns="0" tIns="0" rIns="0" bIns="0" rtlCol="0" anchor="t"/>
+          <a:lstStyle/>
+          <a:p>
+            <a:pPr algn="ctr" indent="0" marL="0">
+              <a:buNone/>
+            </a:pPr>
+            <a:r>
+              <a:rPr lang="en-US" sz="1400" dirty="0">
+                <a:solidFill>
+                  <a:srgbClr val="777777"/>
+                </a:solidFill>
+                <a:latin typeface="Arial" pitchFamily="34" charset="0"/>
+                <a:ea typeface="Arial" pitchFamily="34" charset="-122"/>
+                <a:cs typeface="Arial" pitchFamily="34" charset="-120"/>
+              </a:rPr>
+              <a:t>≤ 30 min, no game in between</a:t>
+            </a:r>
+            <a:endParaRPr lang="en-US" sz="1400" dirty="0"/>
+          </a:p>
+        </p:txBody>
+      </p:sp>
+      <p:sp>
+        <p:nvSpPr>
+          <p:cNvPr id="7" name="game B"/>
+          <p:cNvSpPr/>
+          <p:nvPr/>
+        </p:nvSpPr>
+        <p:spPr>
+          <a:xfrm>
+            <a:off x="5029200" y="1463040"/>
+            <a:ext cx="3657600" cy="1280160"/>
+          </a:xfrm>
+          <a:prstGeom prst="roundRect">
+            <a:avLst>
+              <a:gd name="adj" fmla="val 4286"/>
+            </a:avLst>
           </a:prstGeom>
           <a:solidFill>
             <a:srgbClr val="FFF2CC"/>
@@ -13853,39 +14120,14 @@
       </p:sp>
       <p:sp>
         <p:nvSpPr>
-          <p:cNvPr id="4" name="deserved zone"/>
-          <p:cNvSpPr/>
-          <p:nvPr/>
-        </p:nvSpPr>
-        <p:spPr>
-          <a:xfrm>
-            <a:off x="4206240" y="1417320"/>
-            <a:ext cx="4023360" cy="502920"/>
-          </a:xfrm>
-          <a:prstGeom prst="rect">
-            <a:avLst/>
-          </a:prstGeom>
-          <a:solidFill>
-            <a:srgbClr val="EBF3FA"/>
-          </a:solidFill>
-          <a:ln w="12700">
-            <a:solidFill>
-              <a:srgbClr val="2E75B6"/>
-            </a:solidFill>
-            <a:prstDash val="solid"/>
-          </a:ln>
-        </p:spPr>
-      </p:sp>
-      <p:sp>
-        <p:nvSpPr>
-          <p:cNvPr id="5" name="Text 3"/>
+          <p:cNvPr id="8" name="Text 6"/>
           <p:cNvSpPr txBox="1"/>
           <p:nvPr/>
         </p:nvSpPr>
         <p:spPr>
           <a:xfrm>
-            <a:off x="914400" y="1417320"/>
-            <a:ext cx="3291840" cy="502920"/>
+            <a:off x="5212080" y="1463040"/>
+            <a:ext cx="3291840" cy="1280160"/>
           </a:xfrm>
           <a:prstGeom prst="rect">
             <a:avLst/>
@@ -13897,11 +14139,11 @@
           <a:bodyPr wrap="square" lIns="0" tIns="0" rIns="0" bIns="0" rtlCol="0" anchor="ctr"/>
           <a:lstStyle/>
           <a:p>
-            <a:pPr algn="ctr" indent="0" marL="0">
+            <a:pPr indent="0" marL="0">
               <a:buNone/>
             </a:pPr>
             <a:r>
-              <a:rPr lang="en-US" sz="1600" b="1" dirty="0">
+              <a:rPr lang="en-US" sz="2000" b="1" dirty="0">
                 <a:solidFill>
                   <a:srgbClr val="C27C0E"/>
                 </a:solidFill>
@@ -13909,61 +14151,39 @@
                 <a:ea typeface="Arial" pitchFamily="34" charset="-122"/>
                 <a:cs typeface="Arial" pitchFamily="34" charset="-120"/>
               </a:rPr>
-              <a:t>lucky</a:t>
-            </a:r>
-            <a:endParaRPr lang="en-US" sz="1600" dirty="0"/>
-          </a:p>
-        </p:txBody>
-      </p:sp>
-      <p:sp>
-        <p:nvSpPr>
-          <p:cNvPr id="6" name="Text 4"/>
-          <p:cNvSpPr txBox="1"/>
-          <p:nvPr/>
-        </p:nvSpPr>
-        <p:spPr>
-          <a:xfrm>
-            <a:off x="4206240" y="1417320"/>
-            <a:ext cx="4023360" cy="502920"/>
-          </a:xfrm>
-          <a:prstGeom prst="rect">
-            <a:avLst/>
-          </a:prstGeom>
-          <a:noFill/>
-          <a:ln/>
-        </p:spPr>
-        <p:txBody>
-          <a:bodyPr wrap="square" lIns="0" tIns="0" rIns="0" bIns="0" rtlCol="0" anchor="ctr"/>
-          <a:lstStyle/>
-          <a:p>
-            <a:pPr algn="ctr" indent="0" marL="0">
+              <a:t>Game B</a:t>
+            </a:r>
+            <a:endParaRPr lang="en-US" sz="2000" dirty="0"/>
+          </a:p>
+          <a:p>
+            <a:pPr indent="0" marL="0">
               <a:buNone/>
             </a:pPr>
             <a:r>
-              <a:rPr lang="en-US" sz="1600" b="1" dirty="0">
-                <a:solidFill>
-                  <a:srgbClr val="1F4E79"/>
+              <a:rPr lang="en-US" sz="2000" dirty="0">
+                <a:solidFill>
+                  <a:srgbClr val="C27C0E"/>
                 </a:solidFill>
                 <a:latin typeface="Arial" pitchFamily="34" charset="0"/>
                 <a:ea typeface="Arial" pitchFamily="34" charset="-122"/>
                 <a:cs typeface="Arial" pitchFamily="34" charset="-120"/>
               </a:rPr>
-              <a:t>deserved</a:t>
-            </a:r>
-            <a:endParaRPr lang="en-US" sz="1600" dirty="0"/>
-          </a:p>
-        </p:txBody>
-      </p:sp>
-      <p:sp>
-        <p:nvSpPr>
-          <p:cNvPr id="7" name="Text 5"/>
+              <a:t>the next game: moves 15 to 30 are scored</a:t>
+            </a:r>
+            <a:endParaRPr lang="en-US" sz="2000" dirty="0"/>
+          </a:p>
+        </p:txBody>
+      </p:sp>
+      <p:sp>
+        <p:nvSpPr>
+          <p:cNvPr id="9" name="Text 7"/>
           <p:cNvSpPr txBox="1"/>
           <p:nvPr/>
         </p:nvSpPr>
         <p:spPr>
           <a:xfrm>
-            <a:off x="502920" y="1965960"/>
-            <a:ext cx="822960" cy="274320"/>
+            <a:off x="457200" y="3200400"/>
+            <a:ext cx="8229600" cy="1280160"/>
           </a:xfrm>
           <a:prstGeom prst="rect">
             <a:avLst/>
@@ -13975,280 +14195,44 @@
           <a:bodyPr wrap="square" lIns="0" tIns="0" rIns="0" bIns="0" rtlCol="0" anchor="t"/>
           <a:lstStyle/>
           <a:p>
-            <a:pPr algn="ctr" indent="0" marL="0">
-              <a:buNone/>
+            <a:pPr marL="342900" indent="-342900">
+              <a:spcAft>
+                <a:spcPts val="1000"/>
+              </a:spcAft>
+              <a:buSzPct val="100000"/>
+              <a:buChar char="•"/>
             </a:pPr>
             <a:r>
-              <a:rPr lang="en-US" sz="1300" dirty="0">
-                <a:solidFill>
-                  <a:srgbClr val="777777"/>
+              <a:rPr lang="en-US" sz="2000" dirty="0">
+                <a:solidFill>
+                  <a:schemeClr val="tx1"/>
                 </a:solidFill>
                 <a:latin typeface="Arial" pitchFamily="34" charset="0"/>
                 <a:ea typeface="Arial" pitchFamily="34" charset="-122"/>
                 <a:cs typeface="Arial" pitchFamily="34" charset="-120"/>
               </a:rPr>
-              <a:t>-1000</a:t>
-            </a:r>
-            <a:endParaRPr lang="en-US" sz="1300" dirty="0"/>
-          </a:p>
-        </p:txBody>
-      </p:sp>
-      <p:sp>
-        <p:nvSpPr>
-          <p:cNvPr id="8" name="Text 6"/>
-          <p:cNvSpPr txBox="1"/>
-          <p:nvPr/>
-        </p:nvSpPr>
-        <p:spPr>
-          <a:xfrm>
-            <a:off x="3794760" y="1965960"/>
-            <a:ext cx="822960" cy="274320"/>
-          </a:xfrm>
-          <a:prstGeom prst="rect">
-            <a:avLst/>
-          </a:prstGeom>
-          <a:noFill/>
-          <a:ln/>
-        </p:spPr>
-        <p:txBody>
-          <a:bodyPr wrap="square" lIns="0" tIns="0" rIns="0" bIns="0" rtlCol="0" anchor="t"/>
-          <a:lstStyle/>
-          <a:p>
-            <a:pPr algn="ctr" indent="0" marL="0">
-              <a:buNone/>
+              <a:t>We measure how well game B was played</a:t>
+            </a:r>
+            <a:endParaRPr lang="en-US" sz="2000" dirty="0"/>
+          </a:p>
+          <a:p>
+            <a:pPr marL="342900" indent="-342900">
+              <a:spcAft>
+                <a:spcPts val="1000"/>
+              </a:spcAft>
+              <a:buSzPct val="100000"/>
+              <a:buChar char="•"/>
             </a:pPr>
             <a:r>
-              <a:rPr lang="en-US" sz="1300" dirty="0">
-                <a:solidFill>
-                  <a:srgbClr val="777777"/>
+              <a:rPr lang="en-US" sz="2000" dirty="0">
+                <a:solidFill>
+                  <a:schemeClr val="tx1"/>
                 </a:solidFill>
                 <a:latin typeface="Arial" pitchFamily="34" charset="0"/>
                 <a:ea typeface="Arial" pitchFamily="34" charset="-122"/>
                 <a:cs typeface="Arial" pitchFamily="34" charset="-120"/>
               </a:rPr>
-              <a:t>-100</a:t>
-            </a:r>
-            <a:endParaRPr lang="en-US" sz="1300" dirty="0"/>
-          </a:p>
-        </p:txBody>
-      </p:sp>
-      <p:sp>
-        <p:nvSpPr>
-          <p:cNvPr id="9" name="Text 7"/>
-          <p:cNvSpPr txBox="1"/>
-          <p:nvPr/>
-        </p:nvSpPr>
-        <p:spPr>
-          <a:xfrm>
-            <a:off x="4160520" y="1965960"/>
-            <a:ext cx="822960" cy="274320"/>
-          </a:xfrm>
-          <a:prstGeom prst="rect">
-            <a:avLst/>
-          </a:prstGeom>
-          <a:noFill/>
-          <a:ln/>
-        </p:spPr>
-        <p:txBody>
-          <a:bodyPr wrap="square" lIns="0" tIns="0" rIns="0" bIns="0" rtlCol="0" anchor="t"/>
-          <a:lstStyle/>
-          <a:p>
-            <a:pPr algn="ctr" indent="0" marL="0">
-              <a:buNone/>
-            </a:pPr>
-            <a:r>
-              <a:rPr lang="en-US" sz="1300" dirty="0">
-                <a:solidFill>
-                  <a:srgbClr val="777777"/>
-                </a:solidFill>
-                <a:latin typeface="Arial" pitchFamily="34" charset="0"/>
-                <a:ea typeface="Arial" pitchFamily="34" charset="-122"/>
-                <a:cs typeface="Arial" pitchFamily="34" charset="-120"/>
-              </a:rPr>
-              <a:t>0</a:t>
-            </a:r>
-            <a:endParaRPr lang="en-US" sz="1300" dirty="0"/>
-          </a:p>
-        </p:txBody>
-      </p:sp>
-      <p:sp>
-        <p:nvSpPr>
-          <p:cNvPr id="10" name="Text 8"/>
-          <p:cNvSpPr txBox="1"/>
-          <p:nvPr/>
-        </p:nvSpPr>
-        <p:spPr>
-          <a:xfrm>
-            <a:off x="7818120" y="1965960"/>
-            <a:ext cx="822960" cy="274320"/>
-          </a:xfrm>
-          <a:prstGeom prst="rect">
-            <a:avLst/>
-          </a:prstGeom>
-          <a:noFill/>
-          <a:ln/>
-        </p:spPr>
-        <p:txBody>
-          <a:bodyPr wrap="square" lIns="0" tIns="0" rIns="0" bIns="0" rtlCol="0" anchor="t"/>
-          <a:lstStyle/>
-          <a:p>
-            <a:pPr algn="ctr" indent="0" marL="0">
-              <a:buNone/>
-            </a:pPr>
-            <a:r>
-              <a:rPr lang="en-US" sz="1300" dirty="0">
-                <a:solidFill>
-                  <a:srgbClr val="777777"/>
-                </a:solidFill>
-                <a:latin typeface="Arial" pitchFamily="34" charset="0"/>
-                <a:ea typeface="Arial" pitchFamily="34" charset="-122"/>
-                <a:cs typeface="Arial" pitchFamily="34" charset="-120"/>
-              </a:rPr>
-              <a:t>+1000</a:t>
-            </a:r>
-            <a:endParaRPr lang="en-US" sz="1300" dirty="0"/>
-          </a:p>
-        </p:txBody>
-      </p:sp>
-      <p:sp>
-        <p:nvSpPr>
-          <p:cNvPr id="11" name="Text 9"/>
-          <p:cNvSpPr txBox="1"/>
-          <p:nvPr/>
-        </p:nvSpPr>
-        <p:spPr>
-          <a:xfrm>
-            <a:off x="2743200" y="2240280"/>
-            <a:ext cx="3657600" cy="274320"/>
-          </a:xfrm>
-          <a:prstGeom prst="rect">
-            <a:avLst/>
-          </a:prstGeom>
-          <a:noFill/>
-          <a:ln/>
-        </p:spPr>
-        <p:txBody>
-          <a:bodyPr wrap="square" lIns="0" tIns="0" rIns="0" bIns="0" rtlCol="0" anchor="t"/>
-          <a:lstStyle/>
-          <a:p>
-            <a:pPr algn="ctr" indent="0" marL="0">
-              <a:buNone/>
-            </a:pPr>
-            <a:r>
-              <a:rPr lang="en-US" sz="1300" dirty="0">
-                <a:solidFill>
-                  <a:srgbClr val="777777"/>
-                </a:solidFill>
-                <a:latin typeface="Arial" pitchFamily="34" charset="0"/>
-                <a:ea typeface="Arial" pitchFamily="34" charset="-122"/>
-                <a:cs typeface="Arial" pitchFamily="34" charset="-120"/>
-              </a:rPr>
-              <a:t>winner's final score (cp)</a:t>
-            </a:r>
-            <a:endParaRPr lang="en-US" sz="1300" dirty="0"/>
-          </a:p>
-        </p:txBody>
-      </p:sp>
-      <p:sp>
-        <p:nvSpPr>
-          <p:cNvPr id="12" name="formula"/>
-          <p:cNvSpPr/>
-          <p:nvPr/>
-        </p:nvSpPr>
-        <p:spPr>
-          <a:xfrm>
-            <a:off x="457200" y="2743200"/>
-            <a:ext cx="8229600" cy="640080"/>
-          </a:xfrm>
-          <a:prstGeom prst="roundRect">
-            <a:avLst>
-              <a:gd name="adj" fmla="val 8571"/>
-            </a:avLst>
-          </a:prstGeom>
-          <a:solidFill>
-            <a:srgbClr val="EBF3FA"/>
-          </a:solidFill>
-          <a:ln w="12700">
-            <a:solidFill>
-              <a:srgbClr val="2E75B6"/>
-            </a:solidFill>
-            <a:prstDash val="solid"/>
-          </a:ln>
-        </p:spPr>
-      </p:sp>
-      <p:sp>
-        <p:nvSpPr>
-          <p:cNvPr id="13" name="Text 11"/>
-          <p:cNvSpPr txBox="1"/>
-          <p:nvPr/>
-        </p:nvSpPr>
-        <p:spPr>
-          <a:xfrm>
-            <a:off x="640080" y="2743200"/>
-            <a:ext cx="7863840" cy="640080"/>
-          </a:xfrm>
-          <a:prstGeom prst="rect">
-            <a:avLst/>
-          </a:prstGeom>
-          <a:noFill/>
-          <a:ln/>
-        </p:spPr>
-        <p:txBody>
-          <a:bodyPr wrap="square" lIns="0" tIns="0" rIns="0" bIns="0" rtlCol="0" anchor="ctr"/>
-          <a:lstStyle/>
-          <a:p>
-            <a:pPr algn="ctr" indent="0" marL="0">
-              <a:buNone/>
-            </a:pPr>
-            <a:r>
-              <a:rPr lang="en-US" sz="1700" b="1" dirty="0">
-                <a:solidFill>
-                  <a:srgbClr val="1F4E79"/>
-                </a:solidFill>
-                <a:latin typeface="Arial" pitchFamily="34" charset="0"/>
-                <a:ea typeface="Arial" pitchFamily="34" charset="-122"/>
-                <a:cs typeface="Arial" pitchFamily="34" charset="-120"/>
-              </a:rPr>
-              <a:t>lucky  if  S_final &lt; −100 cp     (S_final = engine score from the winner's side)</a:t>
-            </a:r>
-            <a:endParaRPr lang="en-US" sz="1700" dirty="0"/>
-          </a:p>
-        </p:txBody>
-      </p:sp>
-      <p:sp>
-        <p:nvSpPr>
-          <p:cNvPr id="14" name="Text 12"/>
-          <p:cNvSpPr txBox="1"/>
-          <p:nvPr/>
-        </p:nvSpPr>
-        <p:spPr>
-          <a:xfrm>
-            <a:off x="457200" y="3566160"/>
-            <a:ext cx="8229600" cy="731520"/>
-          </a:xfrm>
-          <a:prstGeom prst="rect">
-            <a:avLst/>
-          </a:prstGeom>
-          <a:noFill/>
-          <a:ln/>
-        </p:spPr>
-        <p:txBody>
-          <a:bodyPr wrap="square" lIns="0" tIns="0" rIns="0" bIns="0" rtlCol="0" anchor="t"/>
-          <a:lstStyle/>
-          <a:p>
-            <a:pPr indent="0" marL="0">
-              <a:buNone/>
-            </a:pPr>
-            <a:r>
-              <a:rPr lang="en-US" sz="2000" dirty="0">
-                <a:solidFill>
-                  <a:schemeClr val="tx1"/>
-                </a:solidFill>
-                <a:latin typeface="Arial" pitchFamily="34" charset="0"/>
-                <a:ea typeface="Arial" pitchFamily="34" charset="-122"/>
-                <a:cs typeface="Arial" pitchFamily="34" charset="-120"/>
-              </a:rPr>
-              <a:t>Losing by more than a pawn when the clock ran out. Forced mates count as ±1000.</a:t>
+              <a:t>Game A only tells us which group the pair is in</a:t>
             </a:r>
             <a:endParaRPr lang="en-US" sz="2000" dirty="0"/>
           </a:p>
@@ -14359,6 +14343,545 @@
                   <a:schemeClr val="tx2"/>
                 </a:solidFill>
               </a:rPr>
+              <a:t>The computer's score at the end of game A decides whether the win was lucky</a:t>
+            </a:r>
+            <a:endParaRPr lang="en-US" sz="2600" dirty="0"/>
+          </a:p>
+        </p:txBody>
+      </p:sp>
+      <p:sp>
+        <p:nvSpPr>
+          <p:cNvPr id="3" name="lucky zone"/>
+          <p:cNvSpPr/>
+          <p:nvPr/>
+        </p:nvSpPr>
+        <p:spPr>
+          <a:xfrm>
+            <a:off x="914400" y="1417320"/>
+            <a:ext cx="3291840" cy="502920"/>
+          </a:xfrm>
+          <a:prstGeom prst="rect">
+            <a:avLst/>
+          </a:prstGeom>
+          <a:solidFill>
+            <a:srgbClr val="FFF2CC"/>
+          </a:solidFill>
+          <a:ln w="12700">
+            <a:solidFill>
+              <a:srgbClr val="C27C0E"/>
+            </a:solidFill>
+            <a:prstDash val="solid"/>
+          </a:ln>
+        </p:spPr>
+      </p:sp>
+      <p:sp>
+        <p:nvSpPr>
+          <p:cNvPr id="4" name="deserved zone"/>
+          <p:cNvSpPr/>
+          <p:nvPr/>
+        </p:nvSpPr>
+        <p:spPr>
+          <a:xfrm>
+            <a:off x="4206240" y="1417320"/>
+            <a:ext cx="4023360" cy="502920"/>
+          </a:xfrm>
+          <a:prstGeom prst="rect">
+            <a:avLst/>
+          </a:prstGeom>
+          <a:solidFill>
+            <a:srgbClr val="EBF3FA"/>
+          </a:solidFill>
+          <a:ln w="12700">
+            <a:solidFill>
+              <a:srgbClr val="2E75B6"/>
+            </a:solidFill>
+            <a:prstDash val="solid"/>
+          </a:ln>
+        </p:spPr>
+      </p:sp>
+      <p:sp>
+        <p:nvSpPr>
+          <p:cNvPr id="5" name="Text 3"/>
+          <p:cNvSpPr txBox="1"/>
+          <p:nvPr/>
+        </p:nvSpPr>
+        <p:spPr>
+          <a:xfrm>
+            <a:off x="914400" y="1417320"/>
+            <a:ext cx="3291840" cy="502920"/>
+          </a:xfrm>
+          <a:prstGeom prst="rect">
+            <a:avLst/>
+          </a:prstGeom>
+          <a:noFill/>
+          <a:ln/>
+        </p:spPr>
+        <p:txBody>
+          <a:bodyPr wrap="square" lIns="0" tIns="0" rIns="0" bIns="0" rtlCol="0" anchor="ctr"/>
+          <a:lstStyle/>
+          <a:p>
+            <a:pPr algn="ctr" indent="0" marL="0">
+              <a:buNone/>
+            </a:pPr>
+            <a:r>
+              <a:rPr lang="en-US" sz="1600" b="1" dirty="0">
+                <a:solidFill>
+                  <a:srgbClr val="C27C0E"/>
+                </a:solidFill>
+                <a:latin typeface="Arial" pitchFamily="34" charset="0"/>
+                <a:ea typeface="Arial" pitchFamily="34" charset="-122"/>
+                <a:cs typeface="Arial" pitchFamily="34" charset="-120"/>
+              </a:rPr>
+              <a:t>lucky</a:t>
+            </a:r>
+            <a:endParaRPr lang="en-US" sz="1600" dirty="0"/>
+          </a:p>
+        </p:txBody>
+      </p:sp>
+      <p:sp>
+        <p:nvSpPr>
+          <p:cNvPr id="6" name="Text 4"/>
+          <p:cNvSpPr txBox="1"/>
+          <p:nvPr/>
+        </p:nvSpPr>
+        <p:spPr>
+          <a:xfrm>
+            <a:off x="4206240" y="1417320"/>
+            <a:ext cx="4023360" cy="502920"/>
+          </a:xfrm>
+          <a:prstGeom prst="rect">
+            <a:avLst/>
+          </a:prstGeom>
+          <a:noFill/>
+          <a:ln/>
+        </p:spPr>
+        <p:txBody>
+          <a:bodyPr wrap="square" lIns="0" tIns="0" rIns="0" bIns="0" rtlCol="0" anchor="ctr"/>
+          <a:lstStyle/>
+          <a:p>
+            <a:pPr algn="ctr" indent="0" marL="0">
+              <a:buNone/>
+            </a:pPr>
+            <a:r>
+              <a:rPr lang="en-US" sz="1600" b="1" dirty="0">
+                <a:solidFill>
+                  <a:srgbClr val="1F4E79"/>
+                </a:solidFill>
+                <a:latin typeface="Arial" pitchFamily="34" charset="0"/>
+                <a:ea typeface="Arial" pitchFamily="34" charset="-122"/>
+                <a:cs typeface="Arial" pitchFamily="34" charset="-120"/>
+              </a:rPr>
+              <a:t>deserved</a:t>
+            </a:r>
+            <a:endParaRPr lang="en-US" sz="1600" dirty="0"/>
+          </a:p>
+        </p:txBody>
+      </p:sp>
+      <p:sp>
+        <p:nvSpPr>
+          <p:cNvPr id="7" name="Text 5"/>
+          <p:cNvSpPr txBox="1"/>
+          <p:nvPr/>
+        </p:nvSpPr>
+        <p:spPr>
+          <a:xfrm>
+            <a:off x="502920" y="1965960"/>
+            <a:ext cx="822960" cy="274320"/>
+          </a:xfrm>
+          <a:prstGeom prst="rect">
+            <a:avLst/>
+          </a:prstGeom>
+          <a:noFill/>
+          <a:ln/>
+        </p:spPr>
+        <p:txBody>
+          <a:bodyPr wrap="square" lIns="0" tIns="0" rIns="0" bIns="0" rtlCol="0" anchor="t"/>
+          <a:lstStyle/>
+          <a:p>
+            <a:pPr algn="ctr" indent="0" marL="0">
+              <a:buNone/>
+            </a:pPr>
+            <a:r>
+              <a:rPr lang="en-US" sz="1300" dirty="0">
+                <a:solidFill>
+                  <a:srgbClr val="777777"/>
+                </a:solidFill>
+                <a:latin typeface="Arial" pitchFamily="34" charset="0"/>
+                <a:ea typeface="Arial" pitchFamily="34" charset="-122"/>
+                <a:cs typeface="Arial" pitchFamily="34" charset="-120"/>
+              </a:rPr>
+              <a:t>-1000</a:t>
+            </a:r>
+            <a:endParaRPr lang="en-US" sz="1300" dirty="0"/>
+          </a:p>
+        </p:txBody>
+      </p:sp>
+      <p:sp>
+        <p:nvSpPr>
+          <p:cNvPr id="8" name="Text 6"/>
+          <p:cNvSpPr txBox="1"/>
+          <p:nvPr/>
+        </p:nvSpPr>
+        <p:spPr>
+          <a:xfrm>
+            <a:off x="3794760" y="1965960"/>
+            <a:ext cx="822960" cy="274320"/>
+          </a:xfrm>
+          <a:prstGeom prst="rect">
+            <a:avLst/>
+          </a:prstGeom>
+          <a:noFill/>
+          <a:ln/>
+        </p:spPr>
+        <p:txBody>
+          <a:bodyPr wrap="square" lIns="0" tIns="0" rIns="0" bIns="0" rtlCol="0" anchor="t"/>
+          <a:lstStyle/>
+          <a:p>
+            <a:pPr algn="ctr" indent="0" marL="0">
+              <a:buNone/>
+            </a:pPr>
+            <a:r>
+              <a:rPr lang="en-US" sz="1300" dirty="0">
+                <a:solidFill>
+                  <a:srgbClr val="777777"/>
+                </a:solidFill>
+                <a:latin typeface="Arial" pitchFamily="34" charset="0"/>
+                <a:ea typeface="Arial" pitchFamily="34" charset="-122"/>
+                <a:cs typeface="Arial" pitchFamily="34" charset="-120"/>
+              </a:rPr>
+              <a:t>-100</a:t>
+            </a:r>
+            <a:endParaRPr lang="en-US" sz="1300" dirty="0"/>
+          </a:p>
+        </p:txBody>
+      </p:sp>
+      <p:sp>
+        <p:nvSpPr>
+          <p:cNvPr id="9" name="Text 7"/>
+          <p:cNvSpPr txBox="1"/>
+          <p:nvPr/>
+        </p:nvSpPr>
+        <p:spPr>
+          <a:xfrm>
+            <a:off x="4160520" y="1965960"/>
+            <a:ext cx="822960" cy="274320"/>
+          </a:xfrm>
+          <a:prstGeom prst="rect">
+            <a:avLst/>
+          </a:prstGeom>
+          <a:noFill/>
+          <a:ln/>
+        </p:spPr>
+        <p:txBody>
+          <a:bodyPr wrap="square" lIns="0" tIns="0" rIns="0" bIns="0" rtlCol="0" anchor="t"/>
+          <a:lstStyle/>
+          <a:p>
+            <a:pPr algn="ctr" indent="0" marL="0">
+              <a:buNone/>
+            </a:pPr>
+            <a:r>
+              <a:rPr lang="en-US" sz="1300" dirty="0">
+                <a:solidFill>
+                  <a:srgbClr val="777777"/>
+                </a:solidFill>
+                <a:latin typeface="Arial" pitchFamily="34" charset="0"/>
+                <a:ea typeface="Arial" pitchFamily="34" charset="-122"/>
+                <a:cs typeface="Arial" pitchFamily="34" charset="-120"/>
+              </a:rPr>
+              <a:t>0</a:t>
+            </a:r>
+            <a:endParaRPr lang="en-US" sz="1300" dirty="0"/>
+          </a:p>
+        </p:txBody>
+      </p:sp>
+      <p:sp>
+        <p:nvSpPr>
+          <p:cNvPr id="10" name="Text 8"/>
+          <p:cNvSpPr txBox="1"/>
+          <p:nvPr/>
+        </p:nvSpPr>
+        <p:spPr>
+          <a:xfrm>
+            <a:off x="7818120" y="1965960"/>
+            <a:ext cx="822960" cy="274320"/>
+          </a:xfrm>
+          <a:prstGeom prst="rect">
+            <a:avLst/>
+          </a:prstGeom>
+          <a:noFill/>
+          <a:ln/>
+        </p:spPr>
+        <p:txBody>
+          <a:bodyPr wrap="square" lIns="0" tIns="0" rIns="0" bIns="0" rtlCol="0" anchor="t"/>
+          <a:lstStyle/>
+          <a:p>
+            <a:pPr algn="ctr" indent="0" marL="0">
+              <a:buNone/>
+            </a:pPr>
+            <a:r>
+              <a:rPr lang="en-US" sz="1300" dirty="0">
+                <a:solidFill>
+                  <a:srgbClr val="777777"/>
+                </a:solidFill>
+                <a:latin typeface="Arial" pitchFamily="34" charset="0"/>
+                <a:ea typeface="Arial" pitchFamily="34" charset="-122"/>
+                <a:cs typeface="Arial" pitchFamily="34" charset="-120"/>
+              </a:rPr>
+              <a:t>+1000</a:t>
+            </a:r>
+            <a:endParaRPr lang="en-US" sz="1300" dirty="0"/>
+          </a:p>
+        </p:txBody>
+      </p:sp>
+      <p:sp>
+        <p:nvSpPr>
+          <p:cNvPr id="11" name="Text 9"/>
+          <p:cNvSpPr txBox="1"/>
+          <p:nvPr/>
+        </p:nvSpPr>
+        <p:spPr>
+          <a:xfrm>
+            <a:off x="2743200" y="2240280"/>
+            <a:ext cx="3657600" cy="274320"/>
+          </a:xfrm>
+          <a:prstGeom prst="rect">
+            <a:avLst/>
+          </a:prstGeom>
+          <a:noFill/>
+          <a:ln/>
+        </p:spPr>
+        <p:txBody>
+          <a:bodyPr wrap="square" lIns="0" tIns="0" rIns="0" bIns="0" rtlCol="0" anchor="t"/>
+          <a:lstStyle/>
+          <a:p>
+            <a:pPr algn="ctr" indent="0" marL="0">
+              <a:buNone/>
+            </a:pPr>
+            <a:r>
+              <a:rPr lang="en-US" sz="1300" dirty="0">
+                <a:solidFill>
+                  <a:srgbClr val="777777"/>
+                </a:solidFill>
+                <a:latin typeface="Arial" pitchFamily="34" charset="0"/>
+                <a:ea typeface="Arial" pitchFamily="34" charset="-122"/>
+                <a:cs typeface="Arial" pitchFamily="34" charset="-120"/>
+              </a:rPr>
+              <a:t>winner's final score (cp)</a:t>
+            </a:r>
+            <a:endParaRPr lang="en-US" sz="1300" dirty="0"/>
+          </a:p>
+        </p:txBody>
+      </p:sp>
+      <p:sp>
+        <p:nvSpPr>
+          <p:cNvPr id="12" name="formula"/>
+          <p:cNvSpPr/>
+          <p:nvPr/>
+        </p:nvSpPr>
+        <p:spPr>
+          <a:xfrm>
+            <a:off x="457200" y="2743200"/>
+            <a:ext cx="8229600" cy="640080"/>
+          </a:xfrm>
+          <a:prstGeom prst="roundRect">
+            <a:avLst>
+              <a:gd name="adj" fmla="val 8571"/>
+            </a:avLst>
+          </a:prstGeom>
+          <a:solidFill>
+            <a:srgbClr val="EBF3FA"/>
+          </a:solidFill>
+          <a:ln w="12700">
+            <a:solidFill>
+              <a:srgbClr val="2E75B6"/>
+            </a:solidFill>
+            <a:prstDash val="solid"/>
+          </a:ln>
+        </p:spPr>
+      </p:sp>
+      <p:sp>
+        <p:nvSpPr>
+          <p:cNvPr id="13" name="Text 11"/>
+          <p:cNvSpPr txBox="1"/>
+          <p:nvPr/>
+        </p:nvSpPr>
+        <p:spPr>
+          <a:xfrm>
+            <a:off x="640080" y="2743200"/>
+            <a:ext cx="7863840" cy="640080"/>
+          </a:xfrm>
+          <a:prstGeom prst="rect">
+            <a:avLst/>
+          </a:prstGeom>
+          <a:noFill/>
+          <a:ln/>
+        </p:spPr>
+        <p:txBody>
+          <a:bodyPr wrap="square" lIns="0" tIns="0" rIns="0" bIns="0" rtlCol="0" anchor="ctr"/>
+          <a:lstStyle/>
+          <a:p>
+            <a:pPr algn="ctr" indent="0" marL="0">
+              <a:buNone/>
+            </a:pPr>
+            <a:r>
+              <a:rPr lang="en-US" sz="1700" b="1" dirty="0">
+                <a:solidFill>
+                  <a:srgbClr val="1F4E79"/>
+                </a:solidFill>
+                <a:latin typeface="Arial" pitchFamily="34" charset="0"/>
+                <a:ea typeface="Arial" pitchFamily="34" charset="-122"/>
+                <a:cs typeface="Arial" pitchFamily="34" charset="-120"/>
+              </a:rPr>
+              <a:t>lucky  if  S_final &lt; −100 cp     (S_final = engine score from the winner's side)</a:t>
+            </a:r>
+            <a:endParaRPr lang="en-US" sz="1700" dirty="0"/>
+          </a:p>
+        </p:txBody>
+      </p:sp>
+      <p:sp>
+        <p:nvSpPr>
+          <p:cNvPr id="14" name="Text 12"/>
+          <p:cNvSpPr txBox="1"/>
+          <p:nvPr/>
+        </p:nvSpPr>
+        <p:spPr>
+          <a:xfrm>
+            <a:off x="457200" y="3566160"/>
+            <a:ext cx="8229600" cy="731520"/>
+          </a:xfrm>
+          <a:prstGeom prst="rect">
+            <a:avLst/>
+          </a:prstGeom>
+          <a:noFill/>
+          <a:ln/>
+        </p:spPr>
+        <p:txBody>
+          <a:bodyPr wrap="square" lIns="0" tIns="0" rIns="0" bIns="0" rtlCol="0" anchor="t"/>
+          <a:lstStyle/>
+          <a:p>
+            <a:pPr indent="0" marL="0">
+              <a:buNone/>
+            </a:pPr>
+            <a:r>
+              <a:rPr lang="en-US" sz="2000" dirty="0">
+                <a:solidFill>
+                  <a:schemeClr val="tx1"/>
+                </a:solidFill>
+                <a:latin typeface="Arial" pitchFamily="34" charset="0"/>
+                <a:ea typeface="Arial" pitchFamily="34" charset="-122"/>
+                <a:cs typeface="Arial" pitchFamily="34" charset="-120"/>
+              </a:rPr>
+              <a:t>Losing by more than a pawn when the clock ran out. Forced mates count as ±1000.</a:t>
+            </a:r>
+            <a:endParaRPr lang="en-US" sz="2000" dirty="0"/>
+          </a:p>
+        </p:txBody>
+      </p:sp>
+      <p:sp>
+        <p:nvSpPr>
+          <p:cNvPr id="25" name="Slide Number Placeholder 0"/>
+          <p:cNvSpPr>
+            <a:spLocks noGrp="1"/>
+          </p:cNvSpPr>
+          <p:nvPr>
+            <p:ph type="sldNum" sz="quarter" idx="4294967295"/>
+          </p:nvPr>
+        </p:nvSpPr>
+        <p:spPr>
+          <a:xfrm>
+            <a:off x="8321040" y="4754880"/>
+            <a:ext cx="457200" cy="274320"/>
+          </a:xfrm>
+          <a:prstGeom prst="rect">
+            <a:avLst/>
+          </a:prstGeom>
+          <a:extLst>
+            <a:ext uri="{C572A759-6A51-4108-AA02-DFA0A04FC94B}">
+              <ma14:wrappingTextBoxFlag xmlns:ma14="http://schemas.microsoft.com/office/mac/drawingml/2011/main" val="0"/>
+            </a:ext>
+          </a:extLst>
+        </p:spPr>
+        <p:txBody>
+          <a:bodyPr/>
+          <a:lstStyle>
+            <a:lvl1pPr>
+              <a:defRPr sz="1100">
+                <a:solidFill>
+                  <a:srgbClr val="777777"/>
+                </a:solidFill>
+                <a:latin typeface="Arial"/>
+                <a:ea typeface="Arial"/>
+                <a:cs typeface="Arial"/>
+              </a:defRPr>
+            </a:lvl1pPr>
+          </a:lstStyle>
+          <a:p>
+            <a:pPr algn="l"/>
+            <a:fld id="{F7021451-1387-4CA6-816F-3879F97B5CBC}" type="slidenum">
+              <a:rPr b="0" lang="en-US"/>
+              <a:t>25</a:t>
+            </a:fld>
+            <a:endParaRPr lang="en-US"/>
+          </a:p>
+        </p:txBody>
+      </p:sp>
+    </p:spTree>
+  </p:cSld>
+  <p:clrMapOvr>
+    <a:masterClrMapping/>
+  </p:clrMapOvr>
+</p:sld>
+</file>
+
+<file path=ppt/slides/slide26.xml><?xml version="1.0" encoding="utf-8"?>
+<p:sld xmlns:a="http://schemas.openxmlformats.org/drawingml/2006/main" xmlns:r="http://schemas.openxmlformats.org/officeDocument/2006/relationships" xmlns:p="http://schemas.openxmlformats.org/presentationml/2006/main">
+  <p:cSld name="Slide 26">
+    <p:spTree>
+      <p:nvGrpSpPr>
+        <p:cNvPr id="1" name=""/>
+        <p:cNvGrpSpPr/>
+        <p:nvPr/>
+      </p:nvGrpSpPr>
+      <p:grpSpPr>
+        <a:xfrm>
+          <a:off x="0" y="0"/>
+          <a:ext cx="0" cy="0"/>
+          <a:chOff x="0" y="0"/>
+          <a:chExt cx="0" cy="0"/>
+        </a:xfrm>
+      </p:grpSpPr>
+      <p:sp>
+        <p:nvSpPr>
+          <p:cNvPr id="2" name="Text 0"/>
+          <p:cNvSpPr/>
+          <p:nvPr>
+            <p:ph idx="100" type="title" hasCustomPrompt="1"/>
+          </p:nvPr>
+        </p:nvSpPr>
+        <p:spPr>
+          <a:xfrm>
+            <a:off x="457200" y="228600"/>
+            <a:ext cx="8229600" cy="822960"/>
+          </a:xfrm>
+          <a:prstGeom prst="rect">
+            <a:avLst/>
+          </a:prstGeom>
+          <a:noFill/>
+          <a:ln/>
+        </p:spPr>
+        <p:txBody>
+          <a:bodyPr wrap="square" lIns="0" tIns="0" rIns="0" bIns="0" rtlCol="0" anchor="t"/>
+          <a:lstStyle/>
+          <a:p>
+            <a:pPr algn="l" indent="0" marL="0">
+              <a:buNone/>
+            </a:pPr>
+            <a:r>
+              <a:rPr lang="en-US" sz="2600" b="1" dirty="0">
+                <a:solidFill>
+                  <a:schemeClr val="tx2"/>
+                </a:solidFill>
+              </a:rPr>
               <a:t>Each lucky win is compared with a deserved win from the same rating band and game speed</a:t>
             </a:r>
             <a:endParaRPr lang="en-US" sz="2600" dirty="0"/>
@@ -14367,7 +14890,7 @@
       </p:sp>
       <p:graphicFrame>
         <p:nvGraphicFramePr>
-          <p:cNvPr id="26" name="Table 0"/>
+          <p:cNvPr id="27" name="Table 0"/>
           <p:cNvGraphicFramePr>
             <a:graphicFrameLocks noGrp="1"/>
           </p:cNvGraphicFramePr>
@@ -15839,7 +16362,7 @@
             <a:pPr algn="l"/>
             <a:fld id="{F7021451-1387-4CA6-816F-3879F97B5CBC}" type="slidenum">
               <a:rPr b="0" lang="en-US"/>
-              <a:t>25</a:t>
+              <a:t>26</a:t>
             </a:fld>
             <a:endParaRPr lang="en-US"/>
           </a:p>
@@ -15853,9 +16376,9 @@
 </p:sld>
 </file>
 
-<file path=ppt/slides/slide26.xml><?xml version="1.0" encoding="utf-8"?>
+<file path=ppt/slides/slide27.xml><?xml version="1.0" encoding="utf-8"?>
 <p:sld xmlns:a="http://schemas.openxmlformats.org/drawingml/2006/main" xmlns:r="http://schemas.openxmlformats.org/officeDocument/2006/relationships" xmlns:p="http://schemas.openxmlformats.org/presentationml/2006/main">
-  <p:cSld name="Slide 26">
+  <p:cSld name="Slide 27">
     <p:spTree>
       <p:nvGrpSpPr>
         <p:cNvPr id="1" name=""/>
@@ -15910,7 +16433,7 @@
       </p:sp>
       <p:graphicFrame>
         <p:nvGraphicFramePr>
-          <p:cNvPr id="27" name="Table 0"/>
+          <p:cNvPr id="28" name="Table 0"/>
           <p:cNvGraphicFramePr>
             <a:graphicFrameLocks noGrp="1"/>
           </p:cNvGraphicFramePr>
@@ -16683,7 +17206,7 @@
                           <a:ea typeface="Arial" pitchFamily="34" charset="-122"/>
                           <a:cs typeface="Arial" pitchFamily="34" charset="-120"/>
                         </a:rPr>
-                        <a:t>Skips prepared openings, saves computer time (next slide)</a:t>
+                        <a:t>Skips prepared openings, saves computer time (see Part 2)</a:t>
                       </a:r>
                       <a:endParaRPr lang="en-US" sz="1500" dirty="0">
                         <a:latin typeface="Arial" charset="0"/>
@@ -17164,529 +17687,6 @@
                 <a:cs typeface="Arial" pitchFamily="34" charset="-120"/>
               </a:rPr>
               <a:t>42,851 next games scored; two separate runs on the same games gave identical numbers in study 1</a:t>
-            </a:r>
-            <a:endParaRPr lang="en-US" sz="1200" dirty="0"/>
-          </a:p>
-        </p:txBody>
-      </p:sp>
-      <p:sp>
-        <p:nvSpPr>
-          <p:cNvPr id="25" name="Slide Number Placeholder 0"/>
-          <p:cNvSpPr>
-            <a:spLocks noGrp="1"/>
-          </p:cNvSpPr>
-          <p:nvPr>
-            <p:ph type="sldNum" sz="quarter" idx="4294967295"/>
-          </p:nvPr>
-        </p:nvSpPr>
-        <p:spPr>
-          <a:xfrm>
-            <a:off x="8321040" y="4754880"/>
-            <a:ext cx="457200" cy="274320"/>
-          </a:xfrm>
-          <a:prstGeom prst="rect">
-            <a:avLst/>
-          </a:prstGeom>
-          <a:extLst>
-            <a:ext uri="{C572A759-6A51-4108-AA02-DFA0A04FC94B}">
-              <ma14:wrappingTextBoxFlag xmlns:ma14="http://schemas.microsoft.com/office/mac/drawingml/2011/main" val="0"/>
-            </a:ext>
-          </a:extLst>
-        </p:spPr>
-        <p:txBody>
-          <a:bodyPr/>
-          <a:lstStyle>
-            <a:lvl1pPr>
-              <a:defRPr sz="1100">
-                <a:solidFill>
-                  <a:srgbClr val="777777"/>
-                </a:solidFill>
-                <a:latin typeface="Arial"/>
-                <a:ea typeface="Arial"/>
-                <a:cs typeface="Arial"/>
-              </a:defRPr>
-            </a:lvl1pPr>
-          </a:lstStyle>
-          <a:p>
-            <a:pPr algn="l"/>
-            <a:fld id="{F7021451-1387-4CA6-816F-3879F97B5CBC}" type="slidenum">
-              <a:rPr b="0" lang="en-US"/>
-              <a:t>26</a:t>
-            </a:fld>
-            <a:endParaRPr lang="en-US"/>
-          </a:p>
-        </p:txBody>
-      </p:sp>
-    </p:spTree>
-  </p:cSld>
-  <p:clrMapOvr>
-    <a:masterClrMapping/>
-  </p:clrMapOvr>
-</p:sld>
-</file>
-
-<file path=ppt/slides/slide27.xml><?xml version="1.0" encoding="utf-8"?>
-<p:sld xmlns:a="http://schemas.openxmlformats.org/drawingml/2006/main" xmlns:r="http://schemas.openxmlformats.org/officeDocument/2006/relationships" xmlns:p="http://schemas.openxmlformats.org/presentationml/2006/main">
-  <p:cSld name="Slide 27">
-    <p:spTree>
-      <p:nvGrpSpPr>
-        <p:cNvPr id="1" name=""/>
-        <p:cNvGrpSpPr/>
-        <p:nvPr/>
-      </p:nvGrpSpPr>
-      <p:grpSpPr>
-        <a:xfrm>
-          <a:off x="0" y="0"/>
-          <a:ext cx="0" cy="0"/>
-          <a:chOff x="0" y="0"/>
-          <a:chExt cx="0" cy="0"/>
-        </a:xfrm>
-      </p:grpSpPr>
-      <p:sp>
-        <p:nvSpPr>
-          <p:cNvPr id="2" name="Text 0"/>
-          <p:cNvSpPr/>
-          <p:nvPr>
-            <p:ph idx="100" type="title" hasCustomPrompt="1"/>
-          </p:nvPr>
-        </p:nvSpPr>
-        <p:spPr>
-          <a:xfrm>
-            <a:off x="457200" y="228600"/>
-            <a:ext cx="8229600" cy="822960"/>
-          </a:xfrm>
-          <a:prstGeom prst="rect">
-            <a:avLst/>
-          </a:prstGeom>
-          <a:noFill/>
-          <a:ln/>
-        </p:spPr>
-        <p:txBody>
-          <a:bodyPr wrap="square" lIns="0" tIns="0" rIns="0" bIns="0" rtlCol="0" anchor="t"/>
-          <a:lstStyle/>
-          <a:p>
-            <a:pPr algn="l" indent="0" marL="0">
-              <a:buNone/>
-            </a:pPr>
-            <a:r>
-              <a:rPr lang="en-US" sz="2600" b="1" dirty="0">
-                <a:solidFill>
-                  <a:schemeClr val="tx2"/>
-                </a:solidFill>
-              </a:rPr>
-              <a:t>Why only moves 15 to 30: Backus et al. gave two reasons, following Guid and Bratko</a:t>
-            </a:r>
-            <a:endParaRPr lang="en-US" sz="2600" dirty="0"/>
-          </a:p>
-        </p:txBody>
-      </p:sp>
-      <p:sp>
-        <p:nvSpPr>
-          <p:cNvPr id="3" name="quote"/>
-          <p:cNvSpPr/>
-          <p:nvPr/>
-        </p:nvSpPr>
-        <p:spPr>
-          <a:xfrm>
-            <a:off x="457200" y="1115568"/>
-            <a:ext cx="8229600" cy="1097280"/>
-          </a:xfrm>
-          <a:prstGeom prst="roundRect">
-            <a:avLst>
-              <a:gd name="adj" fmla="val 5000"/>
-            </a:avLst>
-          </a:prstGeom>
-          <a:solidFill>
-            <a:srgbClr val="EBF3FA"/>
-          </a:solidFill>
-          <a:ln w="12700">
-            <a:solidFill>
-              <a:srgbClr val="2E75B6"/>
-            </a:solidFill>
-            <a:prstDash val="solid"/>
-          </a:ln>
-        </p:spPr>
-      </p:sp>
-      <p:sp>
-        <p:nvSpPr>
-          <p:cNvPr id="4" name="Text 2"/>
-          <p:cNvSpPr txBox="1"/>
-          <p:nvPr/>
-        </p:nvSpPr>
-        <p:spPr>
-          <a:xfrm>
-            <a:off x="640080" y="1115568"/>
-            <a:ext cx="7863840" cy="1097280"/>
-          </a:xfrm>
-          <a:prstGeom prst="rect">
-            <a:avLst/>
-          </a:prstGeom>
-          <a:noFill/>
-          <a:ln/>
-        </p:spPr>
-        <p:txBody>
-          <a:bodyPr wrap="square" lIns="0" tIns="0" rIns="0" bIns="0" rtlCol="0" anchor="ctr"/>
-          <a:lstStyle/>
-          <a:p>
-            <a:pPr indent="0" marL="0">
-              <a:buNone/>
-            </a:pPr>
-            <a:r>
-              <a:rPr lang="en-US" sz="1500" i="1" dirty="0">
-                <a:solidFill>
-                  <a:srgbClr val="1F4E79"/>
-                </a:solidFill>
-                <a:latin typeface="Arial" pitchFamily="34" charset="0"/>
-                <a:ea typeface="Arial" pitchFamily="34" charset="-122"/>
-                <a:cs typeface="Arial" pitchFamily="34" charset="-120"/>
-              </a:rPr>
-              <a:t>“We consider this subset of moves for two reasons. First, to limit the substantial computational burden … Second, because we want to focus on the middle game, which is least likely to follow an established plan …”</a:t>
-            </a:r>
-            <a:endParaRPr lang="en-US" sz="1500" dirty="0"/>
-          </a:p>
-          <a:p>
-            <a:pPr indent="0" marL="0">
-              <a:buNone/>
-            </a:pPr>
-            <a:r>
-              <a:rPr lang="en-US" sz="1300" dirty="0">
-                <a:solidFill>
-                  <a:srgbClr val="777777"/>
-                </a:solidFill>
-                <a:latin typeface="Arial" pitchFamily="34" charset="0"/>
-                <a:ea typeface="Arial" pitchFamily="34" charset="-122"/>
-                <a:cs typeface="Arial" pitchFamily="34" charset="-120"/>
-              </a:rPr>
-              <a:t>Backus et al. (2023), p. 359</a:t>
-            </a:r>
-            <a:endParaRPr lang="en-US" sz="1500" dirty="0"/>
-          </a:p>
-        </p:txBody>
-      </p:sp>
-      <p:sp>
-        <p:nvSpPr>
-          <p:cNvPr id="5" name="1. Computer time"/>
-          <p:cNvSpPr/>
-          <p:nvPr/>
-        </p:nvSpPr>
-        <p:spPr>
-          <a:xfrm>
-            <a:off x="457200" y="2377440"/>
-            <a:ext cx="3977640" cy="1234440"/>
-          </a:xfrm>
-          <a:prstGeom prst="roundRect">
-            <a:avLst>
-              <a:gd name="adj" fmla="val 4444"/>
-            </a:avLst>
-          </a:prstGeom>
-          <a:solidFill>
-            <a:srgbClr val="FFFFFF"/>
-          </a:solidFill>
-          <a:ln w="12700">
-            <a:solidFill>
-              <a:srgbClr val="2E75B6"/>
-            </a:solidFill>
-            <a:prstDash val="solid"/>
-          </a:ln>
-        </p:spPr>
-      </p:sp>
-      <p:sp>
-        <p:nvSpPr>
-          <p:cNvPr id="6" name="Text 4"/>
-          <p:cNvSpPr txBox="1"/>
-          <p:nvPr/>
-        </p:nvSpPr>
-        <p:spPr>
-          <a:xfrm>
-            <a:off x="640080" y="2450592"/>
-            <a:ext cx="3611880" cy="320040"/>
-          </a:xfrm>
-          <a:prstGeom prst="rect">
-            <a:avLst/>
-          </a:prstGeom>
-          <a:noFill/>
-          <a:ln/>
-        </p:spPr>
-        <p:txBody>
-          <a:bodyPr wrap="square" lIns="0" tIns="0" rIns="0" bIns="0" rtlCol="0" anchor="t"/>
-          <a:lstStyle/>
-          <a:p>
-            <a:pPr indent="0" marL="0">
-              <a:buNone/>
-            </a:pPr>
-            <a:r>
-              <a:rPr lang="en-US" sz="1600" b="1" dirty="0">
-                <a:solidFill>
-                  <a:srgbClr val="2E75B6"/>
-                </a:solidFill>
-                <a:latin typeface="Arial" pitchFamily="34" charset="0"/>
-                <a:ea typeface="Arial" pitchFamily="34" charset="-122"/>
-                <a:cs typeface="Arial" pitchFamily="34" charset="-120"/>
-              </a:rPr>
-              <a:t>1. Computer time</a:t>
-            </a:r>
-            <a:endParaRPr lang="en-US" sz="1600" dirty="0"/>
-          </a:p>
-        </p:txBody>
-      </p:sp>
-      <p:sp>
-        <p:nvSpPr>
-          <p:cNvPr id="7" name="Text 5"/>
-          <p:cNvSpPr txBox="1"/>
-          <p:nvPr/>
-        </p:nvSpPr>
-        <p:spPr>
-          <a:xfrm>
-            <a:off x="640080" y="2788920"/>
-            <a:ext cx="3611880" cy="777240"/>
-          </a:xfrm>
-          <a:prstGeom prst="rect">
-            <a:avLst/>
-          </a:prstGeom>
-          <a:noFill/>
-          <a:ln/>
-        </p:spPr>
-        <p:txBody>
-          <a:bodyPr wrap="square" lIns="0" tIns="0" rIns="0" bIns="0" rtlCol="0" anchor="t"/>
-          <a:lstStyle/>
-          <a:p>
-            <a:pPr indent="0" marL="0">
-              <a:buNone/>
-            </a:pPr>
-            <a:r>
-              <a:rPr lang="en-US" sz="1400" dirty="0">
-                <a:solidFill>
-                  <a:schemeClr val="tx1"/>
-                </a:solidFill>
-                <a:latin typeface="Arial" pitchFamily="34" charset="0"/>
-                <a:ea typeface="Arial" pitchFamily="34" charset="-122"/>
-                <a:cs typeface="Arial" pitchFamily="34" charset="-120"/>
-              </a:rPr>
-              <a:t>Their sample had about 1.5 million moves, and each extra step of search depth roughly doubles the computing time.</a:t>
-            </a:r>
-            <a:endParaRPr lang="en-US" sz="1400" dirty="0"/>
-          </a:p>
-        </p:txBody>
-      </p:sp>
-      <p:sp>
-        <p:nvSpPr>
-          <p:cNvPr id="8" name="2. Skip prepared play"/>
-          <p:cNvSpPr/>
-          <p:nvPr/>
-        </p:nvSpPr>
-        <p:spPr>
-          <a:xfrm>
-            <a:off x="4709160" y="2377440"/>
-            <a:ext cx="3977640" cy="1234440"/>
-          </a:xfrm>
-          <a:prstGeom prst="roundRect">
-            <a:avLst>
-              <a:gd name="adj" fmla="val 4444"/>
-            </a:avLst>
-          </a:prstGeom>
-          <a:solidFill>
-            <a:srgbClr val="FFFFFF"/>
-          </a:solidFill>
-          <a:ln w="12700">
-            <a:solidFill>
-              <a:srgbClr val="2E75B6"/>
-            </a:solidFill>
-            <a:prstDash val="solid"/>
-          </a:ln>
-        </p:spPr>
-      </p:sp>
-      <p:sp>
-        <p:nvSpPr>
-          <p:cNvPr id="9" name="Text 7"/>
-          <p:cNvSpPr txBox="1"/>
-          <p:nvPr/>
-        </p:nvSpPr>
-        <p:spPr>
-          <a:xfrm>
-            <a:off x="4892040" y="2450592"/>
-            <a:ext cx="3611880" cy="320040"/>
-          </a:xfrm>
-          <a:prstGeom prst="rect">
-            <a:avLst/>
-          </a:prstGeom>
-          <a:noFill/>
-          <a:ln/>
-        </p:spPr>
-        <p:txBody>
-          <a:bodyPr wrap="square" lIns="0" tIns="0" rIns="0" bIns="0" rtlCol="0" anchor="t"/>
-          <a:lstStyle/>
-          <a:p>
-            <a:pPr indent="0" marL="0">
-              <a:buNone/>
-            </a:pPr>
-            <a:r>
-              <a:rPr lang="en-US" sz="1600" b="1" dirty="0">
-                <a:solidFill>
-                  <a:srgbClr val="2E75B6"/>
-                </a:solidFill>
-                <a:latin typeface="Arial" pitchFamily="34" charset="0"/>
-                <a:ea typeface="Arial" pitchFamily="34" charset="-122"/>
-                <a:cs typeface="Arial" pitchFamily="34" charset="-120"/>
-              </a:rPr>
-              <a:t>2. Skip prepared play</a:t>
-            </a:r>
-            <a:endParaRPr lang="en-US" sz="1600" dirty="0"/>
-          </a:p>
-        </p:txBody>
-      </p:sp>
-      <p:sp>
-        <p:nvSpPr>
-          <p:cNvPr id="10" name="Text 8"/>
-          <p:cNvSpPr txBox="1"/>
-          <p:nvPr/>
-        </p:nvSpPr>
-        <p:spPr>
-          <a:xfrm>
-            <a:off x="4892040" y="2788920"/>
-            <a:ext cx="3611880" cy="777240"/>
-          </a:xfrm>
-          <a:prstGeom prst="rect">
-            <a:avLst/>
-          </a:prstGeom>
-          <a:noFill/>
-          <a:ln/>
-        </p:spPr>
-        <p:txBody>
-          <a:bodyPr wrap="square" lIns="0" tIns="0" rIns="0" bIns="0" rtlCol="0" anchor="t"/>
-          <a:lstStyle/>
-          <a:p>
-            <a:pPr indent="0" marL="0">
-              <a:buNone/>
-            </a:pPr>
-            <a:r>
-              <a:rPr lang="en-US" sz="1400" dirty="0">
-                <a:solidFill>
-                  <a:schemeClr val="tx1"/>
-                </a:solidFill>
-                <a:latin typeface="Arial" pitchFamily="34" charset="0"/>
-                <a:ea typeface="Arial" pitchFamily="34" charset="-122"/>
-                <a:cs typeface="Arial" pitchFamily="34" charset="-120"/>
-              </a:rPr>
-              <a:t>Strong players study openings and practise endgames in advance, so the middle game shows their own decisions best.</a:t>
-            </a:r>
-            <a:endParaRPr lang="en-US" sz="1400" dirty="0"/>
-          </a:p>
-        </p:txBody>
-      </p:sp>
-      <p:sp>
-        <p:nvSpPr>
-          <p:cNvPr id="11" name="our players"/>
-          <p:cNvSpPr/>
-          <p:nvPr/>
-        </p:nvSpPr>
-        <p:spPr>
-          <a:xfrm>
-            <a:off x="457200" y="3767328"/>
-            <a:ext cx="8229600" cy="841248"/>
-          </a:xfrm>
-          <a:prstGeom prst="roundRect">
-            <a:avLst>
-              <a:gd name="adj" fmla="val 6522"/>
-            </a:avLst>
-          </a:prstGeom>
-          <a:solidFill>
-            <a:srgbClr val="FFF2CC"/>
-          </a:solidFill>
-          <a:ln w="12700">
-            <a:solidFill>
-              <a:srgbClr val="C27C0E"/>
-            </a:solidFill>
-            <a:prstDash val="solid"/>
-          </a:ln>
-        </p:spPr>
-      </p:sp>
-      <p:sp>
-        <p:nvSpPr>
-          <p:cNvPr id="12" name="Text 10"/>
-          <p:cNvSpPr txBox="1"/>
-          <p:nvPr/>
-        </p:nvSpPr>
-        <p:spPr>
-          <a:xfrm>
-            <a:off x="594360" y="3767328"/>
-            <a:ext cx="7955280" cy="841248"/>
-          </a:xfrm>
-          <a:prstGeom prst="rect">
-            <a:avLst/>
-          </a:prstGeom>
-          <a:noFill/>
-          <a:ln/>
-        </p:spPr>
-        <p:txBody>
-          <a:bodyPr wrap="square" lIns="0" tIns="0" rIns="0" bIns="0" rtlCol="0" anchor="ctr"/>
-          <a:lstStyle/>
-          <a:p>
-            <a:pPr indent="0" marL="0">
-              <a:buNone/>
-            </a:pPr>
-            <a:r>
-              <a:rPr lang="en-US" sz="1400" b="1" dirty="0">
-                <a:solidFill>
-                  <a:srgbClr val="C27C0E"/>
-                </a:solidFill>
-                <a:latin typeface="Arial" pitchFamily="34" charset="0"/>
-                <a:ea typeface="Arial" pitchFamily="34" charset="-122"/>
-                <a:cs typeface="Arial" pitchFamily="34" charset="-120"/>
-              </a:rPr>
-              <a:t>For our players: </a:t>
-            </a:r>
-            <a:pPr indent="0" marL="0">
-              <a:buNone/>
-            </a:pPr>
-            <a:r>
-              <a:rPr lang="en-US" sz="1400" dirty="0">
-                <a:solidFill>
-                  <a:schemeClr val="tx1"/>
-                </a:solidFill>
-                <a:latin typeface="Arial" pitchFamily="34" charset="0"/>
-                <a:ea typeface="Arial" pitchFamily="34" charset="-122"/>
-                <a:cs typeface="Arial" pitchFamily="34" charset="-120"/>
-              </a:rPr>
-              <a:t>club players rated 1200 to 2000 probably memorise less, so here the window mainly skips habitual opening moves and keeps the computing manageable. It was fixed in the preregistration before any game was scored.</a:t>
-            </a:r>
-            <a:endParaRPr lang="en-US" sz="1400" dirty="0"/>
-          </a:p>
-        </p:txBody>
-      </p:sp>
-      <p:sp>
-        <p:nvSpPr>
-          <p:cNvPr id="13" name="Text 11"/>
-          <p:cNvSpPr txBox="1"/>
-          <p:nvPr/>
-        </p:nvSpPr>
-        <p:spPr>
-          <a:xfrm>
-            <a:off x="457200" y="4709160"/>
-            <a:ext cx="7680960" cy="274320"/>
-          </a:xfrm>
-          <a:prstGeom prst="rect">
-            <a:avLst/>
-          </a:prstGeom>
-          <a:noFill/>
-          <a:ln/>
-        </p:spPr>
-        <p:txBody>
-          <a:bodyPr wrap="square" lIns="0" tIns="0" rIns="0" bIns="0" rtlCol="0" anchor="ctr"/>
-          <a:lstStyle/>
-          <a:p>
-            <a:pPr indent="0" marL="0">
-              <a:buNone/>
-            </a:pPr>
-            <a:r>
-              <a:rPr lang="en-US" sz="1200" dirty="0">
-                <a:solidFill>
-                  <a:srgbClr val="777777"/>
-                </a:solidFill>
-                <a:latin typeface="Arial" pitchFamily="34" charset="0"/>
-                <a:ea typeface="Arial" pitchFamily="34" charset="-122"/>
-                <a:cs typeface="Arial" pitchFamily="34" charset="-120"/>
-              </a:rPr>
-              <a:t>Backus et al. (2023), Quantitative Economics 14(1), 349-380; window from Guid &amp; Bratko (2006, 2011)</a:t>
             </a:r>
             <a:endParaRPr lang="en-US" sz="1200" dirty="0"/>
           </a:p>

--- a/slides/study2-final.pptx
+++ b/slides/study2-final.pptx
@@ -148,12 +148,12 @@
   <p:extLst>
     <p:ext uri="{521415D9-36F7-43E2-AB2F-B90AF26B5E84}">
       <p14:sectionLst xmlns:p14="http://schemas.microsoft.com/office/powerpoint/2010/main">
-        <p14:section name="Introduction" id="{c7b899e5-c9f2-f6b0-d009-dc62bf0770cd}">
+        <p14:section name="Introduction" id="{b46a9ef9-1fc2-3693-986b-f98469625dc3}">
           <p14:sldIdLst>
             <p14:sldId id="256"/>
           </p14:sldIdLst>
         </p14:section>
-        <p14:section name="The basics, no chess needed" id="{659b28ab-cb93-1255-2e52-9bb194e00127}">
+        <p14:section name="The basics, no chess needed" id="{74b8d4a2-ff82-bfd6-a5e1-fbda6addc769}">
           <p14:sldIdLst>
             <p14:sldId id="257"/>
             <p14:sldId id="258"/>
@@ -164,7 +164,7 @@
             <p14:sldId id="263"/>
           </p14:sldIdLst>
         </p14:section>
-        <p14:section name="What other researchers have found" id="{9f8785a4-f1d7-9ba6-e0f9-4ca37db19e8d}">
+        <p14:section name="What other researchers have found" id="{c322651f-1d0e-9eca-87dc-8ad444a71b8d}">
           <p14:sldIdLst>
             <p14:sldId id="264"/>
             <p14:sldId id="265"/>
@@ -180,13 +180,13 @@
             <p14:sldId id="275"/>
           </p14:sldIdLst>
         </p14:section>
-        <p14:section name="The questions" id="{f4cf7a17-23ba-5323-94bd-fc3f37caa358}">
+        <p14:section name="The questions" id="{efa24fbd-4a3e-d483-6329-8ad71ffda923}">
           <p14:sldIdLst>
             <p14:sldId id="276"/>
             <p14:sldId id="277"/>
           </p14:sldIdLst>
         </p14:section>
-        <p14:section name="How it was measured" id="{60711247-aeb8-854d-841f-6910fbc1294d}">
+        <p14:section name="How it was measured" id="{14f4b647-efe0-92e3-35fb-972953cce988}">
           <p14:sldIdLst>
             <p14:sldId id="278"/>
             <p14:sldId id="279"/>
@@ -200,7 +200,7 @@
             <p14:sldId id="287"/>
           </p14:sldIdLst>
         </p14:section>
-        <p14:section name="Results" id="{4e5b0b9a-802b-4ade-5eb8-21ea3afc77e6}">
+        <p14:section name="Results" id="{2f5ace50-b652-b5b5-5f5d-e43d3020df99}">
           <p14:sldIdLst>
             <p14:sldId id="288"/>
             <p14:sldId id="289"/>
@@ -209,18 +209,18 @@
             <p14:sldId id="292"/>
           </p14:sldIdLst>
         </p14:section>
-        <p14:section name="What it means" id="{3227e980-57a6-b102-5a9f-5089a9b7fb0b}">
+        <p14:section name="What it means" id="{ef7ab6a2-b2a1-5d85-a51a-a1f0e45c2146}">
           <p14:sldIdLst>
             <p14:sldId id="293"/>
             <p14:sldId id="294"/>
           </p14:sldIdLst>
         </p14:section>
-        <p14:section name="Conclusions" id="{6cb321e5-a00d-da11-4570-9304d964e8be}">
+        <p14:section name="Conclusions" id="{ebfa8b74-7825-cc56-d25d-84bc76a18932}">
           <p14:sldIdLst>
             <p14:sldId id="295"/>
           </p14:sldIdLst>
         </p14:section>
-        <p14:section name="Backup" id="{ce3fad35-9052-bc36-bbb0-d6a790739985}">
+        <p14:section name="Backup" id="{cef10102-f3d1-af2e-0784-238a430ec773}">
           <p14:sldIdLst>
             <p14:sldId id="296"/>
             <p14:sldId id="297"/>
@@ -1686,7 +1686,7 @@
           <a:p>
             <a:r>
               <a:rPr lang="en-US" dirty="0"/>
-              <a:t>Ken Regan is a computer scientist best known for detecting cheating in chess. This paper compares human and computer play using a very large set of positions, each run through four programs. Two findings matter for us. First, the size of a centipawn depends on the program: in 2014, Stockfish gave numbers about one and a half times bigger than the others. That is why our 72 centipawns cannot be compared with another study's numbers, and why every game in our study is scored with the same program and depth. Second, human mistakes grow when one side is far ahead, which is a reason not to judge a lucky win by the moves inside it, where the winner was losing badly. Their programs were 2014 versions, so the 1.5 figure is not known to hold for Stockfish 16.</a:t>
+              <a:t>A centipawn is not a fixed unit like a centimetre. Each chess program has its own scale, and even the same program gives different numbers at different search depths. Guid and Bratko found this when they graded world champions with four programs: the average error scores changed with the program and with the depth. Regan and colleagues measured how big the difference can be: in 2014, Stockfish's numbers were about one and a half times bigger than other programs'. Think of two bathroom scales that disagree. You can compare two people weighed on the same scale, but not someone weighed on one scale with someone weighed on the other. That is why our average of 72 centipawns cannot be compared with the 16.5 in Backus et al. It is also why our own comparison is fair: every lucky and deserved winner was weighed on the same scale, Stockfish 16 at depth 15. The 1.5 figure was for 2014 versions, so we only rely on the general point, not the exact number.</a:t>
             </a:r>
             <a:endParaRPr lang="en-US" dirty="0"/>
           </a:p>
@@ -10412,7 +10412,7 @@
                   <a:schemeClr val="tx2"/>
                 </a:solidFill>
               </a:rPr>
-              <a:t>Regan et al.: different chess programs score the same move differently</a:t>
+              <a:t>Scores depend on the program, so other papers' numbers can't be compared with ours</a:t>
             </a:r>
             <a:endParaRPr lang="en-US" sz="2600" dirty="0"/>
           </a:p>
@@ -10420,18 +10420,18 @@
       </p:sp>
       <p:sp>
         <p:nvSpPr>
-          <p:cNvPr id="3" name="What they asked"/>
+          <p:cNvPr id="3" name="Guid &amp; Bratko, on their 2011 study of average move errors with four programs"/>
           <p:cNvSpPr/>
           <p:nvPr/>
         </p:nvSpPr>
         <p:spPr>
           <a:xfrm>
-            <a:off x="457200" y="1115568"/>
-            <a:ext cx="1600200" cy="658368"/>
+            <a:off x="457200" y="1188720"/>
+            <a:ext cx="8229600" cy="914400"/>
           </a:xfrm>
           <a:prstGeom prst="roundRect">
             <a:avLst>
-              <a:gd name="adj" fmla="val 8333"/>
+              <a:gd name="adj" fmla="val 6000"/>
             </a:avLst>
           </a:prstGeom>
           <a:solidFill>
@@ -10453,8 +10453,8 @@
         </p:nvSpPr>
         <p:spPr>
           <a:xfrm>
-            <a:off x="548640" y="1115568"/>
-            <a:ext cx="1417320" cy="658368"/>
+            <a:off x="640080" y="1188720"/>
+            <a:ext cx="7863840" cy="914400"/>
           </a:xfrm>
           <a:prstGeom prst="rect">
             <a:avLst/>
@@ -10470,7 +10470,7 @@
               <a:buNone/>
             </a:pPr>
             <a:r>
-              <a:rPr lang="en-US" sz="1500" b="1" dirty="0">
+              <a:rPr lang="en-US" sz="1600" i="1" dirty="0">
                 <a:solidFill>
                   <a:srgbClr val="1F4E79"/>
                 </a:solidFill>
@@ -10478,65 +10478,43 @@
                 <a:ea typeface="Arial" pitchFamily="34" charset="-122"/>
                 <a:cs typeface="Arial" pitchFamily="34" charset="-120"/>
               </a:rPr>
-              <a:t>What they asked</a:t>
-            </a:r>
-            <a:endParaRPr lang="en-US" sz="1500" dirty="0"/>
-          </a:p>
-        </p:txBody>
-      </p:sp>
-      <p:sp>
-        <p:nvSpPr>
-          <p:cNvPr id="5" name="Text 3"/>
-          <p:cNvSpPr txBox="1"/>
-          <p:nvPr/>
-        </p:nvSpPr>
-        <p:spPr>
-          <a:xfrm>
-            <a:off x="2194560" y="1115568"/>
-            <a:ext cx="6492240" cy="658368"/>
-          </a:xfrm>
-          <a:prstGeom prst="rect">
-            <a:avLst/>
-          </a:prstGeom>
-          <a:noFill/>
-          <a:ln/>
-        </p:spPr>
-        <p:txBody>
-          <a:bodyPr wrap="square" lIns="0" tIns="0" rIns="0" bIns="0" rtlCol="0" anchor="ctr"/>
-          <a:lstStyle/>
+              <a:t>“… the scores are not invariable for the same program at different depths of search, the scores also differ significantly when using different programs.”</a:t>
+            </a:r>
+            <a:endParaRPr lang="en-US" sz="1600" dirty="0"/>
+          </a:p>
           <a:p>
             <a:pPr indent="0" marL="0">
               <a:buNone/>
             </a:pPr>
             <a:r>
-              <a:rPr lang="en-US" sz="1500" dirty="0">
-                <a:solidFill>
-                  <a:schemeClr val="tx1"/>
+              <a:rPr lang="en-US" sz="1300" dirty="0">
+                <a:solidFill>
+                  <a:srgbClr val="777777"/>
                 </a:solidFill>
                 <a:latin typeface="Arial" pitchFamily="34" charset="0"/>
                 <a:ea typeface="Arial" pitchFamily="34" charset="-122"/>
                 <a:cs typeface="Arial" pitchFamily="34" charset="-120"/>
               </a:rPr>
-              <a:t>How do the mistakes and choices of human players differ from those of computers?</a:t>
-            </a:r>
-            <a:endParaRPr lang="en-US" sz="1500" dirty="0"/>
-          </a:p>
-        </p:txBody>
-      </p:sp>
-      <p:sp>
-        <p:nvSpPr>
-          <p:cNvPr id="6" name="What they did"/>
+              <a:t>Guid &amp; Bratko, on their 2011 study of average move errors with four programs</a:t>
+            </a:r>
+            <a:endParaRPr lang="en-US" sz="1600" dirty="0"/>
+          </a:p>
+        </p:txBody>
+      </p:sp>
+      <p:sp>
+        <p:nvSpPr>
+          <p:cNvPr id="5" name="Regan, Biswas &amp; Zhou (2014), comparing four programs on 726,120 positions"/>
           <p:cNvSpPr/>
           <p:nvPr/>
         </p:nvSpPr>
         <p:spPr>
           <a:xfrm>
-            <a:off x="457200" y="1847088"/>
-            <a:ext cx="1600200" cy="1115568"/>
+            <a:off x="457200" y="2240280"/>
+            <a:ext cx="8229600" cy="914400"/>
           </a:xfrm>
           <a:prstGeom prst="roundRect">
             <a:avLst>
-              <a:gd name="adj" fmla="val 4918"/>
+              <a:gd name="adj" fmla="val 6000"/>
             </a:avLst>
           </a:prstGeom>
           <a:solidFill>
@@ -10552,14 +10530,14 @@
       </p:sp>
       <p:sp>
         <p:nvSpPr>
-          <p:cNvPr id="7" name="Text 5"/>
+          <p:cNvPr id="6" name="Text 4"/>
           <p:cNvSpPr txBox="1"/>
           <p:nvPr/>
         </p:nvSpPr>
         <p:spPr>
           <a:xfrm>
-            <a:off x="548640" y="1847088"/>
-            <a:ext cx="1417320" cy="1115568"/>
+            <a:off x="640080" y="2240280"/>
+            <a:ext cx="7863840" cy="914400"/>
           </a:xfrm>
           <a:prstGeom prst="rect">
             <a:avLst/>
@@ -10575,7 +10553,7 @@
               <a:buNone/>
             </a:pPr>
             <a:r>
-              <a:rPr lang="en-US" sz="1500" b="1" dirty="0">
+              <a:rPr lang="en-US" sz="1600" i="1" dirty="0">
                 <a:solidFill>
                   <a:srgbClr val="1F4E79"/>
                 </a:solidFill>
@@ -10583,170 +10561,43 @@
                 <a:ea typeface="Arial" pitchFamily="34" charset="-122"/>
                 <a:cs typeface="Arial" pitchFamily="34" charset="-120"/>
               </a:rPr>
-              <a:t>What they did</a:t>
-            </a:r>
-            <a:endParaRPr lang="en-US" sz="1500" dirty="0"/>
-          </a:p>
-        </p:txBody>
-      </p:sp>
-      <p:sp>
-        <p:nvSpPr>
-          <p:cNvPr id="8" name="Text 6"/>
-          <p:cNvSpPr txBox="1"/>
-          <p:nvPr/>
-        </p:nvSpPr>
-        <p:spPr>
-          <a:xfrm>
-            <a:off x="2194560" y="1847088"/>
-            <a:ext cx="6492240" cy="1115568"/>
-          </a:xfrm>
-          <a:prstGeom prst="rect">
-            <a:avLst/>
-          </a:prstGeom>
-          <a:noFill/>
-          <a:ln/>
-        </p:spPr>
-        <p:txBody>
-          <a:bodyPr wrap="square" lIns="0" tIns="0" rIns="0" bIns="0" rtlCol="0" anchor="ctr"/>
-          <a:lstStyle/>
+              <a:t>“… versions of Stockfish give values about 1.5 times higher magnitude than most programs …”</a:t>
+            </a:r>
+            <a:endParaRPr lang="en-US" sz="1600" dirty="0"/>
+          </a:p>
           <a:p>
             <a:pPr indent="0" marL="0">
               <a:buNone/>
             </a:pPr>
             <a:r>
-              <a:rPr lang="en-US" sz="1500" dirty="0">
-                <a:solidFill>
-                  <a:schemeClr val="tx1"/>
+              <a:rPr lang="en-US" sz="1300" dirty="0">
+                <a:solidFill>
+                  <a:srgbClr val="777777"/>
                 </a:solidFill>
                 <a:latin typeface="Arial" pitchFamily="34" charset="0"/>
                 <a:ea typeface="Arial" pitchFamily="34" charset="-122"/>
                 <a:cs typeface="Arial" pitchFamily="34" charset="-120"/>
               </a:rPr>
-              <a:t>726,120 positions from 208 top tournaments (2010 to 2012), each analysed by four different chess programs.</a:t>
-            </a:r>
-            <a:endParaRPr lang="en-US" sz="1500" dirty="0"/>
-          </a:p>
-        </p:txBody>
-      </p:sp>
-      <p:sp>
-        <p:nvSpPr>
-          <p:cNvPr id="9" name="What they found"/>
+              <a:t>Regan, Biswas &amp; Zhou (2014), comparing four programs on 726,120 positions</a:t>
+            </a:r>
+            <a:endParaRPr lang="en-US" sz="1600" dirty="0"/>
+          </a:p>
+        </p:txBody>
+      </p:sp>
+      <p:sp>
+        <p:nvSpPr>
+          <p:cNvPr id="7" name="so what"/>
           <p:cNvSpPr/>
           <p:nvPr/>
         </p:nvSpPr>
         <p:spPr>
           <a:xfrm>
-            <a:off x="457200" y="3035808"/>
-            <a:ext cx="1600200" cy="914400"/>
+            <a:off x="457200" y="3337560"/>
+            <a:ext cx="8229600" cy="1234440"/>
           </a:xfrm>
           <a:prstGeom prst="roundRect">
             <a:avLst>
-              <a:gd name="adj" fmla="val 6000"/>
-            </a:avLst>
-          </a:prstGeom>
-          <a:solidFill>
-            <a:srgbClr val="EBF3FA"/>
-          </a:solidFill>
-          <a:ln w="12700">
-            <a:solidFill>
-              <a:srgbClr val="2E75B6"/>
-            </a:solidFill>
-            <a:prstDash val="solid"/>
-          </a:ln>
-        </p:spPr>
-      </p:sp>
-      <p:sp>
-        <p:nvSpPr>
-          <p:cNvPr id="10" name="Text 8"/>
-          <p:cNvSpPr txBox="1"/>
-          <p:nvPr/>
-        </p:nvSpPr>
-        <p:spPr>
-          <a:xfrm>
-            <a:off x="548640" y="3035808"/>
-            <a:ext cx="1417320" cy="914400"/>
-          </a:xfrm>
-          <a:prstGeom prst="rect">
-            <a:avLst/>
-          </a:prstGeom>
-          <a:noFill/>
-          <a:ln/>
-        </p:spPr>
-        <p:txBody>
-          <a:bodyPr wrap="square" lIns="0" tIns="0" rIns="0" bIns="0" rtlCol="0" anchor="ctr"/>
-          <a:lstStyle/>
-          <a:p>
-            <a:pPr indent="0" marL="0">
-              <a:buNone/>
-            </a:pPr>
-            <a:r>
-              <a:rPr lang="en-US" sz="1500" b="1" dirty="0">
-                <a:solidFill>
-                  <a:srgbClr val="1F4E79"/>
-                </a:solidFill>
-                <a:latin typeface="Arial" pitchFamily="34" charset="0"/>
-                <a:ea typeface="Arial" pitchFamily="34" charset="-122"/>
-                <a:cs typeface="Arial" pitchFamily="34" charset="-120"/>
-              </a:rPr>
-              <a:t>What they found</a:t>
-            </a:r>
-            <a:endParaRPr lang="en-US" sz="1500" dirty="0"/>
-          </a:p>
-        </p:txBody>
-      </p:sp>
-      <p:sp>
-        <p:nvSpPr>
-          <p:cNvPr id="11" name="Text 9"/>
-          <p:cNvSpPr txBox="1"/>
-          <p:nvPr/>
-        </p:nvSpPr>
-        <p:spPr>
-          <a:xfrm>
-            <a:off x="2194560" y="3035808"/>
-            <a:ext cx="6492240" cy="914400"/>
-          </a:xfrm>
-          <a:prstGeom prst="rect">
-            <a:avLst/>
-          </a:prstGeom>
-          <a:noFill/>
-          <a:ln/>
-        </p:spPr>
-        <p:txBody>
-          <a:bodyPr wrap="square" lIns="0" tIns="0" rIns="0" bIns="0" rtlCol="0" anchor="ctr"/>
-          <a:lstStyle/>
-          <a:p>
-            <a:pPr indent="0" marL="0">
-              <a:buNone/>
-            </a:pPr>
-            <a:r>
-              <a:rPr lang="en-US" sz="1500" dirty="0">
-                <a:solidFill>
-                  <a:schemeClr val="tx1"/>
-                </a:solidFill>
-                <a:latin typeface="Arial" pitchFamily="34" charset="0"/>
-                <a:ea typeface="Arial" pitchFamily="34" charset="-122"/>
-                <a:cs typeface="Arial" pitchFamily="34" charset="-120"/>
-              </a:rPr>
-              <a:t>Humans err more the bigger either side's advantage, far more than computers do. A player's expected score is 2-3% lower when it is their turn to move. Stockfish's scores were about 1.5 times larger than other programs'.</a:t>
-            </a:r>
-            <a:endParaRPr lang="en-US" sz="1500" dirty="0"/>
-          </a:p>
-        </p:txBody>
-      </p:sp>
-      <p:sp>
-        <p:nvSpPr>
-          <p:cNvPr id="12" name="why it matters"/>
-          <p:cNvSpPr/>
-          <p:nvPr/>
-        </p:nvSpPr>
-        <p:spPr>
-          <a:xfrm>
-            <a:off x="457200" y="4041648"/>
-            <a:ext cx="8229600" cy="603504"/>
-          </a:xfrm>
-          <a:prstGeom prst="roundRect">
-            <a:avLst>
-              <a:gd name="adj" fmla="val 9091"/>
+              <a:gd name="adj" fmla="val 4444"/>
             </a:avLst>
           </a:prstGeom>
           <a:solidFill>
@@ -10762,14 +10613,14 @@
       </p:sp>
       <p:sp>
         <p:nvSpPr>
-          <p:cNvPr id="13" name="Text 11"/>
+          <p:cNvPr id="8" name="Text 6"/>
           <p:cNvSpPr txBox="1"/>
           <p:nvPr/>
         </p:nvSpPr>
         <p:spPr>
           <a:xfrm>
-            <a:off x="594360" y="4041648"/>
-            <a:ext cx="7955280" cy="603504"/>
+            <a:off x="594360" y="3337560"/>
+            <a:ext cx="7955280" cy="1234440"/>
           </a:xfrm>
           <a:prstGeom prst="rect">
             <a:avLst/>
@@ -10785,7 +10636,7 @@
               <a:buNone/>
             </a:pPr>
             <a:r>
-              <a:rPr lang="en-US" sz="1500" b="1" dirty="0">
+              <a:rPr lang="en-US" sz="1600" b="1" dirty="0">
                 <a:solidFill>
                   <a:srgbClr val="C27C0E"/>
                 </a:solidFill>
@@ -10793,13 +10644,13 @@
                 <a:ea typeface="Arial" pitchFamily="34" charset="-122"/>
                 <a:cs typeface="Arial" pitchFamily="34" charset="-120"/>
               </a:rPr>
-              <a:t>Why it matters for us: </a:t>
+              <a:t>So: </a:t>
             </a:r>
             <a:pPr indent="0" marL="0">
               <a:buNone/>
             </a:pPr>
             <a:r>
-              <a:rPr lang="en-US" sz="1500" dirty="0">
+              <a:rPr lang="en-US" sz="1600" dirty="0">
                 <a:solidFill>
                   <a:schemeClr val="tx1"/>
                 </a:solidFill>
@@ -10807,15 +10658,15 @@
                 <a:ea typeface="Arial" pitchFamily="34" charset="-122"/>
                 <a:cs typeface="Arial" pitchFamily="34" charset="-120"/>
               </a:rPr>
-              <a:t>a centipawn from one program is not a centipawn from another, so we only compare groups scored by one program at one setting.</a:t>
-            </a:r>
-            <a:endParaRPr lang="en-US" sz="1500" dirty="0"/>
-          </a:p>
-        </p:txBody>
-      </p:sp>
-      <p:sp>
-        <p:nvSpPr>
-          <p:cNvPr id="14" name="Text 12"/>
+              <a:t>our 72 cp per move cannot be set against Backus et al.'s 16.5, which used a different program on different players. What we can compare is lucky against deserved winners, because every game was scored by the same program (Stockfish 16) at the same depth.</a:t>
+            </a:r>
+            <a:endParaRPr lang="en-US" sz="1600" dirty="0"/>
+          </a:p>
+        </p:txBody>
+      </p:sp>
+      <p:sp>
+        <p:nvSpPr>
+          <p:cNvPr id="9" name="Text 7"/>
           <p:cNvSpPr txBox="1"/>
           <p:nvPr/>
         </p:nvSpPr>
@@ -10846,7 +10697,7 @@
                 <a:ea typeface="Arial" pitchFamily="34" charset="-122"/>
                 <a:cs typeface="Arial" pitchFamily="34" charset="-120"/>
               </a:rPr>
-              <a:t>Regan, Biswas &amp; Zhou (2014), AAAI-14 Workshop on Advances in Preference Handling</a:t>
+              <a:t>Guid &amp; Bratko (2011), ICGA Journal 34(2), via the authors' ChessBase summary; Regan et al. (2014)</a:t>
             </a:r>
             <a:endParaRPr lang="en-US" sz="1200" dirty="0"/>
           </a:p>
@@ -27338,6 +27189,26 @@
                 <a:cs typeface="Arial" pitchFamily="34" charset="-120"/>
               </a:rPr>
               <a:t>Kuenn, Seel &amp; Zegners (2020). Cognitive performance in the home office. IZA DP 13491; The Economic Journal, 132(643), 1218-1232 (2022).</a:t>
+            </a:r>
+            <a:endParaRPr lang="en-US" sz="1200" dirty="0"/>
+          </a:p>
+          <a:p>
+            <a:pPr indent="0" marL="0">
+              <a:spcAft>
+                <a:spcPts val="600"/>
+              </a:spcAft>
+              <a:buNone/>
+            </a:pPr>
+            <a:r>
+              <a:rPr lang="en-US" sz="1200" dirty="0">
+                <a:solidFill>
+                  <a:schemeClr val="tx1"/>
+                </a:solidFill>
+                <a:latin typeface="Arial" pitchFamily="34" charset="0"/>
+                <a:ea typeface="Arial" pitchFamily="34" charset="-122"/>
+                <a:cs typeface="Arial" pitchFamily="34" charset="-120"/>
+              </a:rPr>
+              <a:t>Guid &amp; Bratko (2011). Using heuristic-search based engines for estimating human skill at chess. ICGA Journal, 34(2), 71-81.</a:t>
             </a:r>
             <a:endParaRPr lang="en-US" sz="1200" dirty="0"/>
           </a:p>
